--- a/docs/cfihos-ontology.pptx
+++ b/docs/cfihos-ontology.pptx
@@ -5,10 +5,10 @@
     <p:sldMasterId id="2147483648" r:id="rId1"/>
   </p:sldMasterIdLst>
   <p:notesMasterIdLst>
-    <p:notesMasterId r:id="rId40"/>
+    <p:notesMasterId r:id="rId37"/>
   </p:notesMasterIdLst>
   <p:handoutMasterIdLst>
-    <p:handoutMasterId r:id="rId41"/>
+    <p:handoutMasterId r:id="rId38"/>
   </p:handoutMasterIdLst>
   <p:sldIdLst>
     <p:sldId id="2076136643" r:id="rId2"/>
@@ -24,31 +24,28 @@
     <p:sldId id="2076136645" r:id="rId12"/>
     <p:sldId id="2076136683" r:id="rId13"/>
     <p:sldId id="2076136676" r:id="rId14"/>
-    <p:sldId id="2076136653" r:id="rId15"/>
-    <p:sldId id="2076136656" r:id="rId16"/>
-    <p:sldId id="2076136655" r:id="rId17"/>
-    <p:sldId id="2076136654" r:id="rId18"/>
-    <p:sldId id="2076136675" r:id="rId19"/>
-    <p:sldId id="2076136663" r:id="rId20"/>
-    <p:sldId id="2076136664" r:id="rId21"/>
-    <p:sldId id="2076136665" r:id="rId22"/>
-    <p:sldId id="2076136677" r:id="rId23"/>
-    <p:sldId id="2076136659" r:id="rId24"/>
-    <p:sldId id="2076136679" r:id="rId25"/>
-    <p:sldId id="2076136680" r:id="rId26"/>
-    <p:sldId id="2076136672" r:id="rId27"/>
-    <p:sldId id="2076136681" r:id="rId28"/>
-    <p:sldId id="2076136632" r:id="rId29"/>
-    <p:sldId id="2076136633" r:id="rId30"/>
-    <p:sldId id="2076136634" r:id="rId31"/>
-    <p:sldId id="2076136635" r:id="rId32"/>
-    <p:sldId id="2076136636" r:id="rId33"/>
-    <p:sldId id="2076136637" r:id="rId34"/>
-    <p:sldId id="2076136673" r:id="rId35"/>
-    <p:sldId id="2076136678" r:id="rId36"/>
-    <p:sldId id="2076136644" r:id="rId37"/>
-    <p:sldId id="2076136657" r:id="rId38"/>
-    <p:sldId id="2076136658" r:id="rId39"/>
+    <p:sldId id="2076136656" r:id="rId15"/>
+    <p:sldId id="2076136654" r:id="rId16"/>
+    <p:sldId id="2076136675" r:id="rId17"/>
+    <p:sldId id="2076136684" r:id="rId18"/>
+    <p:sldId id="2076136663" r:id="rId19"/>
+    <p:sldId id="2076136664" r:id="rId20"/>
+    <p:sldId id="2076136665" r:id="rId21"/>
+    <p:sldId id="2076136677" r:id="rId22"/>
+    <p:sldId id="2076136659" r:id="rId23"/>
+    <p:sldId id="2076136680" r:id="rId24"/>
+    <p:sldId id="2076136672" r:id="rId25"/>
+    <p:sldId id="2076136681" r:id="rId26"/>
+    <p:sldId id="2076136632" r:id="rId27"/>
+    <p:sldId id="2076136633" r:id="rId28"/>
+    <p:sldId id="2076136634" r:id="rId29"/>
+    <p:sldId id="2076136635" r:id="rId30"/>
+    <p:sldId id="2076136636" r:id="rId31"/>
+    <p:sldId id="2076136637" r:id="rId32"/>
+    <p:sldId id="2076136673" r:id="rId33"/>
+    <p:sldId id="2076136678" r:id="rId34"/>
+    <p:sldId id="2076136686" r:id="rId35"/>
+    <p:sldId id="2076136685" r:id="rId36"/>
   </p:sldIdLst>
   <p:sldSz cx="12192000" cy="6858000"/>
   <p:notesSz cx="7104063" cy="10234613"/>
@@ -163,28 +160,6 @@
   <p188:author id="{CFC94317-0DDF-5F08-C115-2646DBDC704D}" name="JESUALDO TOMAS FERNANDEZ BREIS" initials="JF" userId="S::jfernand@um.es::f3f5f80b-f594-499d-889b-f03492c27572" providerId="AD"/>
   <p188:author id="{3F320E7D-C643-C620-1B51-AD75C62C5C3C}" name="FRANCISCO ABAD NAVARRO" initials="FA" userId="S::francisco.abad@um.es::2055515b-7ace-4cfb-96ff-00f85e63f8ef" providerId="AD"/>
 </p188:authorLst>
-</file>
-
-<file path=ppt/comments/modernComment_7BBF54C6_C72A45A5.xml><?xml version="1.0" encoding="utf-8"?>
-<p188:cmLst xmlns:a="http://schemas.openxmlformats.org/drawingml/2006/main" xmlns:r="http://schemas.openxmlformats.org/officeDocument/2006/relationships" xmlns:p188="http://schemas.microsoft.com/office/powerpoint/2018/8/main">
-  <p188:cm id="{7BFA198C-BC8F-D440-80AA-AB36535885AC}" authorId="{CFC94317-0DDF-5F08-C115-2646DBDC704D}" created="2026-02-22T13:57:46.290">
-    <ac:deMkLst xmlns:ac="http://schemas.microsoft.com/office/drawing/2013/main/command">
-      <pc:docMk xmlns:pc="http://schemas.microsoft.com/office/powerpoint/2013/main/command"/>
-      <pc:sldMk xmlns:pc="http://schemas.microsoft.com/office/powerpoint/2013/main/command" cId="3341436325" sldId="2076136646"/>
-      <ac:picMk id="7" creationId="{C6F73B8C-0EB4-51B9-41EF-F50357360354}"/>
-    </ac:deMkLst>
-    <p188:txBody>
-      <a:bodyPr/>
-      <a:lstStyle/>
-      <a:p>
-        <a:r>
-          <a:rPr lang="en-GB"/>
-          <a:t>Cambiar para evitar CDM</a:t>
-        </a:r>
-      </a:p>
-    </p188:txBody>
-  </p188:cm>
-</p188:cmLst>
 </file>
 
 <file path=ppt/diagrams/colors1.xml><?xml version="1.0" encoding="utf-8"?>
@@ -8793,146 +8768,6 @@
         <p:cNvPr id="1" name="">
           <a:extLst>
             <a:ext uri="{FF2B5EF4-FFF2-40B4-BE49-F238E27FC236}">
-              <a16:creationId xmlns:a16="http://schemas.microsoft.com/office/drawing/2014/main" id="{FD7EDA40-4422-6F1E-3EC3-BFB4E95A27D4}"/>
-            </a:ext>
-          </a:extLst>
-        </p:cNvPr>
-        <p:cNvGrpSpPr/>
-        <p:nvPr/>
-      </p:nvGrpSpPr>
-      <p:grpSpPr>
-        <a:xfrm>
-          <a:off x="0" y="0"/>
-          <a:ext cx="0" cy="0"/>
-          <a:chOff x="0" y="0"/>
-          <a:chExt cx="0" cy="0"/>
-        </a:xfrm>
-      </p:grpSpPr>
-      <p:sp>
-        <p:nvSpPr>
-          <p:cNvPr id="2" name="Slide Image Placeholder 1">
-            <a:extLst>
-              <a:ext uri="{FF2B5EF4-FFF2-40B4-BE49-F238E27FC236}">
-                <a16:creationId xmlns:a16="http://schemas.microsoft.com/office/drawing/2014/main" id="{A57F9320-0543-9F4D-B1CE-EE85BAF4A7EB}"/>
-              </a:ext>
-            </a:extLst>
-          </p:cNvPr>
-          <p:cNvSpPr>
-            <a:spLocks noGrp="1" noRot="1" noChangeAspect="1"/>
-          </p:cNvSpPr>
-          <p:nvPr>
-            <p:ph type="sldImg"/>
-          </p:nvPr>
-        </p:nvSpPr>
-        <p:spPr>
-          <a:xfrm>
-            <a:off x="381000" y="685800"/>
-            <a:ext cx="6096000" cy="3429000"/>
-          </a:xfrm>
-        </p:spPr>
-      </p:sp>
-      <p:sp>
-        <p:nvSpPr>
-          <p:cNvPr id="3" name="Notes Placeholder 2">
-            <a:extLst>
-              <a:ext uri="{FF2B5EF4-FFF2-40B4-BE49-F238E27FC236}">
-                <a16:creationId xmlns:a16="http://schemas.microsoft.com/office/drawing/2014/main" id="{11638AC8-7F58-4F32-8D39-235CDA9B348B}"/>
-              </a:ext>
-            </a:extLst>
-          </p:cNvPr>
-          <p:cNvSpPr>
-            <a:spLocks noGrp="1"/>
-          </p:cNvSpPr>
-          <p:nvPr>
-            <p:ph type="body" idx="1"/>
-          </p:nvPr>
-        </p:nvSpPr>
-        <p:spPr/>
-        <p:txBody>
-          <a:bodyPr/>
-          <a:lstStyle/>
-          <a:p>
-            <a:r>
-              <a:rPr lang="de-DE" dirty="0"/>
-              <a:t>This </a:t>
-            </a:r>
-            <a:r>
-              <a:rPr lang="de-DE" dirty="0" err="1"/>
-              <a:t>is</a:t>
-            </a:r>
-            <a:r>
-              <a:rPr lang="de-DE" dirty="0"/>
-              <a:t> </a:t>
-            </a:r>
-            <a:r>
-              <a:rPr lang="de-DE" dirty="0" err="1"/>
-              <a:t>the</a:t>
-            </a:r>
-            <a:r>
-              <a:rPr lang="de-DE" dirty="0"/>
-              <a:t> </a:t>
-            </a:r>
-            <a:r>
-              <a:rPr lang="de-DE" dirty="0" err="1"/>
-              <a:t>competency</a:t>
-            </a:r>
-            <a:r>
-              <a:rPr lang="de-DE" dirty="0"/>
-              <a:t> </a:t>
-            </a:r>
-            <a:r>
-              <a:rPr lang="de-DE" dirty="0" err="1"/>
-              <a:t>question</a:t>
-            </a:r>
-            <a:r>
-              <a:rPr lang="de-DE" dirty="0"/>
-              <a:t> </a:t>
-            </a:r>
-            <a:r>
-              <a:rPr lang="de-DE" dirty="0" err="1"/>
-              <a:t>driving</a:t>
-            </a:r>
-            <a:r>
-              <a:rPr lang="de-DE" dirty="0"/>
-              <a:t> </a:t>
-            </a:r>
-            <a:r>
-              <a:rPr lang="de-DE" dirty="0" err="1"/>
-              <a:t>the</a:t>
-            </a:r>
-            <a:r>
-              <a:rPr lang="de-DE" dirty="0"/>
-              <a:t> </a:t>
-            </a:r>
-            <a:r>
-              <a:rPr lang="de-DE" dirty="0" err="1"/>
-              <a:t>presentation</a:t>
-            </a:r>
-            <a:endParaRPr lang="en-US" dirty="0"/>
-          </a:p>
-        </p:txBody>
-      </p:sp>
-    </p:spTree>
-    <p:extLst>
-      <p:ext uri="{BB962C8B-B14F-4D97-AF65-F5344CB8AC3E}">
-        <p14:creationId xmlns:p14="http://schemas.microsoft.com/office/powerpoint/2010/main" val="4213077994"/>
-      </p:ext>
-    </p:extLst>
-  </p:cSld>
-  <p:clrMapOvr>
-    <a:masterClrMapping/>
-  </p:clrMapOvr>
-</p:notes>
-</file>
-
-<file path=ppt/notesSlides/notesSlide15.xml><?xml version="1.0" encoding="utf-8"?>
-<p:notes xmlns:a="http://schemas.openxmlformats.org/drawingml/2006/main" xmlns:r="http://schemas.openxmlformats.org/officeDocument/2006/relationships" xmlns:p="http://schemas.openxmlformats.org/presentationml/2006/main">
-  <p:cSld>
-    <p:spTree>
-      <p:nvGrpSpPr>
-        <p:cNvPr id="1" name="">
-          <a:extLst>
-            <a:ext uri="{FF2B5EF4-FFF2-40B4-BE49-F238E27FC236}">
               <a16:creationId xmlns:a16="http://schemas.microsoft.com/office/drawing/2014/main" id="{C39AFEDC-83AD-351A-864C-388D2743E26F}"/>
             </a:ext>
           </a:extLst>
@@ -9065,147 +8900,7 @@
 </p:notes>
 </file>
 
-<file path=ppt/notesSlides/notesSlide16.xml><?xml version="1.0" encoding="utf-8"?>
-<p:notes xmlns:a="http://schemas.openxmlformats.org/drawingml/2006/main" xmlns:r="http://schemas.openxmlformats.org/officeDocument/2006/relationships" xmlns:p="http://schemas.openxmlformats.org/presentationml/2006/main">
-  <p:cSld>
-    <p:spTree>
-      <p:nvGrpSpPr>
-        <p:cNvPr id="1" name="">
-          <a:extLst>
-            <a:ext uri="{FF2B5EF4-FFF2-40B4-BE49-F238E27FC236}">
-              <a16:creationId xmlns:a16="http://schemas.microsoft.com/office/drawing/2014/main" id="{50BEB777-1C9F-650A-AB8F-20730DC72A3D}"/>
-            </a:ext>
-          </a:extLst>
-        </p:cNvPr>
-        <p:cNvGrpSpPr/>
-        <p:nvPr/>
-      </p:nvGrpSpPr>
-      <p:grpSpPr>
-        <a:xfrm>
-          <a:off x="0" y="0"/>
-          <a:ext cx="0" cy="0"/>
-          <a:chOff x="0" y="0"/>
-          <a:chExt cx="0" cy="0"/>
-        </a:xfrm>
-      </p:grpSpPr>
-      <p:sp>
-        <p:nvSpPr>
-          <p:cNvPr id="2" name="Slide Image Placeholder 1">
-            <a:extLst>
-              <a:ext uri="{FF2B5EF4-FFF2-40B4-BE49-F238E27FC236}">
-                <a16:creationId xmlns:a16="http://schemas.microsoft.com/office/drawing/2014/main" id="{4E594F93-7848-87BA-7AF4-768B76905ACA}"/>
-              </a:ext>
-            </a:extLst>
-          </p:cNvPr>
-          <p:cNvSpPr>
-            <a:spLocks noGrp="1" noRot="1" noChangeAspect="1"/>
-          </p:cNvSpPr>
-          <p:nvPr>
-            <p:ph type="sldImg"/>
-          </p:nvPr>
-        </p:nvSpPr>
-        <p:spPr>
-          <a:xfrm>
-            <a:off x="381000" y="685800"/>
-            <a:ext cx="6096000" cy="3429000"/>
-          </a:xfrm>
-        </p:spPr>
-      </p:sp>
-      <p:sp>
-        <p:nvSpPr>
-          <p:cNvPr id="3" name="Notes Placeholder 2">
-            <a:extLst>
-              <a:ext uri="{FF2B5EF4-FFF2-40B4-BE49-F238E27FC236}">
-                <a16:creationId xmlns:a16="http://schemas.microsoft.com/office/drawing/2014/main" id="{8EAF6CA5-8660-1197-B457-300FA395B6B6}"/>
-              </a:ext>
-            </a:extLst>
-          </p:cNvPr>
-          <p:cNvSpPr>
-            <a:spLocks noGrp="1"/>
-          </p:cNvSpPr>
-          <p:nvPr>
-            <p:ph type="body" idx="1"/>
-          </p:nvPr>
-        </p:nvSpPr>
-        <p:spPr/>
-        <p:txBody>
-          <a:bodyPr/>
-          <a:lstStyle/>
-          <a:p>
-            <a:r>
-              <a:rPr lang="de-DE" dirty="0"/>
-              <a:t>This </a:t>
-            </a:r>
-            <a:r>
-              <a:rPr lang="de-DE" dirty="0" err="1"/>
-              <a:t>is</a:t>
-            </a:r>
-            <a:r>
-              <a:rPr lang="de-DE" dirty="0"/>
-              <a:t> </a:t>
-            </a:r>
-            <a:r>
-              <a:rPr lang="de-DE" dirty="0" err="1"/>
-              <a:t>the</a:t>
-            </a:r>
-            <a:r>
-              <a:rPr lang="de-DE" dirty="0"/>
-              <a:t> </a:t>
-            </a:r>
-            <a:r>
-              <a:rPr lang="de-DE" dirty="0" err="1"/>
-              <a:t>competency</a:t>
-            </a:r>
-            <a:r>
-              <a:rPr lang="de-DE" dirty="0"/>
-              <a:t> </a:t>
-            </a:r>
-            <a:r>
-              <a:rPr lang="de-DE" dirty="0" err="1"/>
-              <a:t>question</a:t>
-            </a:r>
-            <a:r>
-              <a:rPr lang="de-DE" dirty="0"/>
-              <a:t> </a:t>
-            </a:r>
-            <a:r>
-              <a:rPr lang="de-DE" dirty="0" err="1"/>
-              <a:t>driving</a:t>
-            </a:r>
-            <a:r>
-              <a:rPr lang="de-DE" dirty="0"/>
-              <a:t> </a:t>
-            </a:r>
-            <a:r>
-              <a:rPr lang="de-DE" dirty="0" err="1"/>
-              <a:t>the</a:t>
-            </a:r>
-            <a:r>
-              <a:rPr lang="de-DE" dirty="0"/>
-              <a:t> </a:t>
-            </a:r>
-            <a:r>
-              <a:rPr lang="de-DE" dirty="0" err="1"/>
-              <a:t>presentation</a:t>
-            </a:r>
-            <a:endParaRPr lang="en-US" dirty="0"/>
-          </a:p>
-        </p:txBody>
-      </p:sp>
-    </p:spTree>
-    <p:extLst>
-      <p:ext uri="{BB962C8B-B14F-4D97-AF65-F5344CB8AC3E}">
-        <p14:creationId xmlns:p14="http://schemas.microsoft.com/office/powerpoint/2010/main" val="3968601170"/>
-      </p:ext>
-    </p:extLst>
-  </p:cSld>
-  <p:clrMapOvr>
-    <a:masterClrMapping/>
-  </p:clrMapOvr>
-</p:notes>
-</file>
-
-<file path=ppt/notesSlides/notesSlide17.xml><?xml version="1.0" encoding="utf-8"?>
+<file path=ppt/notesSlides/notesSlide15.xml><?xml version="1.0" encoding="utf-8"?>
 <p:notes xmlns:a="http://schemas.openxmlformats.org/drawingml/2006/main" xmlns:r="http://schemas.openxmlformats.org/officeDocument/2006/relationships" xmlns:p="http://schemas.openxmlformats.org/presentationml/2006/main">
   <p:cSld>
     <p:spTree>
@@ -9345,7 +9040,7 @@
 </p:notes>
 </file>
 
-<file path=ppt/notesSlides/notesSlide18.xml><?xml version="1.0" encoding="utf-8"?>
+<file path=ppt/notesSlides/notesSlide16.xml><?xml version="1.0" encoding="utf-8"?>
 <p:notes xmlns:a="http://schemas.openxmlformats.org/drawingml/2006/main" xmlns:r="http://schemas.openxmlformats.org/officeDocument/2006/relationships" xmlns:p="http://schemas.openxmlformats.org/presentationml/2006/main">
   <p:cSld>
     <p:spTree>
@@ -9485,7 +9180,147 @@
 </p:notes>
 </file>
 
-<file path=ppt/notesSlides/notesSlide19.xml><?xml version="1.0" encoding="utf-8"?>
+<file path=ppt/notesSlides/notesSlide17.xml><?xml version="1.0" encoding="utf-8"?>
+<p:notes xmlns:a="http://schemas.openxmlformats.org/drawingml/2006/main" xmlns:r="http://schemas.openxmlformats.org/officeDocument/2006/relationships" xmlns:p="http://schemas.openxmlformats.org/presentationml/2006/main">
+  <p:cSld>
+    <p:spTree>
+      <p:nvGrpSpPr>
+        <p:cNvPr id="1" name="">
+          <a:extLst>
+            <a:ext uri="{FF2B5EF4-FFF2-40B4-BE49-F238E27FC236}">
+              <a16:creationId xmlns:a16="http://schemas.microsoft.com/office/drawing/2014/main" id="{F8746F0A-09E7-F107-D4AA-E3EF09CB2918}"/>
+            </a:ext>
+          </a:extLst>
+        </p:cNvPr>
+        <p:cNvGrpSpPr/>
+        <p:nvPr/>
+      </p:nvGrpSpPr>
+      <p:grpSpPr>
+        <a:xfrm>
+          <a:off x="0" y="0"/>
+          <a:ext cx="0" cy="0"/>
+          <a:chOff x="0" y="0"/>
+          <a:chExt cx="0" cy="0"/>
+        </a:xfrm>
+      </p:grpSpPr>
+      <p:sp>
+        <p:nvSpPr>
+          <p:cNvPr id="2" name="Slide Image Placeholder 1">
+            <a:extLst>
+              <a:ext uri="{FF2B5EF4-FFF2-40B4-BE49-F238E27FC236}">
+                <a16:creationId xmlns:a16="http://schemas.microsoft.com/office/drawing/2014/main" id="{10B9380B-6BCA-AA18-2DCB-609E9F4761CB}"/>
+              </a:ext>
+            </a:extLst>
+          </p:cNvPr>
+          <p:cNvSpPr>
+            <a:spLocks noGrp="1" noRot="1" noChangeAspect="1"/>
+          </p:cNvSpPr>
+          <p:nvPr>
+            <p:ph type="sldImg"/>
+          </p:nvPr>
+        </p:nvSpPr>
+        <p:spPr>
+          <a:xfrm>
+            <a:off x="381000" y="685800"/>
+            <a:ext cx="6096000" cy="3429000"/>
+          </a:xfrm>
+        </p:spPr>
+      </p:sp>
+      <p:sp>
+        <p:nvSpPr>
+          <p:cNvPr id="3" name="Notes Placeholder 2">
+            <a:extLst>
+              <a:ext uri="{FF2B5EF4-FFF2-40B4-BE49-F238E27FC236}">
+                <a16:creationId xmlns:a16="http://schemas.microsoft.com/office/drawing/2014/main" id="{28337E62-613D-1FE2-7878-06D3373971FD}"/>
+              </a:ext>
+            </a:extLst>
+          </p:cNvPr>
+          <p:cNvSpPr>
+            <a:spLocks noGrp="1"/>
+          </p:cNvSpPr>
+          <p:nvPr>
+            <p:ph type="body" idx="1"/>
+          </p:nvPr>
+        </p:nvSpPr>
+        <p:spPr/>
+        <p:txBody>
+          <a:bodyPr/>
+          <a:lstStyle/>
+          <a:p>
+            <a:r>
+              <a:rPr lang="de-DE" dirty="0"/>
+              <a:t>This </a:t>
+            </a:r>
+            <a:r>
+              <a:rPr lang="de-DE" dirty="0" err="1"/>
+              <a:t>is</a:t>
+            </a:r>
+            <a:r>
+              <a:rPr lang="de-DE" dirty="0"/>
+              <a:t> </a:t>
+            </a:r>
+            <a:r>
+              <a:rPr lang="de-DE" dirty="0" err="1"/>
+              <a:t>the</a:t>
+            </a:r>
+            <a:r>
+              <a:rPr lang="de-DE" dirty="0"/>
+              <a:t> </a:t>
+            </a:r>
+            <a:r>
+              <a:rPr lang="de-DE" dirty="0" err="1"/>
+              <a:t>competency</a:t>
+            </a:r>
+            <a:r>
+              <a:rPr lang="de-DE" dirty="0"/>
+              <a:t> </a:t>
+            </a:r>
+            <a:r>
+              <a:rPr lang="de-DE" dirty="0" err="1"/>
+              <a:t>question</a:t>
+            </a:r>
+            <a:r>
+              <a:rPr lang="de-DE" dirty="0"/>
+              <a:t> </a:t>
+            </a:r>
+            <a:r>
+              <a:rPr lang="de-DE" dirty="0" err="1"/>
+              <a:t>driving</a:t>
+            </a:r>
+            <a:r>
+              <a:rPr lang="de-DE" dirty="0"/>
+              <a:t> </a:t>
+            </a:r>
+            <a:r>
+              <a:rPr lang="de-DE" dirty="0" err="1"/>
+              <a:t>the</a:t>
+            </a:r>
+            <a:r>
+              <a:rPr lang="de-DE" dirty="0"/>
+              <a:t> </a:t>
+            </a:r>
+            <a:r>
+              <a:rPr lang="de-DE" dirty="0" err="1"/>
+              <a:t>presentation</a:t>
+            </a:r>
+            <a:endParaRPr lang="en-US" dirty="0"/>
+          </a:p>
+        </p:txBody>
+      </p:sp>
+    </p:spTree>
+    <p:extLst>
+      <p:ext uri="{BB962C8B-B14F-4D97-AF65-F5344CB8AC3E}">
+        <p14:creationId xmlns:p14="http://schemas.microsoft.com/office/powerpoint/2010/main" val="2608057452"/>
+      </p:ext>
+    </p:extLst>
+  </p:cSld>
+  <p:clrMapOvr>
+    <a:masterClrMapping/>
+  </p:clrMapOvr>
+</p:notes>
+</file>
+
+<file path=ppt/notesSlides/notesSlide18.xml><?xml version="1.0" encoding="utf-8"?>
 <p:notes xmlns:a="http://schemas.openxmlformats.org/drawingml/2006/main" xmlns:r="http://schemas.openxmlformats.org/officeDocument/2006/relationships" xmlns:p="http://schemas.openxmlformats.org/presentationml/2006/main">
   <p:cSld>
     <p:spTree>
@@ -9616,6 +9451,146 @@
     <p:extLst>
       <p:ext uri="{BB962C8B-B14F-4D97-AF65-F5344CB8AC3E}">
         <p14:creationId xmlns:p14="http://schemas.microsoft.com/office/powerpoint/2010/main" val="275646671"/>
+      </p:ext>
+    </p:extLst>
+  </p:cSld>
+  <p:clrMapOvr>
+    <a:masterClrMapping/>
+  </p:clrMapOvr>
+</p:notes>
+</file>
+
+<file path=ppt/notesSlides/notesSlide19.xml><?xml version="1.0" encoding="utf-8"?>
+<p:notes xmlns:a="http://schemas.openxmlformats.org/drawingml/2006/main" xmlns:r="http://schemas.openxmlformats.org/officeDocument/2006/relationships" xmlns:p="http://schemas.openxmlformats.org/presentationml/2006/main">
+  <p:cSld>
+    <p:spTree>
+      <p:nvGrpSpPr>
+        <p:cNvPr id="1" name="">
+          <a:extLst>
+            <a:ext uri="{FF2B5EF4-FFF2-40B4-BE49-F238E27FC236}">
+              <a16:creationId xmlns:a16="http://schemas.microsoft.com/office/drawing/2014/main" id="{2AD72007-414B-4617-6EBE-5B9FE3D77A3F}"/>
+            </a:ext>
+          </a:extLst>
+        </p:cNvPr>
+        <p:cNvGrpSpPr/>
+        <p:nvPr/>
+      </p:nvGrpSpPr>
+      <p:grpSpPr>
+        <a:xfrm>
+          <a:off x="0" y="0"/>
+          <a:ext cx="0" cy="0"/>
+          <a:chOff x="0" y="0"/>
+          <a:chExt cx="0" cy="0"/>
+        </a:xfrm>
+      </p:grpSpPr>
+      <p:sp>
+        <p:nvSpPr>
+          <p:cNvPr id="2" name="Slide Image Placeholder 1">
+            <a:extLst>
+              <a:ext uri="{FF2B5EF4-FFF2-40B4-BE49-F238E27FC236}">
+                <a16:creationId xmlns:a16="http://schemas.microsoft.com/office/drawing/2014/main" id="{2D744B8B-7D04-FD70-E7EE-D2EE184686F4}"/>
+              </a:ext>
+            </a:extLst>
+          </p:cNvPr>
+          <p:cNvSpPr>
+            <a:spLocks noGrp="1" noRot="1" noChangeAspect="1"/>
+          </p:cNvSpPr>
+          <p:nvPr>
+            <p:ph type="sldImg"/>
+          </p:nvPr>
+        </p:nvSpPr>
+        <p:spPr>
+          <a:xfrm>
+            <a:off x="381000" y="685800"/>
+            <a:ext cx="6096000" cy="3429000"/>
+          </a:xfrm>
+        </p:spPr>
+      </p:sp>
+      <p:sp>
+        <p:nvSpPr>
+          <p:cNvPr id="3" name="Notes Placeholder 2">
+            <a:extLst>
+              <a:ext uri="{FF2B5EF4-FFF2-40B4-BE49-F238E27FC236}">
+                <a16:creationId xmlns:a16="http://schemas.microsoft.com/office/drawing/2014/main" id="{1B02EE06-7A3D-6E10-5484-C6CC75714F99}"/>
+              </a:ext>
+            </a:extLst>
+          </p:cNvPr>
+          <p:cNvSpPr>
+            <a:spLocks noGrp="1"/>
+          </p:cNvSpPr>
+          <p:nvPr>
+            <p:ph type="body" idx="1"/>
+          </p:nvPr>
+        </p:nvSpPr>
+        <p:spPr/>
+        <p:txBody>
+          <a:bodyPr/>
+          <a:lstStyle/>
+          <a:p>
+            <a:r>
+              <a:rPr lang="de-DE" dirty="0"/>
+              <a:t>This </a:t>
+            </a:r>
+            <a:r>
+              <a:rPr lang="de-DE" dirty="0" err="1"/>
+              <a:t>is</a:t>
+            </a:r>
+            <a:r>
+              <a:rPr lang="de-DE" dirty="0"/>
+              <a:t> </a:t>
+            </a:r>
+            <a:r>
+              <a:rPr lang="de-DE" dirty="0" err="1"/>
+              <a:t>the</a:t>
+            </a:r>
+            <a:r>
+              <a:rPr lang="de-DE" dirty="0"/>
+              <a:t> </a:t>
+            </a:r>
+            <a:r>
+              <a:rPr lang="de-DE" dirty="0" err="1"/>
+              <a:t>competency</a:t>
+            </a:r>
+            <a:r>
+              <a:rPr lang="de-DE" dirty="0"/>
+              <a:t> </a:t>
+            </a:r>
+            <a:r>
+              <a:rPr lang="de-DE" dirty="0" err="1"/>
+              <a:t>question</a:t>
+            </a:r>
+            <a:r>
+              <a:rPr lang="de-DE" dirty="0"/>
+              <a:t> </a:t>
+            </a:r>
+            <a:r>
+              <a:rPr lang="de-DE" dirty="0" err="1"/>
+              <a:t>driving</a:t>
+            </a:r>
+            <a:r>
+              <a:rPr lang="de-DE" dirty="0"/>
+              <a:t> </a:t>
+            </a:r>
+            <a:r>
+              <a:rPr lang="de-DE" dirty="0" err="1"/>
+              <a:t>the</a:t>
+            </a:r>
+            <a:r>
+              <a:rPr lang="de-DE" dirty="0"/>
+              <a:t> </a:t>
+            </a:r>
+            <a:r>
+              <a:rPr lang="de-DE" dirty="0" err="1"/>
+              <a:t>presentation</a:t>
+            </a:r>
+            <a:endParaRPr lang="en-US" dirty="0"/>
+          </a:p>
+        </p:txBody>
+      </p:sp>
+    </p:spTree>
+    <p:extLst>
+      <p:ext uri="{BB962C8B-B14F-4D97-AF65-F5344CB8AC3E}">
+        <p14:creationId xmlns:p14="http://schemas.microsoft.com/office/powerpoint/2010/main" val="446078535"/>
       </p:ext>
     </p:extLst>
   </p:cSld>
@@ -9699,146 +9674,6 @@
         <p:cNvPr id="1" name="">
           <a:extLst>
             <a:ext uri="{FF2B5EF4-FFF2-40B4-BE49-F238E27FC236}">
-              <a16:creationId xmlns:a16="http://schemas.microsoft.com/office/drawing/2014/main" id="{2AD72007-414B-4617-6EBE-5B9FE3D77A3F}"/>
-            </a:ext>
-          </a:extLst>
-        </p:cNvPr>
-        <p:cNvGrpSpPr/>
-        <p:nvPr/>
-      </p:nvGrpSpPr>
-      <p:grpSpPr>
-        <a:xfrm>
-          <a:off x="0" y="0"/>
-          <a:ext cx="0" cy="0"/>
-          <a:chOff x="0" y="0"/>
-          <a:chExt cx="0" cy="0"/>
-        </a:xfrm>
-      </p:grpSpPr>
-      <p:sp>
-        <p:nvSpPr>
-          <p:cNvPr id="2" name="Slide Image Placeholder 1">
-            <a:extLst>
-              <a:ext uri="{FF2B5EF4-FFF2-40B4-BE49-F238E27FC236}">
-                <a16:creationId xmlns:a16="http://schemas.microsoft.com/office/drawing/2014/main" id="{2D744B8B-7D04-FD70-E7EE-D2EE184686F4}"/>
-              </a:ext>
-            </a:extLst>
-          </p:cNvPr>
-          <p:cNvSpPr>
-            <a:spLocks noGrp="1" noRot="1" noChangeAspect="1"/>
-          </p:cNvSpPr>
-          <p:nvPr>
-            <p:ph type="sldImg"/>
-          </p:nvPr>
-        </p:nvSpPr>
-        <p:spPr>
-          <a:xfrm>
-            <a:off x="381000" y="685800"/>
-            <a:ext cx="6096000" cy="3429000"/>
-          </a:xfrm>
-        </p:spPr>
-      </p:sp>
-      <p:sp>
-        <p:nvSpPr>
-          <p:cNvPr id="3" name="Notes Placeholder 2">
-            <a:extLst>
-              <a:ext uri="{FF2B5EF4-FFF2-40B4-BE49-F238E27FC236}">
-                <a16:creationId xmlns:a16="http://schemas.microsoft.com/office/drawing/2014/main" id="{1B02EE06-7A3D-6E10-5484-C6CC75714F99}"/>
-              </a:ext>
-            </a:extLst>
-          </p:cNvPr>
-          <p:cNvSpPr>
-            <a:spLocks noGrp="1"/>
-          </p:cNvSpPr>
-          <p:nvPr>
-            <p:ph type="body" idx="1"/>
-          </p:nvPr>
-        </p:nvSpPr>
-        <p:spPr/>
-        <p:txBody>
-          <a:bodyPr/>
-          <a:lstStyle/>
-          <a:p>
-            <a:r>
-              <a:rPr lang="de-DE" dirty="0"/>
-              <a:t>This </a:t>
-            </a:r>
-            <a:r>
-              <a:rPr lang="de-DE" dirty="0" err="1"/>
-              <a:t>is</a:t>
-            </a:r>
-            <a:r>
-              <a:rPr lang="de-DE" dirty="0"/>
-              <a:t> </a:t>
-            </a:r>
-            <a:r>
-              <a:rPr lang="de-DE" dirty="0" err="1"/>
-              <a:t>the</a:t>
-            </a:r>
-            <a:r>
-              <a:rPr lang="de-DE" dirty="0"/>
-              <a:t> </a:t>
-            </a:r>
-            <a:r>
-              <a:rPr lang="de-DE" dirty="0" err="1"/>
-              <a:t>competency</a:t>
-            </a:r>
-            <a:r>
-              <a:rPr lang="de-DE" dirty="0"/>
-              <a:t> </a:t>
-            </a:r>
-            <a:r>
-              <a:rPr lang="de-DE" dirty="0" err="1"/>
-              <a:t>question</a:t>
-            </a:r>
-            <a:r>
-              <a:rPr lang="de-DE" dirty="0"/>
-              <a:t> </a:t>
-            </a:r>
-            <a:r>
-              <a:rPr lang="de-DE" dirty="0" err="1"/>
-              <a:t>driving</a:t>
-            </a:r>
-            <a:r>
-              <a:rPr lang="de-DE" dirty="0"/>
-              <a:t> </a:t>
-            </a:r>
-            <a:r>
-              <a:rPr lang="de-DE" dirty="0" err="1"/>
-              <a:t>the</a:t>
-            </a:r>
-            <a:r>
-              <a:rPr lang="de-DE" dirty="0"/>
-              <a:t> </a:t>
-            </a:r>
-            <a:r>
-              <a:rPr lang="de-DE" dirty="0" err="1"/>
-              <a:t>presentation</a:t>
-            </a:r>
-            <a:endParaRPr lang="en-US" dirty="0"/>
-          </a:p>
-        </p:txBody>
-      </p:sp>
-    </p:spTree>
-    <p:extLst>
-      <p:ext uri="{BB962C8B-B14F-4D97-AF65-F5344CB8AC3E}">
-        <p14:creationId xmlns:p14="http://schemas.microsoft.com/office/powerpoint/2010/main" val="446078535"/>
-      </p:ext>
-    </p:extLst>
-  </p:cSld>
-  <p:clrMapOvr>
-    <a:masterClrMapping/>
-  </p:clrMapOvr>
-</p:notes>
-</file>
-
-<file path=ppt/notesSlides/notesSlide21.xml><?xml version="1.0" encoding="utf-8"?>
-<p:notes xmlns:a="http://schemas.openxmlformats.org/drawingml/2006/main" xmlns:r="http://schemas.openxmlformats.org/officeDocument/2006/relationships" xmlns:p="http://schemas.openxmlformats.org/presentationml/2006/main">
-  <p:cSld>
-    <p:spTree>
-      <p:nvGrpSpPr>
-        <p:cNvPr id="1" name="">
-          <a:extLst>
-            <a:ext uri="{FF2B5EF4-FFF2-40B4-BE49-F238E27FC236}">
               <a16:creationId xmlns:a16="http://schemas.microsoft.com/office/drawing/2014/main" id="{8D88D765-E697-34E1-2DEF-76874B3A7EA3}"/>
             </a:ext>
           </a:extLst>
@@ -9971,7 +9806,7 @@
 </p:notes>
 </file>
 
-<file path=ppt/notesSlides/notesSlide22.xml><?xml version="1.0" encoding="utf-8"?>
+<file path=ppt/notesSlides/notesSlide21.xml><?xml version="1.0" encoding="utf-8"?>
 <p:notes xmlns:a="http://schemas.openxmlformats.org/drawingml/2006/main" xmlns:r="http://schemas.openxmlformats.org/officeDocument/2006/relationships" xmlns:p="http://schemas.openxmlformats.org/presentationml/2006/main">
   <p:cSld>
     <p:spTree>
@@ -10111,7 +9946,7 @@
 </p:notes>
 </file>
 
-<file path=ppt/notesSlides/notesSlide23.xml><?xml version="1.0" encoding="utf-8"?>
+<file path=ppt/notesSlides/notesSlide22.xml><?xml version="1.0" encoding="utf-8"?>
 <p:notes xmlns:a="http://schemas.openxmlformats.org/drawingml/2006/main" xmlns:r="http://schemas.openxmlformats.org/officeDocument/2006/relationships" xmlns:p="http://schemas.openxmlformats.org/presentationml/2006/main">
   <p:cSld>
     <p:spTree>
@@ -10251,147 +10086,7 @@
 </p:notes>
 </file>
 
-<file path=ppt/notesSlides/notesSlide24.xml><?xml version="1.0" encoding="utf-8"?>
-<p:notes xmlns:a="http://schemas.openxmlformats.org/drawingml/2006/main" xmlns:r="http://schemas.openxmlformats.org/officeDocument/2006/relationships" xmlns:p="http://schemas.openxmlformats.org/presentationml/2006/main">
-  <p:cSld>
-    <p:spTree>
-      <p:nvGrpSpPr>
-        <p:cNvPr id="1" name="">
-          <a:extLst>
-            <a:ext uri="{FF2B5EF4-FFF2-40B4-BE49-F238E27FC236}">
-              <a16:creationId xmlns:a16="http://schemas.microsoft.com/office/drawing/2014/main" id="{73AB081F-D34E-941F-82BB-63EA3D65E40F}"/>
-            </a:ext>
-          </a:extLst>
-        </p:cNvPr>
-        <p:cNvGrpSpPr/>
-        <p:nvPr/>
-      </p:nvGrpSpPr>
-      <p:grpSpPr>
-        <a:xfrm>
-          <a:off x="0" y="0"/>
-          <a:ext cx="0" cy="0"/>
-          <a:chOff x="0" y="0"/>
-          <a:chExt cx="0" cy="0"/>
-        </a:xfrm>
-      </p:grpSpPr>
-      <p:sp>
-        <p:nvSpPr>
-          <p:cNvPr id="2" name="Slide Image Placeholder 1">
-            <a:extLst>
-              <a:ext uri="{FF2B5EF4-FFF2-40B4-BE49-F238E27FC236}">
-                <a16:creationId xmlns:a16="http://schemas.microsoft.com/office/drawing/2014/main" id="{A2CCD51F-F057-842B-3A48-54F200421722}"/>
-              </a:ext>
-            </a:extLst>
-          </p:cNvPr>
-          <p:cNvSpPr>
-            <a:spLocks noGrp="1" noRot="1" noChangeAspect="1"/>
-          </p:cNvSpPr>
-          <p:nvPr>
-            <p:ph type="sldImg"/>
-          </p:nvPr>
-        </p:nvSpPr>
-        <p:spPr>
-          <a:xfrm>
-            <a:off x="381000" y="685800"/>
-            <a:ext cx="6096000" cy="3429000"/>
-          </a:xfrm>
-        </p:spPr>
-      </p:sp>
-      <p:sp>
-        <p:nvSpPr>
-          <p:cNvPr id="3" name="Notes Placeholder 2">
-            <a:extLst>
-              <a:ext uri="{FF2B5EF4-FFF2-40B4-BE49-F238E27FC236}">
-                <a16:creationId xmlns:a16="http://schemas.microsoft.com/office/drawing/2014/main" id="{C049B38E-C6F5-3591-CD74-088FF7E84339}"/>
-              </a:ext>
-            </a:extLst>
-          </p:cNvPr>
-          <p:cNvSpPr>
-            <a:spLocks noGrp="1"/>
-          </p:cNvSpPr>
-          <p:nvPr>
-            <p:ph type="body" idx="1"/>
-          </p:nvPr>
-        </p:nvSpPr>
-        <p:spPr/>
-        <p:txBody>
-          <a:bodyPr/>
-          <a:lstStyle/>
-          <a:p>
-            <a:r>
-              <a:rPr lang="de-DE" dirty="0"/>
-              <a:t>This </a:t>
-            </a:r>
-            <a:r>
-              <a:rPr lang="de-DE" dirty="0" err="1"/>
-              <a:t>is</a:t>
-            </a:r>
-            <a:r>
-              <a:rPr lang="de-DE" dirty="0"/>
-              <a:t> </a:t>
-            </a:r>
-            <a:r>
-              <a:rPr lang="de-DE" dirty="0" err="1"/>
-              <a:t>the</a:t>
-            </a:r>
-            <a:r>
-              <a:rPr lang="de-DE" dirty="0"/>
-              <a:t> </a:t>
-            </a:r>
-            <a:r>
-              <a:rPr lang="de-DE" dirty="0" err="1"/>
-              <a:t>competency</a:t>
-            </a:r>
-            <a:r>
-              <a:rPr lang="de-DE" dirty="0"/>
-              <a:t> </a:t>
-            </a:r>
-            <a:r>
-              <a:rPr lang="de-DE" dirty="0" err="1"/>
-              <a:t>question</a:t>
-            </a:r>
-            <a:r>
-              <a:rPr lang="de-DE" dirty="0"/>
-              <a:t> </a:t>
-            </a:r>
-            <a:r>
-              <a:rPr lang="de-DE" dirty="0" err="1"/>
-              <a:t>driving</a:t>
-            </a:r>
-            <a:r>
-              <a:rPr lang="de-DE" dirty="0"/>
-              <a:t> </a:t>
-            </a:r>
-            <a:r>
-              <a:rPr lang="de-DE" dirty="0" err="1"/>
-              <a:t>the</a:t>
-            </a:r>
-            <a:r>
-              <a:rPr lang="de-DE" dirty="0"/>
-              <a:t> </a:t>
-            </a:r>
-            <a:r>
-              <a:rPr lang="de-DE" dirty="0" err="1"/>
-              <a:t>presentation</a:t>
-            </a:r>
-            <a:endParaRPr lang="en-US" dirty="0"/>
-          </a:p>
-        </p:txBody>
-      </p:sp>
-    </p:spTree>
-    <p:extLst>
-      <p:ext uri="{BB962C8B-B14F-4D97-AF65-F5344CB8AC3E}">
-        <p14:creationId xmlns:p14="http://schemas.microsoft.com/office/powerpoint/2010/main" val="2823395829"/>
-      </p:ext>
-    </p:extLst>
-  </p:cSld>
-  <p:clrMapOvr>
-    <a:masterClrMapping/>
-  </p:clrMapOvr>
-</p:notes>
-</file>
-
-<file path=ppt/notesSlides/notesSlide25.xml><?xml version="1.0" encoding="utf-8"?>
+<file path=ppt/notesSlides/notesSlide23.xml><?xml version="1.0" encoding="utf-8"?>
 <p:notes xmlns:a="http://schemas.openxmlformats.org/drawingml/2006/main" xmlns:r="http://schemas.openxmlformats.org/officeDocument/2006/relationships" xmlns:p="http://schemas.openxmlformats.org/presentationml/2006/main">
   <p:cSld>
     <p:spTree>
@@ -10531,7 +10226,7 @@
 </p:notes>
 </file>
 
-<file path=ppt/notesSlides/notesSlide26.xml><?xml version="1.0" encoding="utf-8"?>
+<file path=ppt/notesSlides/notesSlide24.xml><?xml version="1.0" encoding="utf-8"?>
 <p:notes xmlns:a="http://schemas.openxmlformats.org/drawingml/2006/main" xmlns:r="http://schemas.openxmlformats.org/officeDocument/2006/relationships" xmlns:p="http://schemas.openxmlformats.org/presentationml/2006/main">
   <p:cSld>
     <p:spTree>
@@ -10671,7 +10366,7 @@
 </p:notes>
 </file>
 
-<file path=ppt/notesSlides/notesSlide27.xml><?xml version="1.0" encoding="utf-8"?>
+<file path=ppt/notesSlides/notesSlide25.xml><?xml version="1.0" encoding="utf-8"?>
 <p:notes xmlns:a="http://schemas.openxmlformats.org/drawingml/2006/main" xmlns:r="http://schemas.openxmlformats.org/officeDocument/2006/relationships" xmlns:p="http://schemas.openxmlformats.org/presentationml/2006/main">
   <p:cSld>
     <p:spTree>
@@ -10811,7 +10506,7 @@
 </p:notes>
 </file>
 
-<file path=ppt/notesSlides/notesSlide28.xml><?xml version="1.0" encoding="utf-8"?>
+<file path=ppt/notesSlides/notesSlide26.xml><?xml version="1.0" encoding="utf-8"?>
 <p:notes xmlns:a="http://schemas.openxmlformats.org/drawingml/2006/main" xmlns:r="http://schemas.openxmlformats.org/officeDocument/2006/relationships" xmlns:p="http://schemas.openxmlformats.org/presentationml/2006/main">
   <p:cSld>
     <p:spTree>
@@ -10951,7 +10646,7 @@
 </p:notes>
 </file>
 
-<file path=ppt/notesSlides/notesSlide29.xml><?xml version="1.0" encoding="utf-8"?>
+<file path=ppt/notesSlides/notesSlide27.xml><?xml version="1.0" encoding="utf-8"?>
 <p:notes xmlns:a="http://schemas.openxmlformats.org/drawingml/2006/main" xmlns:r="http://schemas.openxmlformats.org/officeDocument/2006/relationships" xmlns:p="http://schemas.openxmlformats.org/presentationml/2006/main">
   <p:cSld>
     <p:spTree>
@@ -11082,6 +10777,286 @@
     <p:extLst>
       <p:ext uri="{BB962C8B-B14F-4D97-AF65-F5344CB8AC3E}">
         <p14:creationId xmlns:p14="http://schemas.microsoft.com/office/powerpoint/2010/main" val="1205861898"/>
+      </p:ext>
+    </p:extLst>
+  </p:cSld>
+  <p:clrMapOvr>
+    <a:masterClrMapping/>
+  </p:clrMapOvr>
+</p:notes>
+</file>
+
+<file path=ppt/notesSlides/notesSlide28.xml><?xml version="1.0" encoding="utf-8"?>
+<p:notes xmlns:a="http://schemas.openxmlformats.org/drawingml/2006/main" xmlns:r="http://schemas.openxmlformats.org/officeDocument/2006/relationships" xmlns:p="http://schemas.openxmlformats.org/presentationml/2006/main">
+  <p:cSld>
+    <p:spTree>
+      <p:nvGrpSpPr>
+        <p:cNvPr id="1" name="">
+          <a:extLst>
+            <a:ext uri="{FF2B5EF4-FFF2-40B4-BE49-F238E27FC236}">
+              <a16:creationId xmlns:a16="http://schemas.microsoft.com/office/drawing/2014/main" id="{957D8702-9A02-F3BA-9F35-3B1A59B3D8F2}"/>
+            </a:ext>
+          </a:extLst>
+        </p:cNvPr>
+        <p:cNvGrpSpPr/>
+        <p:nvPr/>
+      </p:nvGrpSpPr>
+      <p:grpSpPr>
+        <a:xfrm>
+          <a:off x="0" y="0"/>
+          <a:ext cx="0" cy="0"/>
+          <a:chOff x="0" y="0"/>
+          <a:chExt cx="0" cy="0"/>
+        </a:xfrm>
+      </p:grpSpPr>
+      <p:sp>
+        <p:nvSpPr>
+          <p:cNvPr id="2" name="Slide Image Placeholder 1">
+            <a:extLst>
+              <a:ext uri="{FF2B5EF4-FFF2-40B4-BE49-F238E27FC236}">
+                <a16:creationId xmlns:a16="http://schemas.microsoft.com/office/drawing/2014/main" id="{243AD3F7-50CD-7912-8A55-5DE9A9F72052}"/>
+              </a:ext>
+            </a:extLst>
+          </p:cNvPr>
+          <p:cNvSpPr>
+            <a:spLocks noGrp="1" noRot="1" noChangeAspect="1"/>
+          </p:cNvSpPr>
+          <p:nvPr>
+            <p:ph type="sldImg"/>
+          </p:nvPr>
+        </p:nvSpPr>
+        <p:spPr>
+          <a:xfrm>
+            <a:off x="381000" y="685800"/>
+            <a:ext cx="6096000" cy="3429000"/>
+          </a:xfrm>
+        </p:spPr>
+      </p:sp>
+      <p:sp>
+        <p:nvSpPr>
+          <p:cNvPr id="3" name="Notes Placeholder 2">
+            <a:extLst>
+              <a:ext uri="{FF2B5EF4-FFF2-40B4-BE49-F238E27FC236}">
+                <a16:creationId xmlns:a16="http://schemas.microsoft.com/office/drawing/2014/main" id="{C4CFD35C-573F-1DE1-1319-D24BC244FF7A}"/>
+              </a:ext>
+            </a:extLst>
+          </p:cNvPr>
+          <p:cNvSpPr>
+            <a:spLocks noGrp="1"/>
+          </p:cNvSpPr>
+          <p:nvPr>
+            <p:ph type="body" idx="1"/>
+          </p:nvPr>
+        </p:nvSpPr>
+        <p:spPr/>
+        <p:txBody>
+          <a:bodyPr/>
+          <a:lstStyle/>
+          <a:p>
+            <a:r>
+              <a:rPr lang="de-DE" dirty="0"/>
+              <a:t>This </a:t>
+            </a:r>
+            <a:r>
+              <a:rPr lang="de-DE" dirty="0" err="1"/>
+              <a:t>is</a:t>
+            </a:r>
+            <a:r>
+              <a:rPr lang="de-DE" dirty="0"/>
+              <a:t> </a:t>
+            </a:r>
+            <a:r>
+              <a:rPr lang="de-DE" dirty="0" err="1"/>
+              <a:t>the</a:t>
+            </a:r>
+            <a:r>
+              <a:rPr lang="de-DE" dirty="0"/>
+              <a:t> </a:t>
+            </a:r>
+            <a:r>
+              <a:rPr lang="de-DE" dirty="0" err="1"/>
+              <a:t>competency</a:t>
+            </a:r>
+            <a:r>
+              <a:rPr lang="de-DE" dirty="0"/>
+              <a:t> </a:t>
+            </a:r>
+            <a:r>
+              <a:rPr lang="de-DE" dirty="0" err="1"/>
+              <a:t>question</a:t>
+            </a:r>
+            <a:r>
+              <a:rPr lang="de-DE" dirty="0"/>
+              <a:t> </a:t>
+            </a:r>
+            <a:r>
+              <a:rPr lang="de-DE" dirty="0" err="1"/>
+              <a:t>driving</a:t>
+            </a:r>
+            <a:r>
+              <a:rPr lang="de-DE" dirty="0"/>
+              <a:t> </a:t>
+            </a:r>
+            <a:r>
+              <a:rPr lang="de-DE" dirty="0" err="1"/>
+              <a:t>the</a:t>
+            </a:r>
+            <a:r>
+              <a:rPr lang="de-DE" dirty="0"/>
+              <a:t> </a:t>
+            </a:r>
+            <a:r>
+              <a:rPr lang="de-DE" dirty="0" err="1"/>
+              <a:t>presentation</a:t>
+            </a:r>
+            <a:endParaRPr lang="en-US" dirty="0"/>
+          </a:p>
+        </p:txBody>
+      </p:sp>
+    </p:spTree>
+    <p:extLst>
+      <p:ext uri="{BB962C8B-B14F-4D97-AF65-F5344CB8AC3E}">
+        <p14:creationId xmlns:p14="http://schemas.microsoft.com/office/powerpoint/2010/main" val="2743853096"/>
+      </p:ext>
+    </p:extLst>
+  </p:cSld>
+  <p:clrMapOvr>
+    <a:masterClrMapping/>
+  </p:clrMapOvr>
+</p:notes>
+</file>
+
+<file path=ppt/notesSlides/notesSlide29.xml><?xml version="1.0" encoding="utf-8"?>
+<p:notes xmlns:a="http://schemas.openxmlformats.org/drawingml/2006/main" xmlns:r="http://schemas.openxmlformats.org/officeDocument/2006/relationships" xmlns:p="http://schemas.openxmlformats.org/presentationml/2006/main">
+  <p:cSld>
+    <p:spTree>
+      <p:nvGrpSpPr>
+        <p:cNvPr id="1" name="">
+          <a:extLst>
+            <a:ext uri="{FF2B5EF4-FFF2-40B4-BE49-F238E27FC236}">
+              <a16:creationId xmlns:a16="http://schemas.microsoft.com/office/drawing/2014/main" id="{CE1B362D-A5BF-BDAA-0184-A043B2409428}"/>
+            </a:ext>
+          </a:extLst>
+        </p:cNvPr>
+        <p:cNvGrpSpPr/>
+        <p:nvPr/>
+      </p:nvGrpSpPr>
+      <p:grpSpPr>
+        <a:xfrm>
+          <a:off x="0" y="0"/>
+          <a:ext cx="0" cy="0"/>
+          <a:chOff x="0" y="0"/>
+          <a:chExt cx="0" cy="0"/>
+        </a:xfrm>
+      </p:grpSpPr>
+      <p:sp>
+        <p:nvSpPr>
+          <p:cNvPr id="2" name="Slide Image Placeholder 1">
+            <a:extLst>
+              <a:ext uri="{FF2B5EF4-FFF2-40B4-BE49-F238E27FC236}">
+                <a16:creationId xmlns:a16="http://schemas.microsoft.com/office/drawing/2014/main" id="{0B89EE34-8331-3FD4-E81F-159FAB5FE3F0}"/>
+              </a:ext>
+            </a:extLst>
+          </p:cNvPr>
+          <p:cNvSpPr>
+            <a:spLocks noGrp="1" noRot="1" noChangeAspect="1"/>
+          </p:cNvSpPr>
+          <p:nvPr>
+            <p:ph type="sldImg"/>
+          </p:nvPr>
+        </p:nvSpPr>
+        <p:spPr>
+          <a:xfrm>
+            <a:off x="381000" y="685800"/>
+            <a:ext cx="6096000" cy="3429000"/>
+          </a:xfrm>
+        </p:spPr>
+      </p:sp>
+      <p:sp>
+        <p:nvSpPr>
+          <p:cNvPr id="3" name="Notes Placeholder 2">
+            <a:extLst>
+              <a:ext uri="{FF2B5EF4-FFF2-40B4-BE49-F238E27FC236}">
+                <a16:creationId xmlns:a16="http://schemas.microsoft.com/office/drawing/2014/main" id="{CCA5CD6C-FFE0-7FA3-73FE-C60E015F5B70}"/>
+              </a:ext>
+            </a:extLst>
+          </p:cNvPr>
+          <p:cNvSpPr>
+            <a:spLocks noGrp="1"/>
+          </p:cNvSpPr>
+          <p:nvPr>
+            <p:ph type="body" idx="1"/>
+          </p:nvPr>
+        </p:nvSpPr>
+        <p:spPr/>
+        <p:txBody>
+          <a:bodyPr/>
+          <a:lstStyle/>
+          <a:p>
+            <a:r>
+              <a:rPr lang="de-DE" dirty="0"/>
+              <a:t>This </a:t>
+            </a:r>
+            <a:r>
+              <a:rPr lang="de-DE" dirty="0" err="1"/>
+              <a:t>is</a:t>
+            </a:r>
+            <a:r>
+              <a:rPr lang="de-DE" dirty="0"/>
+              <a:t> </a:t>
+            </a:r>
+            <a:r>
+              <a:rPr lang="de-DE" dirty="0" err="1"/>
+              <a:t>the</a:t>
+            </a:r>
+            <a:r>
+              <a:rPr lang="de-DE" dirty="0"/>
+              <a:t> </a:t>
+            </a:r>
+            <a:r>
+              <a:rPr lang="de-DE" dirty="0" err="1"/>
+              <a:t>competency</a:t>
+            </a:r>
+            <a:r>
+              <a:rPr lang="de-DE" dirty="0"/>
+              <a:t> </a:t>
+            </a:r>
+            <a:r>
+              <a:rPr lang="de-DE" dirty="0" err="1"/>
+              <a:t>question</a:t>
+            </a:r>
+            <a:r>
+              <a:rPr lang="de-DE" dirty="0"/>
+              <a:t> </a:t>
+            </a:r>
+            <a:r>
+              <a:rPr lang="de-DE" dirty="0" err="1"/>
+              <a:t>driving</a:t>
+            </a:r>
+            <a:r>
+              <a:rPr lang="de-DE" dirty="0"/>
+              <a:t> </a:t>
+            </a:r>
+            <a:r>
+              <a:rPr lang="de-DE" dirty="0" err="1"/>
+              <a:t>the</a:t>
+            </a:r>
+            <a:r>
+              <a:rPr lang="de-DE" dirty="0"/>
+              <a:t> </a:t>
+            </a:r>
+            <a:r>
+              <a:rPr lang="de-DE" dirty="0" err="1"/>
+              <a:t>presentation</a:t>
+            </a:r>
+            <a:endParaRPr lang="en-US" dirty="0"/>
+          </a:p>
+        </p:txBody>
+      </p:sp>
+    </p:spTree>
+    <p:extLst>
+      <p:ext uri="{BB962C8B-B14F-4D97-AF65-F5344CB8AC3E}">
+        <p14:creationId xmlns:p14="http://schemas.microsoft.com/office/powerpoint/2010/main" val="2031637903"/>
       </p:ext>
     </p:extLst>
   </p:cSld>
@@ -11183,286 +11158,6 @@
         <p:cNvPr id="1" name="">
           <a:extLst>
             <a:ext uri="{FF2B5EF4-FFF2-40B4-BE49-F238E27FC236}">
-              <a16:creationId xmlns:a16="http://schemas.microsoft.com/office/drawing/2014/main" id="{957D8702-9A02-F3BA-9F35-3B1A59B3D8F2}"/>
-            </a:ext>
-          </a:extLst>
-        </p:cNvPr>
-        <p:cNvGrpSpPr/>
-        <p:nvPr/>
-      </p:nvGrpSpPr>
-      <p:grpSpPr>
-        <a:xfrm>
-          <a:off x="0" y="0"/>
-          <a:ext cx="0" cy="0"/>
-          <a:chOff x="0" y="0"/>
-          <a:chExt cx="0" cy="0"/>
-        </a:xfrm>
-      </p:grpSpPr>
-      <p:sp>
-        <p:nvSpPr>
-          <p:cNvPr id="2" name="Slide Image Placeholder 1">
-            <a:extLst>
-              <a:ext uri="{FF2B5EF4-FFF2-40B4-BE49-F238E27FC236}">
-                <a16:creationId xmlns:a16="http://schemas.microsoft.com/office/drawing/2014/main" id="{243AD3F7-50CD-7912-8A55-5DE9A9F72052}"/>
-              </a:ext>
-            </a:extLst>
-          </p:cNvPr>
-          <p:cNvSpPr>
-            <a:spLocks noGrp="1" noRot="1" noChangeAspect="1"/>
-          </p:cNvSpPr>
-          <p:nvPr>
-            <p:ph type="sldImg"/>
-          </p:nvPr>
-        </p:nvSpPr>
-        <p:spPr>
-          <a:xfrm>
-            <a:off x="381000" y="685800"/>
-            <a:ext cx="6096000" cy="3429000"/>
-          </a:xfrm>
-        </p:spPr>
-      </p:sp>
-      <p:sp>
-        <p:nvSpPr>
-          <p:cNvPr id="3" name="Notes Placeholder 2">
-            <a:extLst>
-              <a:ext uri="{FF2B5EF4-FFF2-40B4-BE49-F238E27FC236}">
-                <a16:creationId xmlns:a16="http://schemas.microsoft.com/office/drawing/2014/main" id="{C4CFD35C-573F-1DE1-1319-D24BC244FF7A}"/>
-              </a:ext>
-            </a:extLst>
-          </p:cNvPr>
-          <p:cNvSpPr>
-            <a:spLocks noGrp="1"/>
-          </p:cNvSpPr>
-          <p:nvPr>
-            <p:ph type="body" idx="1"/>
-          </p:nvPr>
-        </p:nvSpPr>
-        <p:spPr/>
-        <p:txBody>
-          <a:bodyPr/>
-          <a:lstStyle/>
-          <a:p>
-            <a:r>
-              <a:rPr lang="de-DE" dirty="0"/>
-              <a:t>This </a:t>
-            </a:r>
-            <a:r>
-              <a:rPr lang="de-DE" dirty="0" err="1"/>
-              <a:t>is</a:t>
-            </a:r>
-            <a:r>
-              <a:rPr lang="de-DE" dirty="0"/>
-              <a:t> </a:t>
-            </a:r>
-            <a:r>
-              <a:rPr lang="de-DE" dirty="0" err="1"/>
-              <a:t>the</a:t>
-            </a:r>
-            <a:r>
-              <a:rPr lang="de-DE" dirty="0"/>
-              <a:t> </a:t>
-            </a:r>
-            <a:r>
-              <a:rPr lang="de-DE" dirty="0" err="1"/>
-              <a:t>competency</a:t>
-            </a:r>
-            <a:r>
-              <a:rPr lang="de-DE" dirty="0"/>
-              <a:t> </a:t>
-            </a:r>
-            <a:r>
-              <a:rPr lang="de-DE" dirty="0" err="1"/>
-              <a:t>question</a:t>
-            </a:r>
-            <a:r>
-              <a:rPr lang="de-DE" dirty="0"/>
-              <a:t> </a:t>
-            </a:r>
-            <a:r>
-              <a:rPr lang="de-DE" dirty="0" err="1"/>
-              <a:t>driving</a:t>
-            </a:r>
-            <a:r>
-              <a:rPr lang="de-DE" dirty="0"/>
-              <a:t> </a:t>
-            </a:r>
-            <a:r>
-              <a:rPr lang="de-DE" dirty="0" err="1"/>
-              <a:t>the</a:t>
-            </a:r>
-            <a:r>
-              <a:rPr lang="de-DE" dirty="0"/>
-              <a:t> </a:t>
-            </a:r>
-            <a:r>
-              <a:rPr lang="de-DE" dirty="0" err="1"/>
-              <a:t>presentation</a:t>
-            </a:r>
-            <a:endParaRPr lang="en-US" dirty="0"/>
-          </a:p>
-        </p:txBody>
-      </p:sp>
-    </p:spTree>
-    <p:extLst>
-      <p:ext uri="{BB962C8B-B14F-4D97-AF65-F5344CB8AC3E}">
-        <p14:creationId xmlns:p14="http://schemas.microsoft.com/office/powerpoint/2010/main" val="2743853096"/>
-      </p:ext>
-    </p:extLst>
-  </p:cSld>
-  <p:clrMapOvr>
-    <a:masterClrMapping/>
-  </p:clrMapOvr>
-</p:notes>
-</file>
-
-<file path=ppt/notesSlides/notesSlide31.xml><?xml version="1.0" encoding="utf-8"?>
-<p:notes xmlns:a="http://schemas.openxmlformats.org/drawingml/2006/main" xmlns:r="http://schemas.openxmlformats.org/officeDocument/2006/relationships" xmlns:p="http://schemas.openxmlformats.org/presentationml/2006/main">
-  <p:cSld>
-    <p:spTree>
-      <p:nvGrpSpPr>
-        <p:cNvPr id="1" name="">
-          <a:extLst>
-            <a:ext uri="{FF2B5EF4-FFF2-40B4-BE49-F238E27FC236}">
-              <a16:creationId xmlns:a16="http://schemas.microsoft.com/office/drawing/2014/main" id="{CE1B362D-A5BF-BDAA-0184-A043B2409428}"/>
-            </a:ext>
-          </a:extLst>
-        </p:cNvPr>
-        <p:cNvGrpSpPr/>
-        <p:nvPr/>
-      </p:nvGrpSpPr>
-      <p:grpSpPr>
-        <a:xfrm>
-          <a:off x="0" y="0"/>
-          <a:ext cx="0" cy="0"/>
-          <a:chOff x="0" y="0"/>
-          <a:chExt cx="0" cy="0"/>
-        </a:xfrm>
-      </p:grpSpPr>
-      <p:sp>
-        <p:nvSpPr>
-          <p:cNvPr id="2" name="Slide Image Placeholder 1">
-            <a:extLst>
-              <a:ext uri="{FF2B5EF4-FFF2-40B4-BE49-F238E27FC236}">
-                <a16:creationId xmlns:a16="http://schemas.microsoft.com/office/drawing/2014/main" id="{0B89EE34-8331-3FD4-E81F-159FAB5FE3F0}"/>
-              </a:ext>
-            </a:extLst>
-          </p:cNvPr>
-          <p:cNvSpPr>
-            <a:spLocks noGrp="1" noRot="1" noChangeAspect="1"/>
-          </p:cNvSpPr>
-          <p:nvPr>
-            <p:ph type="sldImg"/>
-          </p:nvPr>
-        </p:nvSpPr>
-        <p:spPr>
-          <a:xfrm>
-            <a:off x="381000" y="685800"/>
-            <a:ext cx="6096000" cy="3429000"/>
-          </a:xfrm>
-        </p:spPr>
-      </p:sp>
-      <p:sp>
-        <p:nvSpPr>
-          <p:cNvPr id="3" name="Notes Placeholder 2">
-            <a:extLst>
-              <a:ext uri="{FF2B5EF4-FFF2-40B4-BE49-F238E27FC236}">
-                <a16:creationId xmlns:a16="http://schemas.microsoft.com/office/drawing/2014/main" id="{CCA5CD6C-FFE0-7FA3-73FE-C60E015F5B70}"/>
-              </a:ext>
-            </a:extLst>
-          </p:cNvPr>
-          <p:cNvSpPr>
-            <a:spLocks noGrp="1"/>
-          </p:cNvSpPr>
-          <p:nvPr>
-            <p:ph type="body" idx="1"/>
-          </p:nvPr>
-        </p:nvSpPr>
-        <p:spPr/>
-        <p:txBody>
-          <a:bodyPr/>
-          <a:lstStyle/>
-          <a:p>
-            <a:r>
-              <a:rPr lang="de-DE" dirty="0"/>
-              <a:t>This </a:t>
-            </a:r>
-            <a:r>
-              <a:rPr lang="de-DE" dirty="0" err="1"/>
-              <a:t>is</a:t>
-            </a:r>
-            <a:r>
-              <a:rPr lang="de-DE" dirty="0"/>
-              <a:t> </a:t>
-            </a:r>
-            <a:r>
-              <a:rPr lang="de-DE" dirty="0" err="1"/>
-              <a:t>the</a:t>
-            </a:r>
-            <a:r>
-              <a:rPr lang="de-DE" dirty="0"/>
-              <a:t> </a:t>
-            </a:r>
-            <a:r>
-              <a:rPr lang="de-DE" dirty="0" err="1"/>
-              <a:t>competency</a:t>
-            </a:r>
-            <a:r>
-              <a:rPr lang="de-DE" dirty="0"/>
-              <a:t> </a:t>
-            </a:r>
-            <a:r>
-              <a:rPr lang="de-DE" dirty="0" err="1"/>
-              <a:t>question</a:t>
-            </a:r>
-            <a:r>
-              <a:rPr lang="de-DE" dirty="0"/>
-              <a:t> </a:t>
-            </a:r>
-            <a:r>
-              <a:rPr lang="de-DE" dirty="0" err="1"/>
-              <a:t>driving</a:t>
-            </a:r>
-            <a:r>
-              <a:rPr lang="de-DE" dirty="0"/>
-              <a:t> </a:t>
-            </a:r>
-            <a:r>
-              <a:rPr lang="de-DE" dirty="0" err="1"/>
-              <a:t>the</a:t>
-            </a:r>
-            <a:r>
-              <a:rPr lang="de-DE" dirty="0"/>
-              <a:t> </a:t>
-            </a:r>
-            <a:r>
-              <a:rPr lang="de-DE" dirty="0" err="1"/>
-              <a:t>presentation</a:t>
-            </a:r>
-            <a:endParaRPr lang="en-US" dirty="0"/>
-          </a:p>
-        </p:txBody>
-      </p:sp>
-    </p:spTree>
-    <p:extLst>
-      <p:ext uri="{BB962C8B-B14F-4D97-AF65-F5344CB8AC3E}">
-        <p14:creationId xmlns:p14="http://schemas.microsoft.com/office/powerpoint/2010/main" val="2031637903"/>
-      </p:ext>
-    </p:extLst>
-  </p:cSld>
-  <p:clrMapOvr>
-    <a:masterClrMapping/>
-  </p:clrMapOvr>
-</p:notes>
-</file>
-
-<file path=ppt/notesSlides/notesSlide32.xml><?xml version="1.0" encoding="utf-8"?>
-<p:notes xmlns:a="http://schemas.openxmlformats.org/drawingml/2006/main" xmlns:r="http://schemas.openxmlformats.org/officeDocument/2006/relationships" xmlns:p="http://schemas.openxmlformats.org/presentationml/2006/main">
-  <p:cSld>
-    <p:spTree>
-      <p:nvGrpSpPr>
-        <p:cNvPr id="1" name="">
-          <a:extLst>
-            <a:ext uri="{FF2B5EF4-FFF2-40B4-BE49-F238E27FC236}">
               <a16:creationId xmlns:a16="http://schemas.microsoft.com/office/drawing/2014/main" id="{74AE4D5B-6E9C-AA0F-749F-C87D190F8202}"/>
             </a:ext>
           </a:extLst>
@@ -11595,7 +11290,7 @@
 </p:notes>
 </file>
 
-<file path=ppt/notesSlides/notesSlide33.xml><?xml version="1.0" encoding="utf-8"?>
+<file path=ppt/notesSlides/notesSlide31.xml><?xml version="1.0" encoding="utf-8"?>
 <p:notes xmlns:a="http://schemas.openxmlformats.org/drawingml/2006/main" xmlns:r="http://schemas.openxmlformats.org/officeDocument/2006/relationships" xmlns:p="http://schemas.openxmlformats.org/presentationml/2006/main">
   <p:cSld>
     <p:spTree>
@@ -11735,7 +11430,7 @@
 </p:notes>
 </file>
 
-<file path=ppt/notesSlides/notesSlide34.xml><?xml version="1.0" encoding="utf-8"?>
+<file path=ppt/notesSlides/notesSlide32.xml><?xml version="1.0" encoding="utf-8"?>
 <p:notes xmlns:a="http://schemas.openxmlformats.org/drawingml/2006/main" xmlns:r="http://schemas.openxmlformats.org/officeDocument/2006/relationships" xmlns:p="http://schemas.openxmlformats.org/presentationml/2006/main">
   <p:cSld>
     <p:spTree>
@@ -11875,7 +11570,7 @@
 </p:notes>
 </file>
 
-<file path=ppt/notesSlides/notesSlide35.xml><?xml version="1.0" encoding="utf-8"?>
+<file path=ppt/notesSlides/notesSlide33.xml><?xml version="1.0" encoding="utf-8"?>
 <p:notes xmlns:a="http://schemas.openxmlformats.org/drawingml/2006/main" xmlns:r="http://schemas.openxmlformats.org/officeDocument/2006/relationships" xmlns:p="http://schemas.openxmlformats.org/presentationml/2006/main">
   <p:cSld>
     <p:spTree>
@@ -12015,7 +11710,7 @@
 </p:notes>
 </file>
 
-<file path=ppt/notesSlides/notesSlide36.xml><?xml version="1.0" encoding="utf-8"?>
+<file path=ppt/notesSlides/notesSlide34.xml><?xml version="1.0" encoding="utf-8"?>
 <p:notes xmlns:a="http://schemas.openxmlformats.org/drawingml/2006/main" xmlns:r="http://schemas.openxmlformats.org/officeDocument/2006/relationships" xmlns:p="http://schemas.openxmlformats.org/presentationml/2006/main">
   <p:cSld>
     <p:spTree>
@@ -12023,7 +11718,147 @@
         <p:cNvPr id="1" name="">
           <a:extLst>
             <a:ext uri="{FF2B5EF4-FFF2-40B4-BE49-F238E27FC236}">
-              <a16:creationId xmlns:a16="http://schemas.microsoft.com/office/drawing/2014/main" id="{A704565B-3BA2-DA0B-66F5-3C575B2E1CF9}"/>
+              <a16:creationId xmlns:a16="http://schemas.microsoft.com/office/drawing/2014/main" id="{EB238CC1-AD18-20A8-78EF-FD5405440720}"/>
+            </a:ext>
+          </a:extLst>
+        </p:cNvPr>
+        <p:cNvGrpSpPr/>
+        <p:nvPr/>
+      </p:nvGrpSpPr>
+      <p:grpSpPr>
+        <a:xfrm>
+          <a:off x="0" y="0"/>
+          <a:ext cx="0" cy="0"/>
+          <a:chOff x="0" y="0"/>
+          <a:chExt cx="0" cy="0"/>
+        </a:xfrm>
+      </p:grpSpPr>
+      <p:sp>
+        <p:nvSpPr>
+          <p:cNvPr id="2" name="Slide Image Placeholder 1">
+            <a:extLst>
+              <a:ext uri="{FF2B5EF4-FFF2-40B4-BE49-F238E27FC236}">
+                <a16:creationId xmlns:a16="http://schemas.microsoft.com/office/drawing/2014/main" id="{4985DD5B-D084-8F21-F6A6-40470B8C10EA}"/>
+              </a:ext>
+            </a:extLst>
+          </p:cNvPr>
+          <p:cNvSpPr>
+            <a:spLocks noGrp="1" noRot="1" noChangeAspect="1"/>
+          </p:cNvSpPr>
+          <p:nvPr>
+            <p:ph type="sldImg"/>
+          </p:nvPr>
+        </p:nvSpPr>
+        <p:spPr>
+          <a:xfrm>
+            <a:off x="381000" y="685800"/>
+            <a:ext cx="6096000" cy="3429000"/>
+          </a:xfrm>
+        </p:spPr>
+      </p:sp>
+      <p:sp>
+        <p:nvSpPr>
+          <p:cNvPr id="3" name="Notes Placeholder 2">
+            <a:extLst>
+              <a:ext uri="{FF2B5EF4-FFF2-40B4-BE49-F238E27FC236}">
+                <a16:creationId xmlns:a16="http://schemas.microsoft.com/office/drawing/2014/main" id="{05E40699-ABB2-340D-DA71-9A6B730E7922}"/>
+              </a:ext>
+            </a:extLst>
+          </p:cNvPr>
+          <p:cNvSpPr>
+            <a:spLocks noGrp="1"/>
+          </p:cNvSpPr>
+          <p:nvPr>
+            <p:ph type="body" idx="1"/>
+          </p:nvPr>
+        </p:nvSpPr>
+        <p:spPr/>
+        <p:txBody>
+          <a:bodyPr/>
+          <a:lstStyle/>
+          <a:p>
+            <a:r>
+              <a:rPr lang="de-DE" dirty="0"/>
+              <a:t>This </a:t>
+            </a:r>
+            <a:r>
+              <a:rPr lang="de-DE" dirty="0" err="1"/>
+              <a:t>is</a:t>
+            </a:r>
+            <a:r>
+              <a:rPr lang="de-DE" dirty="0"/>
+              <a:t> </a:t>
+            </a:r>
+            <a:r>
+              <a:rPr lang="de-DE" dirty="0" err="1"/>
+              <a:t>the</a:t>
+            </a:r>
+            <a:r>
+              <a:rPr lang="de-DE" dirty="0"/>
+              <a:t> </a:t>
+            </a:r>
+            <a:r>
+              <a:rPr lang="de-DE" dirty="0" err="1"/>
+              <a:t>competency</a:t>
+            </a:r>
+            <a:r>
+              <a:rPr lang="de-DE" dirty="0"/>
+              <a:t> </a:t>
+            </a:r>
+            <a:r>
+              <a:rPr lang="de-DE" dirty="0" err="1"/>
+              <a:t>question</a:t>
+            </a:r>
+            <a:r>
+              <a:rPr lang="de-DE" dirty="0"/>
+              <a:t> </a:t>
+            </a:r>
+            <a:r>
+              <a:rPr lang="de-DE" dirty="0" err="1"/>
+              <a:t>driving</a:t>
+            </a:r>
+            <a:r>
+              <a:rPr lang="de-DE" dirty="0"/>
+              <a:t> </a:t>
+            </a:r>
+            <a:r>
+              <a:rPr lang="de-DE" dirty="0" err="1"/>
+              <a:t>the</a:t>
+            </a:r>
+            <a:r>
+              <a:rPr lang="de-DE" dirty="0"/>
+              <a:t> </a:t>
+            </a:r>
+            <a:r>
+              <a:rPr lang="de-DE" dirty="0" err="1"/>
+              <a:t>presentation</a:t>
+            </a:r>
+            <a:endParaRPr lang="en-US" dirty="0"/>
+          </a:p>
+        </p:txBody>
+      </p:sp>
+    </p:spTree>
+    <p:extLst>
+      <p:ext uri="{BB962C8B-B14F-4D97-AF65-F5344CB8AC3E}">
+        <p14:creationId xmlns:p14="http://schemas.microsoft.com/office/powerpoint/2010/main" val="2230178461"/>
+      </p:ext>
+    </p:extLst>
+  </p:cSld>
+  <p:clrMapOvr>
+    <a:masterClrMapping/>
+  </p:clrMapOvr>
+</p:notes>
+</file>
+
+<file path=ppt/notesSlides/notesSlide35.xml><?xml version="1.0" encoding="utf-8"?>
+<p:notes xmlns:a="http://schemas.openxmlformats.org/drawingml/2006/main" xmlns:r="http://schemas.openxmlformats.org/officeDocument/2006/relationships" xmlns:p="http://schemas.openxmlformats.org/presentationml/2006/main">
+  <p:cSld>
+    <p:spTree>
+      <p:nvGrpSpPr>
+        <p:cNvPr id="1" name="">
+          <a:extLst>
+            <a:ext uri="{FF2B5EF4-FFF2-40B4-BE49-F238E27FC236}">
+              <a16:creationId xmlns:a16="http://schemas.microsoft.com/office/drawing/2014/main" id="{790233F6-97A8-1415-9314-E0160E37B322}"/>
             </a:ext>
           </a:extLst>
         </p:cNvPr>
@@ -12043,7 +11878,7 @@
           <p:cNvPr id="2" name="Marcador de imagen de diapositiva 1">
             <a:extLst>
               <a:ext uri="{FF2B5EF4-FFF2-40B4-BE49-F238E27FC236}">
-                <a16:creationId xmlns:a16="http://schemas.microsoft.com/office/drawing/2014/main" id="{8347737C-78A8-8B65-C4E5-D9BDFF59B0EA}"/>
+                <a16:creationId xmlns:a16="http://schemas.microsoft.com/office/drawing/2014/main" id="{4E2782F0-F30D-F84A-3D20-66DB50BDDA00}"/>
               </a:ext>
             </a:extLst>
           </p:cNvPr>
@@ -12066,7 +11901,7 @@
           <p:cNvPr id="3" name="Marcador de notas 2">
             <a:extLst>
               <a:ext uri="{FF2B5EF4-FFF2-40B4-BE49-F238E27FC236}">
-                <a16:creationId xmlns:a16="http://schemas.microsoft.com/office/drawing/2014/main" id="{8AF2F5DE-37DB-2B59-7523-27783450ED38}"/>
+                <a16:creationId xmlns:a16="http://schemas.microsoft.com/office/drawing/2014/main" id="{77F26BF8-3705-6E54-CDBE-4CFC1527BCCA}"/>
               </a:ext>
             </a:extLst>
           </p:cNvPr>
@@ -12089,287 +11924,7 @@
     </p:spTree>
     <p:extLst>
       <p:ext uri="{BB962C8B-B14F-4D97-AF65-F5344CB8AC3E}">
-        <p14:creationId xmlns:p14="http://schemas.microsoft.com/office/powerpoint/2010/main" val="874811196"/>
-      </p:ext>
-    </p:extLst>
-  </p:cSld>
-  <p:clrMapOvr>
-    <a:masterClrMapping/>
-  </p:clrMapOvr>
-</p:notes>
-</file>
-
-<file path=ppt/notesSlides/notesSlide37.xml><?xml version="1.0" encoding="utf-8"?>
-<p:notes xmlns:a="http://schemas.openxmlformats.org/drawingml/2006/main" xmlns:r="http://schemas.openxmlformats.org/officeDocument/2006/relationships" xmlns:p="http://schemas.openxmlformats.org/presentationml/2006/main">
-  <p:cSld>
-    <p:spTree>
-      <p:nvGrpSpPr>
-        <p:cNvPr id="1" name="">
-          <a:extLst>
-            <a:ext uri="{FF2B5EF4-FFF2-40B4-BE49-F238E27FC236}">
-              <a16:creationId xmlns:a16="http://schemas.microsoft.com/office/drawing/2014/main" id="{DECEC542-6B3A-F1E6-2935-5752B7FCC4CE}"/>
-            </a:ext>
-          </a:extLst>
-        </p:cNvPr>
-        <p:cNvGrpSpPr/>
-        <p:nvPr/>
-      </p:nvGrpSpPr>
-      <p:grpSpPr>
-        <a:xfrm>
-          <a:off x="0" y="0"/>
-          <a:ext cx="0" cy="0"/>
-          <a:chOff x="0" y="0"/>
-          <a:chExt cx="0" cy="0"/>
-        </a:xfrm>
-      </p:grpSpPr>
-      <p:sp>
-        <p:nvSpPr>
-          <p:cNvPr id="2" name="Slide Image Placeholder 1">
-            <a:extLst>
-              <a:ext uri="{FF2B5EF4-FFF2-40B4-BE49-F238E27FC236}">
-                <a16:creationId xmlns:a16="http://schemas.microsoft.com/office/drawing/2014/main" id="{48680D78-DA3A-F4F1-9626-F86EEB1AE046}"/>
-              </a:ext>
-            </a:extLst>
-          </p:cNvPr>
-          <p:cNvSpPr>
-            <a:spLocks noGrp="1" noRot="1" noChangeAspect="1"/>
-          </p:cNvSpPr>
-          <p:nvPr>
-            <p:ph type="sldImg"/>
-          </p:nvPr>
-        </p:nvSpPr>
-        <p:spPr>
-          <a:xfrm>
-            <a:off x="381000" y="685800"/>
-            <a:ext cx="6096000" cy="3429000"/>
-          </a:xfrm>
-        </p:spPr>
-      </p:sp>
-      <p:sp>
-        <p:nvSpPr>
-          <p:cNvPr id="3" name="Notes Placeholder 2">
-            <a:extLst>
-              <a:ext uri="{FF2B5EF4-FFF2-40B4-BE49-F238E27FC236}">
-                <a16:creationId xmlns:a16="http://schemas.microsoft.com/office/drawing/2014/main" id="{BFB7E967-D652-EA62-C601-ABDBF60A2B43}"/>
-              </a:ext>
-            </a:extLst>
-          </p:cNvPr>
-          <p:cNvSpPr>
-            <a:spLocks noGrp="1"/>
-          </p:cNvSpPr>
-          <p:nvPr>
-            <p:ph type="body" idx="1"/>
-          </p:nvPr>
-        </p:nvSpPr>
-        <p:spPr/>
-        <p:txBody>
-          <a:bodyPr/>
-          <a:lstStyle/>
-          <a:p>
-            <a:r>
-              <a:rPr lang="de-DE" dirty="0"/>
-              <a:t>This </a:t>
-            </a:r>
-            <a:r>
-              <a:rPr lang="de-DE" dirty="0" err="1"/>
-              <a:t>is</a:t>
-            </a:r>
-            <a:r>
-              <a:rPr lang="de-DE" dirty="0"/>
-              <a:t> </a:t>
-            </a:r>
-            <a:r>
-              <a:rPr lang="de-DE" dirty="0" err="1"/>
-              <a:t>the</a:t>
-            </a:r>
-            <a:r>
-              <a:rPr lang="de-DE" dirty="0"/>
-              <a:t> </a:t>
-            </a:r>
-            <a:r>
-              <a:rPr lang="de-DE" dirty="0" err="1"/>
-              <a:t>competency</a:t>
-            </a:r>
-            <a:r>
-              <a:rPr lang="de-DE" dirty="0"/>
-              <a:t> </a:t>
-            </a:r>
-            <a:r>
-              <a:rPr lang="de-DE" dirty="0" err="1"/>
-              <a:t>question</a:t>
-            </a:r>
-            <a:r>
-              <a:rPr lang="de-DE" dirty="0"/>
-              <a:t> </a:t>
-            </a:r>
-            <a:r>
-              <a:rPr lang="de-DE" dirty="0" err="1"/>
-              <a:t>driving</a:t>
-            </a:r>
-            <a:r>
-              <a:rPr lang="de-DE" dirty="0"/>
-              <a:t> </a:t>
-            </a:r>
-            <a:r>
-              <a:rPr lang="de-DE" dirty="0" err="1"/>
-              <a:t>the</a:t>
-            </a:r>
-            <a:r>
-              <a:rPr lang="de-DE" dirty="0"/>
-              <a:t> </a:t>
-            </a:r>
-            <a:r>
-              <a:rPr lang="de-DE" dirty="0" err="1"/>
-              <a:t>presentation</a:t>
-            </a:r>
-            <a:endParaRPr lang="en-US" dirty="0"/>
-          </a:p>
-        </p:txBody>
-      </p:sp>
-    </p:spTree>
-    <p:extLst>
-      <p:ext uri="{BB962C8B-B14F-4D97-AF65-F5344CB8AC3E}">
-        <p14:creationId xmlns:p14="http://schemas.microsoft.com/office/powerpoint/2010/main" val="3552457620"/>
-      </p:ext>
-    </p:extLst>
-  </p:cSld>
-  <p:clrMapOvr>
-    <a:masterClrMapping/>
-  </p:clrMapOvr>
-</p:notes>
-</file>
-
-<file path=ppt/notesSlides/notesSlide38.xml><?xml version="1.0" encoding="utf-8"?>
-<p:notes xmlns:a="http://schemas.openxmlformats.org/drawingml/2006/main" xmlns:r="http://schemas.openxmlformats.org/officeDocument/2006/relationships" xmlns:p="http://schemas.openxmlformats.org/presentationml/2006/main">
-  <p:cSld>
-    <p:spTree>
-      <p:nvGrpSpPr>
-        <p:cNvPr id="1" name="">
-          <a:extLst>
-            <a:ext uri="{FF2B5EF4-FFF2-40B4-BE49-F238E27FC236}">
-              <a16:creationId xmlns:a16="http://schemas.microsoft.com/office/drawing/2014/main" id="{F1F1DE24-615D-1EA4-B17C-CBCE32FE9DC2}"/>
-            </a:ext>
-          </a:extLst>
-        </p:cNvPr>
-        <p:cNvGrpSpPr/>
-        <p:nvPr/>
-      </p:nvGrpSpPr>
-      <p:grpSpPr>
-        <a:xfrm>
-          <a:off x="0" y="0"/>
-          <a:ext cx="0" cy="0"/>
-          <a:chOff x="0" y="0"/>
-          <a:chExt cx="0" cy="0"/>
-        </a:xfrm>
-      </p:grpSpPr>
-      <p:sp>
-        <p:nvSpPr>
-          <p:cNvPr id="2" name="Slide Image Placeholder 1">
-            <a:extLst>
-              <a:ext uri="{FF2B5EF4-FFF2-40B4-BE49-F238E27FC236}">
-                <a16:creationId xmlns:a16="http://schemas.microsoft.com/office/drawing/2014/main" id="{14243F7B-5A87-0B4C-AE1E-2B3912C53233}"/>
-              </a:ext>
-            </a:extLst>
-          </p:cNvPr>
-          <p:cNvSpPr>
-            <a:spLocks noGrp="1" noRot="1" noChangeAspect="1"/>
-          </p:cNvSpPr>
-          <p:nvPr>
-            <p:ph type="sldImg"/>
-          </p:nvPr>
-        </p:nvSpPr>
-        <p:spPr>
-          <a:xfrm>
-            <a:off x="381000" y="685800"/>
-            <a:ext cx="6096000" cy="3429000"/>
-          </a:xfrm>
-        </p:spPr>
-      </p:sp>
-      <p:sp>
-        <p:nvSpPr>
-          <p:cNvPr id="3" name="Notes Placeholder 2">
-            <a:extLst>
-              <a:ext uri="{FF2B5EF4-FFF2-40B4-BE49-F238E27FC236}">
-                <a16:creationId xmlns:a16="http://schemas.microsoft.com/office/drawing/2014/main" id="{EE3B5D49-3D87-9533-BBB1-AA735668F4A0}"/>
-              </a:ext>
-            </a:extLst>
-          </p:cNvPr>
-          <p:cNvSpPr>
-            <a:spLocks noGrp="1"/>
-          </p:cNvSpPr>
-          <p:nvPr>
-            <p:ph type="body" idx="1"/>
-          </p:nvPr>
-        </p:nvSpPr>
-        <p:spPr/>
-        <p:txBody>
-          <a:bodyPr/>
-          <a:lstStyle/>
-          <a:p>
-            <a:r>
-              <a:rPr lang="de-DE" dirty="0"/>
-              <a:t>This </a:t>
-            </a:r>
-            <a:r>
-              <a:rPr lang="de-DE" dirty="0" err="1"/>
-              <a:t>is</a:t>
-            </a:r>
-            <a:r>
-              <a:rPr lang="de-DE" dirty="0"/>
-              <a:t> </a:t>
-            </a:r>
-            <a:r>
-              <a:rPr lang="de-DE" dirty="0" err="1"/>
-              <a:t>the</a:t>
-            </a:r>
-            <a:r>
-              <a:rPr lang="de-DE" dirty="0"/>
-              <a:t> </a:t>
-            </a:r>
-            <a:r>
-              <a:rPr lang="de-DE" dirty="0" err="1"/>
-              <a:t>competency</a:t>
-            </a:r>
-            <a:r>
-              <a:rPr lang="de-DE" dirty="0"/>
-              <a:t> </a:t>
-            </a:r>
-            <a:r>
-              <a:rPr lang="de-DE" dirty="0" err="1"/>
-              <a:t>question</a:t>
-            </a:r>
-            <a:r>
-              <a:rPr lang="de-DE" dirty="0"/>
-              <a:t> </a:t>
-            </a:r>
-            <a:r>
-              <a:rPr lang="de-DE" dirty="0" err="1"/>
-              <a:t>driving</a:t>
-            </a:r>
-            <a:r>
-              <a:rPr lang="de-DE" dirty="0"/>
-              <a:t> </a:t>
-            </a:r>
-            <a:r>
-              <a:rPr lang="de-DE" dirty="0" err="1"/>
-              <a:t>the</a:t>
-            </a:r>
-            <a:r>
-              <a:rPr lang="de-DE" dirty="0"/>
-              <a:t> </a:t>
-            </a:r>
-            <a:r>
-              <a:rPr lang="de-DE" dirty="0" err="1"/>
-              <a:t>presentation</a:t>
-            </a:r>
-            <a:endParaRPr lang="en-US" dirty="0"/>
-          </a:p>
-        </p:txBody>
-      </p:sp>
-    </p:spTree>
-    <p:extLst>
-      <p:ext uri="{BB962C8B-B14F-4D97-AF65-F5344CB8AC3E}">
-        <p14:creationId xmlns:p14="http://schemas.microsoft.com/office/powerpoint/2010/main" val="93604464"/>
+        <p14:creationId xmlns:p14="http://schemas.microsoft.com/office/powerpoint/2010/main" val="3635598891"/>
       </p:ext>
     </p:extLst>
   </p:cSld>
@@ -23680,7 +23235,7 @@
         </p:nvSpPr>
         <p:spPr>
           <a:xfrm>
-            <a:off x="415600" y="1593684"/>
+            <a:off x="415600" y="1356967"/>
             <a:ext cx="11228532" cy="4670949"/>
           </a:xfrm>
         </p:spPr>
@@ -23710,8 +23265,22 @@
           <a:p>
             <a:r>
               <a:rPr lang="en-US" dirty="0"/>
-              <a:t>Ontology and additional resources available at </a:t>
-            </a:r>
+              <a:t>Names and descriptions of classes and properties from</a:t>
+            </a:r>
+          </a:p>
+          <a:p>
+            <a:pPr marL="152396" indent="0">
+              <a:buNone/>
+            </a:pPr>
+            <a:r>
+              <a:rPr lang="en-US" dirty="0"/>
+              <a:t>       the RDL Master object</a:t>
+            </a:r>
+          </a:p>
+          <a:p>
+            <a:endParaRPr lang="en-US" dirty="0"/>
+          </a:p>
+          <a:p>
             <a:r>
               <a:rPr lang="en-US" b="1" dirty="0"/>
               <a:t>https://</a:t>
@@ -23803,36 +23372,6 @@
           </a:p>
         </p:txBody>
       </p:sp>
-      <p:pic>
-        <p:nvPicPr>
-          <p:cNvPr id="5" name="Imagen 4" descr="Interfaz de usuario gráfica, Texto, Chat o mensaje de texto&#10;&#10;El contenido generado por IA puede ser incorrecto.">
-            <a:extLst>
-              <a:ext uri="{FF2B5EF4-FFF2-40B4-BE49-F238E27FC236}">
-                <a16:creationId xmlns:a16="http://schemas.microsoft.com/office/drawing/2014/main" id="{3E41B169-0456-0C0B-ABC0-B3D0CF00E4CF}"/>
-              </a:ext>
-            </a:extLst>
-          </p:cNvPr>
-          <p:cNvPicPr>
-            <a:picLocks noChangeAspect="1"/>
-          </p:cNvPicPr>
-          <p:nvPr/>
-        </p:nvPicPr>
-        <p:blipFill>
-          <a:blip r:embed="rId3"/>
-          <a:stretch>
-            <a:fillRect/>
-          </a:stretch>
-        </p:blipFill>
-        <p:spPr>
-          <a:xfrm>
-            <a:off x="8164311" y="4443178"/>
-            <a:ext cx="2438740" cy="1362265"/>
-          </a:xfrm>
-          <a:prstGeom prst="rect">
-            <a:avLst/>
-          </a:prstGeom>
-        </p:spPr>
-      </p:pic>
       <p:sp>
         <p:nvSpPr>
           <p:cNvPr id="9" name="Title 1">
@@ -23862,19 +23401,53 @@
           <a:lstStyle/>
           <a:p>
             <a:r>
-              <a:rPr lang="en-US" sz="4000" dirty="0"/>
-              <a:t>CFIHOS Ontology Approach 2</a:t>
-            </a:r>
-            <a:endParaRPr lang="en-US" sz="4000" b="1" dirty="0"/>
+              <a:rPr lang="en-US" sz="4000" b="1" dirty="0"/>
+              <a:t>Overview of the ontology</a:t>
+            </a:r>
           </a:p>
         </p:txBody>
       </p:sp>
       <p:pic>
         <p:nvPicPr>
-          <p:cNvPr id="11" name="Imagen 10">
-            <a:extLst>
-              <a:ext uri="{FF2B5EF4-FFF2-40B4-BE49-F238E27FC236}">
-                <a16:creationId xmlns:a16="http://schemas.microsoft.com/office/drawing/2014/main" id="{28C6AFA7-58F1-AE94-476E-56D8C5EC60D4}"/>
+          <p:cNvPr id="2" name="Imagen 1">
+            <a:extLst>
+              <a:ext uri="{FF2B5EF4-FFF2-40B4-BE49-F238E27FC236}">
+                <a16:creationId xmlns:a16="http://schemas.microsoft.com/office/drawing/2014/main" id="{27AD58DF-C2B8-047E-557B-653E6A82E61D}"/>
+              </a:ext>
+            </a:extLst>
+          </p:cNvPr>
+          <p:cNvPicPr>
+            <a:picLocks noChangeAspect="1"/>
+          </p:cNvPicPr>
+          <p:nvPr/>
+        </p:nvPicPr>
+        <p:blipFill>
+          <a:blip r:embed="rId3"/>
+          <a:stretch>
+            <a:fillRect/>
+          </a:stretch>
+        </p:blipFill>
+        <p:spPr>
+          <a:xfrm>
+            <a:off x="1422953" y="3918333"/>
+            <a:ext cx="4540526" cy="2691966"/>
+          </a:xfrm>
+          <a:prstGeom prst="rect">
+            <a:avLst/>
+          </a:prstGeom>
+          <a:ln w="25400">
+            <a:solidFill>
+              <a:srgbClr val="7030A0"/>
+            </a:solidFill>
+          </a:ln>
+        </p:spPr>
+      </p:pic>
+      <p:pic>
+        <p:nvPicPr>
+          <p:cNvPr id="3" name="Imagen 2">
+            <a:extLst>
+              <a:ext uri="{FF2B5EF4-FFF2-40B4-BE49-F238E27FC236}">
+                <a16:creationId xmlns:a16="http://schemas.microsoft.com/office/drawing/2014/main" id="{FE24AFE7-BF33-F298-18B3-B48AB7E4D3F2}"/>
               </a:ext>
             </a:extLst>
           </p:cNvPr>
@@ -23891,12 +23464,17 @@
         </p:blipFill>
         <p:spPr>
           <a:xfrm>
-            <a:off x="547868" y="3504150"/>
-            <a:ext cx="7200900" cy="2997200"/>
+            <a:off x="8023975" y="3044508"/>
+            <a:ext cx="3620157" cy="3456842"/>
           </a:xfrm>
           <a:prstGeom prst="rect">
             <a:avLst/>
           </a:prstGeom>
+          <a:ln w="25400">
+            <a:solidFill>
+              <a:srgbClr val="7030A0"/>
+            </a:solidFill>
+          </a:ln>
         </p:spPr>
       </p:pic>
     </p:spTree>
@@ -23913,14 +23491,14 @@
 </file>
 
 <file path=ppt/slides/slide14.xml><?xml version="1.0" encoding="utf-8"?>
-<p:sld xmlns:a="http://schemas.openxmlformats.org/drawingml/2006/main" xmlns:r="http://schemas.openxmlformats.org/officeDocument/2006/relationships" xmlns:p="http://schemas.openxmlformats.org/presentationml/2006/main" show="0">
+<p:sld xmlns:a="http://schemas.openxmlformats.org/drawingml/2006/main" xmlns:r="http://schemas.openxmlformats.org/officeDocument/2006/relationships" xmlns:p="http://schemas.openxmlformats.org/presentationml/2006/main">
   <p:cSld>
     <p:spTree>
       <p:nvGrpSpPr>
         <p:cNvPr id="1" name="">
           <a:extLst>
             <a:ext uri="{FF2B5EF4-FFF2-40B4-BE49-F238E27FC236}">
-              <a16:creationId xmlns:a16="http://schemas.microsoft.com/office/drawing/2014/main" id="{AABA4EE7-31E3-FBEF-7BB5-265560BF7642}"/>
+              <a16:creationId xmlns:a16="http://schemas.microsoft.com/office/drawing/2014/main" id="{649945AB-7B90-258E-595A-185D1FA9915C}"/>
             </a:ext>
           </a:extLst>
         </p:cNvPr>
@@ -23935,137 +23513,12 @@
           <a:chExt cx="0" cy="0"/>
         </a:xfrm>
       </p:grpSpPr>
-      <p:sp>
-        <p:nvSpPr>
-          <p:cNvPr id="19" name="Marcador de texto 2">
-            <a:extLst>
-              <a:ext uri="{FF2B5EF4-FFF2-40B4-BE49-F238E27FC236}">
-                <a16:creationId xmlns:a16="http://schemas.microsoft.com/office/drawing/2014/main" id="{BD7D6F28-E12F-DBAA-4F25-3246168D9C8C}"/>
-              </a:ext>
-            </a:extLst>
-          </p:cNvPr>
-          <p:cNvSpPr>
-            <a:spLocks noGrp="1"/>
-          </p:cNvSpPr>
-          <p:nvPr>
-            <p:ph type="body" idx="1"/>
-          </p:nvPr>
-        </p:nvSpPr>
-        <p:spPr>
-          <a:xfrm>
-            <a:off x="415600" y="1593684"/>
-            <a:ext cx="11228532" cy="1017711"/>
-          </a:xfrm>
-        </p:spPr>
-        <p:txBody>
-          <a:bodyPr>
-            <a:normAutofit fontScale="25000" lnSpcReduction="20000"/>
-          </a:bodyPr>
-          <a:lstStyle/>
-          <a:p>
-            <a:r>
-              <a:rPr lang="en-US" sz="7200" dirty="0"/>
-              <a:t>The main classes of the CFIHOS ontology have been linked to the Industrial Data Ontology</a:t>
-            </a:r>
-          </a:p>
-          <a:p>
-            <a:endParaRPr lang="en-US" sz="7200" dirty="0"/>
-          </a:p>
-          <a:p>
-            <a:r>
-              <a:rPr lang="en-US" sz="7200" dirty="0"/>
-              <a:t>The Industrial Data Ontology (IDO) is a “top-level” ontology for industrial data terminology that defines generic terms for things that exist in more than one industrial domain.</a:t>
-            </a:r>
-          </a:p>
-          <a:p>
-            <a:endParaRPr lang="en-US" sz="7200" dirty="0"/>
-          </a:p>
-          <a:p>
-            <a:r>
-              <a:rPr lang="en-US" sz="7200" dirty="0"/>
-              <a:t>Representing CFIHOS by extending IDO benefits the interoperability</a:t>
-            </a:r>
-          </a:p>
-          <a:p>
-            <a:pPr marL="152396" indent="0">
-              <a:buNone/>
-            </a:pPr>
-            <a:endParaRPr lang="en-US" sz="7200" dirty="0"/>
-          </a:p>
-          <a:p>
-            <a:endParaRPr lang="en-US" sz="7200" dirty="0"/>
-          </a:p>
-          <a:p>
-            <a:endParaRPr lang="en-US" sz="7200" dirty="0"/>
-          </a:p>
-          <a:p>
-            <a:endParaRPr lang="en-US" sz="7200" dirty="0"/>
-          </a:p>
-          <a:p>
-            <a:pPr marL="152396" indent="0">
-              <a:buNone/>
-            </a:pPr>
-            <a:endParaRPr lang="en-US" sz="7200" dirty="0"/>
-          </a:p>
-          <a:p>
-            <a:endParaRPr lang="en-US" dirty="0"/>
-          </a:p>
-          <a:p>
-            <a:endParaRPr lang="en-US" dirty="0"/>
-          </a:p>
-          <a:p>
-            <a:endParaRPr lang="en-US" dirty="0"/>
-          </a:p>
-          <a:p>
-            <a:endParaRPr lang="en-US" dirty="0"/>
-          </a:p>
-          <a:p>
-            <a:endParaRPr lang="en-US" dirty="0"/>
-          </a:p>
-          <a:p>
-            <a:endParaRPr lang="en-US" dirty="0"/>
-          </a:p>
-          <a:p>
-            <a:endParaRPr lang="en-US" dirty="0"/>
-          </a:p>
-          <a:p>
-            <a:endParaRPr lang="en-US" dirty="0"/>
-          </a:p>
-          <a:p>
-            <a:endParaRPr lang="en-US" dirty="0"/>
-          </a:p>
-          <a:p>
-            <a:endParaRPr lang="en-US" dirty="0"/>
-          </a:p>
-          <a:p>
-            <a:pPr marL="152396" indent="0">
-              <a:buNone/>
-            </a:pPr>
-            <a:endParaRPr lang="en-US" dirty="0"/>
-          </a:p>
-          <a:p>
-            <a:endParaRPr lang="en-US" dirty="0"/>
-          </a:p>
-          <a:p>
-            <a:pPr marL="795847" lvl="1" indent="0">
-              <a:buNone/>
-            </a:pPr>
-            <a:endParaRPr lang="en-US" dirty="0"/>
-          </a:p>
-          <a:p>
-            <a:pPr marL="152396" indent="0">
-              <a:buNone/>
-            </a:pPr>
-            <a:endParaRPr lang="en-US" dirty="0"/>
-          </a:p>
-        </p:txBody>
-      </p:sp>
       <p:pic>
         <p:nvPicPr>
-          <p:cNvPr id="4" name="Imagen 3">
-            <a:extLst>
-              <a:ext uri="{FF2B5EF4-FFF2-40B4-BE49-F238E27FC236}">
-                <a16:creationId xmlns:a16="http://schemas.microsoft.com/office/drawing/2014/main" id="{FF9E67BA-EF04-9763-A427-6A1230F54F40}"/>
+          <p:cNvPr id="6" name="Imagen 5">
+            <a:extLst>
+              <a:ext uri="{FF2B5EF4-FFF2-40B4-BE49-F238E27FC236}">
+                <a16:creationId xmlns:a16="http://schemas.microsoft.com/office/drawing/2014/main" id="{62090BB6-FC44-47E9-D9B8-DBD3BB76F12B}"/>
               </a:ext>
             </a:extLst>
           </p:cNvPr>
@@ -24082,8 +23535,8 @@
         </p:blipFill>
         <p:spPr>
           <a:xfrm>
-            <a:off x="3179548" y="3355504"/>
-            <a:ext cx="5832904" cy="3207687"/>
+            <a:off x="415600" y="1336583"/>
+            <a:ext cx="5950732" cy="4946389"/>
           </a:xfrm>
           <a:prstGeom prst="rect">
             <a:avLst/>
@@ -24092,10 +23545,10 @@
       </p:pic>
       <p:sp>
         <p:nvSpPr>
-          <p:cNvPr id="5" name="Title 1">
-            <a:extLst>
-              <a:ext uri="{FF2B5EF4-FFF2-40B4-BE49-F238E27FC236}">
-                <a16:creationId xmlns:a16="http://schemas.microsoft.com/office/drawing/2014/main" id="{1E21AD62-B84E-8A1C-601D-063F645B61AD}"/>
+          <p:cNvPr id="4" name="Title 1">
+            <a:extLst>
+              <a:ext uri="{FF2B5EF4-FFF2-40B4-BE49-F238E27FC236}">
+                <a16:creationId xmlns:a16="http://schemas.microsoft.com/office/drawing/2014/main" id="{5960B970-2C2D-8C7D-349B-F1C93E18D68D}"/>
               </a:ext>
             </a:extLst>
           </p:cNvPr>
@@ -24115,7 +23568,7 @@
         </p:spPr>
         <p:txBody>
           <a:bodyPr spcFirstLastPara="1" vert="horz" wrap="square" lIns="91425" tIns="91425" rIns="91425" bIns="91425" rtlCol="0" anchor="t" anchorCtr="0">
-            <a:normAutofit fontScale="67500" lnSpcReduction="20000"/>
+            <a:normAutofit fontScale="97500"/>
           </a:bodyPr>
           <a:lstStyle>
             <a:lvl1pPr lvl="0" algn="l" defTabSz="914400" rtl="0" eaLnBrk="1" latinLnBrk="0" hangingPunct="1">
@@ -24230,223 +23683,134 @@
           </a:lstStyle>
           <a:p>
             <a:r>
-              <a:rPr lang="en-US" sz="4000"/>
-              <a:t>CFIHOS Ontology Approach 2: Linking CFIHOS classes to the IDO</a:t>
-            </a:r>
-            <a:endParaRPr lang="en-US" sz="4000" dirty="0"/>
+              <a:rPr lang="en-US" sz="4000" dirty="0"/>
+              <a:t>Linking CFIHOS classes to the IDO</a:t>
+            </a:r>
           </a:p>
         </p:txBody>
       </p:sp>
-    </p:spTree>
-    <p:extLst>
-      <p:ext uri="{BB962C8B-B14F-4D97-AF65-F5344CB8AC3E}">
-        <p14:creationId xmlns:p14="http://schemas.microsoft.com/office/powerpoint/2010/main" val="1298048937"/>
-      </p:ext>
-    </p:extLst>
-  </p:cSld>
-  <p:clrMapOvr>
-    <a:masterClrMapping/>
-  </p:clrMapOvr>
-</p:sld>
-</file>
-
-<file path=ppt/slides/slide15.xml><?xml version="1.0" encoding="utf-8"?>
-<p:sld xmlns:a="http://schemas.openxmlformats.org/drawingml/2006/main" xmlns:r="http://schemas.openxmlformats.org/officeDocument/2006/relationships" xmlns:p="http://schemas.openxmlformats.org/presentationml/2006/main">
-  <p:cSld>
-    <p:spTree>
-      <p:nvGrpSpPr>
-        <p:cNvPr id="1" name="">
-          <a:extLst>
-            <a:ext uri="{FF2B5EF4-FFF2-40B4-BE49-F238E27FC236}">
-              <a16:creationId xmlns:a16="http://schemas.microsoft.com/office/drawing/2014/main" id="{649945AB-7B90-258E-595A-185D1FA9915C}"/>
-            </a:ext>
-          </a:extLst>
-        </p:cNvPr>
-        <p:cNvGrpSpPr/>
-        <p:nvPr/>
-      </p:nvGrpSpPr>
-      <p:grpSpPr>
-        <a:xfrm>
-          <a:off x="0" y="0"/>
-          <a:ext cx="0" cy="0"/>
-          <a:chOff x="0" y="0"/>
-          <a:chExt cx="0" cy="0"/>
-        </a:xfrm>
-      </p:grpSpPr>
-      <p:pic>
-        <p:nvPicPr>
-          <p:cNvPr id="6" name="Imagen 5">
-            <a:extLst>
-              <a:ext uri="{FF2B5EF4-FFF2-40B4-BE49-F238E27FC236}">
-                <a16:creationId xmlns:a16="http://schemas.microsoft.com/office/drawing/2014/main" id="{62090BB6-FC44-47E9-D9B8-DBD3BB76F12B}"/>
-              </a:ext>
-            </a:extLst>
-          </p:cNvPr>
-          <p:cNvPicPr>
-            <a:picLocks noChangeAspect="1"/>
-          </p:cNvPicPr>
-          <p:nvPr/>
-        </p:nvPicPr>
-        <p:blipFill>
-          <a:blip r:embed="rId3"/>
-          <a:stretch>
-            <a:fillRect/>
-          </a:stretch>
-        </p:blipFill>
-        <p:spPr>
-          <a:xfrm>
-            <a:off x="2527347" y="1524152"/>
-            <a:ext cx="5950732" cy="4946389"/>
-          </a:xfrm>
-          <a:prstGeom prst="rect">
-            <a:avLst/>
-          </a:prstGeom>
-        </p:spPr>
-      </p:pic>
       <p:sp>
         <p:nvSpPr>
-          <p:cNvPr id="4" name="Title 1">
-            <a:extLst>
-              <a:ext uri="{FF2B5EF4-FFF2-40B4-BE49-F238E27FC236}">
-                <a16:creationId xmlns:a16="http://schemas.microsoft.com/office/drawing/2014/main" id="{5960B970-2C2D-8C7D-349B-F1C93E18D68D}"/>
-              </a:ext>
-            </a:extLst>
-          </p:cNvPr>
-          <p:cNvSpPr txBox="1">
-            <a:spLocks/>
+          <p:cNvPr id="2" name="Marcador de texto 2">
+            <a:extLst>
+              <a:ext uri="{FF2B5EF4-FFF2-40B4-BE49-F238E27FC236}">
+                <a16:creationId xmlns:a16="http://schemas.microsoft.com/office/drawing/2014/main" id="{2DA56615-0E56-49CE-339D-4BCB1298CEBB}"/>
+              </a:ext>
+            </a:extLst>
+          </p:cNvPr>
+          <p:cNvSpPr>
+            <a:spLocks noGrp="1"/>
           </p:cNvSpPr>
-          <p:nvPr/>
+          <p:nvPr>
+            <p:ph type="body" idx="1"/>
+          </p:nvPr>
         </p:nvSpPr>
         <p:spPr>
           <a:xfrm>
-            <a:off x="415600" y="294809"/>
-            <a:ext cx="11360800" cy="763600"/>
+            <a:off x="6682154" y="1593684"/>
+            <a:ext cx="4961978" cy="1017711"/>
           </a:xfrm>
-          <a:prstGeom prst="rect">
-            <a:avLst/>
-          </a:prstGeom>
         </p:spPr>
         <p:txBody>
-          <a:bodyPr spcFirstLastPara="1" vert="horz" wrap="square" lIns="91425" tIns="91425" rIns="91425" bIns="91425" rtlCol="0" anchor="t" anchorCtr="0">
-            <a:normAutofit fontScale="67500" lnSpcReduction="20000"/>
+          <a:bodyPr>
+            <a:normAutofit fontScale="25000" lnSpcReduction="20000"/>
           </a:bodyPr>
-          <a:lstStyle>
-            <a:lvl1pPr lvl="0" algn="l" defTabSz="914400" rtl="0" eaLnBrk="1" latinLnBrk="0" hangingPunct="1">
-              <a:lnSpc>
-                <a:spcPct val="90000"/>
-              </a:lnSpc>
-              <a:spcBef>
-                <a:spcPts val="0"/>
-              </a:spcBef>
-              <a:spcAft>
-                <a:spcPts val="0"/>
-              </a:spcAft>
-              <a:buSzPts val="2800"/>
+          <a:lstStyle/>
+          <a:p>
+            <a:r>
+              <a:rPr lang="en-US" sz="7200" dirty="0"/>
+              <a:t>The main classes of the CFIHOS ontology have been linked to the Industrial Data Ontology</a:t>
+            </a:r>
+          </a:p>
+          <a:p>
+            <a:endParaRPr lang="en-US" sz="7200" dirty="0"/>
+          </a:p>
+          <a:p>
+            <a:r>
+              <a:rPr lang="en-US" sz="7200" dirty="0"/>
+              <a:t>The Industrial Data Ontology (IDO) is a “top-level” ontology for industrial data terminology that defines generic terms for things that exist in more than one industrial domain.</a:t>
+            </a:r>
+          </a:p>
+          <a:p>
+            <a:endParaRPr lang="en-US" sz="7200" dirty="0"/>
+          </a:p>
+          <a:p>
+            <a:r>
+              <a:rPr lang="en-US" sz="7200" dirty="0"/>
+              <a:t>Representing CFIHOS by extending IDO benefits the interoperability</a:t>
+            </a:r>
+          </a:p>
+          <a:p>
+            <a:pPr marL="152396" indent="0">
               <a:buNone/>
-              <a:defRPr sz="2400" b="1" kern="1200">
-                <a:solidFill>
-                  <a:schemeClr val="accent2"/>
-                </a:solidFill>
-                <a:latin typeface="+mj-lt"/>
-                <a:ea typeface="+mj-ea"/>
-                <a:cs typeface="+mj-cs"/>
-              </a:defRPr>
-            </a:lvl1pPr>
-            <a:lvl2pPr lvl="1">
-              <a:spcBef>
-                <a:spcPts val="0"/>
-              </a:spcBef>
-              <a:spcAft>
-                <a:spcPts val="0"/>
-              </a:spcAft>
-              <a:buSzPts val="2800"/>
+            </a:pPr>
+            <a:endParaRPr lang="en-US" sz="7200" dirty="0"/>
+          </a:p>
+          <a:p>
+            <a:endParaRPr lang="en-US" sz="7200" dirty="0"/>
+          </a:p>
+          <a:p>
+            <a:endParaRPr lang="en-US" sz="7200" dirty="0"/>
+          </a:p>
+          <a:p>
+            <a:endParaRPr lang="en-US" sz="7200" dirty="0"/>
+          </a:p>
+          <a:p>
+            <a:pPr marL="152396" indent="0">
               <a:buNone/>
-              <a:defRPr/>
-            </a:lvl2pPr>
-            <a:lvl3pPr lvl="2">
-              <a:spcBef>
-                <a:spcPts val="0"/>
-              </a:spcBef>
-              <a:spcAft>
-                <a:spcPts val="0"/>
-              </a:spcAft>
-              <a:buSzPts val="2800"/>
+            </a:pPr>
+            <a:endParaRPr lang="en-US" sz="7200" dirty="0"/>
+          </a:p>
+          <a:p>
+            <a:endParaRPr lang="en-US" dirty="0"/>
+          </a:p>
+          <a:p>
+            <a:endParaRPr lang="en-US" dirty="0"/>
+          </a:p>
+          <a:p>
+            <a:endParaRPr lang="en-US" dirty="0"/>
+          </a:p>
+          <a:p>
+            <a:endParaRPr lang="en-US" dirty="0"/>
+          </a:p>
+          <a:p>
+            <a:endParaRPr lang="en-US" dirty="0"/>
+          </a:p>
+          <a:p>
+            <a:endParaRPr lang="en-US" dirty="0"/>
+          </a:p>
+          <a:p>
+            <a:endParaRPr lang="en-US" dirty="0"/>
+          </a:p>
+          <a:p>
+            <a:endParaRPr lang="en-US" dirty="0"/>
+          </a:p>
+          <a:p>
+            <a:endParaRPr lang="en-US" dirty="0"/>
+          </a:p>
+          <a:p>
+            <a:endParaRPr lang="en-US" dirty="0"/>
+          </a:p>
+          <a:p>
+            <a:pPr marL="152396" indent="0">
               <a:buNone/>
-              <a:defRPr/>
-            </a:lvl3pPr>
-            <a:lvl4pPr lvl="3">
-              <a:spcBef>
-                <a:spcPts val="0"/>
-              </a:spcBef>
-              <a:spcAft>
-                <a:spcPts val="0"/>
-              </a:spcAft>
-              <a:buSzPts val="2800"/>
+            </a:pPr>
+            <a:endParaRPr lang="en-US" dirty="0"/>
+          </a:p>
+          <a:p>
+            <a:endParaRPr lang="en-US" dirty="0"/>
+          </a:p>
+          <a:p>
+            <a:pPr marL="795847" lvl="1" indent="0">
               <a:buNone/>
-              <a:defRPr/>
-            </a:lvl4pPr>
-            <a:lvl5pPr lvl="4">
-              <a:spcBef>
-                <a:spcPts val="0"/>
-              </a:spcBef>
-              <a:spcAft>
-                <a:spcPts val="0"/>
-              </a:spcAft>
-              <a:buSzPts val="2800"/>
+            </a:pPr>
+            <a:endParaRPr lang="en-US" dirty="0"/>
+          </a:p>
+          <a:p>
+            <a:pPr marL="152396" indent="0">
               <a:buNone/>
-              <a:defRPr/>
-            </a:lvl5pPr>
-            <a:lvl6pPr lvl="5">
-              <a:spcBef>
-                <a:spcPts val="0"/>
-              </a:spcBef>
-              <a:spcAft>
-                <a:spcPts val="0"/>
-              </a:spcAft>
-              <a:buSzPts val="2800"/>
-              <a:buNone/>
-              <a:defRPr/>
-            </a:lvl6pPr>
-            <a:lvl7pPr lvl="6">
-              <a:spcBef>
-                <a:spcPts val="0"/>
-              </a:spcBef>
-              <a:spcAft>
-                <a:spcPts val="0"/>
-              </a:spcAft>
-              <a:buSzPts val="2800"/>
-              <a:buNone/>
-              <a:defRPr/>
-            </a:lvl7pPr>
-            <a:lvl8pPr lvl="7">
-              <a:spcBef>
-                <a:spcPts val="0"/>
-              </a:spcBef>
-              <a:spcAft>
-                <a:spcPts val="0"/>
-              </a:spcAft>
-              <a:buSzPts val="2800"/>
-              <a:buNone/>
-              <a:defRPr/>
-            </a:lvl8pPr>
-            <a:lvl9pPr lvl="8">
-              <a:spcBef>
-                <a:spcPts val="0"/>
-              </a:spcBef>
-              <a:spcAft>
-                <a:spcPts val="0"/>
-              </a:spcAft>
-              <a:buSzPts val="2800"/>
-              <a:buNone/>
-              <a:defRPr/>
-            </a:lvl9pPr>
-          </a:lstStyle>
-          <a:p>
-            <a:r>
-              <a:rPr lang="en-US" sz="4000"/>
-              <a:t>CFIHOS Ontology Approach 2: Linking CFIHOS classes to the IDO</a:t>
-            </a:r>
-            <a:endParaRPr lang="en-US" sz="4000" dirty="0"/>
+            </a:pPr>
+            <a:endParaRPr lang="en-US" dirty="0"/>
           </a:p>
         </p:txBody>
       </p:sp>
@@ -24463,238 +23827,7 @@
 </p:sld>
 </file>
 
-<file path=ppt/slides/slide16.xml><?xml version="1.0" encoding="utf-8"?>
-<p:sld xmlns:a="http://schemas.openxmlformats.org/drawingml/2006/main" xmlns:r="http://schemas.openxmlformats.org/officeDocument/2006/relationships" xmlns:p="http://schemas.openxmlformats.org/presentationml/2006/main" show="0">
-  <p:cSld>
-    <p:spTree>
-      <p:nvGrpSpPr>
-        <p:cNvPr id="1" name="">
-          <a:extLst>
-            <a:ext uri="{FF2B5EF4-FFF2-40B4-BE49-F238E27FC236}">
-              <a16:creationId xmlns:a16="http://schemas.microsoft.com/office/drawing/2014/main" id="{B43B051E-5E05-3808-6835-885E54580191}"/>
-            </a:ext>
-          </a:extLst>
-        </p:cNvPr>
-        <p:cNvGrpSpPr/>
-        <p:nvPr/>
-      </p:nvGrpSpPr>
-      <p:grpSpPr>
-        <a:xfrm>
-          <a:off x="0" y="0"/>
-          <a:ext cx="0" cy="0"/>
-          <a:chOff x="0" y="0"/>
-          <a:chExt cx="0" cy="0"/>
-        </a:xfrm>
-      </p:grpSpPr>
-      <p:sp>
-        <p:nvSpPr>
-          <p:cNvPr id="19" name="Marcador de texto 2">
-            <a:extLst>
-              <a:ext uri="{FF2B5EF4-FFF2-40B4-BE49-F238E27FC236}">
-                <a16:creationId xmlns:a16="http://schemas.microsoft.com/office/drawing/2014/main" id="{46A08BA4-11DB-2B70-E5AC-AF942242E431}"/>
-              </a:ext>
-            </a:extLst>
-          </p:cNvPr>
-          <p:cNvSpPr>
-            <a:spLocks noGrp="1"/>
-          </p:cNvSpPr>
-          <p:nvPr>
-            <p:ph type="body" idx="1"/>
-          </p:nvPr>
-        </p:nvSpPr>
-        <p:spPr>
-          <a:xfrm>
-            <a:off x="415600" y="1593684"/>
-            <a:ext cx="11228532" cy="1017711"/>
-          </a:xfrm>
-        </p:spPr>
-        <p:txBody>
-          <a:bodyPr>
-            <a:normAutofit/>
-          </a:bodyPr>
-          <a:lstStyle/>
-          <a:p>
-            <a:r>
-              <a:rPr lang="en-US" dirty="0"/>
-              <a:t>The main classes of the CFIHOS ontology have been linked to the Industrial Data Ontology</a:t>
-            </a:r>
-          </a:p>
-          <a:p>
-            <a:r>
-              <a:rPr lang="en-US" dirty="0"/>
-              <a:t>Ontology and additional resources available at </a:t>
-            </a:r>
-            <a:r>
-              <a:rPr lang="en-US" b="1" dirty="0"/>
-              <a:t>https://</a:t>
-            </a:r>
-            <a:r>
-              <a:rPr lang="en-US" b="1" dirty="0" err="1"/>
-              <a:t>github.com</a:t>
-            </a:r>
-            <a:r>
-              <a:rPr lang="en-US" b="1" dirty="0"/>
-              <a:t>/</a:t>
-            </a:r>
-            <a:r>
-              <a:rPr lang="en-US" b="1" dirty="0" err="1"/>
-              <a:t>tecnomod</a:t>
-            </a:r>
-            <a:r>
-              <a:rPr lang="en-US" b="1" dirty="0"/>
-              <a:t>-um/</a:t>
-            </a:r>
-            <a:r>
-              <a:rPr lang="en-US" b="1" dirty="0" err="1"/>
-              <a:t>cfihos</a:t>
-            </a:r>
-            <a:endParaRPr lang="en-US" b="1" dirty="0"/>
-          </a:p>
-          <a:p>
-            <a:endParaRPr lang="en-US" dirty="0"/>
-          </a:p>
-          <a:p>
-            <a:endParaRPr lang="en-US" dirty="0"/>
-          </a:p>
-          <a:p>
-            <a:endParaRPr lang="en-US" dirty="0"/>
-          </a:p>
-          <a:p>
-            <a:endParaRPr lang="en-US" dirty="0"/>
-          </a:p>
-          <a:p>
-            <a:endParaRPr lang="en-US" dirty="0"/>
-          </a:p>
-          <a:p>
-            <a:endParaRPr lang="en-US" dirty="0"/>
-          </a:p>
-          <a:p>
-            <a:endParaRPr lang="en-US" dirty="0"/>
-          </a:p>
-          <a:p>
-            <a:endParaRPr lang="en-US" dirty="0"/>
-          </a:p>
-          <a:p>
-            <a:endParaRPr lang="en-US" dirty="0"/>
-          </a:p>
-          <a:p>
-            <a:endParaRPr lang="en-US" dirty="0"/>
-          </a:p>
-          <a:p>
-            <a:endParaRPr lang="en-US" dirty="0"/>
-          </a:p>
-          <a:p>
-            <a:endParaRPr lang="en-US" dirty="0"/>
-          </a:p>
-          <a:p>
-            <a:endParaRPr lang="en-US" dirty="0"/>
-          </a:p>
-          <a:p>
-            <a:endParaRPr lang="en-US" dirty="0"/>
-          </a:p>
-          <a:p>
-            <a:pPr marL="152396" indent="0">
-              <a:buNone/>
-            </a:pPr>
-            <a:endParaRPr lang="en-US" dirty="0"/>
-          </a:p>
-          <a:p>
-            <a:endParaRPr lang="en-US" dirty="0"/>
-          </a:p>
-          <a:p>
-            <a:pPr marL="795847" lvl="1" indent="0">
-              <a:buNone/>
-            </a:pPr>
-            <a:endParaRPr lang="en-US" dirty="0"/>
-          </a:p>
-          <a:p>
-            <a:pPr marL="152396" indent="0">
-              <a:buNone/>
-            </a:pPr>
-            <a:endParaRPr lang="en-US" dirty="0"/>
-          </a:p>
-        </p:txBody>
-      </p:sp>
-      <p:pic>
-        <p:nvPicPr>
-          <p:cNvPr id="2" name="Imagen 1">
-            <a:extLst>
-              <a:ext uri="{FF2B5EF4-FFF2-40B4-BE49-F238E27FC236}">
-                <a16:creationId xmlns:a16="http://schemas.microsoft.com/office/drawing/2014/main" id="{37DAACED-6FF2-081D-EE86-5ACD56F5577A}"/>
-              </a:ext>
-            </a:extLst>
-          </p:cNvPr>
-          <p:cNvPicPr>
-            <a:picLocks noChangeAspect="1"/>
-          </p:cNvPicPr>
-          <p:nvPr/>
-        </p:nvPicPr>
-        <p:blipFill>
-          <a:blip r:embed="rId3"/>
-          <a:stretch>
-            <a:fillRect/>
-          </a:stretch>
-        </p:blipFill>
-        <p:spPr>
-          <a:xfrm>
-            <a:off x="1342596" y="2419007"/>
-            <a:ext cx="5651500" cy="4178300"/>
-          </a:xfrm>
-          <a:prstGeom prst="rect">
-            <a:avLst/>
-          </a:prstGeom>
-        </p:spPr>
-      </p:pic>
-      <p:sp>
-        <p:nvSpPr>
-          <p:cNvPr id="6" name="Title 1">
-            <a:extLst>
-              <a:ext uri="{FF2B5EF4-FFF2-40B4-BE49-F238E27FC236}">
-                <a16:creationId xmlns:a16="http://schemas.microsoft.com/office/drawing/2014/main" id="{4542E768-70B5-2DD1-59DC-8A3A400442A8}"/>
-              </a:ext>
-            </a:extLst>
-          </p:cNvPr>
-          <p:cNvSpPr>
-            <a:spLocks noGrp="1"/>
-          </p:cNvSpPr>
-          <p:nvPr>
-            <p:ph type="title"/>
-          </p:nvPr>
-        </p:nvSpPr>
-        <p:spPr>
-          <a:xfrm>
-            <a:off x="415600" y="294809"/>
-            <a:ext cx="11360800" cy="763600"/>
-          </a:xfrm>
-        </p:spPr>
-        <p:txBody>
-          <a:bodyPr>
-            <a:noAutofit/>
-          </a:bodyPr>
-          <a:lstStyle/>
-          <a:p>
-            <a:r>
-              <a:rPr lang="en-US" sz="2800" dirty="0"/>
-              <a:t>CFIHOS Ontology Approach 2: Linking CFIHOS classes to the IDO</a:t>
-            </a:r>
-            <a:endParaRPr lang="en-US" sz="2800" b="1" dirty="0"/>
-          </a:p>
-        </p:txBody>
-      </p:sp>
-    </p:spTree>
-    <p:extLst>
-      <p:ext uri="{BB962C8B-B14F-4D97-AF65-F5344CB8AC3E}">
-        <p14:creationId xmlns:p14="http://schemas.microsoft.com/office/powerpoint/2010/main" val="2049174795"/>
-      </p:ext>
-    </p:extLst>
-  </p:cSld>
-  <p:clrMapOvr>
-    <a:masterClrMapping/>
-  </p:clrMapOvr>
-</p:sld>
-</file>
-
-<file path=ppt/slides/slide17.xml><?xml version="1.0" encoding="utf-8"?>
+<file path=ppt/slides/slide15.xml><?xml version="1.0" encoding="utf-8"?>
 <p:sld xmlns:a="http://schemas.openxmlformats.org/drawingml/2006/main" xmlns:r="http://schemas.openxmlformats.org/officeDocument/2006/relationships" xmlns:p="http://schemas.openxmlformats.org/presentationml/2006/main">
   <p:cSld>
     <p:spTree>
@@ -24717,144 +23850,12 @@
           <a:chExt cx="0" cy="0"/>
         </a:xfrm>
       </p:grpSpPr>
-      <p:sp>
-        <p:nvSpPr>
-          <p:cNvPr id="19" name="Marcador de texto 2">
-            <a:extLst>
-              <a:ext uri="{FF2B5EF4-FFF2-40B4-BE49-F238E27FC236}">
-                <a16:creationId xmlns:a16="http://schemas.microsoft.com/office/drawing/2014/main" id="{483A0497-BD31-A95E-D3F1-2A7BF1286E98}"/>
-              </a:ext>
-            </a:extLst>
-          </p:cNvPr>
-          <p:cNvSpPr>
-            <a:spLocks noGrp="1"/>
-          </p:cNvSpPr>
-          <p:nvPr>
-            <p:ph type="body" idx="1"/>
-          </p:nvPr>
-        </p:nvSpPr>
-        <p:spPr>
-          <a:xfrm>
-            <a:off x="415600" y="1593684"/>
-            <a:ext cx="11228532" cy="1017711"/>
-          </a:xfrm>
-        </p:spPr>
-        <p:txBody>
-          <a:bodyPr>
-            <a:normAutofit/>
-          </a:bodyPr>
-          <a:lstStyle/>
-          <a:p>
-            <a:r>
-              <a:rPr lang="en-US" dirty="0"/>
-              <a:t>The main classes of the CFIHOS ontology have been linked to the Industrial Data Ontology</a:t>
-            </a:r>
-          </a:p>
-          <a:p>
-            <a:r>
-              <a:rPr lang="en-US" dirty="0"/>
-              <a:t>Ontology and additional resources available at </a:t>
-            </a:r>
-            <a:r>
-              <a:rPr lang="en-US" b="1" dirty="0"/>
-              <a:t>https://</a:t>
-            </a:r>
-            <a:r>
-              <a:rPr lang="en-US" b="1" dirty="0" err="1"/>
-              <a:t>github.com</a:t>
-            </a:r>
-            <a:r>
-              <a:rPr lang="en-US" b="1" dirty="0"/>
-              <a:t>/</a:t>
-            </a:r>
-            <a:r>
-              <a:rPr lang="en-US" b="1" dirty="0" err="1"/>
-              <a:t>tecnomod</a:t>
-            </a:r>
-            <a:r>
-              <a:rPr lang="en-US" b="1" dirty="0"/>
-              <a:t>-um/</a:t>
-            </a:r>
-            <a:r>
-              <a:rPr lang="en-US" b="1" dirty="0" err="1"/>
-              <a:t>cfihos</a:t>
-            </a:r>
-            <a:endParaRPr lang="en-US" b="1" dirty="0"/>
-          </a:p>
-          <a:p>
-            <a:endParaRPr lang="en-US" dirty="0"/>
-          </a:p>
-          <a:p>
-            <a:endParaRPr lang="en-US" dirty="0"/>
-          </a:p>
-          <a:p>
-            <a:pPr marL="152396" indent="0">
-              <a:buNone/>
-            </a:pPr>
-            <a:endParaRPr lang="en-US" dirty="0"/>
-          </a:p>
-          <a:p>
-            <a:endParaRPr lang="en-US" dirty="0"/>
-          </a:p>
-          <a:p>
-            <a:endParaRPr lang="en-US" dirty="0"/>
-          </a:p>
-          <a:p>
-            <a:endParaRPr lang="en-US" dirty="0"/>
-          </a:p>
-          <a:p>
-            <a:endParaRPr lang="en-US" dirty="0"/>
-          </a:p>
-          <a:p>
-            <a:endParaRPr lang="en-US" dirty="0"/>
-          </a:p>
-          <a:p>
-            <a:endParaRPr lang="en-US" dirty="0"/>
-          </a:p>
-          <a:p>
-            <a:endParaRPr lang="en-US" dirty="0"/>
-          </a:p>
-          <a:p>
-            <a:endParaRPr lang="en-US" dirty="0"/>
-          </a:p>
-          <a:p>
-            <a:endParaRPr lang="en-US" dirty="0"/>
-          </a:p>
-          <a:p>
-            <a:endParaRPr lang="en-US" dirty="0"/>
-          </a:p>
-          <a:p>
-            <a:endParaRPr lang="en-US" dirty="0"/>
-          </a:p>
-          <a:p>
-            <a:pPr marL="152396" indent="0">
-              <a:buNone/>
-            </a:pPr>
-            <a:endParaRPr lang="en-US" dirty="0"/>
-          </a:p>
-          <a:p>
-            <a:endParaRPr lang="en-US" dirty="0"/>
-          </a:p>
-          <a:p>
-            <a:pPr marL="795847" lvl="1" indent="0">
-              <a:buNone/>
-            </a:pPr>
-            <a:endParaRPr lang="en-US" dirty="0"/>
-          </a:p>
-          <a:p>
-            <a:pPr marL="152396" indent="0">
-              <a:buNone/>
-            </a:pPr>
-            <a:endParaRPr lang="en-US" dirty="0"/>
-          </a:p>
-        </p:txBody>
-      </p:sp>
       <p:pic>
         <p:nvPicPr>
-          <p:cNvPr id="2" name="Imagen 1">
-            <a:extLst>
-              <a:ext uri="{FF2B5EF4-FFF2-40B4-BE49-F238E27FC236}">
-                <a16:creationId xmlns:a16="http://schemas.microsoft.com/office/drawing/2014/main" id="{D29A4B2D-E01D-4667-F645-8402219ADB27}"/>
+          <p:cNvPr id="11" name="Imagen 10">
+            <a:extLst>
+              <a:ext uri="{FF2B5EF4-FFF2-40B4-BE49-F238E27FC236}">
+                <a16:creationId xmlns:a16="http://schemas.microsoft.com/office/drawing/2014/main" id="{5657C09B-94F0-64AA-B09F-C9C7EB564BF3}"/>
               </a:ext>
             </a:extLst>
           </p:cNvPr>
@@ -24871,12 +23872,17 @@
         </p:blipFill>
         <p:spPr>
           <a:xfrm>
-            <a:off x="1342596" y="2419007"/>
-            <a:ext cx="5651500" cy="4178300"/>
+            <a:off x="1028511" y="1708080"/>
+            <a:ext cx="4581135" cy="4374468"/>
           </a:xfrm>
           <a:prstGeom prst="rect">
             <a:avLst/>
           </a:prstGeom>
+          <a:ln w="25400">
+            <a:solidFill>
+              <a:srgbClr val="7030A0"/>
+            </a:solidFill>
+          </a:ln>
         </p:spPr>
       </p:pic>
       <p:sp>
@@ -24893,8 +23899,8 @@
         </p:nvSpPr>
         <p:spPr>
           <a:xfrm>
-            <a:off x="2067697" y="2657048"/>
-            <a:ext cx="1570025" cy="191064"/>
+            <a:off x="1507967" y="1939752"/>
+            <a:ext cx="1501934" cy="203867"/>
           </a:xfrm>
           <a:prstGeom prst="rect">
             <a:avLst/>
@@ -24949,8 +23955,8 @@
         </p:nvSpPr>
         <p:spPr>
           <a:xfrm>
-            <a:off x="2067696" y="3040500"/>
-            <a:ext cx="2295582" cy="191064"/>
+            <a:off x="1507966" y="2264559"/>
+            <a:ext cx="2458255" cy="196549"/>
           </a:xfrm>
           <a:prstGeom prst="rect">
             <a:avLst/>
@@ -25005,8 +24011,8 @@
         </p:nvSpPr>
         <p:spPr>
           <a:xfrm>
-            <a:off x="2067696" y="3436718"/>
-            <a:ext cx="1748930" cy="189719"/>
+            <a:off x="1507966" y="2629685"/>
+            <a:ext cx="1914836" cy="195205"/>
           </a:xfrm>
           <a:prstGeom prst="rect">
             <a:avLst/>
@@ -25061,8 +24067,8 @@
         </p:nvSpPr>
         <p:spPr>
           <a:xfrm>
-            <a:off x="2067696" y="4875154"/>
-            <a:ext cx="1570025" cy="236717"/>
+            <a:off x="1507967" y="4290939"/>
+            <a:ext cx="1736266" cy="139503"/>
           </a:xfrm>
           <a:prstGeom prst="rect">
             <a:avLst/>
@@ -25117,120 +24123,8 @@
         </p:nvSpPr>
         <p:spPr>
           <a:xfrm>
-            <a:off x="2067695" y="5264316"/>
-            <a:ext cx="1570025" cy="236717"/>
-          </a:xfrm>
-          <a:prstGeom prst="rect">
-            <a:avLst/>
-          </a:prstGeom>
-          <a:noFill/>
-          <a:ln w="50800">
-            <a:solidFill>
-              <a:srgbClr val="FFC000"/>
-            </a:solidFill>
-          </a:ln>
-        </p:spPr>
-        <p:style>
-          <a:lnRef idx="2">
-            <a:schemeClr val="accent1">
-              <a:shade val="50000"/>
-            </a:schemeClr>
-          </a:lnRef>
-          <a:fillRef idx="1">
-            <a:schemeClr val="accent1"/>
-          </a:fillRef>
-          <a:effectRef idx="0">
-            <a:schemeClr val="accent1"/>
-          </a:effectRef>
-          <a:fontRef idx="minor">
-            <a:schemeClr val="lt1"/>
-          </a:fontRef>
-        </p:style>
-        <p:txBody>
-          <a:bodyPr lIns="0" tIns="0" rIns="0" bIns="0" rtlCol="0" anchor="ctr"/>
-          <a:lstStyle/>
-          <a:p>
-            <a:pPr algn="ctr"/>
-            <a:endParaRPr lang="en-GB" dirty="0">
-              <a:solidFill>
-                <a:schemeClr val="tx1"/>
-              </a:solidFill>
-            </a:endParaRPr>
-          </a:p>
-        </p:txBody>
-      </p:sp>
-      <p:sp>
-        <p:nvSpPr>
-          <p:cNvPr id="8" name="Rectángulo 7">
-            <a:extLst>
-              <a:ext uri="{FF2B5EF4-FFF2-40B4-BE49-F238E27FC236}">
-                <a16:creationId xmlns:a16="http://schemas.microsoft.com/office/drawing/2014/main" id="{D7E9010F-806E-A1E5-F516-1921A1B2D2CF}"/>
-              </a:ext>
-            </a:extLst>
-          </p:cNvPr>
-          <p:cNvSpPr/>
-          <p:nvPr/>
-        </p:nvSpPr>
-        <p:spPr>
-          <a:xfrm>
-            <a:off x="2067695" y="5647768"/>
-            <a:ext cx="536358" cy="289426"/>
-          </a:xfrm>
-          <a:prstGeom prst="rect">
-            <a:avLst/>
-          </a:prstGeom>
-          <a:noFill/>
-          <a:ln w="50800">
-            <a:solidFill>
-              <a:srgbClr val="FFC000"/>
-            </a:solidFill>
-          </a:ln>
-        </p:spPr>
-        <p:style>
-          <a:lnRef idx="2">
-            <a:schemeClr val="accent1">
-              <a:shade val="50000"/>
-            </a:schemeClr>
-          </a:lnRef>
-          <a:fillRef idx="1">
-            <a:schemeClr val="accent1"/>
-          </a:fillRef>
-          <a:effectRef idx="0">
-            <a:schemeClr val="accent1"/>
-          </a:effectRef>
-          <a:fontRef idx="minor">
-            <a:schemeClr val="lt1"/>
-          </a:fontRef>
-        </p:style>
-        <p:txBody>
-          <a:bodyPr lIns="0" tIns="0" rIns="0" bIns="0" rtlCol="0" anchor="ctr"/>
-          <a:lstStyle/>
-          <a:p>
-            <a:pPr algn="ctr"/>
-            <a:endParaRPr lang="en-GB" dirty="0">
-              <a:solidFill>
-                <a:schemeClr val="tx1"/>
-              </a:solidFill>
-            </a:endParaRPr>
-          </a:p>
-        </p:txBody>
-      </p:sp>
-      <p:sp>
-        <p:nvSpPr>
-          <p:cNvPr id="9" name="Rectángulo 8">
-            <a:extLst>
-              <a:ext uri="{FF2B5EF4-FFF2-40B4-BE49-F238E27FC236}">
-                <a16:creationId xmlns:a16="http://schemas.microsoft.com/office/drawing/2014/main" id="{C5B45494-1670-D6A7-6807-B10C020F34DF}"/>
-              </a:ext>
-            </a:extLst>
-          </p:cNvPr>
-          <p:cNvSpPr/>
-          <p:nvPr/>
-        </p:nvSpPr>
-        <p:spPr>
-          <a:xfrm>
-            <a:off x="2067694" y="6083929"/>
-            <a:ext cx="1570025" cy="236717"/>
+            <a:off x="1370604" y="4654720"/>
+            <a:ext cx="1914836" cy="737896"/>
           </a:xfrm>
           <a:prstGeom prst="rect">
             <a:avLst/>
@@ -25360,9 +24254,65 @@
           <a:p>
             <a:r>
               <a:rPr lang="en-US" sz="2800" dirty="0"/>
-              <a:t>CFIHOS Ontology Approach 2: Linking CFIHOS classes to the IDO</a:t>
+              <a:t>Linking CFIHOS classes to the IDO</a:t>
             </a:r>
             <a:endParaRPr lang="en-US" sz="2800" b="1" dirty="0"/>
+          </a:p>
+        </p:txBody>
+      </p:sp>
+      <p:sp>
+        <p:nvSpPr>
+          <p:cNvPr id="14" name="Rectángulo 13">
+            <a:extLst>
+              <a:ext uri="{FF2B5EF4-FFF2-40B4-BE49-F238E27FC236}">
+                <a16:creationId xmlns:a16="http://schemas.microsoft.com/office/drawing/2014/main" id="{3621D6A1-71B5-115B-4284-FC525D861F4D}"/>
+              </a:ext>
+            </a:extLst>
+          </p:cNvPr>
+          <p:cNvSpPr/>
+          <p:nvPr/>
+        </p:nvSpPr>
+        <p:spPr>
+          <a:xfrm>
+            <a:off x="1507966" y="5616894"/>
+            <a:ext cx="2899908" cy="344714"/>
+          </a:xfrm>
+          <a:prstGeom prst="rect">
+            <a:avLst/>
+          </a:prstGeom>
+          <a:noFill/>
+          <a:ln w="50800">
+            <a:solidFill>
+              <a:srgbClr val="FFC000"/>
+            </a:solidFill>
+          </a:ln>
+        </p:spPr>
+        <p:style>
+          <a:lnRef idx="2">
+            <a:schemeClr val="accent1">
+              <a:shade val="50000"/>
+            </a:schemeClr>
+          </a:lnRef>
+          <a:fillRef idx="1">
+            <a:schemeClr val="accent1"/>
+          </a:fillRef>
+          <a:effectRef idx="0">
+            <a:schemeClr val="accent1"/>
+          </a:effectRef>
+          <a:fontRef idx="minor">
+            <a:schemeClr val="lt1"/>
+          </a:fontRef>
+        </p:style>
+        <p:txBody>
+          <a:bodyPr lIns="0" tIns="0" rIns="0" bIns="0" rtlCol="0" anchor="ctr"/>
+          <a:lstStyle/>
+          <a:p>
+            <a:pPr algn="ctr"/>
+            <a:endParaRPr lang="en-GB" dirty="0">
+              <a:solidFill>
+                <a:schemeClr val="tx1"/>
+              </a:solidFill>
+            </a:endParaRPr>
           </a:p>
         </p:txBody>
       </p:sp>
@@ -25379,7 +24329,7 @@
 </p:sld>
 </file>
 
-<file path=ppt/slides/slide18.xml><?xml version="1.0" encoding="utf-8"?>
+<file path=ppt/slides/slide16.xml><?xml version="1.0" encoding="utf-8"?>
 <p:sld xmlns:a="http://schemas.openxmlformats.org/drawingml/2006/main" xmlns:r="http://schemas.openxmlformats.org/officeDocument/2006/relationships" xmlns:p="http://schemas.openxmlformats.org/presentationml/2006/main">
   <p:cSld>
     <p:spTree>
@@ -25426,10 +24376,9 @@
           <a:lstStyle/>
           <a:p>
             <a:r>
-              <a:rPr lang="en-US" sz="4000" dirty="0"/>
-              <a:t>CFIHOS Ontology Approach 2: properties</a:t>
-            </a:r>
-            <a:endParaRPr lang="en-US" sz="4000" b="1" dirty="0"/>
+              <a:rPr lang="en-US" sz="4000" b="1" dirty="0"/>
+              <a:t>Modeling properties</a:t>
+            </a:r>
           </a:p>
         </p:txBody>
       </p:sp>
@@ -25565,7 +24514,133 @@
 </p:sld>
 </file>
 
-<file path=ppt/slides/slide19.xml><?xml version="1.0" encoding="utf-8"?>
+<file path=ppt/slides/slide17.xml><?xml version="1.0" encoding="utf-8"?>
+<p:sld xmlns:a="http://schemas.openxmlformats.org/drawingml/2006/main" xmlns:r="http://schemas.openxmlformats.org/officeDocument/2006/relationships" xmlns:p="http://schemas.openxmlformats.org/presentationml/2006/main">
+  <p:cSld>
+    <p:spTree>
+      <p:nvGrpSpPr>
+        <p:cNvPr id="1" name="">
+          <a:extLst>
+            <a:ext uri="{FF2B5EF4-FFF2-40B4-BE49-F238E27FC236}">
+              <a16:creationId xmlns:a16="http://schemas.microsoft.com/office/drawing/2014/main" id="{06FDEFFB-BA1F-789B-2ABD-2239F0ADBF8A}"/>
+            </a:ext>
+          </a:extLst>
+        </p:cNvPr>
+        <p:cNvGrpSpPr/>
+        <p:nvPr/>
+      </p:nvGrpSpPr>
+      <p:grpSpPr>
+        <a:xfrm>
+          <a:off x="0" y="0"/>
+          <a:ext cx="0" cy="0"/>
+          <a:chOff x="0" y="0"/>
+          <a:chExt cx="0" cy="0"/>
+        </a:xfrm>
+      </p:grpSpPr>
+      <p:sp>
+        <p:nvSpPr>
+          <p:cNvPr id="28" name="Title 1">
+            <a:extLst>
+              <a:ext uri="{FF2B5EF4-FFF2-40B4-BE49-F238E27FC236}">
+                <a16:creationId xmlns:a16="http://schemas.microsoft.com/office/drawing/2014/main" id="{E9E3E9A8-2411-183B-C17C-7E3C20BC535B}"/>
+              </a:ext>
+            </a:extLst>
+          </p:cNvPr>
+          <p:cNvSpPr>
+            <a:spLocks noGrp="1"/>
+          </p:cNvSpPr>
+          <p:nvPr>
+            <p:ph type="title"/>
+          </p:nvPr>
+        </p:nvSpPr>
+        <p:spPr/>
+        <p:txBody>
+          <a:bodyPr>
+            <a:normAutofit/>
+          </a:bodyPr>
+          <a:lstStyle/>
+          <a:p>
+            <a:r>
+              <a:rPr lang="en-US" sz="4000" b="1" dirty="0"/>
+              <a:t>Modeling properties</a:t>
+            </a:r>
+          </a:p>
+        </p:txBody>
+      </p:sp>
+      <p:pic>
+        <p:nvPicPr>
+          <p:cNvPr id="4" name="Imagen 3">
+            <a:extLst>
+              <a:ext uri="{FF2B5EF4-FFF2-40B4-BE49-F238E27FC236}">
+                <a16:creationId xmlns:a16="http://schemas.microsoft.com/office/drawing/2014/main" id="{D804F251-1723-ECF5-871E-FC900051DD8B}"/>
+              </a:ext>
+            </a:extLst>
+          </p:cNvPr>
+          <p:cNvPicPr>
+            <a:picLocks noChangeAspect="1"/>
+          </p:cNvPicPr>
+          <p:nvPr/>
+        </p:nvPicPr>
+        <p:blipFill>
+          <a:blip r:embed="rId3"/>
+          <a:stretch>
+            <a:fillRect/>
+          </a:stretch>
+        </p:blipFill>
+        <p:spPr>
+          <a:xfrm>
+            <a:off x="86458" y="1627553"/>
+            <a:ext cx="6255727" cy="3750968"/>
+          </a:xfrm>
+          <a:prstGeom prst="rect">
+            <a:avLst/>
+          </a:prstGeom>
+        </p:spPr>
+      </p:pic>
+      <p:pic>
+        <p:nvPicPr>
+          <p:cNvPr id="5" name="Imagen 4">
+            <a:extLst>
+              <a:ext uri="{FF2B5EF4-FFF2-40B4-BE49-F238E27FC236}">
+                <a16:creationId xmlns:a16="http://schemas.microsoft.com/office/drawing/2014/main" id="{5B7BA75B-1254-ABBF-6E00-CFCBB044CA3C}"/>
+              </a:ext>
+            </a:extLst>
+          </p:cNvPr>
+          <p:cNvPicPr>
+            <a:picLocks noChangeAspect="1"/>
+          </p:cNvPicPr>
+          <p:nvPr/>
+        </p:nvPicPr>
+        <p:blipFill>
+          <a:blip r:embed="rId4"/>
+          <a:stretch>
+            <a:fillRect/>
+          </a:stretch>
+        </p:blipFill>
+        <p:spPr>
+          <a:xfrm>
+            <a:off x="6263542" y="1600200"/>
+            <a:ext cx="5842000" cy="3657600"/>
+          </a:xfrm>
+          <a:prstGeom prst="rect">
+            <a:avLst/>
+          </a:prstGeom>
+        </p:spPr>
+      </p:pic>
+    </p:spTree>
+    <p:extLst>
+      <p:ext uri="{BB962C8B-B14F-4D97-AF65-F5344CB8AC3E}">
+        <p14:creationId xmlns:p14="http://schemas.microsoft.com/office/powerpoint/2010/main" val="2500914355"/>
+      </p:ext>
+    </p:extLst>
+  </p:cSld>
+  <p:clrMapOvr>
+    <a:masterClrMapping/>
+  </p:clrMapOvr>
+</p:sld>
+</file>
+
+<file path=ppt/slides/slide18.xml><?xml version="1.0" encoding="utf-8"?>
 <p:sld xmlns:a="http://schemas.openxmlformats.org/drawingml/2006/main" xmlns:r="http://schemas.openxmlformats.org/officeDocument/2006/relationships" xmlns:p="http://schemas.openxmlformats.org/presentationml/2006/main">
   <p:cSld>
     <p:spTree>
@@ -25617,10 +24692,10 @@
           <a:lstStyle/>
           <a:p>
             <a:r>
-              <a:rPr lang="en-US" sz="2800" dirty="0"/>
-              <a:t>CFIHOS Ontology Approach 2: IDO-based Property modeling</a:t>
-            </a:r>
-            <a:endParaRPr lang="en-US" sz="2800" b="1" dirty="0"/>
+              <a:rPr lang="en-US" sz="4000" dirty="0"/>
+              <a:t>IDO-based Property modeling</a:t>
+            </a:r>
+            <a:endParaRPr lang="en-US" sz="4000" b="1" dirty="0"/>
           </a:p>
         </p:txBody>
       </p:sp>
@@ -25673,12 +24748,12 @@
         <p:spPr>
           <a:xfrm>
             <a:off x="785003" y="1639667"/>
-            <a:ext cx="5127475" cy="1929387"/>
+            <a:ext cx="9554751" cy="1929387"/>
           </a:xfrm>
         </p:spPr>
         <p:txBody>
           <a:bodyPr>
-            <a:normAutofit fontScale="47500" lnSpcReduction="20000"/>
+            <a:normAutofit fontScale="55000" lnSpcReduction="20000"/>
           </a:bodyPr>
           <a:lstStyle/>
           <a:p>
@@ -25698,15 +24773,142 @@
           </a:p>
           <a:p>
             <a:endParaRPr lang="en-US" dirty="0"/>
+          </a:p>
+        </p:txBody>
+      </p:sp>
+      <p:sp>
+        <p:nvSpPr>
+          <p:cNvPr id="4" name="Rectángulo 3">
+            <a:extLst>
+              <a:ext uri="{FF2B5EF4-FFF2-40B4-BE49-F238E27FC236}">
+                <a16:creationId xmlns:a16="http://schemas.microsoft.com/office/drawing/2014/main" id="{4052158E-C414-F0D3-4C1F-D10B59DEDF58}"/>
+              </a:ext>
+            </a:extLst>
+          </p:cNvPr>
+          <p:cNvSpPr/>
+          <p:nvPr/>
+        </p:nvSpPr>
+        <p:spPr>
+          <a:xfrm>
+            <a:off x="2374900" y="4068816"/>
+            <a:ext cx="3302000" cy="2065284"/>
+          </a:xfrm>
+          <a:prstGeom prst="rect">
+            <a:avLst/>
+          </a:prstGeom>
+          <a:noFill/>
+          <a:ln w="38100">
+            <a:solidFill>
+              <a:srgbClr val="7030A0"/>
+            </a:solidFill>
+          </a:ln>
+        </p:spPr>
+        <p:style>
+          <a:lnRef idx="2">
+            <a:schemeClr val="accent1">
+              <a:shade val="50000"/>
+            </a:schemeClr>
+          </a:lnRef>
+          <a:fillRef idx="1">
+            <a:schemeClr val="accent1"/>
+          </a:fillRef>
+          <a:effectRef idx="0">
+            <a:schemeClr val="accent1"/>
+          </a:effectRef>
+          <a:fontRef idx="minor">
+            <a:schemeClr val="lt1"/>
+          </a:fontRef>
+        </p:style>
+        <p:txBody>
+          <a:bodyPr lIns="0" tIns="0" rIns="0" bIns="0" rtlCol="0" anchor="ctr"/>
+          <a:lstStyle/>
+          <a:p>
+            <a:pPr algn="ctr"/>
+            <a:endParaRPr lang="en-GB" dirty="0">
+              <a:solidFill>
+                <a:schemeClr val="tx1"/>
+              </a:solidFill>
+            </a:endParaRPr>
+          </a:p>
+        </p:txBody>
+      </p:sp>
+    </p:spTree>
+    <p:extLst>
+      <p:ext uri="{BB962C8B-B14F-4D97-AF65-F5344CB8AC3E}">
+        <p14:creationId xmlns:p14="http://schemas.microsoft.com/office/powerpoint/2010/main" val="3242012395"/>
+      </p:ext>
+    </p:extLst>
+  </p:cSld>
+  <p:clrMapOvr>
+    <a:masterClrMapping/>
+  </p:clrMapOvr>
+</p:sld>
+</file>
+
+<file path=ppt/slides/slide19.xml><?xml version="1.0" encoding="utf-8"?>
+<p:sld xmlns:a="http://schemas.openxmlformats.org/drawingml/2006/main" xmlns:r="http://schemas.openxmlformats.org/officeDocument/2006/relationships" xmlns:p="http://schemas.openxmlformats.org/presentationml/2006/main">
+  <p:cSld>
+    <p:spTree>
+      <p:nvGrpSpPr>
+        <p:cNvPr id="1" name="">
+          <a:extLst>
+            <a:ext uri="{FF2B5EF4-FFF2-40B4-BE49-F238E27FC236}">
+              <a16:creationId xmlns:a16="http://schemas.microsoft.com/office/drawing/2014/main" id="{C9B8E1A5-ED69-C854-6421-4146B5067B4C}"/>
+            </a:ext>
+          </a:extLst>
+        </p:cNvPr>
+        <p:cNvGrpSpPr/>
+        <p:nvPr/>
+      </p:nvGrpSpPr>
+      <p:grpSpPr>
+        <a:xfrm>
+          <a:off x="0" y="0"/>
+          <a:ext cx="0" cy="0"/>
+          <a:chOff x="0" y="0"/>
+          <a:chExt cx="0" cy="0"/>
+        </a:xfrm>
+      </p:grpSpPr>
+      <p:sp>
+        <p:nvSpPr>
+          <p:cNvPr id="2" name="Marcador de texto 2">
+            <a:extLst>
+              <a:ext uri="{FF2B5EF4-FFF2-40B4-BE49-F238E27FC236}">
+                <a16:creationId xmlns:a16="http://schemas.microsoft.com/office/drawing/2014/main" id="{AA5561F2-9505-AF70-34F2-5513C06CF55B}"/>
+              </a:ext>
+            </a:extLst>
+          </p:cNvPr>
+          <p:cNvSpPr>
+            <a:spLocks noGrp="1"/>
+          </p:cNvSpPr>
+          <p:nvPr>
+            <p:ph type="body" idx="1"/>
+          </p:nvPr>
+        </p:nvSpPr>
+        <p:spPr>
+          <a:xfrm>
+            <a:off x="785003" y="1639667"/>
+            <a:ext cx="6803329" cy="604769"/>
+          </a:xfrm>
+        </p:spPr>
+        <p:txBody>
+          <a:bodyPr>
+            <a:normAutofit/>
+          </a:bodyPr>
+          <a:lstStyle/>
+          <a:p>
+            <a:r>
+              <a:rPr lang="en-US" sz="2000" dirty="0"/>
+              <a:t>The qualities are classified according to  IDO</a:t>
+            </a:r>
           </a:p>
         </p:txBody>
       </p:sp>
       <p:pic>
         <p:nvPicPr>
-          <p:cNvPr id="5" name="Imagen 4" descr="Interfaz de usuario gráfica, Aplicación, Sitio web&#10;&#10;El contenido generado por IA puede ser incorrecto.">
-            <a:extLst>
-              <a:ext uri="{FF2B5EF4-FFF2-40B4-BE49-F238E27FC236}">
-                <a16:creationId xmlns:a16="http://schemas.microsoft.com/office/drawing/2014/main" id="{0CDE0F40-65F1-A02B-2CDC-58C5B969BF2B}"/>
+          <p:cNvPr id="4" name="Imagen 3" descr="Imagen que contiene Diagrama&#10;&#10;El contenido generado por IA puede ser incorrecto.">
+            <a:extLst>
+              <a:ext uri="{FF2B5EF4-FFF2-40B4-BE49-F238E27FC236}">
+                <a16:creationId xmlns:a16="http://schemas.microsoft.com/office/drawing/2014/main" id="{DCDE7E53-2473-BDA4-D797-8F7E48D79361}"/>
               </a:ext>
             </a:extLst>
           </p:cNvPr>
@@ -25716,55 +24918,117 @@
           <p:nvPr/>
         </p:nvPicPr>
         <p:blipFill>
-          <a:blip r:embed="rId4"/>
+          <a:blip r:embed="rId3"/>
           <a:stretch>
             <a:fillRect/>
           </a:stretch>
         </p:blipFill>
         <p:spPr>
           <a:xfrm>
-            <a:off x="5795157" y="1639667"/>
-            <a:ext cx="2534004" cy="514422"/>
+            <a:off x="1245098" y="2319379"/>
+            <a:ext cx="9701804" cy="4306833"/>
           </a:xfrm>
           <a:prstGeom prst="rect">
             <a:avLst/>
           </a:prstGeom>
         </p:spPr>
       </p:pic>
-      <p:pic>
-        <p:nvPicPr>
-          <p:cNvPr id="7" name="Imagen 6" descr="Interfaz de usuario gráfica, Texto, Aplicación, Chat o mensaje de texto&#10;&#10;El contenido generado por IA puede ser incorrecto.">
-            <a:extLst>
-              <a:ext uri="{FF2B5EF4-FFF2-40B4-BE49-F238E27FC236}">
-                <a16:creationId xmlns:a16="http://schemas.microsoft.com/office/drawing/2014/main" id="{2D2EEA3B-4F22-2FB2-E60E-B693116BBF0E}"/>
-              </a:ext>
-            </a:extLst>
-          </p:cNvPr>
-          <p:cNvPicPr>
-            <a:picLocks noChangeAspect="1"/>
-          </p:cNvPicPr>
-          <p:nvPr/>
-        </p:nvPicPr>
-        <p:blipFill>
-          <a:blip r:embed="rId5"/>
-          <a:stretch>
-            <a:fillRect/>
-          </a:stretch>
-        </p:blipFill>
+      <p:sp>
+        <p:nvSpPr>
+          <p:cNvPr id="6" name="Title 1">
+            <a:extLst>
+              <a:ext uri="{FF2B5EF4-FFF2-40B4-BE49-F238E27FC236}">
+                <a16:creationId xmlns:a16="http://schemas.microsoft.com/office/drawing/2014/main" id="{A03FD395-36D3-CCCE-6151-4731B5CB0515}"/>
+              </a:ext>
+            </a:extLst>
+          </p:cNvPr>
+          <p:cNvSpPr>
+            <a:spLocks noGrp="1"/>
+          </p:cNvSpPr>
+          <p:nvPr>
+            <p:ph type="title"/>
+          </p:nvPr>
+        </p:nvSpPr>
         <p:spPr>
           <a:xfrm>
-            <a:off x="8663414" y="1639667"/>
-            <a:ext cx="2743583" cy="1552792"/>
+            <a:off x="415600" y="593367"/>
+            <a:ext cx="11360800" cy="763600"/>
+          </a:xfrm>
+        </p:spPr>
+        <p:txBody>
+          <a:bodyPr>
+            <a:noAutofit/>
+          </a:bodyPr>
+          <a:lstStyle/>
+          <a:p>
+            <a:r>
+              <a:rPr lang="en-US" sz="4000" dirty="0"/>
+              <a:t>IDO-based Property modeling</a:t>
+            </a:r>
+            <a:endParaRPr lang="en-US" sz="4000" b="1" dirty="0"/>
+          </a:p>
+        </p:txBody>
+      </p:sp>
+      <p:sp>
+        <p:nvSpPr>
+          <p:cNvPr id="3" name="Rectángulo 2">
+            <a:extLst>
+              <a:ext uri="{FF2B5EF4-FFF2-40B4-BE49-F238E27FC236}">
+                <a16:creationId xmlns:a16="http://schemas.microsoft.com/office/drawing/2014/main" id="{F117E1EB-A0C3-4519-92D4-F96057C1416C}"/>
+              </a:ext>
+            </a:extLst>
+          </p:cNvPr>
+          <p:cNvSpPr/>
+          <p:nvPr/>
+        </p:nvSpPr>
+        <p:spPr>
+          <a:xfrm>
+            <a:off x="2374900" y="2145323"/>
+            <a:ext cx="3302000" cy="4480889"/>
           </a:xfrm>
           <a:prstGeom prst="rect">
             <a:avLst/>
           </a:prstGeom>
+          <a:noFill/>
+          <a:ln w="38100">
+            <a:solidFill>
+              <a:srgbClr val="7030A0"/>
+            </a:solidFill>
+          </a:ln>
         </p:spPr>
-      </p:pic>
+        <p:style>
+          <a:lnRef idx="2">
+            <a:schemeClr val="accent1">
+              <a:shade val="50000"/>
+            </a:schemeClr>
+          </a:lnRef>
+          <a:fillRef idx="1">
+            <a:schemeClr val="accent1"/>
+          </a:fillRef>
+          <a:effectRef idx="0">
+            <a:schemeClr val="accent1"/>
+          </a:effectRef>
+          <a:fontRef idx="minor">
+            <a:schemeClr val="lt1"/>
+          </a:fontRef>
+        </p:style>
+        <p:txBody>
+          <a:bodyPr lIns="0" tIns="0" rIns="0" bIns="0" rtlCol="0" anchor="ctr"/>
+          <a:lstStyle/>
+          <a:p>
+            <a:pPr algn="ctr"/>
+            <a:endParaRPr lang="en-GB" dirty="0">
+              <a:solidFill>
+                <a:schemeClr val="tx1"/>
+              </a:solidFill>
+            </a:endParaRPr>
+          </a:p>
+        </p:txBody>
+      </p:sp>
     </p:spTree>
     <p:extLst>
       <p:ext uri="{BB962C8B-B14F-4D97-AF65-F5344CB8AC3E}">
-        <p14:creationId xmlns:p14="http://schemas.microsoft.com/office/powerpoint/2010/main" val="3242012395"/>
+        <p14:creationId xmlns:p14="http://schemas.microsoft.com/office/powerpoint/2010/main" val="1592997775"/>
       </p:ext>
     </p:extLst>
   </p:cSld>
@@ -25871,7 +25135,7 @@
         <p:cNvPr id="1" name="">
           <a:extLst>
             <a:ext uri="{FF2B5EF4-FFF2-40B4-BE49-F238E27FC236}">
-              <a16:creationId xmlns:a16="http://schemas.microsoft.com/office/drawing/2014/main" id="{C9B8E1A5-ED69-C854-6421-4146B5067B4C}"/>
+              <a16:creationId xmlns:a16="http://schemas.microsoft.com/office/drawing/2014/main" id="{38E0AA91-FBF9-0E52-D9DB-83A62046218E}"/>
             </a:ext>
           </a:extLst>
         </p:cNvPr>
@@ -25891,7 +25155,7 @@
           <p:cNvPr id="2" name="Marcador de texto 2">
             <a:extLst>
               <a:ext uri="{FF2B5EF4-FFF2-40B4-BE49-F238E27FC236}">
-                <a16:creationId xmlns:a16="http://schemas.microsoft.com/office/drawing/2014/main" id="{AA5561F2-9505-AF70-34F2-5513C06CF55B}"/>
+                <a16:creationId xmlns:a16="http://schemas.microsoft.com/office/drawing/2014/main" id="{03E77BD5-5426-6469-8DFA-D614969B7CDF}"/>
               </a:ext>
             </a:extLst>
           </p:cNvPr>
@@ -25904,8 +25168,8 @@
         </p:nvSpPr>
         <p:spPr>
           <a:xfrm>
-            <a:off x="785003" y="1639667"/>
-            <a:ext cx="6803329" cy="604769"/>
+            <a:off x="597877" y="1593685"/>
+            <a:ext cx="10455945" cy="1149516"/>
           </a:xfrm>
         </p:spPr>
         <p:txBody>
@@ -25915,48 +25179,21 @@
           <a:lstStyle/>
           <a:p>
             <a:r>
-              <a:rPr lang="en-US" sz="2000" dirty="0"/>
-              <a:t>The qualities are classified according to  IDO</a:t>
-            </a:r>
+              <a:rPr lang="en-US" sz="3200" dirty="0"/>
+              <a:t>Modeling the length of a cable</a:t>
+            </a:r>
+          </a:p>
+          <a:p>
+            <a:endParaRPr lang="en-US" dirty="0"/>
           </a:p>
         </p:txBody>
       </p:sp>
-      <p:pic>
-        <p:nvPicPr>
-          <p:cNvPr id="4" name="Imagen 3" descr="Imagen que contiene Diagrama&#10;&#10;El contenido generado por IA puede ser incorrecto.">
-            <a:extLst>
-              <a:ext uri="{FF2B5EF4-FFF2-40B4-BE49-F238E27FC236}">
-                <a16:creationId xmlns:a16="http://schemas.microsoft.com/office/drawing/2014/main" id="{DCDE7E53-2473-BDA4-D797-8F7E48D79361}"/>
-              </a:ext>
-            </a:extLst>
-          </p:cNvPr>
-          <p:cNvPicPr>
-            <a:picLocks noChangeAspect="1"/>
-          </p:cNvPicPr>
-          <p:nvPr/>
-        </p:nvPicPr>
-        <p:blipFill>
-          <a:blip r:embed="rId3"/>
-          <a:stretch>
-            <a:fillRect/>
-          </a:stretch>
-        </p:blipFill>
-        <p:spPr>
-          <a:xfrm>
-            <a:off x="1245098" y="2319379"/>
-            <a:ext cx="9701804" cy="4306833"/>
-          </a:xfrm>
-          <a:prstGeom prst="rect">
-            <a:avLst/>
-          </a:prstGeom>
-        </p:spPr>
-      </p:pic>
       <p:sp>
         <p:nvSpPr>
-          <p:cNvPr id="6" name="Title 1">
-            <a:extLst>
-              <a:ext uri="{FF2B5EF4-FFF2-40B4-BE49-F238E27FC236}">
-                <a16:creationId xmlns:a16="http://schemas.microsoft.com/office/drawing/2014/main" id="{A03FD395-36D3-CCCE-6151-4731B5CB0515}"/>
+          <p:cNvPr id="7" name="Title 1">
+            <a:extLst>
+              <a:ext uri="{FF2B5EF4-FFF2-40B4-BE49-F238E27FC236}">
+                <a16:creationId xmlns:a16="http://schemas.microsoft.com/office/drawing/2014/main" id="{854F594A-7C99-6BAD-4D2D-0D034F5A5186}"/>
               </a:ext>
             </a:extLst>
           </p:cNvPr>
@@ -25980,214 +25217,177 @@
           <a:lstStyle/>
           <a:p>
             <a:r>
-              <a:rPr lang="en-US" sz="2800" dirty="0"/>
-              <a:t>CFIHOS Ontology Approach 2: IDO-based Property modeling</a:t>
-            </a:r>
-            <a:endParaRPr lang="en-US" sz="2800" b="1" dirty="0"/>
+              <a:rPr lang="en-US" sz="4000" dirty="0"/>
+              <a:t>First example</a:t>
+            </a:r>
+            <a:endParaRPr lang="en-US" sz="4000" b="1" dirty="0"/>
           </a:p>
         </p:txBody>
       </p:sp>
-    </p:spTree>
-    <p:extLst>
-      <p:ext uri="{BB962C8B-B14F-4D97-AF65-F5344CB8AC3E}">
-        <p14:creationId xmlns:p14="http://schemas.microsoft.com/office/powerpoint/2010/main" val="1592997775"/>
-      </p:ext>
-    </p:extLst>
-  </p:cSld>
-  <p:clrMapOvr>
-    <a:masterClrMapping/>
-  </p:clrMapOvr>
-</p:sld>
-</file>
-
-<file path=ppt/slides/slide21.xml><?xml version="1.0" encoding="utf-8"?>
-<p:sld xmlns:a="http://schemas.openxmlformats.org/drawingml/2006/main" xmlns:r="http://schemas.openxmlformats.org/officeDocument/2006/relationships" xmlns:p="http://schemas.openxmlformats.org/presentationml/2006/main">
-  <p:cSld>
-    <p:spTree>
-      <p:nvGrpSpPr>
-        <p:cNvPr id="1" name="">
-          <a:extLst>
-            <a:ext uri="{FF2B5EF4-FFF2-40B4-BE49-F238E27FC236}">
-              <a16:creationId xmlns:a16="http://schemas.microsoft.com/office/drawing/2014/main" id="{38E0AA91-FBF9-0E52-D9DB-83A62046218E}"/>
-            </a:ext>
-          </a:extLst>
-        </p:cNvPr>
-        <p:cNvGrpSpPr/>
-        <p:nvPr/>
-      </p:nvGrpSpPr>
-      <p:grpSpPr>
-        <a:xfrm>
-          <a:off x="0" y="0"/>
-          <a:ext cx="0" cy="0"/>
-          <a:chOff x="0" y="0"/>
-          <a:chExt cx="0" cy="0"/>
-        </a:xfrm>
-      </p:grpSpPr>
-      <p:sp>
-        <p:nvSpPr>
-          <p:cNvPr id="2" name="Marcador de texto 2">
-            <a:extLst>
-              <a:ext uri="{FF2B5EF4-FFF2-40B4-BE49-F238E27FC236}">
-                <a16:creationId xmlns:a16="http://schemas.microsoft.com/office/drawing/2014/main" id="{03E77BD5-5426-6469-8DFA-D614969B7CDF}"/>
-              </a:ext>
-            </a:extLst>
-          </p:cNvPr>
-          <p:cNvSpPr>
-            <a:spLocks noGrp="1"/>
-          </p:cNvSpPr>
-          <p:nvPr>
-            <p:ph type="body" idx="1"/>
-          </p:nvPr>
-        </p:nvSpPr>
-        <p:spPr>
+      <p:grpSp>
+        <p:nvGrpSpPr>
+          <p:cNvPr id="9" name="Grupo 8">
+            <a:extLst>
+              <a:ext uri="{FF2B5EF4-FFF2-40B4-BE49-F238E27FC236}">
+                <a16:creationId xmlns:a16="http://schemas.microsoft.com/office/drawing/2014/main" id="{08F6C30E-087B-9389-805E-18A5CC22BFCA}"/>
+              </a:ext>
+            </a:extLst>
+          </p:cNvPr>
+          <p:cNvGrpSpPr/>
+          <p:nvPr/>
+        </p:nvGrpSpPr>
+        <p:grpSpPr>
           <a:xfrm>
-            <a:off x="5926347" y="1593685"/>
-            <a:ext cx="5127475" cy="1149516"/>
+            <a:off x="1258325" y="3410177"/>
+            <a:ext cx="9336043" cy="2910950"/>
+            <a:chOff x="1258325" y="3410177"/>
+            <a:chExt cx="9336043" cy="2910950"/>
           </a:xfrm>
-        </p:spPr>
-        <p:txBody>
-          <a:bodyPr>
-            <a:normAutofit fontScale="55000" lnSpcReduction="20000"/>
-          </a:bodyPr>
-          <a:lstStyle/>
-          <a:p>
-            <a:r>
-              <a:rPr lang="en-US" sz="4500" dirty="0"/>
-              <a:t>Example of instances modelling the length of a cable</a:t>
-            </a:r>
-          </a:p>
-          <a:p>
-            <a:endParaRPr lang="en-US" dirty="0"/>
-          </a:p>
-        </p:txBody>
-      </p:sp>
-      <p:pic>
-        <p:nvPicPr>
-          <p:cNvPr id="4" name="Imagen 3" descr="Interfaz de usuario gráfica, Aplicación&#10;&#10;El contenido generado por IA puede ser incorrecto.">
-            <a:extLst>
-              <a:ext uri="{FF2B5EF4-FFF2-40B4-BE49-F238E27FC236}">
-                <a16:creationId xmlns:a16="http://schemas.microsoft.com/office/drawing/2014/main" id="{9ED92F97-6CD3-994B-0593-0D812D0763BD}"/>
-              </a:ext>
-            </a:extLst>
-          </p:cNvPr>
-          <p:cNvPicPr>
-            <a:picLocks noChangeAspect="1"/>
-          </p:cNvPicPr>
-          <p:nvPr/>
-        </p:nvPicPr>
-        <p:blipFill>
-          <a:blip r:embed="rId3"/>
-          <a:srcRect t="29834"/>
-          <a:stretch>
-            <a:fillRect/>
-          </a:stretch>
-        </p:blipFill>
-        <p:spPr>
-          <a:xfrm>
-            <a:off x="1258325" y="3652096"/>
-            <a:ext cx="9336043" cy="2669031"/>
-          </a:xfrm>
-          <a:prstGeom prst="rect">
-            <a:avLst/>
-          </a:prstGeom>
-        </p:spPr>
-      </p:pic>
-      <p:pic>
-        <p:nvPicPr>
-          <p:cNvPr id="5" name="Imagen 4" descr="Interfaz de usuario gráfica, Aplicación, Sitio web&#10;&#10;El contenido generado por IA puede ser incorrecto.">
-            <a:extLst>
-              <a:ext uri="{FF2B5EF4-FFF2-40B4-BE49-F238E27FC236}">
-                <a16:creationId xmlns:a16="http://schemas.microsoft.com/office/drawing/2014/main" id="{86241720-D3A5-B854-29F6-FF50C4850922}"/>
-              </a:ext>
-            </a:extLst>
-          </p:cNvPr>
-          <p:cNvPicPr>
-            <a:picLocks noChangeAspect="1"/>
-          </p:cNvPicPr>
-          <p:nvPr/>
-        </p:nvPicPr>
-        <p:blipFill>
-          <a:blip r:embed="rId4"/>
-          <a:stretch>
-            <a:fillRect/>
-          </a:stretch>
-        </p:blipFill>
-        <p:spPr>
-          <a:xfrm>
-            <a:off x="415600" y="1356967"/>
-            <a:ext cx="2534004" cy="514422"/>
-          </a:xfrm>
-          <a:prstGeom prst="rect">
-            <a:avLst/>
-          </a:prstGeom>
-        </p:spPr>
-      </p:pic>
-      <p:pic>
-        <p:nvPicPr>
-          <p:cNvPr id="8" name="Imagen 7" descr="Interfaz de usuario gráfica, Texto, Aplicación, Chat o mensaje de texto&#10;&#10;El contenido generado por IA puede ser incorrecto.">
-            <a:extLst>
-              <a:ext uri="{FF2B5EF4-FFF2-40B4-BE49-F238E27FC236}">
-                <a16:creationId xmlns:a16="http://schemas.microsoft.com/office/drawing/2014/main" id="{AAB56E2C-685C-CD06-B059-E14A47ED8BD4}"/>
-              </a:ext>
-            </a:extLst>
-          </p:cNvPr>
-          <p:cNvPicPr>
-            <a:picLocks noChangeAspect="1"/>
-          </p:cNvPicPr>
-          <p:nvPr/>
-        </p:nvPicPr>
-        <p:blipFill>
-          <a:blip r:embed="rId5"/>
-          <a:stretch>
-            <a:fillRect/>
-          </a:stretch>
-        </p:blipFill>
-        <p:spPr>
-          <a:xfrm>
-            <a:off x="3283857" y="1356967"/>
-            <a:ext cx="2743583" cy="1552792"/>
-          </a:xfrm>
-          <a:prstGeom prst="rect">
-            <a:avLst/>
-          </a:prstGeom>
-        </p:spPr>
-      </p:pic>
-      <p:sp>
-        <p:nvSpPr>
-          <p:cNvPr id="7" name="Title 1">
-            <a:extLst>
-              <a:ext uri="{FF2B5EF4-FFF2-40B4-BE49-F238E27FC236}">
-                <a16:creationId xmlns:a16="http://schemas.microsoft.com/office/drawing/2014/main" id="{854F594A-7C99-6BAD-4D2D-0D034F5A5186}"/>
-              </a:ext>
-            </a:extLst>
-          </p:cNvPr>
-          <p:cNvSpPr>
-            <a:spLocks noGrp="1"/>
-          </p:cNvSpPr>
-          <p:nvPr>
-            <p:ph type="title"/>
-          </p:nvPr>
-        </p:nvSpPr>
-        <p:spPr>
-          <a:xfrm>
-            <a:off x="415600" y="593367"/>
-            <a:ext cx="11360800" cy="763600"/>
-          </a:xfrm>
-        </p:spPr>
-        <p:txBody>
-          <a:bodyPr>
-            <a:noAutofit/>
-          </a:bodyPr>
-          <a:lstStyle/>
-          <a:p>
-            <a:r>
-              <a:rPr lang="en-US" sz="2800" dirty="0"/>
-              <a:t>CFIHOS Ontology Approach 2: IDO-based Property modeling</a:t>
-            </a:r>
-            <a:endParaRPr lang="en-US" sz="2800" b="1" dirty="0"/>
-          </a:p>
-        </p:txBody>
-      </p:sp>
+        </p:grpSpPr>
+        <p:pic>
+          <p:nvPicPr>
+            <p:cNvPr id="4" name="Imagen 3" descr="Interfaz de usuario gráfica, Aplicación&#10;&#10;El contenido generado por IA puede ser incorrecto.">
+              <a:extLst>
+                <a:ext uri="{FF2B5EF4-FFF2-40B4-BE49-F238E27FC236}">
+                  <a16:creationId xmlns:a16="http://schemas.microsoft.com/office/drawing/2014/main" id="{9ED92F97-6CD3-994B-0593-0D812D0763BD}"/>
+                </a:ext>
+              </a:extLst>
+            </p:cNvPr>
+            <p:cNvPicPr>
+              <a:picLocks noChangeAspect="1"/>
+            </p:cNvPicPr>
+            <p:nvPr/>
+          </p:nvPicPr>
+          <p:blipFill>
+            <a:blip r:embed="rId3"/>
+            <a:srcRect t="29834"/>
+            <a:stretch>
+              <a:fillRect/>
+            </a:stretch>
+          </p:blipFill>
+          <p:spPr>
+            <a:xfrm>
+              <a:off x="1258325" y="3652096"/>
+              <a:ext cx="9336043" cy="2669031"/>
+            </a:xfrm>
+            <a:prstGeom prst="rect">
+              <a:avLst/>
+            </a:prstGeom>
+          </p:spPr>
+        </p:pic>
+        <p:sp>
+          <p:nvSpPr>
+            <p:cNvPr id="3" name="Rectángulo 2">
+              <a:extLst>
+                <a:ext uri="{FF2B5EF4-FFF2-40B4-BE49-F238E27FC236}">
+                  <a16:creationId xmlns:a16="http://schemas.microsoft.com/office/drawing/2014/main" id="{9C3436A5-53E1-5DDE-DA00-4C4AA6CDE058}"/>
+                </a:ext>
+              </a:extLst>
+            </p:cNvPr>
+            <p:cNvSpPr/>
+            <p:nvPr/>
+          </p:nvSpPr>
+          <p:spPr>
+            <a:xfrm>
+              <a:off x="2426676" y="3458665"/>
+              <a:ext cx="574431" cy="463062"/>
+            </a:xfrm>
+            <a:prstGeom prst="rect">
+              <a:avLst/>
+            </a:prstGeom>
+            <a:solidFill>
+              <a:schemeClr val="bg1"/>
+            </a:solidFill>
+            <a:ln>
+              <a:noFill/>
+            </a:ln>
+          </p:spPr>
+          <p:style>
+            <a:lnRef idx="2">
+              <a:schemeClr val="accent1">
+                <a:shade val="50000"/>
+              </a:schemeClr>
+            </a:lnRef>
+            <a:fillRef idx="1">
+              <a:schemeClr val="accent1"/>
+            </a:fillRef>
+            <a:effectRef idx="0">
+              <a:schemeClr val="accent1"/>
+            </a:effectRef>
+            <a:fontRef idx="minor">
+              <a:schemeClr val="lt1"/>
+            </a:fontRef>
+          </p:style>
+          <p:txBody>
+            <a:bodyPr lIns="0" tIns="0" rIns="0" bIns="0" rtlCol="0" anchor="ctr"/>
+            <a:lstStyle/>
+            <a:p>
+              <a:pPr algn="ctr"/>
+              <a:endParaRPr lang="en-GB" dirty="0">
+                <a:solidFill>
+                  <a:schemeClr val="tx1"/>
+                </a:solidFill>
+              </a:endParaRPr>
+            </a:p>
+          </p:txBody>
+        </p:sp>
+        <p:sp>
+          <p:nvSpPr>
+            <p:cNvPr id="6" name="Rectángulo 5">
+              <a:extLst>
+                <a:ext uri="{FF2B5EF4-FFF2-40B4-BE49-F238E27FC236}">
+                  <a16:creationId xmlns:a16="http://schemas.microsoft.com/office/drawing/2014/main" id="{11BC25B6-8ADE-FDE6-1063-3EC694D5B199}"/>
+                </a:ext>
+              </a:extLst>
+            </p:cNvPr>
+            <p:cNvSpPr/>
+            <p:nvPr/>
+          </p:nvSpPr>
+          <p:spPr>
+            <a:xfrm>
+              <a:off x="4788876" y="3410177"/>
+              <a:ext cx="574431" cy="463062"/>
+            </a:xfrm>
+            <a:prstGeom prst="rect">
+              <a:avLst/>
+            </a:prstGeom>
+            <a:solidFill>
+              <a:schemeClr val="bg1"/>
+            </a:solidFill>
+            <a:ln>
+              <a:noFill/>
+            </a:ln>
+          </p:spPr>
+          <p:style>
+            <a:lnRef idx="2">
+              <a:schemeClr val="accent1">
+                <a:shade val="50000"/>
+              </a:schemeClr>
+            </a:lnRef>
+            <a:fillRef idx="1">
+              <a:schemeClr val="accent1"/>
+            </a:fillRef>
+            <a:effectRef idx="0">
+              <a:schemeClr val="accent1"/>
+            </a:effectRef>
+            <a:fontRef idx="minor">
+              <a:schemeClr val="lt1"/>
+            </a:fontRef>
+          </p:style>
+          <p:txBody>
+            <a:bodyPr lIns="0" tIns="0" rIns="0" bIns="0" rtlCol="0" anchor="ctr"/>
+            <a:lstStyle/>
+            <a:p>
+              <a:pPr algn="ctr"/>
+              <a:endParaRPr lang="en-GB" dirty="0">
+                <a:solidFill>
+                  <a:schemeClr val="tx1"/>
+                </a:solidFill>
+              </a:endParaRPr>
+            </a:p>
+          </p:txBody>
+        </p:sp>
+      </p:grpSp>
     </p:spTree>
     <p:extLst>
       <p:ext uri="{BB962C8B-B14F-4D97-AF65-F5344CB8AC3E}">
@@ -26201,7 +25401,7 @@
 </p:sld>
 </file>
 
-<file path=ppt/slides/slide22.xml><?xml version="1.0" encoding="utf-8"?>
+<file path=ppt/slides/slide21.xml><?xml version="1.0" encoding="utf-8"?>
 <p:sld xmlns:a="http://schemas.openxmlformats.org/drawingml/2006/main" xmlns:r="http://schemas.openxmlformats.org/officeDocument/2006/relationships" xmlns:p="http://schemas.openxmlformats.org/presentationml/2006/main">
   <p:cSld>
     <p:spTree>
@@ -26254,7 +25454,7 @@
           <a:p>
             <a:r>
               <a:rPr lang="en-US" sz="4000" dirty="0"/>
-              <a:t>Example of data representation – Approach 2</a:t>
+              <a:t>Second example</a:t>
             </a:r>
             <a:endParaRPr lang="en-US" sz="4000" b="1" dirty="0"/>
           </a:p>
@@ -26282,7 +25482,7 @@
         </p:blipFill>
         <p:spPr>
           <a:xfrm>
-            <a:off x="663839" y="1356967"/>
+            <a:off x="663838" y="2165860"/>
             <a:ext cx="10864321" cy="4356100"/>
           </a:xfrm>
           <a:prstGeom prst="rect">
@@ -26304,7 +25504,7 @@
         </p:nvSpPr>
         <p:spPr>
           <a:xfrm>
-            <a:off x="1523969" y="5833937"/>
+            <a:off x="930552" y="1604680"/>
             <a:ext cx="9205478" cy="430696"/>
           </a:xfrm>
           <a:prstGeom prst="rect">
@@ -26339,7 +25539,7 @@
 </p:sld>
 </file>
 
-<file path=ppt/slides/slide23.xml><?xml version="1.0" encoding="utf-8"?>
+<file path=ppt/slides/slide22.xml><?xml version="1.0" encoding="utf-8"?>
 <p:sld xmlns:a="http://schemas.openxmlformats.org/drawingml/2006/main" xmlns:r="http://schemas.openxmlformats.org/officeDocument/2006/relationships" xmlns:p="http://schemas.openxmlformats.org/presentationml/2006/main">
   <p:cSld>
     <p:spTree>
@@ -26386,15 +25586,14 @@
         </p:spPr>
         <p:txBody>
           <a:bodyPr>
-            <a:normAutofit/>
+            <a:normAutofit fontScale="90000"/>
           </a:bodyPr>
           <a:lstStyle/>
           <a:p>
             <a:r>
               <a:rPr lang="en-US" sz="4000" dirty="0"/>
-              <a:t>Secondary result</a:t>
-            </a:r>
-            <a:endParaRPr lang="en-US" sz="4000" b="1" dirty="0"/>
+              <a:t>Shortcuts: IDO expressions - CFHIOS properties</a:t>
+            </a:r>
           </a:p>
         </p:txBody>
       </p:sp>
@@ -26427,12 +25626,29 @@
           <a:lstStyle/>
           <a:p>
             <a:r>
-              <a:rPr lang="en-US" sz="3000" dirty="0"/>
-              <a:t>Shortcuts: IDO expression vs CFHIOS properties</a:t>
-            </a:r>
-          </a:p>
-          <a:p>
-            <a:endParaRPr lang="en-US" dirty="0"/>
+              <a:rPr lang="en-US" dirty="0"/>
+              <a:t>Each </a:t>
+            </a:r>
+            <a:r>
+              <a:rPr lang="en-US" b="1" dirty="0"/>
+              <a:t>quality</a:t>
+            </a:r>
+            <a:r>
+              <a:rPr lang="en-US" dirty="0"/>
+              <a:t> in the CFHIOS ontology is annotated with the </a:t>
+            </a:r>
+            <a:r>
+              <a:rPr lang="en-US" b="1" dirty="0"/>
+              <a:t>object property </a:t>
+            </a:r>
+            <a:r>
+              <a:rPr lang="en-US" dirty="0"/>
+              <a:t>from which it </a:t>
+            </a:r>
+            <a:r>
+              <a:rPr lang="en-US" b="1" dirty="0"/>
+              <a:t>derives</a:t>
+            </a:r>
           </a:p>
         </p:txBody>
       </p:sp>
@@ -26535,7 +25751,7 @@
 </p:sld>
 </file>
 
-<file path=ppt/slides/slide24.xml><?xml version="1.0" encoding="utf-8"?>
+<file path=ppt/slides/slide23.xml><?xml version="1.0" encoding="utf-8"?>
 <p:sld xmlns:a="http://schemas.openxmlformats.org/drawingml/2006/main" xmlns:r="http://schemas.openxmlformats.org/officeDocument/2006/relationships" xmlns:p="http://schemas.openxmlformats.org/presentationml/2006/main">
   <p:cSld>
     <p:spTree>
@@ -26543,7 +25759,7 @@
         <p:cNvPr id="1" name="">
           <a:extLst>
             <a:ext uri="{FF2B5EF4-FFF2-40B4-BE49-F238E27FC236}">
-              <a16:creationId xmlns:a16="http://schemas.microsoft.com/office/drawing/2014/main" id="{0F7FDB57-23F6-AC85-2C0C-C20D44E7BDEE}"/>
+              <a16:creationId xmlns:a16="http://schemas.microsoft.com/office/drawing/2014/main" id="{6713A4C5-6B0D-973D-80FF-6840F4628DD8}"/>
             </a:ext>
           </a:extLst>
         </p:cNvPr>
@@ -26563,7 +25779,7 @@
           <p:cNvPr id="28" name="Title 1">
             <a:extLst>
               <a:ext uri="{FF2B5EF4-FFF2-40B4-BE49-F238E27FC236}">
-                <a16:creationId xmlns:a16="http://schemas.microsoft.com/office/drawing/2014/main" id="{4C3FB49D-E8E9-8A66-F4DE-D9FBF7829FFA}"/>
+                <a16:creationId xmlns:a16="http://schemas.microsoft.com/office/drawing/2014/main" id="{C9A6A044-BAD1-87D9-D30A-70FBF6725914}"/>
               </a:ext>
             </a:extLst>
           </p:cNvPr>
@@ -26588,7 +25804,146 @@
           <a:p>
             <a:r>
               <a:rPr lang="en-US" sz="4000" dirty="0"/>
-              <a:t>Secondary result</a:t>
+              <a:t>Object Properties    ⇔  IDO expressions</a:t>
+            </a:r>
+            <a:endParaRPr lang="en-US" sz="4000" b="1" dirty="0"/>
+          </a:p>
+        </p:txBody>
+      </p:sp>
+      <p:pic>
+        <p:nvPicPr>
+          <p:cNvPr id="3" name="Imagen 2">
+            <a:extLst>
+              <a:ext uri="{FF2B5EF4-FFF2-40B4-BE49-F238E27FC236}">
+                <a16:creationId xmlns:a16="http://schemas.microsoft.com/office/drawing/2014/main" id="{A57DE16D-DF67-C8AA-FA0F-7013BA97023A}"/>
+              </a:ext>
+            </a:extLst>
+          </p:cNvPr>
+          <p:cNvPicPr>
+            <a:picLocks noChangeAspect="1"/>
+          </p:cNvPicPr>
+          <p:nvPr/>
+        </p:nvPicPr>
+        <p:blipFill>
+          <a:blip r:embed="rId3"/>
+          <a:srcRect t="25150"/>
+          <a:stretch>
+            <a:fillRect/>
+          </a:stretch>
+        </p:blipFill>
+        <p:spPr>
+          <a:xfrm>
+            <a:off x="6499804" y="1902392"/>
+            <a:ext cx="5399119" cy="3496198"/>
+          </a:xfrm>
+          <a:prstGeom prst="rect">
+            <a:avLst/>
+          </a:prstGeom>
+          <a:ln w="38100">
+            <a:solidFill>
+              <a:srgbClr val="7030A0"/>
+            </a:solidFill>
+          </a:ln>
+        </p:spPr>
+      </p:pic>
+      <p:pic>
+        <p:nvPicPr>
+          <p:cNvPr id="4" name="Imagen 3">
+            <a:extLst>
+              <a:ext uri="{FF2B5EF4-FFF2-40B4-BE49-F238E27FC236}">
+                <a16:creationId xmlns:a16="http://schemas.microsoft.com/office/drawing/2014/main" id="{6234FA79-72BB-3BB4-E497-0EF05A74F5C4}"/>
+              </a:ext>
+            </a:extLst>
+          </p:cNvPr>
+          <p:cNvPicPr>
+            <a:picLocks noChangeAspect="1"/>
+          </p:cNvPicPr>
+          <p:nvPr/>
+        </p:nvPicPr>
+        <p:blipFill>
+          <a:blip r:embed="rId4"/>
+          <a:srcRect r="27464"/>
+          <a:stretch>
+            <a:fillRect/>
+          </a:stretch>
+        </p:blipFill>
+        <p:spPr>
+          <a:xfrm>
+            <a:off x="293077" y="2145329"/>
+            <a:ext cx="5637823" cy="1783829"/>
+          </a:xfrm>
+          <a:prstGeom prst="rect">
+            <a:avLst/>
+          </a:prstGeom>
+          <a:ln w="38100">
+            <a:solidFill>
+              <a:srgbClr val="7030A0"/>
+            </a:solidFill>
+          </a:ln>
+        </p:spPr>
+      </p:pic>
+    </p:spTree>
+    <p:extLst>
+      <p:ext uri="{BB962C8B-B14F-4D97-AF65-F5344CB8AC3E}">
+        <p14:creationId xmlns:p14="http://schemas.microsoft.com/office/powerpoint/2010/main" val="1976675056"/>
+      </p:ext>
+    </p:extLst>
+  </p:cSld>
+  <p:clrMapOvr>
+    <a:masterClrMapping/>
+  </p:clrMapOvr>
+</p:sld>
+</file>
+
+<file path=ppt/slides/slide24.xml><?xml version="1.0" encoding="utf-8"?>
+<p:sld xmlns:a="http://schemas.openxmlformats.org/drawingml/2006/main" xmlns:r="http://schemas.openxmlformats.org/officeDocument/2006/relationships" xmlns:p="http://schemas.openxmlformats.org/presentationml/2006/main">
+  <p:cSld>
+    <p:spTree>
+      <p:nvGrpSpPr>
+        <p:cNvPr id="1" name="">
+          <a:extLst>
+            <a:ext uri="{FF2B5EF4-FFF2-40B4-BE49-F238E27FC236}">
+              <a16:creationId xmlns:a16="http://schemas.microsoft.com/office/drawing/2014/main" id="{DE10B4C0-D2DA-C971-950B-7592E41BCE06}"/>
+            </a:ext>
+          </a:extLst>
+        </p:cNvPr>
+        <p:cNvGrpSpPr/>
+        <p:nvPr/>
+      </p:nvGrpSpPr>
+      <p:grpSpPr>
+        <a:xfrm>
+          <a:off x="0" y="0"/>
+          <a:ext cx="0" cy="0"/>
+          <a:chOff x="0" y="0"/>
+          <a:chExt cx="0" cy="0"/>
+        </a:xfrm>
+      </p:grpSpPr>
+      <p:sp>
+        <p:nvSpPr>
+          <p:cNvPr id="28" name="Title 1">
+            <a:extLst>
+              <a:ext uri="{FF2B5EF4-FFF2-40B4-BE49-F238E27FC236}">
+                <a16:creationId xmlns:a16="http://schemas.microsoft.com/office/drawing/2014/main" id="{B22E17D0-5CF0-E895-6DAB-A7B00BFB1A9B}"/>
+              </a:ext>
+            </a:extLst>
+          </p:cNvPr>
+          <p:cNvSpPr>
+            <a:spLocks noGrp="1"/>
+          </p:cNvSpPr>
+          <p:nvPr>
+            <p:ph type="title"/>
+          </p:nvPr>
+        </p:nvSpPr>
+        <p:spPr/>
+        <p:txBody>
+          <a:bodyPr>
+            <a:normAutofit/>
+          </a:bodyPr>
+          <a:lstStyle/>
+          <a:p>
+            <a:r>
+              <a:rPr lang="en-US" sz="4000" dirty="0"/>
+              <a:t>Other modeling aspects: property groups</a:t>
             </a:r>
             <a:endParaRPr lang="en-US" sz="4000" b="1" dirty="0"/>
           </a:p>
@@ -26596,10 +25951,10 @@
       </p:sp>
       <p:sp>
         <p:nvSpPr>
-          <p:cNvPr id="2" name="Marcador de texto 2">
-            <a:extLst>
-              <a:ext uri="{FF2B5EF4-FFF2-40B4-BE49-F238E27FC236}">
-                <a16:creationId xmlns:a16="http://schemas.microsoft.com/office/drawing/2014/main" id="{E6B5DF48-83E4-CC42-9DAC-5BBE49800AA4}"/>
+          <p:cNvPr id="8" name="Marcador de texto 7">
+            <a:extLst>
+              <a:ext uri="{FF2B5EF4-FFF2-40B4-BE49-F238E27FC236}">
+                <a16:creationId xmlns:a16="http://schemas.microsoft.com/office/drawing/2014/main" id="{A038D119-F6BC-4748-BDEA-DEF6F9540CBC}"/>
               </a:ext>
             </a:extLst>
           </p:cNvPr>
@@ -26612,8 +25967,8 @@
         </p:nvSpPr>
         <p:spPr>
           <a:xfrm>
-            <a:off x="415599" y="1593684"/>
-            <a:ext cx="11483324" cy="4670949"/>
+            <a:off x="415600" y="1536633"/>
+            <a:ext cx="6220990" cy="4555200"/>
           </a:xfrm>
         </p:spPr>
         <p:txBody>
@@ -26623,21 +25978,39 @@
           <a:lstStyle/>
           <a:p>
             <a:r>
-              <a:rPr lang="en-US" sz="3000" dirty="0"/>
-              <a:t>Conversion to IDO expressions</a:t>
-            </a:r>
-          </a:p>
-          <a:p>
-            <a:endParaRPr lang="en-US" dirty="0"/>
+              <a:rPr lang="en-GB" sz="2200" dirty="0"/>
+              <a:t>Property groups were modelled as classes</a:t>
+            </a:r>
+          </a:p>
+          <a:p>
+            <a:endParaRPr lang="en-GB" sz="2200" dirty="0"/>
+          </a:p>
+          <a:p>
+            <a:r>
+              <a:rPr lang="en-GB" sz="2200" dirty="0"/>
+              <a:t>Use of the annotation property </a:t>
+            </a:r>
+            <a:r>
+              <a:rPr lang="en-GB" sz="2200" i="1" dirty="0" err="1"/>
+              <a:t>schema:category</a:t>
+            </a:r>
+            <a:r>
+              <a:rPr lang="en-GB" sz="2200" i="1" dirty="0"/>
+              <a:t> </a:t>
+            </a:r>
+            <a:r>
+              <a:rPr lang="en-GB" sz="2200" dirty="0"/>
+              <a:t>to link a property with its property group</a:t>
+            </a:r>
           </a:p>
         </p:txBody>
       </p:sp>
       <p:pic>
         <p:nvPicPr>
-          <p:cNvPr id="7" name="Imagen 6">
-            <a:extLst>
-              <a:ext uri="{FF2B5EF4-FFF2-40B4-BE49-F238E27FC236}">
-                <a16:creationId xmlns:a16="http://schemas.microsoft.com/office/drawing/2014/main" id="{3C127A3C-9EA1-D7C2-3C92-2B2B6135F664}"/>
+          <p:cNvPr id="3" name="Imagen 2" descr="Texto, Carta&#10;&#10;El contenido generado por IA puede ser incorrecto.">
+            <a:extLst>
+              <a:ext uri="{FF2B5EF4-FFF2-40B4-BE49-F238E27FC236}">
+                <a16:creationId xmlns:a16="http://schemas.microsoft.com/office/drawing/2014/main" id="{DD13EB2A-C1BD-AF76-DF14-0AFCA2663E43}"/>
               </a:ext>
             </a:extLst>
           </p:cNvPr>
@@ -26648,14 +26021,45 @@
         </p:nvPicPr>
         <p:blipFill>
           <a:blip r:embed="rId3"/>
+          <a:srcRect b="42355"/>
           <a:stretch>
             <a:fillRect/>
           </a:stretch>
         </p:blipFill>
         <p:spPr>
           <a:xfrm>
-            <a:off x="692149" y="2254250"/>
-            <a:ext cx="11386305" cy="3702050"/>
+            <a:off x="6636590" y="1536633"/>
+            <a:ext cx="4363059" cy="1241073"/>
+          </a:xfrm>
+          <a:prstGeom prst="rect">
+            <a:avLst/>
+          </a:prstGeom>
+        </p:spPr>
+      </p:pic>
+      <p:pic>
+        <p:nvPicPr>
+          <p:cNvPr id="2" name="Imagen 1">
+            <a:extLst>
+              <a:ext uri="{FF2B5EF4-FFF2-40B4-BE49-F238E27FC236}">
+                <a16:creationId xmlns:a16="http://schemas.microsoft.com/office/drawing/2014/main" id="{7F13848D-4FF1-5693-8C8F-1A18DE76682C}"/>
+              </a:ext>
+            </a:extLst>
+          </p:cNvPr>
+          <p:cNvPicPr>
+            <a:picLocks noChangeAspect="1"/>
+          </p:cNvPicPr>
+          <p:nvPr/>
+        </p:nvPicPr>
+        <p:blipFill>
+          <a:blip r:embed="rId4"/>
+          <a:stretch>
+            <a:fillRect/>
+          </a:stretch>
+        </p:blipFill>
+        <p:spPr>
+          <a:xfrm>
+            <a:off x="1732722" y="3814233"/>
+            <a:ext cx="7772400" cy="1871413"/>
           </a:xfrm>
           <a:prstGeom prst="rect">
             <a:avLst/>
@@ -26664,10 +26068,10 @@
       </p:pic>
       <p:sp>
         <p:nvSpPr>
-          <p:cNvPr id="8" name="Rectángulo 7">
-            <a:extLst>
-              <a:ext uri="{FF2B5EF4-FFF2-40B4-BE49-F238E27FC236}">
-                <a16:creationId xmlns:a16="http://schemas.microsoft.com/office/drawing/2014/main" id="{9AEFC878-0091-86B4-0D54-547FDCE8BD61}"/>
+          <p:cNvPr id="4" name="Rectángulo 3">
+            <a:extLst>
+              <a:ext uri="{FF2B5EF4-FFF2-40B4-BE49-F238E27FC236}">
+                <a16:creationId xmlns:a16="http://schemas.microsoft.com/office/drawing/2014/main" id="{33B47B79-F4DB-3E43-17CD-96E7542D5CA5}"/>
               </a:ext>
             </a:extLst>
           </p:cNvPr>
@@ -26676,8 +26080,8 @@
         </p:nvSpPr>
         <p:spPr>
           <a:xfrm>
-            <a:off x="10875108" y="4955608"/>
-            <a:ext cx="1023815" cy="617415"/>
+            <a:off x="1732722" y="5232266"/>
+            <a:ext cx="2768940" cy="453380"/>
           </a:xfrm>
           <a:prstGeom prst="rect">
             <a:avLst/>
@@ -26721,7 +26125,7 @@
     </p:spTree>
     <p:extLst>
       <p:ext uri="{BB962C8B-B14F-4D97-AF65-F5344CB8AC3E}">
-        <p14:creationId xmlns:p14="http://schemas.microsoft.com/office/powerpoint/2010/main" val="2489959695"/>
+        <p14:creationId xmlns:p14="http://schemas.microsoft.com/office/powerpoint/2010/main" val="624026556"/>
       </p:ext>
     </p:extLst>
   </p:cSld>
@@ -26732,416 +26136,6 @@
 </file>
 
 <file path=ppt/slides/slide25.xml><?xml version="1.0" encoding="utf-8"?>
-<p:sld xmlns:a="http://schemas.openxmlformats.org/drawingml/2006/main" xmlns:r="http://schemas.openxmlformats.org/officeDocument/2006/relationships" xmlns:p="http://schemas.openxmlformats.org/presentationml/2006/main">
-  <p:cSld>
-    <p:spTree>
-      <p:nvGrpSpPr>
-        <p:cNvPr id="1" name="">
-          <a:extLst>
-            <a:ext uri="{FF2B5EF4-FFF2-40B4-BE49-F238E27FC236}">
-              <a16:creationId xmlns:a16="http://schemas.microsoft.com/office/drawing/2014/main" id="{6713A4C5-6B0D-973D-80FF-6840F4628DD8}"/>
-            </a:ext>
-          </a:extLst>
-        </p:cNvPr>
-        <p:cNvGrpSpPr/>
-        <p:nvPr/>
-      </p:nvGrpSpPr>
-      <p:grpSpPr>
-        <a:xfrm>
-          <a:off x="0" y="0"/>
-          <a:ext cx="0" cy="0"/>
-          <a:chOff x="0" y="0"/>
-          <a:chExt cx="0" cy="0"/>
-        </a:xfrm>
-      </p:grpSpPr>
-      <p:sp>
-        <p:nvSpPr>
-          <p:cNvPr id="28" name="Title 1">
-            <a:extLst>
-              <a:ext uri="{FF2B5EF4-FFF2-40B4-BE49-F238E27FC236}">
-                <a16:creationId xmlns:a16="http://schemas.microsoft.com/office/drawing/2014/main" id="{C9A6A044-BAD1-87D9-D30A-70FBF6725914}"/>
-              </a:ext>
-            </a:extLst>
-          </p:cNvPr>
-          <p:cNvSpPr>
-            <a:spLocks noGrp="1"/>
-          </p:cNvSpPr>
-          <p:nvPr>
-            <p:ph type="title"/>
-          </p:nvPr>
-        </p:nvSpPr>
-        <p:spPr>
-          <a:xfrm>
-            <a:off x="415600" y="593367"/>
-            <a:ext cx="11360800" cy="763600"/>
-          </a:xfrm>
-        </p:spPr>
-        <p:txBody>
-          <a:bodyPr>
-            <a:normAutofit/>
-          </a:bodyPr>
-          <a:lstStyle/>
-          <a:p>
-            <a:r>
-              <a:rPr lang="en-US" sz="4000" dirty="0"/>
-              <a:t>Secondary result</a:t>
-            </a:r>
-            <a:endParaRPr lang="en-US" sz="4000" b="1" dirty="0"/>
-          </a:p>
-        </p:txBody>
-      </p:sp>
-      <p:sp>
-        <p:nvSpPr>
-          <p:cNvPr id="2" name="Marcador de texto 2">
-            <a:extLst>
-              <a:ext uri="{FF2B5EF4-FFF2-40B4-BE49-F238E27FC236}">
-                <a16:creationId xmlns:a16="http://schemas.microsoft.com/office/drawing/2014/main" id="{FD70B4FC-0F98-7829-EFAA-FABA28AC5B24}"/>
-              </a:ext>
-            </a:extLst>
-          </p:cNvPr>
-          <p:cNvSpPr>
-            <a:spLocks noGrp="1"/>
-          </p:cNvSpPr>
-          <p:nvPr>
-            <p:ph type="body" idx="1"/>
-          </p:nvPr>
-        </p:nvSpPr>
-        <p:spPr>
-          <a:xfrm>
-            <a:off x="415599" y="1593684"/>
-            <a:ext cx="11483324" cy="4670949"/>
-          </a:xfrm>
-        </p:spPr>
-        <p:txBody>
-          <a:bodyPr>
-            <a:normAutofit/>
-          </a:bodyPr>
-          <a:lstStyle/>
-          <a:p>
-            <a:r>
-              <a:rPr lang="en-US" sz="3000" dirty="0"/>
-              <a:t>Conversion to IDO expressions</a:t>
-            </a:r>
-          </a:p>
-          <a:p>
-            <a:endParaRPr lang="en-US" dirty="0"/>
-          </a:p>
-        </p:txBody>
-      </p:sp>
-      <p:pic>
-        <p:nvPicPr>
-          <p:cNvPr id="7" name="Imagen 6">
-            <a:extLst>
-              <a:ext uri="{FF2B5EF4-FFF2-40B4-BE49-F238E27FC236}">
-                <a16:creationId xmlns:a16="http://schemas.microsoft.com/office/drawing/2014/main" id="{9A772709-7486-A6C8-1609-AACDAB634909}"/>
-              </a:ext>
-            </a:extLst>
-          </p:cNvPr>
-          <p:cNvPicPr>
-            <a:picLocks noChangeAspect="1"/>
-          </p:cNvPicPr>
-          <p:nvPr/>
-        </p:nvPicPr>
-        <p:blipFill>
-          <a:blip r:embed="rId3"/>
-          <a:stretch>
-            <a:fillRect/>
-          </a:stretch>
-        </p:blipFill>
-        <p:spPr>
-          <a:xfrm>
-            <a:off x="692149" y="2254250"/>
-            <a:ext cx="11386305" cy="3702050"/>
-          </a:xfrm>
-          <a:prstGeom prst="rect">
-            <a:avLst/>
-          </a:prstGeom>
-        </p:spPr>
-      </p:pic>
-      <p:sp>
-        <p:nvSpPr>
-          <p:cNvPr id="8" name="Rectángulo 7">
-            <a:extLst>
-              <a:ext uri="{FF2B5EF4-FFF2-40B4-BE49-F238E27FC236}">
-                <a16:creationId xmlns:a16="http://schemas.microsoft.com/office/drawing/2014/main" id="{B96C7B06-F7AA-7FE5-DE62-AD76E4D65240}"/>
-              </a:ext>
-            </a:extLst>
-          </p:cNvPr>
-          <p:cNvSpPr/>
-          <p:nvPr/>
-        </p:nvSpPr>
-        <p:spPr>
-          <a:xfrm>
-            <a:off x="10875108" y="4955608"/>
-            <a:ext cx="1023815" cy="617415"/>
-          </a:xfrm>
-          <a:prstGeom prst="rect">
-            <a:avLst/>
-          </a:prstGeom>
-          <a:noFill/>
-          <a:ln w="63500">
-            <a:solidFill>
-              <a:srgbClr val="7030A0"/>
-            </a:solidFill>
-          </a:ln>
-        </p:spPr>
-        <p:style>
-          <a:lnRef idx="2">
-            <a:schemeClr val="accent1">
-              <a:shade val="50000"/>
-            </a:schemeClr>
-          </a:lnRef>
-          <a:fillRef idx="1">
-            <a:schemeClr val="accent1"/>
-          </a:fillRef>
-          <a:effectRef idx="0">
-            <a:schemeClr val="accent1"/>
-          </a:effectRef>
-          <a:fontRef idx="minor">
-            <a:schemeClr val="lt1"/>
-          </a:fontRef>
-        </p:style>
-        <p:txBody>
-          <a:bodyPr lIns="0" tIns="0" rIns="0" bIns="0" rtlCol="0" anchor="ctr"/>
-          <a:lstStyle/>
-          <a:p>
-            <a:pPr algn="ctr"/>
-            <a:endParaRPr lang="en-GB" dirty="0">
-              <a:solidFill>
-                <a:schemeClr val="tx1"/>
-              </a:solidFill>
-            </a:endParaRPr>
-          </a:p>
-        </p:txBody>
-      </p:sp>
-      <p:pic>
-        <p:nvPicPr>
-          <p:cNvPr id="3" name="Imagen 2">
-            <a:extLst>
-              <a:ext uri="{FF2B5EF4-FFF2-40B4-BE49-F238E27FC236}">
-                <a16:creationId xmlns:a16="http://schemas.microsoft.com/office/drawing/2014/main" id="{A57DE16D-DF67-C8AA-FA0F-7013BA97023A}"/>
-              </a:ext>
-            </a:extLst>
-          </p:cNvPr>
-          <p:cNvPicPr>
-            <a:picLocks noChangeAspect="1"/>
-          </p:cNvPicPr>
-          <p:nvPr/>
-        </p:nvPicPr>
-        <p:blipFill>
-          <a:blip r:embed="rId4"/>
-          <a:stretch>
-            <a:fillRect/>
-          </a:stretch>
-        </p:blipFill>
-        <p:spPr>
-          <a:xfrm>
-            <a:off x="6792881" y="2254250"/>
-            <a:ext cx="5399119" cy="4670948"/>
-          </a:xfrm>
-          <a:prstGeom prst="rect">
-            <a:avLst/>
-          </a:prstGeom>
-        </p:spPr>
-      </p:pic>
-    </p:spTree>
-    <p:extLst>
-      <p:ext uri="{BB962C8B-B14F-4D97-AF65-F5344CB8AC3E}">
-        <p14:creationId xmlns:p14="http://schemas.microsoft.com/office/powerpoint/2010/main" val="1976675056"/>
-      </p:ext>
-    </p:extLst>
-  </p:cSld>
-  <p:clrMapOvr>
-    <a:masterClrMapping/>
-  </p:clrMapOvr>
-</p:sld>
-</file>
-
-<file path=ppt/slides/slide26.xml><?xml version="1.0" encoding="utf-8"?>
-<p:sld xmlns:a="http://schemas.openxmlformats.org/drawingml/2006/main" xmlns:r="http://schemas.openxmlformats.org/officeDocument/2006/relationships" xmlns:p="http://schemas.openxmlformats.org/presentationml/2006/main">
-  <p:cSld>
-    <p:spTree>
-      <p:nvGrpSpPr>
-        <p:cNvPr id="1" name="">
-          <a:extLst>
-            <a:ext uri="{FF2B5EF4-FFF2-40B4-BE49-F238E27FC236}">
-              <a16:creationId xmlns:a16="http://schemas.microsoft.com/office/drawing/2014/main" id="{DE10B4C0-D2DA-C971-950B-7592E41BCE06}"/>
-            </a:ext>
-          </a:extLst>
-        </p:cNvPr>
-        <p:cNvGrpSpPr/>
-        <p:nvPr/>
-      </p:nvGrpSpPr>
-      <p:grpSpPr>
-        <a:xfrm>
-          <a:off x="0" y="0"/>
-          <a:ext cx="0" cy="0"/>
-          <a:chOff x="0" y="0"/>
-          <a:chExt cx="0" cy="0"/>
-        </a:xfrm>
-      </p:grpSpPr>
-      <p:sp>
-        <p:nvSpPr>
-          <p:cNvPr id="28" name="Title 1">
-            <a:extLst>
-              <a:ext uri="{FF2B5EF4-FFF2-40B4-BE49-F238E27FC236}">
-                <a16:creationId xmlns:a16="http://schemas.microsoft.com/office/drawing/2014/main" id="{B22E17D0-5CF0-E895-6DAB-A7B00BFB1A9B}"/>
-              </a:ext>
-            </a:extLst>
-          </p:cNvPr>
-          <p:cNvSpPr>
-            <a:spLocks noGrp="1"/>
-          </p:cNvSpPr>
-          <p:nvPr>
-            <p:ph type="title"/>
-          </p:nvPr>
-        </p:nvSpPr>
-        <p:spPr/>
-        <p:txBody>
-          <a:bodyPr>
-            <a:normAutofit fontScale="90000"/>
-          </a:bodyPr>
-          <a:lstStyle/>
-          <a:p>
-            <a:r>
-              <a:rPr lang="en-US" sz="4000" dirty="0"/>
-              <a:t>CFIHOS Ontology Approach 2: property groups</a:t>
-            </a:r>
-            <a:endParaRPr lang="en-US" sz="4000" b="1" dirty="0"/>
-          </a:p>
-        </p:txBody>
-      </p:sp>
-      <p:sp>
-        <p:nvSpPr>
-          <p:cNvPr id="8" name="Marcador de texto 7">
-            <a:extLst>
-              <a:ext uri="{FF2B5EF4-FFF2-40B4-BE49-F238E27FC236}">
-                <a16:creationId xmlns:a16="http://schemas.microsoft.com/office/drawing/2014/main" id="{A038D119-F6BC-4748-BDEA-DEF6F9540CBC}"/>
-              </a:ext>
-            </a:extLst>
-          </p:cNvPr>
-          <p:cNvSpPr>
-            <a:spLocks noGrp="1"/>
-          </p:cNvSpPr>
-          <p:nvPr>
-            <p:ph type="body" idx="1"/>
-          </p:nvPr>
-        </p:nvSpPr>
-        <p:spPr>
-          <a:xfrm>
-            <a:off x="415600" y="1536633"/>
-            <a:ext cx="6220990" cy="4555200"/>
-          </a:xfrm>
-        </p:spPr>
-        <p:txBody>
-          <a:bodyPr>
-            <a:normAutofit/>
-          </a:bodyPr>
-          <a:lstStyle/>
-          <a:p>
-            <a:r>
-              <a:rPr lang="en-GB" sz="2200" dirty="0"/>
-              <a:t>Property groups were modelled as classes</a:t>
-            </a:r>
-          </a:p>
-          <a:p>
-            <a:endParaRPr lang="en-GB" sz="2200" dirty="0"/>
-          </a:p>
-          <a:p>
-            <a:r>
-              <a:rPr lang="en-GB" sz="2200" dirty="0"/>
-              <a:t>Use of the annotation property </a:t>
-            </a:r>
-            <a:r>
-              <a:rPr lang="en-GB" sz="2200" i="1" dirty="0" err="1"/>
-              <a:t>schema:category</a:t>
-            </a:r>
-            <a:r>
-              <a:rPr lang="en-GB" sz="2200" i="1" dirty="0"/>
-              <a:t> </a:t>
-            </a:r>
-            <a:r>
-              <a:rPr lang="en-GB" sz="2200" dirty="0"/>
-              <a:t>to link a property with its property group</a:t>
-            </a:r>
-          </a:p>
-        </p:txBody>
-      </p:sp>
-      <p:pic>
-        <p:nvPicPr>
-          <p:cNvPr id="3" name="Imagen 2" descr="Texto, Carta&#10;&#10;El contenido generado por IA puede ser incorrecto.">
-            <a:extLst>
-              <a:ext uri="{FF2B5EF4-FFF2-40B4-BE49-F238E27FC236}">
-                <a16:creationId xmlns:a16="http://schemas.microsoft.com/office/drawing/2014/main" id="{DD13EB2A-C1BD-AF76-DF14-0AFCA2663E43}"/>
-              </a:ext>
-            </a:extLst>
-          </p:cNvPr>
-          <p:cNvPicPr>
-            <a:picLocks noChangeAspect="1"/>
-          </p:cNvPicPr>
-          <p:nvPr/>
-        </p:nvPicPr>
-        <p:blipFill>
-          <a:blip r:embed="rId3"/>
-          <a:srcRect b="42355"/>
-          <a:stretch>
-            <a:fillRect/>
-          </a:stretch>
-        </p:blipFill>
-        <p:spPr>
-          <a:xfrm>
-            <a:off x="6636590" y="1536633"/>
-            <a:ext cx="4363059" cy="1241073"/>
-          </a:xfrm>
-          <a:prstGeom prst="rect">
-            <a:avLst/>
-          </a:prstGeom>
-        </p:spPr>
-      </p:pic>
-      <p:pic>
-        <p:nvPicPr>
-          <p:cNvPr id="2" name="Imagen 1">
-            <a:extLst>
-              <a:ext uri="{FF2B5EF4-FFF2-40B4-BE49-F238E27FC236}">
-                <a16:creationId xmlns:a16="http://schemas.microsoft.com/office/drawing/2014/main" id="{7F13848D-4FF1-5693-8C8F-1A18DE76682C}"/>
-              </a:ext>
-            </a:extLst>
-          </p:cNvPr>
-          <p:cNvPicPr>
-            <a:picLocks noChangeAspect="1"/>
-          </p:cNvPicPr>
-          <p:nvPr/>
-        </p:nvPicPr>
-        <p:blipFill>
-          <a:blip r:embed="rId4"/>
-          <a:stretch>
-            <a:fillRect/>
-          </a:stretch>
-        </p:blipFill>
-        <p:spPr>
-          <a:xfrm>
-            <a:off x="1732722" y="3814233"/>
-            <a:ext cx="7772400" cy="1871413"/>
-          </a:xfrm>
-          <a:prstGeom prst="rect">
-            <a:avLst/>
-          </a:prstGeom>
-        </p:spPr>
-      </p:pic>
-    </p:spTree>
-    <p:extLst>
-      <p:ext uri="{BB962C8B-B14F-4D97-AF65-F5344CB8AC3E}">
-        <p14:creationId xmlns:p14="http://schemas.microsoft.com/office/powerpoint/2010/main" val="624026556"/>
-      </p:ext>
-    </p:extLst>
-  </p:cSld>
-  <p:clrMapOvr>
-    <a:masterClrMapping/>
-  </p:clrMapOvr>
-</p:sld>
-</file>
-
-<file path=ppt/slides/slide27.xml><?xml version="1.0" encoding="utf-8"?>
 <p:sld xmlns:a="http://schemas.openxmlformats.org/drawingml/2006/main" xmlns:r="http://schemas.openxmlformats.org/officeDocument/2006/relationships" xmlns:p="http://schemas.openxmlformats.org/presentationml/2006/main">
   <p:cSld>
     <p:spTree>
@@ -27180,7 +26174,12 @@
             <p:ph type="title"/>
           </p:nvPr>
         </p:nvSpPr>
-        <p:spPr/>
+        <p:spPr>
+          <a:xfrm>
+            <a:off x="0" y="593367"/>
+            <a:ext cx="12192000" cy="763600"/>
+          </a:xfrm>
+        </p:spPr>
         <p:txBody>
           <a:bodyPr>
             <a:noAutofit/>
@@ -27188,10 +26187,10 @@
           <a:lstStyle/>
           <a:p>
             <a:r>
-              <a:rPr lang="en-US" sz="2800" dirty="0"/>
-              <a:t>CFIHOS Ontology Approach 2: mappings to other standards</a:t>
-            </a:r>
-            <a:endParaRPr lang="en-US" sz="2800" b="1" dirty="0"/>
+              <a:rPr lang="en-US" sz="3600" dirty="0"/>
+              <a:t>Other modelling aspects: mappings to other standards</a:t>
+            </a:r>
+            <a:endParaRPr lang="en-US" sz="3600" b="1" dirty="0"/>
           </a:p>
         </p:txBody>
       </p:sp>
@@ -27346,7 +26345,7 @@
 </p:sld>
 </file>
 
-<file path=ppt/slides/slide28.xml><?xml version="1.0" encoding="utf-8"?>
+<file path=ppt/slides/slide26.xml><?xml version="1.0" encoding="utf-8"?>
 <p:sld xmlns:a="http://schemas.openxmlformats.org/drawingml/2006/main" xmlns:r="http://schemas.openxmlformats.org/officeDocument/2006/relationships" xmlns:p="http://schemas.openxmlformats.org/presentationml/2006/main">
   <p:cSld>
     <p:spTree>
@@ -27435,7 +26434,7 @@
           <a:p>
             <a:r>
               <a:rPr lang="en-US" dirty="0"/>
-              <a:t>The ontology was tested by using a set of 14+1 competency questions (CQ).</a:t>
+              <a:t>The ontology was tested by using a set of 15 competency questions (CQ).</a:t>
             </a:r>
           </a:p>
           <a:p>
@@ -27507,8 +26506,8 @@
 </p:sld>
 </file>
 
-<file path=ppt/slides/slide29.xml><?xml version="1.0" encoding="utf-8"?>
-<p:sld xmlns:a="http://schemas.openxmlformats.org/drawingml/2006/main" xmlns:r="http://schemas.openxmlformats.org/officeDocument/2006/relationships" xmlns:p="http://schemas.openxmlformats.org/presentationml/2006/main" show="0">
+<file path=ppt/slides/slide27.xml><?xml version="1.0" encoding="utf-8"?>
+<p:sld xmlns:a="http://schemas.openxmlformats.org/drawingml/2006/main" xmlns:r="http://schemas.openxmlformats.org/officeDocument/2006/relationships" xmlns:p="http://schemas.openxmlformats.org/presentationml/2006/main">
   <p:cSld>
     <p:spTree>
       <p:nvGrpSpPr>
@@ -27630,6 +26629,300 @@
     <p:extLst>
       <p:ext uri="{BB962C8B-B14F-4D97-AF65-F5344CB8AC3E}">
         <p14:creationId xmlns:p14="http://schemas.microsoft.com/office/powerpoint/2010/main" val="1318075338"/>
+      </p:ext>
+    </p:extLst>
+  </p:cSld>
+  <p:clrMapOvr>
+    <a:masterClrMapping/>
+  </p:clrMapOvr>
+</p:sld>
+</file>
+
+<file path=ppt/slides/slide28.xml><?xml version="1.0" encoding="utf-8"?>
+<p:sld xmlns:a="http://schemas.openxmlformats.org/drawingml/2006/main" xmlns:r="http://schemas.openxmlformats.org/officeDocument/2006/relationships" xmlns:p="http://schemas.openxmlformats.org/presentationml/2006/main">
+  <p:cSld>
+    <p:spTree>
+      <p:nvGrpSpPr>
+        <p:cNvPr id="1" name="">
+          <a:extLst>
+            <a:ext uri="{FF2B5EF4-FFF2-40B4-BE49-F238E27FC236}">
+              <a16:creationId xmlns:a16="http://schemas.microsoft.com/office/drawing/2014/main" id="{6A47CBFD-AD5F-A68B-318D-E9D2ACEE2A40}"/>
+            </a:ext>
+          </a:extLst>
+        </p:cNvPr>
+        <p:cNvGrpSpPr/>
+        <p:nvPr/>
+      </p:nvGrpSpPr>
+      <p:grpSpPr>
+        <a:xfrm>
+          <a:off x="0" y="0"/>
+          <a:ext cx="0" cy="0"/>
+          <a:chOff x="0" y="0"/>
+          <a:chExt cx="0" cy="0"/>
+        </a:xfrm>
+      </p:grpSpPr>
+      <p:sp>
+        <p:nvSpPr>
+          <p:cNvPr id="28" name="Title 1">
+            <a:extLst>
+              <a:ext uri="{FF2B5EF4-FFF2-40B4-BE49-F238E27FC236}">
+                <a16:creationId xmlns:a16="http://schemas.microsoft.com/office/drawing/2014/main" id="{4044E2B9-569E-8A8C-75EB-340206C68B9A}"/>
+              </a:ext>
+            </a:extLst>
+          </p:cNvPr>
+          <p:cNvSpPr>
+            <a:spLocks noGrp="1"/>
+          </p:cNvSpPr>
+          <p:nvPr>
+            <p:ph type="title"/>
+          </p:nvPr>
+        </p:nvSpPr>
+        <p:spPr>
+          <a:xfrm>
+            <a:off x="415600" y="593367"/>
+            <a:ext cx="11360800" cy="763600"/>
+          </a:xfrm>
+        </p:spPr>
+        <p:txBody>
+          <a:bodyPr>
+            <a:normAutofit/>
+          </a:bodyPr>
+          <a:lstStyle/>
+          <a:p>
+            <a:r>
+              <a:rPr lang="en-US" sz="4000" dirty="0"/>
+              <a:t>Testing the CFIHOS ontology</a:t>
+            </a:r>
+            <a:endParaRPr lang="en-US" sz="4000" b="1" dirty="0"/>
+          </a:p>
+        </p:txBody>
+      </p:sp>
+      <p:pic>
+        <p:nvPicPr>
+          <p:cNvPr id="5" name="Imagen 4" descr="Icono&#10;&#10;El contenido generado por IA puede ser incorrecto.">
+            <a:extLst>
+              <a:ext uri="{FF2B5EF4-FFF2-40B4-BE49-F238E27FC236}">
+                <a16:creationId xmlns:a16="http://schemas.microsoft.com/office/drawing/2014/main" id="{5A40C384-B9C2-75D4-7B8B-39F2D03DF5C1}"/>
+              </a:ext>
+            </a:extLst>
+          </p:cNvPr>
+          <p:cNvPicPr>
+            <a:picLocks noChangeAspect="1"/>
+          </p:cNvPicPr>
+          <p:nvPr/>
+        </p:nvPicPr>
+        <p:blipFill>
+          <a:blip r:embed="rId3"/>
+          <a:stretch>
+            <a:fillRect/>
+          </a:stretch>
+        </p:blipFill>
+        <p:spPr>
+          <a:xfrm>
+            <a:off x="7751700" y="3586386"/>
+            <a:ext cx="3806734" cy="2397797"/>
+          </a:xfrm>
+          <a:prstGeom prst="rect">
+            <a:avLst/>
+          </a:prstGeom>
+        </p:spPr>
+      </p:pic>
+      <p:pic>
+        <p:nvPicPr>
+          <p:cNvPr id="3" name="Imagen 2">
+            <a:extLst>
+              <a:ext uri="{FF2B5EF4-FFF2-40B4-BE49-F238E27FC236}">
+                <a16:creationId xmlns:a16="http://schemas.microsoft.com/office/drawing/2014/main" id="{9487C66F-B75E-6F69-3B25-B3DCFB9F1EC8}"/>
+              </a:ext>
+            </a:extLst>
+          </p:cNvPr>
+          <p:cNvPicPr>
+            <a:picLocks noChangeAspect="1"/>
+          </p:cNvPicPr>
+          <p:nvPr/>
+        </p:nvPicPr>
+        <p:blipFill>
+          <a:blip r:embed="rId4"/>
+          <a:stretch>
+            <a:fillRect/>
+          </a:stretch>
+        </p:blipFill>
+        <p:spPr>
+          <a:xfrm>
+            <a:off x="415600" y="1743912"/>
+            <a:ext cx="5701285" cy="1758413"/>
+          </a:xfrm>
+          <a:prstGeom prst="rect">
+            <a:avLst/>
+          </a:prstGeom>
+        </p:spPr>
+      </p:pic>
+    </p:spTree>
+    <p:extLst>
+      <p:ext uri="{BB962C8B-B14F-4D97-AF65-F5344CB8AC3E}">
+        <p14:creationId xmlns:p14="http://schemas.microsoft.com/office/powerpoint/2010/main" val="282612169"/>
+      </p:ext>
+    </p:extLst>
+  </p:cSld>
+  <p:clrMapOvr>
+    <a:masterClrMapping/>
+  </p:clrMapOvr>
+</p:sld>
+</file>
+
+<file path=ppt/slides/slide29.xml><?xml version="1.0" encoding="utf-8"?>
+<p:sld xmlns:a="http://schemas.openxmlformats.org/drawingml/2006/main" xmlns:r="http://schemas.openxmlformats.org/officeDocument/2006/relationships" xmlns:p="http://schemas.openxmlformats.org/presentationml/2006/main">
+  <p:cSld>
+    <p:spTree>
+      <p:nvGrpSpPr>
+        <p:cNvPr id="1" name="">
+          <a:extLst>
+            <a:ext uri="{FF2B5EF4-FFF2-40B4-BE49-F238E27FC236}">
+              <a16:creationId xmlns:a16="http://schemas.microsoft.com/office/drawing/2014/main" id="{E8A03AF6-19E8-A901-BD72-71E36F2D4A64}"/>
+            </a:ext>
+          </a:extLst>
+        </p:cNvPr>
+        <p:cNvGrpSpPr/>
+        <p:nvPr/>
+      </p:nvGrpSpPr>
+      <p:grpSpPr>
+        <a:xfrm>
+          <a:off x="0" y="0"/>
+          <a:ext cx="0" cy="0"/>
+          <a:chOff x="0" y="0"/>
+          <a:chExt cx="0" cy="0"/>
+        </a:xfrm>
+      </p:grpSpPr>
+      <p:sp>
+        <p:nvSpPr>
+          <p:cNvPr id="28" name="Title 1">
+            <a:extLst>
+              <a:ext uri="{FF2B5EF4-FFF2-40B4-BE49-F238E27FC236}">
+                <a16:creationId xmlns:a16="http://schemas.microsoft.com/office/drawing/2014/main" id="{841AC314-9A4C-31D1-D1BA-5A1B1451FE76}"/>
+              </a:ext>
+            </a:extLst>
+          </p:cNvPr>
+          <p:cNvSpPr>
+            <a:spLocks noGrp="1"/>
+          </p:cNvSpPr>
+          <p:nvPr>
+            <p:ph type="title"/>
+          </p:nvPr>
+        </p:nvSpPr>
+        <p:spPr>
+          <a:xfrm>
+            <a:off x="415600" y="593367"/>
+            <a:ext cx="11360800" cy="763600"/>
+          </a:xfrm>
+        </p:spPr>
+        <p:txBody>
+          <a:bodyPr>
+            <a:normAutofit/>
+          </a:bodyPr>
+          <a:lstStyle/>
+          <a:p>
+            <a:r>
+              <a:rPr lang="en-US" sz="4000" dirty="0"/>
+              <a:t>Testing the CFIHOS ontology</a:t>
+            </a:r>
+            <a:endParaRPr lang="en-US" sz="4000" b="1" dirty="0"/>
+          </a:p>
+        </p:txBody>
+      </p:sp>
+      <p:pic>
+        <p:nvPicPr>
+          <p:cNvPr id="5" name="Imagen 4" descr="Icono&#10;&#10;El contenido generado por IA puede ser incorrecto.">
+            <a:extLst>
+              <a:ext uri="{FF2B5EF4-FFF2-40B4-BE49-F238E27FC236}">
+                <a16:creationId xmlns:a16="http://schemas.microsoft.com/office/drawing/2014/main" id="{7802E86F-CF06-1D97-B6F5-EF4B02DAB6C0}"/>
+              </a:ext>
+            </a:extLst>
+          </p:cNvPr>
+          <p:cNvPicPr>
+            <a:picLocks noChangeAspect="1"/>
+          </p:cNvPicPr>
+          <p:nvPr/>
+        </p:nvPicPr>
+        <p:blipFill>
+          <a:blip r:embed="rId3"/>
+          <a:stretch>
+            <a:fillRect/>
+          </a:stretch>
+        </p:blipFill>
+        <p:spPr>
+          <a:xfrm>
+            <a:off x="7751700" y="3586386"/>
+            <a:ext cx="3806734" cy="2397797"/>
+          </a:xfrm>
+          <a:prstGeom prst="rect">
+            <a:avLst/>
+          </a:prstGeom>
+        </p:spPr>
+      </p:pic>
+      <p:pic>
+        <p:nvPicPr>
+          <p:cNvPr id="4" name="Imagen 3">
+            <a:extLst>
+              <a:ext uri="{FF2B5EF4-FFF2-40B4-BE49-F238E27FC236}">
+                <a16:creationId xmlns:a16="http://schemas.microsoft.com/office/drawing/2014/main" id="{DD1358B5-3981-33D2-2398-1BD47306E926}"/>
+              </a:ext>
+            </a:extLst>
+          </p:cNvPr>
+          <p:cNvPicPr>
+            <a:picLocks noChangeAspect="1"/>
+          </p:cNvPicPr>
+          <p:nvPr/>
+        </p:nvPicPr>
+        <p:blipFill>
+          <a:blip r:embed="rId4"/>
+          <a:stretch>
+            <a:fillRect/>
+          </a:stretch>
+        </p:blipFill>
+        <p:spPr>
+          <a:xfrm>
+            <a:off x="541049" y="1734824"/>
+            <a:ext cx="11490185" cy="1221440"/>
+          </a:xfrm>
+          <a:prstGeom prst="rect">
+            <a:avLst/>
+          </a:prstGeom>
+        </p:spPr>
+      </p:pic>
+      <p:pic>
+        <p:nvPicPr>
+          <p:cNvPr id="6" name="Imagen 5">
+            <a:extLst>
+              <a:ext uri="{FF2B5EF4-FFF2-40B4-BE49-F238E27FC236}">
+                <a16:creationId xmlns:a16="http://schemas.microsoft.com/office/drawing/2014/main" id="{90F5D4DB-71A3-0323-4EDE-E9185E65D3EC}"/>
+              </a:ext>
+            </a:extLst>
+          </p:cNvPr>
+          <p:cNvPicPr>
+            <a:picLocks noChangeAspect="1"/>
+          </p:cNvPicPr>
+          <p:nvPr/>
+        </p:nvPicPr>
+        <p:blipFill>
+          <a:blip r:embed="rId5"/>
+          <a:stretch>
+            <a:fillRect/>
+          </a:stretch>
+        </p:blipFill>
+        <p:spPr>
+          <a:xfrm>
+            <a:off x="541050" y="3593238"/>
+            <a:ext cx="5660032" cy="1029097"/>
+          </a:xfrm>
+          <a:prstGeom prst="rect">
+            <a:avLst/>
+          </a:prstGeom>
+        </p:spPr>
+      </p:pic>
+    </p:spTree>
+    <p:extLst>
+      <p:ext uri="{BB962C8B-B14F-4D97-AF65-F5344CB8AC3E}">
+        <p14:creationId xmlns:p14="http://schemas.microsoft.com/office/powerpoint/2010/main" val="4034572620"/>
       </p:ext>
     </p:extLst>
   </p:cSld>
@@ -27799,301 +27092,7 @@
 </file>
 
 <file path=ppt/slides/slide30.xml><?xml version="1.0" encoding="utf-8"?>
-<p:sld xmlns:a="http://schemas.openxmlformats.org/drawingml/2006/main" xmlns:r="http://schemas.openxmlformats.org/officeDocument/2006/relationships" xmlns:p="http://schemas.openxmlformats.org/presentationml/2006/main" show="0">
-  <p:cSld>
-    <p:spTree>
-      <p:nvGrpSpPr>
-        <p:cNvPr id="1" name="">
-          <a:extLst>
-            <a:ext uri="{FF2B5EF4-FFF2-40B4-BE49-F238E27FC236}">
-              <a16:creationId xmlns:a16="http://schemas.microsoft.com/office/drawing/2014/main" id="{6A47CBFD-AD5F-A68B-318D-E9D2ACEE2A40}"/>
-            </a:ext>
-          </a:extLst>
-        </p:cNvPr>
-        <p:cNvGrpSpPr/>
-        <p:nvPr/>
-      </p:nvGrpSpPr>
-      <p:grpSpPr>
-        <a:xfrm>
-          <a:off x="0" y="0"/>
-          <a:ext cx="0" cy="0"/>
-          <a:chOff x="0" y="0"/>
-          <a:chExt cx="0" cy="0"/>
-        </a:xfrm>
-      </p:grpSpPr>
-      <p:sp>
-        <p:nvSpPr>
-          <p:cNvPr id="28" name="Title 1">
-            <a:extLst>
-              <a:ext uri="{FF2B5EF4-FFF2-40B4-BE49-F238E27FC236}">
-                <a16:creationId xmlns:a16="http://schemas.microsoft.com/office/drawing/2014/main" id="{4044E2B9-569E-8A8C-75EB-340206C68B9A}"/>
-              </a:ext>
-            </a:extLst>
-          </p:cNvPr>
-          <p:cNvSpPr>
-            <a:spLocks noGrp="1"/>
-          </p:cNvSpPr>
-          <p:nvPr>
-            <p:ph type="title"/>
-          </p:nvPr>
-        </p:nvSpPr>
-        <p:spPr>
-          <a:xfrm>
-            <a:off x="415600" y="593367"/>
-            <a:ext cx="11360800" cy="763600"/>
-          </a:xfrm>
-        </p:spPr>
-        <p:txBody>
-          <a:bodyPr>
-            <a:normAutofit/>
-          </a:bodyPr>
-          <a:lstStyle/>
-          <a:p>
-            <a:r>
-              <a:rPr lang="en-US" sz="4000" dirty="0"/>
-              <a:t>Testing the CFIHOS ontology</a:t>
-            </a:r>
-            <a:endParaRPr lang="en-US" sz="4000" b="1" dirty="0"/>
-          </a:p>
-        </p:txBody>
-      </p:sp>
-      <p:pic>
-        <p:nvPicPr>
-          <p:cNvPr id="5" name="Imagen 4" descr="Icono&#10;&#10;El contenido generado por IA puede ser incorrecto.">
-            <a:extLst>
-              <a:ext uri="{FF2B5EF4-FFF2-40B4-BE49-F238E27FC236}">
-                <a16:creationId xmlns:a16="http://schemas.microsoft.com/office/drawing/2014/main" id="{5A40C384-B9C2-75D4-7B8B-39F2D03DF5C1}"/>
-              </a:ext>
-            </a:extLst>
-          </p:cNvPr>
-          <p:cNvPicPr>
-            <a:picLocks noChangeAspect="1"/>
-          </p:cNvPicPr>
-          <p:nvPr/>
-        </p:nvPicPr>
-        <p:blipFill>
-          <a:blip r:embed="rId3"/>
-          <a:stretch>
-            <a:fillRect/>
-          </a:stretch>
-        </p:blipFill>
-        <p:spPr>
-          <a:xfrm>
-            <a:off x="7751700" y="3586386"/>
-            <a:ext cx="3806734" cy="2397797"/>
-          </a:xfrm>
-          <a:prstGeom prst="rect">
-            <a:avLst/>
-          </a:prstGeom>
-        </p:spPr>
-      </p:pic>
-      <p:pic>
-        <p:nvPicPr>
-          <p:cNvPr id="3" name="Imagen 2">
-            <a:extLst>
-              <a:ext uri="{FF2B5EF4-FFF2-40B4-BE49-F238E27FC236}">
-                <a16:creationId xmlns:a16="http://schemas.microsoft.com/office/drawing/2014/main" id="{9487C66F-B75E-6F69-3B25-B3DCFB9F1EC8}"/>
-              </a:ext>
-            </a:extLst>
-          </p:cNvPr>
-          <p:cNvPicPr>
-            <a:picLocks noChangeAspect="1"/>
-          </p:cNvPicPr>
-          <p:nvPr/>
-        </p:nvPicPr>
-        <p:blipFill>
-          <a:blip r:embed="rId4"/>
-          <a:stretch>
-            <a:fillRect/>
-          </a:stretch>
-        </p:blipFill>
-        <p:spPr>
-          <a:xfrm>
-            <a:off x="415600" y="1743912"/>
-            <a:ext cx="5701285" cy="1758413"/>
-          </a:xfrm>
-          <a:prstGeom prst="rect">
-            <a:avLst/>
-          </a:prstGeom>
-        </p:spPr>
-      </p:pic>
-    </p:spTree>
-    <p:extLst>
-      <p:ext uri="{BB962C8B-B14F-4D97-AF65-F5344CB8AC3E}">
-        <p14:creationId xmlns:p14="http://schemas.microsoft.com/office/powerpoint/2010/main" val="282612169"/>
-      </p:ext>
-    </p:extLst>
-  </p:cSld>
-  <p:clrMapOvr>
-    <a:masterClrMapping/>
-  </p:clrMapOvr>
-</p:sld>
-</file>
-
-<file path=ppt/slides/slide31.xml><?xml version="1.0" encoding="utf-8"?>
-<p:sld xmlns:a="http://schemas.openxmlformats.org/drawingml/2006/main" xmlns:r="http://schemas.openxmlformats.org/officeDocument/2006/relationships" xmlns:p="http://schemas.openxmlformats.org/presentationml/2006/main" show="0">
-  <p:cSld>
-    <p:spTree>
-      <p:nvGrpSpPr>
-        <p:cNvPr id="1" name="">
-          <a:extLst>
-            <a:ext uri="{FF2B5EF4-FFF2-40B4-BE49-F238E27FC236}">
-              <a16:creationId xmlns:a16="http://schemas.microsoft.com/office/drawing/2014/main" id="{E8A03AF6-19E8-A901-BD72-71E36F2D4A64}"/>
-            </a:ext>
-          </a:extLst>
-        </p:cNvPr>
-        <p:cNvGrpSpPr/>
-        <p:nvPr/>
-      </p:nvGrpSpPr>
-      <p:grpSpPr>
-        <a:xfrm>
-          <a:off x="0" y="0"/>
-          <a:ext cx="0" cy="0"/>
-          <a:chOff x="0" y="0"/>
-          <a:chExt cx="0" cy="0"/>
-        </a:xfrm>
-      </p:grpSpPr>
-      <p:sp>
-        <p:nvSpPr>
-          <p:cNvPr id="28" name="Title 1">
-            <a:extLst>
-              <a:ext uri="{FF2B5EF4-FFF2-40B4-BE49-F238E27FC236}">
-                <a16:creationId xmlns:a16="http://schemas.microsoft.com/office/drawing/2014/main" id="{841AC314-9A4C-31D1-D1BA-5A1B1451FE76}"/>
-              </a:ext>
-            </a:extLst>
-          </p:cNvPr>
-          <p:cNvSpPr>
-            <a:spLocks noGrp="1"/>
-          </p:cNvSpPr>
-          <p:nvPr>
-            <p:ph type="title"/>
-          </p:nvPr>
-        </p:nvSpPr>
-        <p:spPr>
-          <a:xfrm>
-            <a:off x="415600" y="593367"/>
-            <a:ext cx="11360800" cy="763600"/>
-          </a:xfrm>
-        </p:spPr>
-        <p:txBody>
-          <a:bodyPr>
-            <a:normAutofit/>
-          </a:bodyPr>
-          <a:lstStyle/>
-          <a:p>
-            <a:r>
-              <a:rPr lang="en-US" sz="4000" dirty="0"/>
-              <a:t>Testing the CFIHOS ontology</a:t>
-            </a:r>
-            <a:endParaRPr lang="en-US" sz="4000" b="1" dirty="0"/>
-          </a:p>
-        </p:txBody>
-      </p:sp>
-      <p:pic>
-        <p:nvPicPr>
-          <p:cNvPr id="5" name="Imagen 4" descr="Icono&#10;&#10;El contenido generado por IA puede ser incorrecto.">
-            <a:extLst>
-              <a:ext uri="{FF2B5EF4-FFF2-40B4-BE49-F238E27FC236}">
-                <a16:creationId xmlns:a16="http://schemas.microsoft.com/office/drawing/2014/main" id="{7802E86F-CF06-1D97-B6F5-EF4B02DAB6C0}"/>
-              </a:ext>
-            </a:extLst>
-          </p:cNvPr>
-          <p:cNvPicPr>
-            <a:picLocks noChangeAspect="1"/>
-          </p:cNvPicPr>
-          <p:nvPr/>
-        </p:nvPicPr>
-        <p:blipFill>
-          <a:blip r:embed="rId3"/>
-          <a:stretch>
-            <a:fillRect/>
-          </a:stretch>
-        </p:blipFill>
-        <p:spPr>
-          <a:xfrm>
-            <a:off x="7751700" y="3586386"/>
-            <a:ext cx="3806734" cy="2397797"/>
-          </a:xfrm>
-          <a:prstGeom prst="rect">
-            <a:avLst/>
-          </a:prstGeom>
-        </p:spPr>
-      </p:pic>
-      <p:pic>
-        <p:nvPicPr>
-          <p:cNvPr id="4" name="Imagen 3">
-            <a:extLst>
-              <a:ext uri="{FF2B5EF4-FFF2-40B4-BE49-F238E27FC236}">
-                <a16:creationId xmlns:a16="http://schemas.microsoft.com/office/drawing/2014/main" id="{DD1358B5-3981-33D2-2398-1BD47306E926}"/>
-              </a:ext>
-            </a:extLst>
-          </p:cNvPr>
-          <p:cNvPicPr>
-            <a:picLocks noChangeAspect="1"/>
-          </p:cNvPicPr>
-          <p:nvPr/>
-        </p:nvPicPr>
-        <p:blipFill>
-          <a:blip r:embed="rId4"/>
-          <a:stretch>
-            <a:fillRect/>
-          </a:stretch>
-        </p:blipFill>
-        <p:spPr>
-          <a:xfrm>
-            <a:off x="541049" y="1734824"/>
-            <a:ext cx="11490185" cy="1221440"/>
-          </a:xfrm>
-          <a:prstGeom prst="rect">
-            <a:avLst/>
-          </a:prstGeom>
-        </p:spPr>
-      </p:pic>
-      <p:pic>
-        <p:nvPicPr>
-          <p:cNvPr id="6" name="Imagen 5">
-            <a:extLst>
-              <a:ext uri="{FF2B5EF4-FFF2-40B4-BE49-F238E27FC236}">
-                <a16:creationId xmlns:a16="http://schemas.microsoft.com/office/drawing/2014/main" id="{90F5D4DB-71A3-0323-4EDE-E9185E65D3EC}"/>
-              </a:ext>
-            </a:extLst>
-          </p:cNvPr>
-          <p:cNvPicPr>
-            <a:picLocks noChangeAspect="1"/>
-          </p:cNvPicPr>
-          <p:nvPr/>
-        </p:nvPicPr>
-        <p:blipFill>
-          <a:blip r:embed="rId5"/>
-          <a:stretch>
-            <a:fillRect/>
-          </a:stretch>
-        </p:blipFill>
-        <p:spPr>
-          <a:xfrm>
-            <a:off x="541050" y="3593238"/>
-            <a:ext cx="5660032" cy="1029097"/>
-          </a:xfrm>
-          <a:prstGeom prst="rect">
-            <a:avLst/>
-          </a:prstGeom>
-        </p:spPr>
-      </p:pic>
-    </p:spTree>
-    <p:extLst>
-      <p:ext uri="{BB962C8B-B14F-4D97-AF65-F5344CB8AC3E}">
-        <p14:creationId xmlns:p14="http://schemas.microsoft.com/office/powerpoint/2010/main" val="4034572620"/>
-      </p:ext>
-    </p:extLst>
-  </p:cSld>
-  <p:clrMapOvr>
-    <a:masterClrMapping/>
-  </p:clrMapOvr>
-</p:sld>
-</file>
-
-<file path=ppt/slides/slide32.xml><?xml version="1.0" encoding="utf-8"?>
-<p:sld xmlns:a="http://schemas.openxmlformats.org/drawingml/2006/main" xmlns:r="http://schemas.openxmlformats.org/officeDocument/2006/relationships" xmlns:p="http://schemas.openxmlformats.org/presentationml/2006/main" show="0">
+<p:sld xmlns:a="http://schemas.openxmlformats.org/drawingml/2006/main" xmlns:r="http://schemas.openxmlformats.org/officeDocument/2006/relationships" xmlns:p="http://schemas.openxmlformats.org/presentationml/2006/main">
   <p:cSld>
     <p:spTree>
       <p:nvGrpSpPr>
@@ -28224,8 +27223,8 @@
 </p:sld>
 </file>
 
-<file path=ppt/slides/slide33.xml><?xml version="1.0" encoding="utf-8"?>
-<p:sld xmlns:a="http://schemas.openxmlformats.org/drawingml/2006/main" xmlns:r="http://schemas.openxmlformats.org/officeDocument/2006/relationships" xmlns:p="http://schemas.openxmlformats.org/presentationml/2006/main" show="0">
+<file path=ppt/slides/slide31.xml><?xml version="1.0" encoding="utf-8"?>
+<p:sld xmlns:a="http://schemas.openxmlformats.org/drawingml/2006/main" xmlns:r="http://schemas.openxmlformats.org/officeDocument/2006/relationships" xmlns:p="http://schemas.openxmlformats.org/presentationml/2006/main">
   <p:cSld>
     <p:spTree>
       <p:nvGrpSpPr>
@@ -28356,7 +27355,7 @@
 </p:sld>
 </file>
 
-<file path=ppt/slides/slide34.xml><?xml version="1.0" encoding="utf-8"?>
+<file path=ppt/slides/slide32.xml><?xml version="1.0" encoding="utf-8"?>
 <p:sld xmlns:a="http://schemas.openxmlformats.org/drawingml/2006/main" xmlns:r="http://schemas.openxmlformats.org/officeDocument/2006/relationships" xmlns:p="http://schemas.openxmlformats.org/presentationml/2006/main">
   <p:cSld>
     <p:spTree>
@@ -28488,7 +27487,7 @@
 </p:sld>
 </file>
 
-<file path=ppt/slides/slide35.xml><?xml version="1.0" encoding="utf-8"?>
+<file path=ppt/slides/slide33.xml><?xml version="1.0" encoding="utf-8"?>
 <p:sld xmlns:a="http://schemas.openxmlformats.org/drawingml/2006/main" xmlns:r="http://schemas.openxmlformats.org/officeDocument/2006/relationships" xmlns:p="http://schemas.openxmlformats.org/presentationml/2006/main">
   <p:cSld>
     <p:spTree>
@@ -28541,7 +27540,109 @@
           <a:p>
             <a:r>
               <a:rPr lang="en-US" sz="4000" dirty="0"/>
-              <a:t>Next steps</a:t>
+              <a:t>The pattern in CFHIOS</a:t>
+            </a:r>
+            <a:endParaRPr lang="en-US" sz="4000" b="1" dirty="0"/>
+          </a:p>
+        </p:txBody>
+      </p:sp>
+      <p:pic>
+        <p:nvPicPr>
+          <p:cNvPr id="6" name="Imagen 5">
+            <a:extLst>
+              <a:ext uri="{FF2B5EF4-FFF2-40B4-BE49-F238E27FC236}">
+                <a16:creationId xmlns:a16="http://schemas.microsoft.com/office/drawing/2014/main" id="{0EAEBDE6-1C24-41AE-E46B-EE3D062C0454}"/>
+              </a:ext>
+            </a:extLst>
+          </p:cNvPr>
+          <p:cNvPicPr>
+            <a:picLocks noChangeAspect="1"/>
+          </p:cNvPicPr>
+          <p:nvPr/>
+        </p:nvPicPr>
+        <p:blipFill>
+          <a:blip r:embed="rId3"/>
+          <a:stretch>
+            <a:fillRect/>
+          </a:stretch>
+        </p:blipFill>
+        <p:spPr>
+          <a:xfrm>
+            <a:off x="1679987" y="1356967"/>
+            <a:ext cx="8312152" cy="5323513"/>
+          </a:xfrm>
+          <a:prstGeom prst="rect">
+            <a:avLst/>
+          </a:prstGeom>
+        </p:spPr>
+      </p:pic>
+    </p:spTree>
+    <p:extLst>
+      <p:ext uri="{BB962C8B-B14F-4D97-AF65-F5344CB8AC3E}">
+        <p14:creationId xmlns:p14="http://schemas.microsoft.com/office/powerpoint/2010/main" val="3099339232"/>
+      </p:ext>
+    </p:extLst>
+  </p:cSld>
+  <p:clrMapOvr>
+    <a:masterClrMapping/>
+  </p:clrMapOvr>
+</p:sld>
+</file>
+
+<file path=ppt/slides/slide34.xml><?xml version="1.0" encoding="utf-8"?>
+<p:sld xmlns:a="http://schemas.openxmlformats.org/drawingml/2006/main" xmlns:r="http://schemas.openxmlformats.org/officeDocument/2006/relationships" xmlns:p="http://schemas.openxmlformats.org/presentationml/2006/main">
+  <p:cSld>
+    <p:spTree>
+      <p:nvGrpSpPr>
+        <p:cNvPr id="1" name="">
+          <a:extLst>
+            <a:ext uri="{FF2B5EF4-FFF2-40B4-BE49-F238E27FC236}">
+              <a16:creationId xmlns:a16="http://schemas.microsoft.com/office/drawing/2014/main" id="{0C5F5467-B11C-1874-0B66-EA55BB0241A8}"/>
+            </a:ext>
+          </a:extLst>
+        </p:cNvPr>
+        <p:cNvGrpSpPr/>
+        <p:nvPr/>
+      </p:nvGrpSpPr>
+      <p:grpSpPr>
+        <a:xfrm>
+          <a:off x="0" y="0"/>
+          <a:ext cx="0" cy="0"/>
+          <a:chOff x="0" y="0"/>
+          <a:chExt cx="0" cy="0"/>
+        </a:xfrm>
+      </p:grpSpPr>
+      <p:sp>
+        <p:nvSpPr>
+          <p:cNvPr id="28" name="Title 1">
+            <a:extLst>
+              <a:ext uri="{FF2B5EF4-FFF2-40B4-BE49-F238E27FC236}">
+                <a16:creationId xmlns:a16="http://schemas.microsoft.com/office/drawing/2014/main" id="{0E662F11-F3F8-E701-0F29-1339B00F676D}"/>
+              </a:ext>
+            </a:extLst>
+          </p:cNvPr>
+          <p:cNvSpPr>
+            <a:spLocks noGrp="1"/>
+          </p:cNvSpPr>
+          <p:nvPr>
+            <p:ph type="title"/>
+          </p:nvPr>
+        </p:nvSpPr>
+        <p:spPr>
+          <a:xfrm>
+            <a:off x="415600" y="593367"/>
+            <a:ext cx="11360800" cy="763600"/>
+          </a:xfrm>
+        </p:spPr>
+        <p:txBody>
+          <a:bodyPr>
+            <a:normAutofit/>
+          </a:bodyPr>
+          <a:lstStyle/>
+          <a:p>
+            <a:r>
+              <a:rPr lang="en-US" sz="4000" dirty="0"/>
+              <a:t>Summary</a:t>
             </a:r>
             <a:endParaRPr lang="en-US" sz="4000" b="1" dirty="0"/>
           </a:p>
@@ -28552,7 +27653,7 @@
           <p:cNvPr id="2" name="Marcador de texto 2">
             <a:extLst>
               <a:ext uri="{FF2B5EF4-FFF2-40B4-BE49-F238E27FC236}">
-                <a16:creationId xmlns:a16="http://schemas.microsoft.com/office/drawing/2014/main" id="{6C622C0E-A0BE-21D8-09E0-E28137FBDD26}"/>
+                <a16:creationId xmlns:a16="http://schemas.microsoft.com/office/drawing/2014/main" id="{01E4921C-1F36-0105-A715-3ABA17A0E93A}"/>
               </a:ext>
             </a:extLst>
           </p:cNvPr>
@@ -28571,89 +27672,44 @@
         </p:spPr>
         <p:txBody>
           <a:bodyPr>
-            <a:normAutofit fontScale="47500" lnSpcReduction="20000"/>
+            <a:normAutofit fontScale="92500" lnSpcReduction="20000"/>
           </a:bodyPr>
           <a:lstStyle/>
           <a:p>
             <a:r>
-              <a:rPr lang="en-US" sz="4500" dirty="0"/>
-              <a:t>Not modelled sheets</a:t>
-            </a:r>
-          </a:p>
-          <a:p>
-            <a:pPr lvl="1"/>
-            <a:r>
-              <a:rPr lang="en-US" sz="4500" b="1" dirty="0"/>
-              <a:t>handover event</a:t>
-            </a:r>
-            <a:r>
-              <a:rPr lang="en-US" sz="4500" dirty="0"/>
-              <a:t>: five types of project milestone. Worthy?</a:t>
-            </a:r>
-          </a:p>
-          <a:p>
-            <a:pPr lvl="1"/>
-            <a:r>
-              <a:rPr lang="en-US" sz="4500" b="1" dirty="0"/>
-              <a:t>Jip33 info required spec</a:t>
-            </a:r>
-            <a:r>
-              <a:rPr lang="en-US" sz="4500" dirty="0"/>
-              <a:t>: documents that define the information required for procuring equipment in the oil and gas industry. Needed in the ontology?</a:t>
-            </a:r>
-          </a:p>
-          <a:p>
-            <a:pPr lvl="1"/>
-            <a:r>
-              <a:rPr lang="en-US" sz="4500" b="1" dirty="0"/>
-              <a:t>Data dictionary</a:t>
-            </a:r>
-            <a:r>
-              <a:rPr lang="en-US" sz="4500" dirty="0"/>
-              <a:t>: definitions of classes and properties with format for properties. Maybe of interest for data validation (shapes)</a:t>
-            </a:r>
-          </a:p>
-          <a:p>
-            <a:pPr marL="152396" indent="0">
-              <a:buNone/>
-            </a:pPr>
+              <a:rPr lang="en-US" sz="3800" dirty="0"/>
+              <a:t>Development of a CFIHOS ontology following IDO</a:t>
+            </a:r>
+          </a:p>
+          <a:p>
+            <a:endParaRPr lang="en-US" sz="3800" dirty="0"/>
+          </a:p>
+          <a:p>
+            <a:r>
+              <a:rPr lang="en-US" sz="3800" dirty="0"/>
+              <a:t>Use of a modelling pattern that could be applied to other standards to promote data interoperability</a:t>
+            </a:r>
+          </a:p>
+          <a:p>
+            <a:endParaRPr lang="en-US" sz="3800" dirty="0"/>
+          </a:p>
+          <a:p>
+            <a:r>
+              <a:rPr lang="en-US" sz="3800" dirty="0"/>
+              <a:t>Need for validation from the CFIHOS community</a:t>
+            </a:r>
+          </a:p>
+          <a:p>
+            <a:endParaRPr lang="en-US" sz="3800" dirty="0"/>
+          </a:p>
+          <a:p>
+            <a:r>
+              <a:rPr lang="en-US" sz="3800" dirty="0"/>
+              <a:t>Tag vs equipment</a:t>
+            </a:r>
+          </a:p>
+          <a:p>
             <a:endParaRPr lang="en-US" sz="4500" dirty="0"/>
-          </a:p>
-          <a:p>
-            <a:r>
-              <a:rPr lang="en-US" sz="4500" dirty="0"/>
-              <a:t>Tag vs equipment</a:t>
-            </a:r>
-          </a:p>
-          <a:p>
-            <a:endParaRPr lang="en-US" sz="4500" dirty="0"/>
-          </a:p>
-          <a:p>
-            <a:r>
-              <a:rPr lang="en-US" sz="4500" dirty="0"/>
-              <a:t>Share the ontology with the CFIHOS community and the W3C community group  (https://www.w3.org/groups/cg/</a:t>
-            </a:r>
-            <a:r>
-              <a:rPr lang="en-US" sz="4500" dirty="0" err="1"/>
-              <a:t>oki</a:t>
-            </a:r>
-            <a:r>
-              <a:rPr lang="en-US" sz="4500" dirty="0"/>
-              <a:t>/)</a:t>
-            </a:r>
-          </a:p>
-          <a:p>
-            <a:pPr lvl="1"/>
-            <a:endParaRPr lang="en-US" sz="4500" dirty="0"/>
-          </a:p>
-          <a:p>
-            <a:endParaRPr lang="en-US" sz="4500" dirty="0"/>
-          </a:p>
-          <a:p>
-            <a:r>
-              <a:rPr lang="en-US" sz="4500" dirty="0"/>
-              <a:t>Alignment with CDM and other standards</a:t>
-            </a:r>
           </a:p>
           <a:p>
             <a:endParaRPr lang="en-US" dirty="0"/>
@@ -28663,7 +27719,7 @@
     </p:spTree>
     <p:extLst>
       <p:ext uri="{BB962C8B-B14F-4D97-AF65-F5344CB8AC3E}">
-        <p14:creationId xmlns:p14="http://schemas.microsoft.com/office/powerpoint/2010/main" val="3099339232"/>
+        <p14:creationId xmlns:p14="http://schemas.microsoft.com/office/powerpoint/2010/main" val="2297658136"/>
       </p:ext>
     </p:extLst>
   </p:cSld>
@@ -28673,7 +27729,7 @@
 </p:sld>
 </file>
 
-<file path=ppt/slides/slide36.xml><?xml version="1.0" encoding="utf-8"?>
+<file path=ppt/slides/slide35.xml><?xml version="1.0" encoding="utf-8"?>
 <p:sld xmlns:a="http://schemas.openxmlformats.org/drawingml/2006/main" xmlns:r="http://schemas.openxmlformats.org/officeDocument/2006/relationships" xmlns:p="http://schemas.openxmlformats.org/presentationml/2006/main">
   <p:cSld>
     <p:spTree>
@@ -28681,7 +27737,7 @@
         <p:cNvPr id="1" name="">
           <a:extLst>
             <a:ext uri="{FF2B5EF4-FFF2-40B4-BE49-F238E27FC236}">
-              <a16:creationId xmlns:a16="http://schemas.microsoft.com/office/drawing/2014/main" id="{ADEEC1DC-559E-C706-CC9D-263B1A7FB487}"/>
+              <a16:creationId xmlns:a16="http://schemas.microsoft.com/office/drawing/2014/main" id="{F930E104-E044-79DE-FD54-8A31F1CDC9F0}"/>
             </a:ext>
           </a:extLst>
         </p:cNvPr>
@@ -28701,7 +27757,7 @@
           <p:cNvPr id="2" name="Título 1">
             <a:extLst>
               <a:ext uri="{FF2B5EF4-FFF2-40B4-BE49-F238E27FC236}">
-                <a16:creationId xmlns:a16="http://schemas.microsoft.com/office/drawing/2014/main" id="{D5985E1A-2B75-8383-9FCD-41293F4EC18C}"/>
+                <a16:creationId xmlns:a16="http://schemas.microsoft.com/office/drawing/2014/main" id="{DAE27460-C9AC-B3B8-AD40-11428AE4529F}"/>
               </a:ext>
             </a:extLst>
           </p:cNvPr>
@@ -28715,7 +27771,7 @@
         <p:spPr>
           <a:xfrm>
             <a:off x="627063" y="1414800"/>
-            <a:ext cx="10321023" cy="3114000"/>
+            <a:ext cx="10211266" cy="3114000"/>
           </a:xfrm>
         </p:spPr>
         <p:txBody>
@@ -28724,18 +27780,12 @@
           <a:p>
             <a:r>
               <a:rPr lang="en-US" dirty="0"/>
-              <a:t>Towards the harmonization of industrial standards</a:t>
+              <a:t>Development of the CFIHOS ontology</a:t>
             </a:r>
             <a:br>
               <a:rPr lang="en-US" dirty="0"/>
             </a:br>
-            <a:br>
-              <a:rPr lang="en-US" dirty="0"/>
-            </a:br>
-            <a:r>
-              <a:rPr lang="en-US" dirty="0"/>
-              <a:t>Development of CFIHOS ontology</a:t>
-            </a:r>
+            <a:endParaRPr lang="en-US" dirty="0"/>
           </a:p>
         </p:txBody>
       </p:sp>
@@ -28744,7 +27794,7 @@
           <p:cNvPr id="4" name="Subtítulo 3">
             <a:extLst>
               <a:ext uri="{FF2B5EF4-FFF2-40B4-BE49-F238E27FC236}">
-                <a16:creationId xmlns:a16="http://schemas.microsoft.com/office/drawing/2014/main" id="{46B4D31F-F005-9F66-B8E9-E2C5D9CF0A85}"/>
+                <a16:creationId xmlns:a16="http://schemas.microsoft.com/office/drawing/2014/main" id="{CAEF1F5A-0367-4FE3-8555-8C1A27B99049}"/>
               </a:ext>
             </a:extLst>
           </p:cNvPr>
@@ -28787,8 +27837,6 @@
               <a:rPr lang="en-US" dirty="0"/>
               <a:t>Andreas Neumann</a:t>
             </a:r>
-          </a:p>
-          <a:p>
             <a:endParaRPr lang="en-US" noProof="0" dirty="0"/>
           </a:p>
           <a:p>
@@ -28799,96 +27847,37 @@
           </a:p>
         </p:txBody>
       </p:sp>
-    </p:spTree>
-    <p:extLst>
-      <p:ext uri="{BB962C8B-B14F-4D97-AF65-F5344CB8AC3E}">
-        <p14:creationId xmlns:p14="http://schemas.microsoft.com/office/powerpoint/2010/main" val="1505426191"/>
-      </p:ext>
-    </p:extLst>
-  </p:cSld>
-  <p:clrMapOvr>
-    <a:masterClrMapping/>
-  </p:clrMapOvr>
-</p:sld>
-</file>
-
-<file path=ppt/slides/slide37.xml><?xml version="1.0" encoding="utf-8"?>
-<p:sld xmlns:a="http://schemas.openxmlformats.org/drawingml/2006/main" xmlns:r="http://schemas.openxmlformats.org/officeDocument/2006/relationships" xmlns:p="http://schemas.openxmlformats.org/presentationml/2006/main">
-  <p:cSld>
-    <p:spTree>
-      <p:nvGrpSpPr>
-        <p:cNvPr id="1" name="">
-          <a:extLst>
-            <a:ext uri="{FF2B5EF4-FFF2-40B4-BE49-F238E27FC236}">
-              <a16:creationId xmlns:a16="http://schemas.microsoft.com/office/drawing/2014/main" id="{8FC10E3A-6C83-8613-BB5C-0B2CB9AF0BB3}"/>
-            </a:ext>
-          </a:extLst>
-        </p:cNvPr>
-        <p:cNvGrpSpPr/>
-        <p:nvPr/>
-      </p:nvGrpSpPr>
-      <p:grpSpPr>
-        <a:xfrm>
-          <a:off x="0" y="0"/>
-          <a:ext cx="0" cy="0"/>
-          <a:chOff x="0" y="0"/>
-          <a:chExt cx="0" cy="0"/>
-        </a:xfrm>
-      </p:grpSpPr>
-      <p:sp>
-        <p:nvSpPr>
-          <p:cNvPr id="28" name="Title 1">
-            <a:extLst>
-              <a:ext uri="{FF2B5EF4-FFF2-40B4-BE49-F238E27FC236}">
-                <a16:creationId xmlns:a16="http://schemas.microsoft.com/office/drawing/2014/main" id="{056D23A3-1B5D-B902-5E74-58819AFFAA02}"/>
-              </a:ext>
-            </a:extLst>
-          </p:cNvPr>
-          <p:cNvSpPr>
-            <a:spLocks noGrp="1"/>
-          </p:cNvSpPr>
-          <p:nvPr>
-            <p:ph type="title"/>
-          </p:nvPr>
-        </p:nvSpPr>
-        <p:spPr>
-          <a:xfrm>
-            <a:off x="415599" y="593367"/>
-            <a:ext cx="5047651" cy="763600"/>
-          </a:xfrm>
-        </p:spPr>
-        <p:txBody>
-          <a:bodyPr>
-            <a:normAutofit fontScale="90000"/>
-          </a:bodyPr>
-          <a:lstStyle/>
-          <a:p>
-            <a:r>
-              <a:rPr lang="en-US" sz="4000" dirty="0"/>
-              <a:t>Overview of the CDM</a:t>
-            </a:r>
-            <a:endParaRPr lang="en-US" sz="4000" b="1" dirty="0"/>
-          </a:p>
-        </p:txBody>
-      </p:sp>
-      <p:sp>
-        <p:nvSpPr>
-          <p:cNvPr id="7" name="AutoShape 2">
-            <a:extLst>
-              <a:ext uri="{FF2B5EF4-FFF2-40B4-BE49-F238E27FC236}">
-                <a16:creationId xmlns:a16="http://schemas.microsoft.com/office/drawing/2014/main" id="{F28C3650-4478-3C59-9BB5-B47210A988C4}"/>
-              </a:ext>
-            </a:extLst>
-          </p:cNvPr>
-          <p:cNvSpPr>
-            <a:spLocks noChangeAspect="1" noChangeArrowheads="1"/>
-          </p:cNvSpPr>
+      <p:pic>
+        <p:nvPicPr>
+          <p:cNvPr id="1026" name="Picture 2" descr="Nueva Identidad Visual UMU ...">
+            <a:extLst>
+              <a:ext uri="{FF2B5EF4-FFF2-40B4-BE49-F238E27FC236}">
+                <a16:creationId xmlns:a16="http://schemas.microsoft.com/office/drawing/2014/main" id="{DFC1F77A-BE60-94D3-398B-36CBAEF07B12}"/>
+              </a:ext>
+            </a:extLst>
+          </p:cNvPr>
+          <p:cNvPicPr>
+            <a:picLocks noChangeAspect="1" noChangeArrowheads="1"/>
+          </p:cNvPicPr>
           <p:nvPr/>
-        </p:nvSpPr>
+        </p:nvPicPr>
+        <p:blipFill>
+          <a:blip r:embed="rId3">
+            <a:extLst>
+              <a:ext uri="{28A0092B-C50C-407E-A947-70E740481C1C}">
+                <a14:useLocalDpi xmlns:a14="http://schemas.microsoft.com/office/drawing/2010/main" val="0"/>
+              </a:ext>
+            </a:extLst>
+          </a:blip>
+          <a:srcRect/>
+          <a:stretch>
+            <a:fillRect/>
+          </a:stretch>
+        </p:blipFill>
         <p:spPr bwMode="auto">
           <a:xfrm>
-            <a:off x="5943600" y="3276600"/>
-            <a:ext cx="304800" cy="304800"/>
+            <a:off x="7207250" y="228600"/>
+            <a:ext cx="2759319" cy="955985"/>
           </a:xfrm>
           <a:prstGeom prst="rect">
             <a:avLst/>
@@ -28904,154 +27893,11 @@
             </a:ext>
           </a:extLst>
         </p:spPr>
-        <p:txBody>
-          <a:bodyPr vert="horz" wrap="square" lIns="91440" tIns="45720" rIns="91440" bIns="45720" numCol="1" anchor="t" anchorCtr="0" compatLnSpc="1">
-            <a:prstTxWarp prst="textNoShape">
-              <a:avLst/>
-            </a:prstTxWarp>
-          </a:bodyPr>
-          <a:lstStyle/>
-          <a:p>
-            <a:endParaRPr lang="en-GB"/>
-          </a:p>
-        </p:txBody>
-      </p:sp>
-      <p:pic>
-        <p:nvPicPr>
-          <p:cNvPr id="10" name="Imagen 9">
-            <a:extLst>
-              <a:ext uri="{FF2B5EF4-FFF2-40B4-BE49-F238E27FC236}">
-                <a16:creationId xmlns:a16="http://schemas.microsoft.com/office/drawing/2014/main" id="{BB936234-5358-BE15-86B3-15301D0911C6}"/>
-              </a:ext>
-            </a:extLst>
-          </p:cNvPr>
-          <p:cNvPicPr>
-            <a:picLocks noChangeAspect="1"/>
-          </p:cNvPicPr>
-          <p:nvPr/>
-        </p:nvPicPr>
-        <p:blipFill>
-          <a:blip r:embed="rId3"/>
-          <a:stretch>
-            <a:fillRect/>
-          </a:stretch>
-        </p:blipFill>
-        <p:spPr>
-          <a:xfrm>
-            <a:off x="1280811" y="1227560"/>
-            <a:ext cx="9630378" cy="5488686"/>
-          </a:xfrm>
-          <a:prstGeom prst="rect">
-            <a:avLst/>
-          </a:prstGeom>
-        </p:spPr>
       </p:pic>
     </p:spTree>
     <p:extLst>
       <p:ext uri="{BB962C8B-B14F-4D97-AF65-F5344CB8AC3E}">
-        <p14:creationId xmlns:p14="http://schemas.microsoft.com/office/powerpoint/2010/main" val="2932677075"/>
-      </p:ext>
-    </p:extLst>
-  </p:cSld>
-  <p:clrMapOvr>
-    <a:masterClrMapping/>
-  </p:clrMapOvr>
-</p:sld>
-</file>
-
-<file path=ppt/slides/slide38.xml><?xml version="1.0" encoding="utf-8"?>
-<p:sld xmlns:a="http://schemas.openxmlformats.org/drawingml/2006/main" xmlns:r="http://schemas.openxmlformats.org/officeDocument/2006/relationships" xmlns:p="http://schemas.openxmlformats.org/presentationml/2006/main">
-  <p:cSld>
-    <p:spTree>
-      <p:nvGrpSpPr>
-        <p:cNvPr id="1" name="">
-          <a:extLst>
-            <a:ext uri="{FF2B5EF4-FFF2-40B4-BE49-F238E27FC236}">
-              <a16:creationId xmlns:a16="http://schemas.microsoft.com/office/drawing/2014/main" id="{E4947D5F-204C-8AD6-50BC-1DD858A172B5}"/>
-            </a:ext>
-          </a:extLst>
-        </p:cNvPr>
-        <p:cNvGrpSpPr/>
-        <p:nvPr/>
-      </p:nvGrpSpPr>
-      <p:grpSpPr>
-        <a:xfrm>
-          <a:off x="0" y="0"/>
-          <a:ext cx="0" cy="0"/>
-          <a:chOff x="0" y="0"/>
-          <a:chExt cx="0" cy="0"/>
-        </a:xfrm>
-      </p:grpSpPr>
-      <p:sp>
-        <p:nvSpPr>
-          <p:cNvPr id="28" name="Title 1">
-            <a:extLst>
-              <a:ext uri="{FF2B5EF4-FFF2-40B4-BE49-F238E27FC236}">
-                <a16:creationId xmlns:a16="http://schemas.microsoft.com/office/drawing/2014/main" id="{B60FC94B-7A51-B957-B1EC-C5BE4FF287C6}"/>
-              </a:ext>
-            </a:extLst>
-          </p:cNvPr>
-          <p:cNvSpPr>
-            <a:spLocks noGrp="1"/>
-          </p:cNvSpPr>
-          <p:nvPr>
-            <p:ph type="title"/>
-          </p:nvPr>
-        </p:nvSpPr>
-        <p:spPr>
-          <a:xfrm>
-            <a:off x="415600" y="593367"/>
-            <a:ext cx="3843884" cy="763600"/>
-          </a:xfrm>
-        </p:spPr>
-        <p:txBody>
-          <a:bodyPr>
-            <a:normAutofit fontScale="90000"/>
-          </a:bodyPr>
-          <a:lstStyle/>
-          <a:p>
-            <a:r>
-              <a:rPr lang="en-US" sz="4000" dirty="0"/>
-              <a:t>Alignment with CDM</a:t>
-            </a:r>
-            <a:endParaRPr lang="en-US" sz="4000" b="1" dirty="0"/>
-          </a:p>
-        </p:txBody>
-      </p:sp>
-      <p:pic>
-        <p:nvPicPr>
-          <p:cNvPr id="3" name="Imagen 2">
-            <a:extLst>
-              <a:ext uri="{FF2B5EF4-FFF2-40B4-BE49-F238E27FC236}">
-                <a16:creationId xmlns:a16="http://schemas.microsoft.com/office/drawing/2014/main" id="{2E7DADE3-E651-4AF7-3707-BFBEDFEBF902}"/>
-              </a:ext>
-            </a:extLst>
-          </p:cNvPr>
-          <p:cNvPicPr>
-            <a:picLocks noChangeAspect="1"/>
-          </p:cNvPicPr>
-          <p:nvPr/>
-        </p:nvPicPr>
-        <p:blipFill>
-          <a:blip r:embed="rId3"/>
-          <a:stretch>
-            <a:fillRect/>
-          </a:stretch>
-        </p:blipFill>
-        <p:spPr>
-          <a:xfrm>
-            <a:off x="5082919" y="0"/>
-            <a:ext cx="5699198" cy="6858000"/>
-          </a:xfrm>
-          <a:prstGeom prst="rect">
-            <a:avLst/>
-          </a:prstGeom>
-        </p:spPr>
-      </p:pic>
-    </p:spTree>
-    <p:extLst>
-      <p:ext uri="{BB962C8B-B14F-4D97-AF65-F5344CB8AC3E}">
-        <p14:creationId xmlns:p14="http://schemas.microsoft.com/office/powerpoint/2010/main" val="2532495979"/>
+        <p14:creationId xmlns:p14="http://schemas.microsoft.com/office/powerpoint/2010/main" val="1840464689"/>
       </p:ext>
     </p:extLst>
   </p:cSld>
@@ -31130,10 +29976,10 @@
       </p:sp>
       <p:pic>
         <p:nvPicPr>
-          <p:cNvPr id="7" name="Imagen 6" descr="Diagrama&#10;&#10;El contenido generado por IA puede ser incorrecto.">
-            <a:extLst>
-              <a:ext uri="{FF2B5EF4-FFF2-40B4-BE49-F238E27FC236}">
-                <a16:creationId xmlns:a16="http://schemas.microsoft.com/office/drawing/2014/main" id="{C6F73B8C-0EB4-51B9-41EF-F50357360354}"/>
+          <p:cNvPr id="3" name="Imagen 2">
+            <a:extLst>
+              <a:ext uri="{FF2B5EF4-FFF2-40B4-BE49-F238E27FC236}">
+                <a16:creationId xmlns:a16="http://schemas.microsoft.com/office/drawing/2014/main" id="{6F27EABF-E047-EC0B-D004-BC341F20C8BD}"/>
               </a:ext>
             </a:extLst>
           </p:cNvPr>
@@ -31143,15 +29989,15 @@
           <p:nvPr/>
         </p:nvPicPr>
         <p:blipFill>
-          <a:blip r:embed="rId4"/>
+          <a:blip r:embed="rId3"/>
           <a:stretch>
             <a:fillRect/>
           </a:stretch>
         </p:blipFill>
         <p:spPr>
           <a:xfrm>
-            <a:off x="2007529" y="1325590"/>
-            <a:ext cx="8176942" cy="5066149"/>
+            <a:off x="1076570" y="910708"/>
+            <a:ext cx="9450754" cy="5855358"/>
           </a:xfrm>
           <a:prstGeom prst="rect">
             <a:avLst/>
@@ -31168,11 +30014,6 @@
   <p:clrMapOvr>
     <a:masterClrMapping/>
   </p:clrMapOvr>
-  <p:extLst>
-    <p:ext uri="{6950BFC3-D8DA-4A85-94F7-54DA5524770B}">
-      <p188:commentRel xmlns:p188="http://schemas.microsoft.com/office/powerpoint/2018/8/main" r:id="rId3"/>
-    </p:ext>
-  </p:extLst>
 </p:sld>
 </file>
 

--- a/docs/cfihos-ontology.pptx
+++ b/docs/cfihos-ontology.pptx
@@ -21,8 +21,8 @@
     <p:sldId id="2076136646" r:id="rId9"/>
     <p:sldId id="2076136682" r:id="rId10"/>
     <p:sldId id="2076136625" r:id="rId11"/>
-    <p:sldId id="2076136645" r:id="rId12"/>
-    <p:sldId id="2076136683" r:id="rId13"/>
+    <p:sldId id="2076136683" r:id="rId12"/>
+    <p:sldId id="2076136645" r:id="rId13"/>
     <p:sldId id="2076136676" r:id="rId14"/>
     <p:sldId id="2076136656" r:id="rId15"/>
     <p:sldId id="2076136654" r:id="rId16"/>
@@ -7638,7 +7638,7 @@
           <a:p>
             <a:fld id="{ADE2EF3F-42B8-4B9D-A37E-11A4D443AA0D}" type="datetimeFigureOut">
               <a:rPr lang="en-US" sz="1050" smtClean="0"/>
-              <a:t>2/22/26</a:t>
+              <a:t>2/24/26</a:t>
             </a:fld>
             <a:endParaRPr lang="en-US" sz="1050" dirty="0"/>
           </a:p>
@@ -7824,7 +7824,7 @@
             <a:fld id="{B121E240-E9EA-40DE-8EFF-BE00DCAC0262}" type="datetimeFigureOut">
               <a:rPr lang="en-US" noProof="0" smtClean="0"/>
               <a:pPr/>
-              <a:t>2/22/26</a:t>
+              <a:t>2/24/26</a:t>
             </a:fld>
             <a:endParaRPr lang="en-US" noProof="0" dirty="0"/>
           </a:p>
@@ -8348,6 +8348,146 @@
         <p:cNvPr id="1" name="">
           <a:extLst>
             <a:ext uri="{FF2B5EF4-FFF2-40B4-BE49-F238E27FC236}">
+              <a16:creationId xmlns:a16="http://schemas.microsoft.com/office/drawing/2014/main" id="{56F21A0D-1E11-A9EB-8BED-2B0C7F2FCE75}"/>
+            </a:ext>
+          </a:extLst>
+        </p:cNvPr>
+        <p:cNvGrpSpPr/>
+        <p:nvPr/>
+      </p:nvGrpSpPr>
+      <p:grpSpPr>
+        <a:xfrm>
+          <a:off x="0" y="0"/>
+          <a:ext cx="0" cy="0"/>
+          <a:chOff x="0" y="0"/>
+          <a:chExt cx="0" cy="0"/>
+        </a:xfrm>
+      </p:grpSpPr>
+      <p:sp>
+        <p:nvSpPr>
+          <p:cNvPr id="2" name="Slide Image Placeholder 1">
+            <a:extLst>
+              <a:ext uri="{FF2B5EF4-FFF2-40B4-BE49-F238E27FC236}">
+                <a16:creationId xmlns:a16="http://schemas.microsoft.com/office/drawing/2014/main" id="{7E7F4A33-865D-D1C6-2AF4-AD9065FC9811}"/>
+              </a:ext>
+            </a:extLst>
+          </p:cNvPr>
+          <p:cNvSpPr>
+            <a:spLocks noGrp="1" noRot="1" noChangeAspect="1"/>
+          </p:cNvSpPr>
+          <p:nvPr>
+            <p:ph type="sldImg"/>
+          </p:nvPr>
+        </p:nvSpPr>
+        <p:spPr>
+          <a:xfrm>
+            <a:off x="381000" y="685800"/>
+            <a:ext cx="6096000" cy="3429000"/>
+          </a:xfrm>
+        </p:spPr>
+      </p:sp>
+      <p:sp>
+        <p:nvSpPr>
+          <p:cNvPr id="3" name="Notes Placeholder 2">
+            <a:extLst>
+              <a:ext uri="{FF2B5EF4-FFF2-40B4-BE49-F238E27FC236}">
+                <a16:creationId xmlns:a16="http://schemas.microsoft.com/office/drawing/2014/main" id="{BD39A727-9BA9-3013-0828-D42CE57BF0ED}"/>
+              </a:ext>
+            </a:extLst>
+          </p:cNvPr>
+          <p:cNvSpPr>
+            <a:spLocks noGrp="1"/>
+          </p:cNvSpPr>
+          <p:nvPr>
+            <p:ph type="body" idx="1"/>
+          </p:nvPr>
+        </p:nvSpPr>
+        <p:spPr/>
+        <p:txBody>
+          <a:bodyPr/>
+          <a:lstStyle/>
+          <a:p>
+            <a:r>
+              <a:rPr lang="de-DE" dirty="0"/>
+              <a:t>This </a:t>
+            </a:r>
+            <a:r>
+              <a:rPr lang="de-DE" dirty="0" err="1"/>
+              <a:t>is</a:t>
+            </a:r>
+            <a:r>
+              <a:rPr lang="de-DE" dirty="0"/>
+              <a:t> </a:t>
+            </a:r>
+            <a:r>
+              <a:rPr lang="de-DE" dirty="0" err="1"/>
+              <a:t>the</a:t>
+            </a:r>
+            <a:r>
+              <a:rPr lang="de-DE" dirty="0"/>
+              <a:t> </a:t>
+            </a:r>
+            <a:r>
+              <a:rPr lang="de-DE" dirty="0" err="1"/>
+              <a:t>competency</a:t>
+            </a:r>
+            <a:r>
+              <a:rPr lang="de-DE" dirty="0"/>
+              <a:t> </a:t>
+            </a:r>
+            <a:r>
+              <a:rPr lang="de-DE" dirty="0" err="1"/>
+              <a:t>question</a:t>
+            </a:r>
+            <a:r>
+              <a:rPr lang="de-DE" dirty="0"/>
+              <a:t> </a:t>
+            </a:r>
+            <a:r>
+              <a:rPr lang="de-DE" dirty="0" err="1"/>
+              <a:t>driving</a:t>
+            </a:r>
+            <a:r>
+              <a:rPr lang="de-DE" dirty="0"/>
+              <a:t> </a:t>
+            </a:r>
+            <a:r>
+              <a:rPr lang="de-DE" dirty="0" err="1"/>
+              <a:t>the</a:t>
+            </a:r>
+            <a:r>
+              <a:rPr lang="de-DE" dirty="0"/>
+              <a:t> </a:t>
+            </a:r>
+            <a:r>
+              <a:rPr lang="de-DE" dirty="0" err="1"/>
+              <a:t>presentation</a:t>
+            </a:r>
+            <a:endParaRPr lang="en-US" dirty="0"/>
+          </a:p>
+        </p:txBody>
+      </p:sp>
+    </p:spTree>
+    <p:extLst>
+      <p:ext uri="{BB962C8B-B14F-4D97-AF65-F5344CB8AC3E}">
+        <p14:creationId xmlns:p14="http://schemas.microsoft.com/office/powerpoint/2010/main" val="332006398"/>
+      </p:ext>
+    </p:extLst>
+  </p:cSld>
+  <p:clrMapOvr>
+    <a:masterClrMapping/>
+  </p:clrMapOvr>
+</p:notes>
+</file>
+
+<file path=ppt/notesSlides/notesSlide12.xml><?xml version="1.0" encoding="utf-8"?>
+<p:notes xmlns:a="http://schemas.openxmlformats.org/drawingml/2006/main" xmlns:r="http://schemas.openxmlformats.org/officeDocument/2006/relationships" xmlns:p="http://schemas.openxmlformats.org/presentationml/2006/main">
+  <p:cSld>
+    <p:spTree>
+      <p:nvGrpSpPr>
+        <p:cNvPr id="1" name="">
+          <a:extLst>
+            <a:ext uri="{FF2B5EF4-FFF2-40B4-BE49-F238E27FC236}">
               <a16:creationId xmlns:a16="http://schemas.microsoft.com/office/drawing/2014/main" id="{0B392C2C-C715-C7F0-2009-92432B61B2E8}"/>
             </a:ext>
           </a:extLst>
@@ -8471,146 +8611,6 @@
     <p:extLst>
       <p:ext uri="{BB962C8B-B14F-4D97-AF65-F5344CB8AC3E}">
         <p14:creationId xmlns:p14="http://schemas.microsoft.com/office/powerpoint/2010/main" val="3696906029"/>
-      </p:ext>
-    </p:extLst>
-  </p:cSld>
-  <p:clrMapOvr>
-    <a:masterClrMapping/>
-  </p:clrMapOvr>
-</p:notes>
-</file>
-
-<file path=ppt/notesSlides/notesSlide12.xml><?xml version="1.0" encoding="utf-8"?>
-<p:notes xmlns:a="http://schemas.openxmlformats.org/drawingml/2006/main" xmlns:r="http://schemas.openxmlformats.org/officeDocument/2006/relationships" xmlns:p="http://schemas.openxmlformats.org/presentationml/2006/main">
-  <p:cSld>
-    <p:spTree>
-      <p:nvGrpSpPr>
-        <p:cNvPr id="1" name="">
-          <a:extLst>
-            <a:ext uri="{FF2B5EF4-FFF2-40B4-BE49-F238E27FC236}">
-              <a16:creationId xmlns:a16="http://schemas.microsoft.com/office/drawing/2014/main" id="{56F21A0D-1E11-A9EB-8BED-2B0C7F2FCE75}"/>
-            </a:ext>
-          </a:extLst>
-        </p:cNvPr>
-        <p:cNvGrpSpPr/>
-        <p:nvPr/>
-      </p:nvGrpSpPr>
-      <p:grpSpPr>
-        <a:xfrm>
-          <a:off x="0" y="0"/>
-          <a:ext cx="0" cy="0"/>
-          <a:chOff x="0" y="0"/>
-          <a:chExt cx="0" cy="0"/>
-        </a:xfrm>
-      </p:grpSpPr>
-      <p:sp>
-        <p:nvSpPr>
-          <p:cNvPr id="2" name="Slide Image Placeholder 1">
-            <a:extLst>
-              <a:ext uri="{FF2B5EF4-FFF2-40B4-BE49-F238E27FC236}">
-                <a16:creationId xmlns:a16="http://schemas.microsoft.com/office/drawing/2014/main" id="{7E7F4A33-865D-D1C6-2AF4-AD9065FC9811}"/>
-              </a:ext>
-            </a:extLst>
-          </p:cNvPr>
-          <p:cNvSpPr>
-            <a:spLocks noGrp="1" noRot="1" noChangeAspect="1"/>
-          </p:cNvSpPr>
-          <p:nvPr>
-            <p:ph type="sldImg"/>
-          </p:nvPr>
-        </p:nvSpPr>
-        <p:spPr>
-          <a:xfrm>
-            <a:off x="381000" y="685800"/>
-            <a:ext cx="6096000" cy="3429000"/>
-          </a:xfrm>
-        </p:spPr>
-      </p:sp>
-      <p:sp>
-        <p:nvSpPr>
-          <p:cNvPr id="3" name="Notes Placeholder 2">
-            <a:extLst>
-              <a:ext uri="{FF2B5EF4-FFF2-40B4-BE49-F238E27FC236}">
-                <a16:creationId xmlns:a16="http://schemas.microsoft.com/office/drawing/2014/main" id="{BD39A727-9BA9-3013-0828-D42CE57BF0ED}"/>
-              </a:ext>
-            </a:extLst>
-          </p:cNvPr>
-          <p:cNvSpPr>
-            <a:spLocks noGrp="1"/>
-          </p:cNvSpPr>
-          <p:nvPr>
-            <p:ph type="body" idx="1"/>
-          </p:nvPr>
-        </p:nvSpPr>
-        <p:spPr/>
-        <p:txBody>
-          <a:bodyPr/>
-          <a:lstStyle/>
-          <a:p>
-            <a:r>
-              <a:rPr lang="de-DE" dirty="0"/>
-              <a:t>This </a:t>
-            </a:r>
-            <a:r>
-              <a:rPr lang="de-DE" dirty="0" err="1"/>
-              <a:t>is</a:t>
-            </a:r>
-            <a:r>
-              <a:rPr lang="de-DE" dirty="0"/>
-              <a:t> </a:t>
-            </a:r>
-            <a:r>
-              <a:rPr lang="de-DE" dirty="0" err="1"/>
-              <a:t>the</a:t>
-            </a:r>
-            <a:r>
-              <a:rPr lang="de-DE" dirty="0"/>
-              <a:t> </a:t>
-            </a:r>
-            <a:r>
-              <a:rPr lang="de-DE" dirty="0" err="1"/>
-              <a:t>competency</a:t>
-            </a:r>
-            <a:r>
-              <a:rPr lang="de-DE" dirty="0"/>
-              <a:t> </a:t>
-            </a:r>
-            <a:r>
-              <a:rPr lang="de-DE" dirty="0" err="1"/>
-              <a:t>question</a:t>
-            </a:r>
-            <a:r>
-              <a:rPr lang="de-DE" dirty="0"/>
-              <a:t> </a:t>
-            </a:r>
-            <a:r>
-              <a:rPr lang="de-DE" dirty="0" err="1"/>
-              <a:t>driving</a:t>
-            </a:r>
-            <a:r>
-              <a:rPr lang="de-DE" dirty="0"/>
-              <a:t> </a:t>
-            </a:r>
-            <a:r>
-              <a:rPr lang="de-DE" dirty="0" err="1"/>
-              <a:t>the</a:t>
-            </a:r>
-            <a:r>
-              <a:rPr lang="de-DE" dirty="0"/>
-              <a:t> </a:t>
-            </a:r>
-            <a:r>
-              <a:rPr lang="de-DE" dirty="0" err="1"/>
-              <a:t>presentation</a:t>
-            </a:r>
-            <a:endParaRPr lang="en-US" dirty="0"/>
-          </a:p>
-        </p:txBody>
-      </p:sp>
-    </p:spTree>
-    <p:extLst>
-      <p:ext uri="{BB962C8B-B14F-4D97-AF65-F5344CB8AC3E}">
-        <p14:creationId xmlns:p14="http://schemas.microsoft.com/office/powerpoint/2010/main" val="332006398"/>
       </p:ext>
     </p:extLst>
   </p:cSld>
@@ -22692,7 +22692,7 @@
         <p:cNvPr id="1" name="">
           <a:extLst>
             <a:ext uri="{FF2B5EF4-FFF2-40B4-BE49-F238E27FC236}">
-              <a16:creationId xmlns:a16="http://schemas.microsoft.com/office/drawing/2014/main" id="{1436A772-BDA0-7A43-692C-2F6D9C5D3907}"/>
+              <a16:creationId xmlns:a16="http://schemas.microsoft.com/office/drawing/2014/main" id="{A27A01F2-1895-EBF4-43A2-0F0B4D59DEBB}"/>
             </a:ext>
           </a:extLst>
         </p:cNvPr>
@@ -22712,7 +22712,7 @@
           <p:cNvPr id="28" name="Title 1">
             <a:extLst>
               <a:ext uri="{FF2B5EF4-FFF2-40B4-BE49-F238E27FC236}">
-                <a16:creationId xmlns:a16="http://schemas.microsoft.com/office/drawing/2014/main" id="{D8A35FBC-5A8A-E35B-442A-5A67B3AD3098}"/>
+                <a16:creationId xmlns:a16="http://schemas.microsoft.com/office/drawing/2014/main" id="{CA4DD9F1-EE8E-2ACC-4C8F-F989F0FF00F1}"/>
               </a:ext>
             </a:extLst>
           </p:cNvPr>
@@ -22737,196 +22737,7 @@
           <a:p>
             <a:r>
               <a:rPr lang="en-US" sz="4000" dirty="0"/>
-              <a:t>CFIHOS ontology modeling principles</a:t>
-            </a:r>
-            <a:endParaRPr lang="en-US" sz="4000" b="1" dirty="0"/>
-          </a:p>
-        </p:txBody>
-      </p:sp>
-      <p:sp>
-        <p:nvSpPr>
-          <p:cNvPr id="19" name="Marcador de texto 2">
-            <a:extLst>
-              <a:ext uri="{FF2B5EF4-FFF2-40B4-BE49-F238E27FC236}">
-                <a16:creationId xmlns:a16="http://schemas.microsoft.com/office/drawing/2014/main" id="{C3B39444-141D-A754-584A-E02F0A0CB025}"/>
-              </a:ext>
-            </a:extLst>
-          </p:cNvPr>
-          <p:cNvSpPr>
-            <a:spLocks noGrp="1"/>
-          </p:cNvSpPr>
-          <p:nvPr>
-            <p:ph type="body" idx="1"/>
-          </p:nvPr>
-        </p:nvSpPr>
-        <p:spPr>
-          <a:xfrm>
-            <a:off x="415600" y="1356967"/>
-            <a:ext cx="11604122" cy="853852"/>
-          </a:xfrm>
-        </p:spPr>
-        <p:txBody>
-          <a:bodyPr>
-            <a:normAutofit fontScale="25000" lnSpcReduction="20000"/>
-          </a:bodyPr>
-          <a:lstStyle/>
-          <a:p>
-            <a:r>
-              <a:rPr lang="en-US" sz="12800" dirty="0"/>
-              <a:t>Alignment with the CFHIOS principles</a:t>
-            </a:r>
-          </a:p>
-          <a:p>
-            <a:endParaRPr lang="en-US" sz="12800" dirty="0"/>
-          </a:p>
-          <a:p>
-            <a:r>
-              <a:rPr lang="en-US" sz="12800" dirty="0"/>
-              <a:t>Alignment with the previous </a:t>
-            </a:r>
-            <a:r>
-              <a:rPr lang="en-US" sz="12800" dirty="0" err="1"/>
-              <a:t>commmon</a:t>
-            </a:r>
-            <a:r>
-              <a:rPr lang="en-US" sz="12800" dirty="0"/>
-              <a:t> pattern</a:t>
-            </a:r>
-          </a:p>
-          <a:p>
-            <a:pPr marL="186262" indent="0">
-              <a:buNone/>
-            </a:pPr>
-            <a:endParaRPr lang="en-US" sz="12800" dirty="0"/>
-          </a:p>
-          <a:p>
-            <a:r>
-              <a:rPr lang="en-US" sz="12800" dirty="0"/>
-              <a:t>Alignment with the Industrial Data Ontology (IDO)</a:t>
-            </a:r>
-          </a:p>
-          <a:p>
-            <a:pPr lvl="1"/>
-            <a:r>
-              <a:rPr lang="en-US" sz="12800" dirty="0"/>
-              <a:t>Alignment of classes with IDO classes</a:t>
-            </a:r>
-          </a:p>
-          <a:p>
-            <a:pPr lvl="1"/>
-            <a:r>
-              <a:rPr lang="en-US" sz="12800" dirty="0"/>
-              <a:t>Representation of properties using IDO modeling patterns</a:t>
-            </a:r>
-          </a:p>
-          <a:p>
-            <a:endParaRPr lang="en-US" sz="9600" dirty="0"/>
-          </a:p>
-          <a:p>
-            <a:endParaRPr lang="en-US" sz="5600" dirty="0"/>
-          </a:p>
-          <a:p>
-            <a:endParaRPr lang="en-US" sz="5600" dirty="0"/>
-          </a:p>
-          <a:p>
-            <a:endParaRPr lang="en-US" sz="5600" dirty="0"/>
-          </a:p>
-          <a:p>
-            <a:endParaRPr lang="en-US" sz="5600" dirty="0"/>
-          </a:p>
-          <a:p>
-            <a:endParaRPr lang="en-US" sz="4300" dirty="0"/>
-          </a:p>
-          <a:p>
-            <a:endParaRPr lang="en-US" sz="4300" dirty="0"/>
-          </a:p>
-          <a:p>
-            <a:endParaRPr lang="en-US" sz="4300" dirty="0"/>
-          </a:p>
-          <a:p>
-            <a:endParaRPr lang="en-US" sz="4300" dirty="0"/>
-          </a:p>
-          <a:p>
-            <a:endParaRPr lang="en-US" sz="4300" dirty="0"/>
-          </a:p>
-          <a:p>
-            <a:endParaRPr lang="en-US" sz="4300" dirty="0"/>
-          </a:p>
-          <a:p>
-            <a:pPr marL="152396" indent="0">
-              <a:buNone/>
-            </a:pPr>
-            <a:endParaRPr lang="en-US" dirty="0"/>
-          </a:p>
-        </p:txBody>
-      </p:sp>
-    </p:spTree>
-    <p:extLst>
-      <p:ext uri="{BB962C8B-B14F-4D97-AF65-F5344CB8AC3E}">
-        <p14:creationId xmlns:p14="http://schemas.microsoft.com/office/powerpoint/2010/main" val="3070532699"/>
-      </p:ext>
-    </p:extLst>
-  </p:cSld>
-  <p:clrMapOvr>
-    <a:masterClrMapping/>
-  </p:clrMapOvr>
-</p:sld>
-</file>
-
-<file path=ppt/slides/slide12.xml><?xml version="1.0" encoding="utf-8"?>
-<p:sld xmlns:a="http://schemas.openxmlformats.org/drawingml/2006/main" xmlns:r="http://schemas.openxmlformats.org/officeDocument/2006/relationships" xmlns:p="http://schemas.openxmlformats.org/presentationml/2006/main">
-  <p:cSld>
-    <p:spTree>
-      <p:nvGrpSpPr>
-        <p:cNvPr id="1" name="">
-          <a:extLst>
-            <a:ext uri="{FF2B5EF4-FFF2-40B4-BE49-F238E27FC236}">
-              <a16:creationId xmlns:a16="http://schemas.microsoft.com/office/drawing/2014/main" id="{A27A01F2-1895-EBF4-43A2-0F0B4D59DEBB}"/>
-            </a:ext>
-          </a:extLst>
-        </p:cNvPr>
-        <p:cNvGrpSpPr/>
-        <p:nvPr/>
-      </p:nvGrpSpPr>
-      <p:grpSpPr>
-        <a:xfrm>
-          <a:off x="0" y="0"/>
-          <a:ext cx="0" cy="0"/>
-          <a:chOff x="0" y="0"/>
-          <a:chExt cx="0" cy="0"/>
-        </a:xfrm>
-      </p:grpSpPr>
-      <p:sp>
-        <p:nvSpPr>
-          <p:cNvPr id="28" name="Title 1">
-            <a:extLst>
-              <a:ext uri="{FF2B5EF4-FFF2-40B4-BE49-F238E27FC236}">
-                <a16:creationId xmlns:a16="http://schemas.microsoft.com/office/drawing/2014/main" id="{CA4DD9F1-EE8E-2ACC-4C8F-F989F0FF00F1}"/>
-              </a:ext>
-            </a:extLst>
-          </p:cNvPr>
-          <p:cNvSpPr>
-            <a:spLocks noGrp="1"/>
-          </p:cNvSpPr>
-          <p:nvPr>
-            <p:ph type="title"/>
-          </p:nvPr>
-        </p:nvSpPr>
-        <p:spPr>
-          <a:xfrm>
-            <a:off x="415600" y="593367"/>
-            <a:ext cx="11360800" cy="763600"/>
-          </a:xfrm>
-        </p:spPr>
-        <p:txBody>
-          <a:bodyPr>
-            <a:normAutofit/>
-          </a:bodyPr>
-          <a:lstStyle/>
-          <a:p>
-            <a:r>
-              <a:rPr lang="en-US" sz="4000" dirty="0"/>
-              <a:t>Generation of the ontology</a:t>
+              <a:t>Generation of the CFIHOS ontology</a:t>
             </a:r>
             <a:endParaRPr lang="en-US" sz="4000" b="1" dirty="0"/>
           </a:p>
@@ -23185,6 +22996,187 @@
     <p:extLst>
       <p:ext uri="{BB962C8B-B14F-4D97-AF65-F5344CB8AC3E}">
         <p14:creationId xmlns:p14="http://schemas.microsoft.com/office/powerpoint/2010/main" val="99779176"/>
+      </p:ext>
+    </p:extLst>
+  </p:cSld>
+  <p:clrMapOvr>
+    <a:masterClrMapping/>
+  </p:clrMapOvr>
+</p:sld>
+</file>
+
+<file path=ppt/slides/slide12.xml><?xml version="1.0" encoding="utf-8"?>
+<p:sld xmlns:a="http://schemas.openxmlformats.org/drawingml/2006/main" xmlns:r="http://schemas.openxmlformats.org/officeDocument/2006/relationships" xmlns:p="http://schemas.openxmlformats.org/presentationml/2006/main">
+  <p:cSld>
+    <p:spTree>
+      <p:nvGrpSpPr>
+        <p:cNvPr id="1" name="">
+          <a:extLst>
+            <a:ext uri="{FF2B5EF4-FFF2-40B4-BE49-F238E27FC236}">
+              <a16:creationId xmlns:a16="http://schemas.microsoft.com/office/drawing/2014/main" id="{1436A772-BDA0-7A43-692C-2F6D9C5D3907}"/>
+            </a:ext>
+          </a:extLst>
+        </p:cNvPr>
+        <p:cNvGrpSpPr/>
+        <p:nvPr/>
+      </p:nvGrpSpPr>
+      <p:grpSpPr>
+        <a:xfrm>
+          <a:off x="0" y="0"/>
+          <a:ext cx="0" cy="0"/>
+          <a:chOff x="0" y="0"/>
+          <a:chExt cx="0" cy="0"/>
+        </a:xfrm>
+      </p:grpSpPr>
+      <p:sp>
+        <p:nvSpPr>
+          <p:cNvPr id="28" name="Title 1">
+            <a:extLst>
+              <a:ext uri="{FF2B5EF4-FFF2-40B4-BE49-F238E27FC236}">
+                <a16:creationId xmlns:a16="http://schemas.microsoft.com/office/drawing/2014/main" id="{D8A35FBC-5A8A-E35B-442A-5A67B3AD3098}"/>
+              </a:ext>
+            </a:extLst>
+          </p:cNvPr>
+          <p:cNvSpPr>
+            <a:spLocks noGrp="1"/>
+          </p:cNvSpPr>
+          <p:nvPr>
+            <p:ph type="title"/>
+          </p:nvPr>
+        </p:nvSpPr>
+        <p:spPr>
+          <a:xfrm>
+            <a:off x="415600" y="593367"/>
+            <a:ext cx="11360800" cy="763600"/>
+          </a:xfrm>
+        </p:spPr>
+        <p:txBody>
+          <a:bodyPr>
+            <a:normAutofit/>
+          </a:bodyPr>
+          <a:lstStyle/>
+          <a:p>
+            <a:r>
+              <a:rPr lang="en-US" sz="4000" dirty="0"/>
+              <a:t>CFIHOS ontology modeling principles</a:t>
+            </a:r>
+            <a:endParaRPr lang="en-US" sz="4000" b="1" dirty="0"/>
+          </a:p>
+        </p:txBody>
+      </p:sp>
+      <p:sp>
+        <p:nvSpPr>
+          <p:cNvPr id="19" name="Marcador de texto 2">
+            <a:extLst>
+              <a:ext uri="{FF2B5EF4-FFF2-40B4-BE49-F238E27FC236}">
+                <a16:creationId xmlns:a16="http://schemas.microsoft.com/office/drawing/2014/main" id="{C3B39444-141D-A754-584A-E02F0A0CB025}"/>
+              </a:ext>
+            </a:extLst>
+          </p:cNvPr>
+          <p:cNvSpPr>
+            <a:spLocks noGrp="1"/>
+          </p:cNvSpPr>
+          <p:nvPr>
+            <p:ph type="body" idx="1"/>
+          </p:nvPr>
+        </p:nvSpPr>
+        <p:spPr>
+          <a:xfrm>
+            <a:off x="415600" y="1356967"/>
+            <a:ext cx="11604122" cy="853852"/>
+          </a:xfrm>
+        </p:spPr>
+        <p:txBody>
+          <a:bodyPr>
+            <a:normAutofit fontScale="25000" lnSpcReduction="20000"/>
+          </a:bodyPr>
+          <a:lstStyle/>
+          <a:p>
+            <a:r>
+              <a:rPr lang="en-US" sz="12800" dirty="0"/>
+              <a:t>Alignment with the CFIHOS principles</a:t>
+            </a:r>
+          </a:p>
+          <a:p>
+            <a:endParaRPr lang="en-US" sz="12800" dirty="0"/>
+          </a:p>
+          <a:p>
+            <a:r>
+              <a:rPr lang="en-US" sz="12800" dirty="0"/>
+              <a:t>Alignment with the previous common pattern</a:t>
+            </a:r>
+          </a:p>
+          <a:p>
+            <a:pPr marL="186262" indent="0">
+              <a:buNone/>
+            </a:pPr>
+            <a:endParaRPr lang="en-US" sz="12800" dirty="0"/>
+          </a:p>
+          <a:p>
+            <a:r>
+              <a:rPr lang="en-US" sz="12800" dirty="0"/>
+              <a:t>Alignment with the Industrial Data Ontology (IDO)</a:t>
+            </a:r>
+          </a:p>
+          <a:p>
+            <a:pPr lvl="1"/>
+            <a:r>
+              <a:rPr lang="en-US" sz="12800" dirty="0"/>
+              <a:t>Alignment of classes with IDO classes</a:t>
+            </a:r>
+          </a:p>
+          <a:p>
+            <a:pPr lvl="1"/>
+            <a:r>
+              <a:rPr lang="en-US" sz="12800" dirty="0"/>
+              <a:t>Representation of properties using IDO modeling patterns</a:t>
+            </a:r>
+          </a:p>
+          <a:p>
+            <a:endParaRPr lang="en-US" sz="9600" dirty="0"/>
+          </a:p>
+          <a:p>
+            <a:endParaRPr lang="en-US" sz="5600" dirty="0"/>
+          </a:p>
+          <a:p>
+            <a:endParaRPr lang="en-US" sz="5600" dirty="0"/>
+          </a:p>
+          <a:p>
+            <a:endParaRPr lang="en-US" sz="5600" dirty="0"/>
+          </a:p>
+          <a:p>
+            <a:endParaRPr lang="en-US" sz="5600" dirty="0"/>
+          </a:p>
+          <a:p>
+            <a:endParaRPr lang="en-US" sz="4300" dirty="0"/>
+          </a:p>
+          <a:p>
+            <a:endParaRPr lang="en-US" sz="4300" dirty="0"/>
+          </a:p>
+          <a:p>
+            <a:endParaRPr lang="en-US" sz="4300" dirty="0"/>
+          </a:p>
+          <a:p>
+            <a:endParaRPr lang="en-US" sz="4300" dirty="0"/>
+          </a:p>
+          <a:p>
+            <a:endParaRPr lang="en-US" sz="4300" dirty="0"/>
+          </a:p>
+          <a:p>
+            <a:endParaRPr lang="en-US" sz="4300" dirty="0"/>
+          </a:p>
+          <a:p>
+            <a:pPr marL="152396" indent="0">
+              <a:buNone/>
+            </a:pPr>
+            <a:endParaRPr lang="en-US" dirty="0"/>
+          </a:p>
+        </p:txBody>
+      </p:sp>
+    </p:spTree>
+    <p:extLst>
+      <p:ext uri="{BB962C8B-B14F-4D97-AF65-F5344CB8AC3E}">
+        <p14:creationId xmlns:p14="http://schemas.microsoft.com/office/powerpoint/2010/main" val="3070532699"/>
       </p:ext>
     </p:extLst>
   </p:cSld>
@@ -23717,6 +23709,27 @@
           </a:bodyPr>
           <a:lstStyle/>
           <a:p>
+            <a:endParaRPr lang="en-US" sz="7200" dirty="0"/>
+          </a:p>
+          <a:p>
+            <a:r>
+              <a:rPr lang="en-US" sz="7200" dirty="0"/>
+              <a:t>The Industrial Data Ontology (IDO) is a “top-level” ontology for industrial data terminology that defines generic terms for things that exist in more than one industrial domain.</a:t>
+            </a:r>
+          </a:p>
+          <a:p>
+            <a:endParaRPr lang="en-US" sz="7200" dirty="0"/>
+          </a:p>
+          <a:p>
+            <a:r>
+              <a:rPr lang="en-US" sz="7200" dirty="0"/>
+              <a:t>Representing CFIHOS by extending IDO benefits the interoperability</a:t>
+            </a:r>
+          </a:p>
+          <a:p>
+            <a:endParaRPr lang="en-US" sz="7200" dirty="0"/>
+          </a:p>
+          <a:p>
             <a:r>
               <a:rPr lang="en-US" sz="7200" dirty="0"/>
               <a:t>The main classes of the CFIHOS ontology have been linked to the Industrial Data Ontology</a:t>
@@ -23724,21 +23737,6 @@
           </a:p>
           <a:p>
             <a:endParaRPr lang="en-US" sz="7200" dirty="0"/>
-          </a:p>
-          <a:p>
-            <a:r>
-              <a:rPr lang="en-US" sz="7200" dirty="0"/>
-              <a:t>The Industrial Data Ontology (IDO) is a “top-level” ontology for industrial data terminology that defines generic terms for things that exist in more than one industrial domain.</a:t>
-            </a:r>
-          </a:p>
-          <a:p>
-            <a:endParaRPr lang="en-US" sz="7200" dirty="0"/>
-          </a:p>
-          <a:p>
-            <a:r>
-              <a:rPr lang="en-US" sz="7200" dirty="0"/>
-              <a:t>Representing CFIHOS by extending IDO benefits the interoperability</a:t>
-            </a:r>
           </a:p>
           <a:p>
             <a:pPr marL="152396" indent="0">
@@ -25150,44 +25148,6 @@
           <a:chExt cx="0" cy="0"/>
         </a:xfrm>
       </p:grpSpPr>
-      <p:sp>
-        <p:nvSpPr>
-          <p:cNvPr id="2" name="Marcador de texto 2">
-            <a:extLst>
-              <a:ext uri="{FF2B5EF4-FFF2-40B4-BE49-F238E27FC236}">
-                <a16:creationId xmlns:a16="http://schemas.microsoft.com/office/drawing/2014/main" id="{03E77BD5-5426-6469-8DFA-D614969B7CDF}"/>
-              </a:ext>
-            </a:extLst>
-          </p:cNvPr>
-          <p:cNvSpPr>
-            <a:spLocks noGrp="1"/>
-          </p:cNvSpPr>
-          <p:nvPr>
-            <p:ph type="body" idx="1"/>
-          </p:nvPr>
-        </p:nvSpPr>
-        <p:spPr>
-          <a:xfrm>
-            <a:off x="597877" y="1593685"/>
-            <a:ext cx="10455945" cy="1149516"/>
-          </a:xfrm>
-        </p:spPr>
-        <p:txBody>
-          <a:bodyPr>
-            <a:normAutofit/>
-          </a:bodyPr>
-          <a:lstStyle/>
-          <a:p>
-            <a:r>
-              <a:rPr lang="en-US" sz="3200" dirty="0"/>
-              <a:t>Modeling the length of a cable</a:t>
-            </a:r>
-          </a:p>
-          <a:p>
-            <a:endParaRPr lang="en-US" dirty="0"/>
-          </a:p>
-        </p:txBody>
-      </p:sp>
       <p:sp>
         <p:nvSpPr>
           <p:cNvPr id="7" name="Title 1">
@@ -25388,6 +25348,50 @@
           </p:txBody>
         </p:sp>
       </p:grpSp>
+      <p:sp>
+        <p:nvSpPr>
+          <p:cNvPr id="5" name="CuadroTexto 4">
+            <a:extLst>
+              <a:ext uri="{FF2B5EF4-FFF2-40B4-BE49-F238E27FC236}">
+                <a16:creationId xmlns:a16="http://schemas.microsoft.com/office/drawing/2014/main" id="{1E906B8C-E878-D5D1-5FE5-C95CE46EE890}"/>
+              </a:ext>
+            </a:extLst>
+          </p:cNvPr>
+          <p:cNvSpPr txBox="1"/>
+          <p:nvPr/>
+        </p:nvSpPr>
+        <p:spPr>
+          <a:xfrm>
+            <a:off x="857400" y="1665057"/>
+            <a:ext cx="9205478" cy="430696"/>
+          </a:xfrm>
+          <a:prstGeom prst="rect">
+            <a:avLst/>
+          </a:prstGeom>
+          <a:noFill/>
+        </p:spPr>
+        <p:txBody>
+          <a:bodyPr wrap="none" lIns="0" tIns="0" rIns="0" bIns="0" rtlCol="0">
+            <a:noAutofit/>
+          </a:bodyPr>
+          <a:lstStyle/>
+          <a:p>
+            <a:pPr algn="ctr"/>
+            <a:r>
+              <a:rPr lang="en-GB" sz="2200" b="1" dirty="0"/>
+              <a:t>My </a:t>
+            </a:r>
+            <a:r>
+              <a:rPr lang="en-GB" sz="2200" b="1" dirty="0" err="1"/>
+              <a:t>powerCable</a:t>
+            </a:r>
+            <a:r>
+              <a:rPr lang="en-GB" sz="2200" b="1" dirty="0"/>
+              <a:t> 1 has a length of 30 m</a:t>
+            </a:r>
+          </a:p>
+        </p:txBody>
+      </p:sp>
     </p:spTree>
     <p:extLst>
       <p:ext uri="{BB962C8B-B14F-4D97-AF65-F5344CB8AC3E}">
@@ -25592,7 +25596,7 @@
           <a:p>
             <a:r>
               <a:rPr lang="en-US" sz="4000" dirty="0"/>
-              <a:t>Shortcuts: IDO expressions - CFHIOS properties</a:t>
+              <a:t>Shortcuts: IDO expressions - CFIHOS properties</a:t>
             </a:r>
           </a:p>
         </p:txBody>
@@ -25635,7 +25639,7 @@
             </a:r>
             <a:r>
               <a:rPr lang="en-US" dirty="0"/>
-              <a:t> in the CFHIOS ontology is annotated with the </a:t>
+              <a:t> in the CFIHOS ontology is annotated with the </a:t>
             </a:r>
             <a:r>
               <a:rPr lang="en-US" b="1" dirty="0"/>
@@ -27540,7 +27544,7 @@
           <a:p>
             <a:r>
               <a:rPr lang="en-US" sz="4000" dirty="0"/>
-              <a:t>The pattern in CFHIOS</a:t>
+              <a:t>The pattern in CFIHOS</a:t>
             </a:r>
             <a:endParaRPr lang="en-US" sz="4000" b="1" dirty="0"/>
           </a:p>
@@ -27667,12 +27671,12 @@
         <p:spPr>
           <a:xfrm>
             <a:off x="415599" y="1593684"/>
-            <a:ext cx="10638223" cy="4670949"/>
+            <a:ext cx="11681913" cy="4670949"/>
           </a:xfrm>
         </p:spPr>
         <p:txBody>
           <a:bodyPr>
-            <a:normAutofit fontScale="92500" lnSpcReduction="20000"/>
+            <a:normAutofit fontScale="92500" lnSpcReduction="10000"/>
           </a:bodyPr>
           <a:lstStyle/>
           <a:p>
@@ -27705,7 +27709,7 @@
           <a:p>
             <a:r>
               <a:rPr lang="en-US" sz="3800" dirty="0"/>
-              <a:t>Tag vs equipment</a:t>
+              <a:t>Tag vs equipment. They share the identifier</a:t>
             </a:r>
           </a:p>
           <a:p>
@@ -28402,8 +28406,8 @@
         </p:nvSpPr>
         <p:spPr>
           <a:xfrm>
-            <a:off x="103854" y="994855"/>
-            <a:ext cx="4259801" cy="5693866"/>
+            <a:off x="0" y="1528255"/>
+            <a:ext cx="3343917" cy="4832092"/>
           </a:xfrm>
           <a:prstGeom prst="rect">
             <a:avLst/>
@@ -28446,24 +28450,7 @@
             </a:pPr>
             <a:r>
               <a:rPr lang="en-US" sz="2800" dirty="0"/>
-              <a:t>Need for a shared understanding </a:t>
-            </a:r>
-          </a:p>
-          <a:p>
-            <a:pPr marL="380990" indent="-380990">
-              <a:buFont typeface="Arial" panose="020B0604020202020204" pitchFamily="34" charset="0"/>
-              <a:buChar char="•"/>
-            </a:pPr>
-            <a:endParaRPr lang="en-US" sz="2800" dirty="0"/>
-          </a:p>
-          <a:p>
-            <a:pPr marL="380990" indent="-380990">
-              <a:buFont typeface="Arial" panose="020B0604020202020204" pitchFamily="34" charset="0"/>
-              <a:buChar char="•"/>
-            </a:pPr>
-            <a:r>
-              <a:rPr lang="en-US" sz="2800" dirty="0"/>
-              <a:t>Need for harmonization</a:t>
+              <a:t>Need for data interoperability</a:t>
             </a:r>
           </a:p>
           <a:p>

--- a/docs/cfihos-ontology.pptx
+++ b/docs/cfihos-ontology.pptx
@@ -3170,7 +3170,7 @@
         <a:lstStyle/>
         <a:p>
           <a:r>
-            <a:rPr lang="en-US" sz="1400" dirty="0"/>
+            <a:rPr lang="en-US" sz="1400" b="1" dirty="0"/>
             <a:t>CFIHOS</a:t>
           </a:r>
         </a:p>
@@ -4772,7 +4772,7 @@
             <a:buChar char="•"/>
           </a:pPr>
           <a:r>
-            <a:rPr lang="en-US" sz="1400" kern="1200" dirty="0"/>
+            <a:rPr lang="en-US" sz="1400" b="1" kern="1200" dirty="0"/>
             <a:t>CFIHOS</a:t>
           </a:r>
         </a:p>
@@ -7638,7 +7638,7 @@
           <a:p>
             <a:fld id="{ADE2EF3F-42B8-4B9D-A37E-11A4D443AA0D}" type="datetimeFigureOut">
               <a:rPr lang="en-US" sz="1050" smtClean="0"/>
-              <a:t>2/24/26</a:t>
+              <a:t>2/25/26</a:t>
             </a:fld>
             <a:endParaRPr lang="en-US" sz="1050" dirty="0"/>
           </a:p>
@@ -7824,7 +7824,7 @@
             <a:fld id="{B121E240-E9EA-40DE-8EFF-BE00DCAC0262}" type="datetimeFigureOut">
               <a:rPr lang="en-US" noProof="0" smtClean="0"/>
               <a:pPr/>
-              <a:t>2/24/26</a:t>
+              <a:t>2/25/26</a:t>
             </a:fld>
             <a:endParaRPr lang="en-US" noProof="0" dirty="0"/>
           </a:p>
@@ -22327,7 +22327,7 @@
           <a:p>
             <a:r>
               <a:rPr lang="en-US" noProof="0" dirty="0"/>
-              <a:t>Alexander Garcia</a:t>
+              <a:t>Alexander Garcia Castro</a:t>
             </a:r>
           </a:p>
           <a:p>
@@ -22782,13 +22782,8 @@
           <a:p>
             <a:r>
               <a:rPr lang="en-US" sz="11200" dirty="0"/>
-              <a:t>Processing made by sheet </a:t>
-            </a:r>
-            <a:r>
-              <a:rPr lang="en-US" sz="11200"/>
-              <a:t>in the source file</a:t>
-            </a:r>
-            <a:endParaRPr lang="en-US" sz="11200" dirty="0"/>
+              <a:t>Processing made by sheet in the source file</a:t>
+            </a:r>
           </a:p>
           <a:p>
             <a:endParaRPr lang="en-US" sz="11200" dirty="0"/>
@@ -22898,7 +22893,7 @@
         </p:blipFill>
         <p:spPr>
           <a:xfrm>
-            <a:off x="3365057" y="4220256"/>
+            <a:off x="3365057" y="4986947"/>
             <a:ext cx="1370023" cy="853852"/>
           </a:xfrm>
           <a:prstGeom prst="rect">
@@ -22920,7 +22915,7 @@
         </p:nvSpPr>
         <p:spPr>
           <a:xfrm rot="16200000">
-            <a:off x="5582994" y="4099486"/>
+            <a:off x="5582994" y="4866177"/>
             <a:ext cx="664234" cy="1104893"/>
           </a:xfrm>
           <a:prstGeom prst="downArrow">
@@ -22984,7 +22979,7 @@
         </p:blipFill>
         <p:spPr>
           <a:xfrm>
-            <a:off x="7095142" y="4053846"/>
+            <a:off x="7095142" y="4820537"/>
             <a:ext cx="1020538" cy="1186672"/>
           </a:xfrm>
           <a:prstGeom prst="rect">
@@ -23094,7 +23089,7 @@
           <a:p>
             <a:r>
               <a:rPr lang="en-US" sz="12800" dirty="0"/>
-              <a:t>Alignment with the CFIHOS principles</a:t>
+              <a:t>Alignment with the CFIHOS specification and principles</a:t>
             </a:r>
           </a:p>
           <a:p>
@@ -23103,7 +23098,7 @@
           <a:p>
             <a:r>
               <a:rPr lang="en-US" sz="12800" dirty="0"/>
-              <a:t>Alignment with the previous common pattern</a:t>
+              <a:t>Alignment with the “common language”</a:t>
             </a:r>
           </a:p>
           <a:p>
@@ -23394,7 +23389,7 @@
           <a:p>
             <a:r>
               <a:rPr lang="en-US" sz="4000" b="1" dirty="0"/>
-              <a:t>Overview of the ontology</a:t>
+              <a:t>Overview of the current CFIHOS ontology</a:t>
             </a:r>
           </a:p>
         </p:txBody>
@@ -23897,8 +23892,8 @@
         </p:nvSpPr>
         <p:spPr>
           <a:xfrm>
-            <a:off x="1507967" y="1939752"/>
-            <a:ext cx="1501934" cy="203867"/>
+            <a:off x="1507966" y="1939752"/>
+            <a:ext cx="1777473" cy="203867"/>
           </a:xfrm>
           <a:prstGeom prst="rect">
             <a:avLst/>
@@ -24066,7 +24061,7 @@
         <p:spPr>
           <a:xfrm>
             <a:off x="1507967" y="4290939"/>
-            <a:ext cx="1736266" cy="139503"/>
+            <a:ext cx="1736266" cy="195205"/>
           </a:xfrm>
           <a:prstGeom prst="rect">
             <a:avLst/>
@@ -27011,7 +27006,7 @@
           <p:nvPr>
             <p:extLst>
               <p:ext uri="{D42A27DB-BD31-4B8C-83A1-F6EECF244321}">
-                <p14:modId xmlns:p14="http://schemas.microsoft.com/office/powerpoint/2010/main" val="2465696286"/>
+                <p14:modId xmlns:p14="http://schemas.microsoft.com/office/powerpoint/2010/main" val="1167317168"/>
               </p:ext>
             </p:extLst>
           </p:nvPr>
@@ -27544,7 +27539,7 @@
           <a:p>
             <a:r>
               <a:rPr lang="en-US" sz="4000" dirty="0"/>
-              <a:t>The pattern in CFIHOS</a:t>
+              <a:t>The common language applied to CFIHOS</a:t>
             </a:r>
             <a:endParaRPr lang="en-US" sz="4000" b="1" dirty="0"/>
           </a:p>
@@ -27552,10 +27547,10 @@
       </p:sp>
       <p:pic>
         <p:nvPicPr>
-          <p:cNvPr id="6" name="Imagen 5">
-            <a:extLst>
-              <a:ext uri="{FF2B5EF4-FFF2-40B4-BE49-F238E27FC236}">
-                <a16:creationId xmlns:a16="http://schemas.microsoft.com/office/drawing/2014/main" id="{0EAEBDE6-1C24-41AE-E46B-EE3D062C0454}"/>
+          <p:cNvPr id="3" name="Imagen 2" descr="Diagrama&#10;&#10;El contenido generado por IA puede ser incorrecto.">
+            <a:extLst>
+              <a:ext uri="{FF2B5EF4-FFF2-40B4-BE49-F238E27FC236}">
+                <a16:creationId xmlns:a16="http://schemas.microsoft.com/office/drawing/2014/main" id="{4E025DBB-03C4-8028-7D82-B2CB5BCADF3A}"/>
               </a:ext>
             </a:extLst>
           </p:cNvPr>
@@ -27572,8 +27567,8 @@
         </p:blipFill>
         <p:spPr>
           <a:xfrm>
-            <a:off x="1679987" y="1356967"/>
-            <a:ext cx="8312152" cy="5323513"/>
+            <a:off x="1940853" y="1408235"/>
+            <a:ext cx="7751787" cy="4964628"/>
           </a:xfrm>
           <a:prstGeom prst="rect">
             <a:avLst/>
@@ -27646,7 +27641,7 @@
           <a:p>
             <a:r>
               <a:rPr lang="en-US" sz="4000" dirty="0"/>
-              <a:t>Summary</a:t>
+              <a:t>Final remarks</a:t>
             </a:r>
             <a:endParaRPr lang="en-US" sz="4000" b="1" dirty="0"/>
           </a:p>
@@ -27676,13 +27671,34 @@
         </p:spPr>
         <p:txBody>
           <a:bodyPr>
-            <a:normAutofit fontScale="92500" lnSpcReduction="10000"/>
+            <a:normAutofit fontScale="92500" lnSpcReduction="20000"/>
           </a:bodyPr>
           <a:lstStyle/>
           <a:p>
             <a:r>
               <a:rPr lang="en-US" sz="3800" dirty="0"/>
-              <a:t>Development of a CFIHOS ontology following IDO</a:t>
+              <a:t>Development of a CFIHOS ontology based on the IDO</a:t>
+            </a:r>
+          </a:p>
+          <a:p>
+            <a:pPr marL="152396" indent="0">
+              <a:buNone/>
+            </a:pPr>
+            <a:endParaRPr lang="en-US" sz="3800" dirty="0"/>
+          </a:p>
+          <a:p>
+            <a:r>
+              <a:rPr lang="en-US" sz="3800" dirty="0"/>
+              <a:t>Need for validation from the CFIHOS community and testing in real scenarios</a:t>
+            </a:r>
+          </a:p>
+          <a:p>
+            <a:endParaRPr lang="en-US" sz="3800" dirty="0"/>
+          </a:p>
+          <a:p>
+            <a:r>
+              <a:rPr lang="en-US" sz="3800" dirty="0"/>
+              <a:t>Need to clarification: Tag vs Equipment</a:t>
             </a:r>
           </a:p>
           <a:p>
@@ -27696,21 +27712,6 @@
           </a:p>
           <a:p>
             <a:endParaRPr lang="en-US" sz="3800" dirty="0"/>
-          </a:p>
-          <a:p>
-            <a:r>
-              <a:rPr lang="en-US" sz="3800" dirty="0"/>
-              <a:t>Need for validation from the CFIHOS community</a:t>
-            </a:r>
-          </a:p>
-          <a:p>
-            <a:endParaRPr lang="en-US" sz="3800" dirty="0"/>
-          </a:p>
-          <a:p>
-            <a:r>
-              <a:rPr lang="en-US" sz="3800" dirty="0"/>
-              <a:t>Tag vs equipment. They share the identifier</a:t>
-            </a:r>
           </a:p>
           <a:p>
             <a:endParaRPr lang="en-US" sz="4500" dirty="0"/>
@@ -27833,7 +27834,7 @@
           <a:p>
             <a:r>
               <a:rPr lang="en-US" noProof="0" dirty="0"/>
-              <a:t>Alexander Garcia</a:t>
+              <a:t>Alexander Garcia Castro</a:t>
             </a:r>
           </a:p>
           <a:p>
@@ -29956,7 +29957,7 @@
           <a:p>
             <a:r>
               <a:rPr lang="en-GB" sz="4000" dirty="0"/>
-              <a:t>Towards a harmonized representation</a:t>
+              <a:t>Towards a common language</a:t>
             </a:r>
           </a:p>
         </p:txBody>

--- a/docs/cfihos-ontology.pptx
+++ b/docs/cfihos-ontology.pptx
@@ -5,47 +5,46 @@
     <p:sldMasterId id="2147483648" r:id="rId1"/>
   </p:sldMasterIdLst>
   <p:notesMasterIdLst>
-    <p:notesMasterId r:id="rId37"/>
+    <p:notesMasterId r:id="rId36"/>
   </p:notesMasterIdLst>
   <p:handoutMasterIdLst>
-    <p:handoutMasterId r:id="rId38"/>
+    <p:handoutMasterId r:id="rId37"/>
   </p:handoutMasterIdLst>
   <p:sldIdLst>
     <p:sldId id="2076136643" r:id="rId2"/>
     <p:sldId id="2076136468" r:id="rId3"/>
     <p:sldId id="2076136601" r:id="rId4"/>
     <p:sldId id="2076136602" r:id="rId5"/>
-    <p:sldId id="2076136605" r:id="rId6"/>
-    <p:sldId id="2076136604" r:id="rId7"/>
-    <p:sldId id="2076136469" r:id="rId8"/>
-    <p:sldId id="2076136646" r:id="rId9"/>
-    <p:sldId id="2076136682" r:id="rId10"/>
-    <p:sldId id="2076136625" r:id="rId11"/>
-    <p:sldId id="2076136683" r:id="rId12"/>
-    <p:sldId id="2076136645" r:id="rId13"/>
-    <p:sldId id="2076136676" r:id="rId14"/>
-    <p:sldId id="2076136656" r:id="rId15"/>
-    <p:sldId id="2076136654" r:id="rId16"/>
-    <p:sldId id="2076136675" r:id="rId17"/>
-    <p:sldId id="2076136684" r:id="rId18"/>
-    <p:sldId id="2076136663" r:id="rId19"/>
-    <p:sldId id="2076136664" r:id="rId20"/>
-    <p:sldId id="2076136665" r:id="rId21"/>
-    <p:sldId id="2076136677" r:id="rId22"/>
-    <p:sldId id="2076136659" r:id="rId23"/>
-    <p:sldId id="2076136680" r:id="rId24"/>
-    <p:sldId id="2076136672" r:id="rId25"/>
-    <p:sldId id="2076136681" r:id="rId26"/>
-    <p:sldId id="2076136632" r:id="rId27"/>
-    <p:sldId id="2076136633" r:id="rId28"/>
-    <p:sldId id="2076136634" r:id="rId29"/>
-    <p:sldId id="2076136635" r:id="rId30"/>
-    <p:sldId id="2076136636" r:id="rId31"/>
-    <p:sldId id="2076136637" r:id="rId32"/>
-    <p:sldId id="2076136673" r:id="rId33"/>
-    <p:sldId id="2076136678" r:id="rId34"/>
-    <p:sldId id="2076136686" r:id="rId35"/>
-    <p:sldId id="2076136685" r:id="rId36"/>
+    <p:sldId id="2076136604" r:id="rId6"/>
+    <p:sldId id="2076136469" r:id="rId7"/>
+    <p:sldId id="2076136646" r:id="rId8"/>
+    <p:sldId id="2076136682" r:id="rId9"/>
+    <p:sldId id="2076136625" r:id="rId10"/>
+    <p:sldId id="2076136683" r:id="rId11"/>
+    <p:sldId id="2076136645" r:id="rId12"/>
+    <p:sldId id="2076136676" r:id="rId13"/>
+    <p:sldId id="2076136656" r:id="rId14"/>
+    <p:sldId id="2076136654" r:id="rId15"/>
+    <p:sldId id="2076136675" r:id="rId16"/>
+    <p:sldId id="2076136684" r:id="rId17"/>
+    <p:sldId id="2076136663" r:id="rId18"/>
+    <p:sldId id="2076136664" r:id="rId19"/>
+    <p:sldId id="2076136665" r:id="rId20"/>
+    <p:sldId id="2076136677" r:id="rId21"/>
+    <p:sldId id="2076136659" r:id="rId22"/>
+    <p:sldId id="2076136680" r:id="rId23"/>
+    <p:sldId id="2076136672" r:id="rId24"/>
+    <p:sldId id="2076136681" r:id="rId25"/>
+    <p:sldId id="2076136632" r:id="rId26"/>
+    <p:sldId id="2076136633" r:id="rId27"/>
+    <p:sldId id="2076136634" r:id="rId28"/>
+    <p:sldId id="2076136635" r:id="rId29"/>
+    <p:sldId id="2076136636" r:id="rId30"/>
+    <p:sldId id="2076136637" r:id="rId31"/>
+    <p:sldId id="2076136673" r:id="rId32"/>
+    <p:sldId id="2076136678" r:id="rId33"/>
+    <p:sldId id="2076136686" r:id="rId34"/>
+    <p:sldId id="2076136685" r:id="rId35"/>
   </p:sldIdLst>
   <p:sldSz cx="12192000" cy="6858000"/>
   <p:notesSz cx="7104063" cy="10234613"/>
@@ -8208,146 +8207,6 @@
         <p:cNvPr id="1" name="">
           <a:extLst>
             <a:ext uri="{FF2B5EF4-FFF2-40B4-BE49-F238E27FC236}">
-              <a16:creationId xmlns:a16="http://schemas.microsoft.com/office/drawing/2014/main" id="{2EB95F05-2FC5-300A-E716-36694B5DE717}"/>
-            </a:ext>
-          </a:extLst>
-        </p:cNvPr>
-        <p:cNvGrpSpPr/>
-        <p:nvPr/>
-      </p:nvGrpSpPr>
-      <p:grpSpPr>
-        <a:xfrm>
-          <a:off x="0" y="0"/>
-          <a:ext cx="0" cy="0"/>
-          <a:chOff x="0" y="0"/>
-          <a:chExt cx="0" cy="0"/>
-        </a:xfrm>
-      </p:grpSpPr>
-      <p:sp>
-        <p:nvSpPr>
-          <p:cNvPr id="2" name="Slide Image Placeholder 1">
-            <a:extLst>
-              <a:ext uri="{FF2B5EF4-FFF2-40B4-BE49-F238E27FC236}">
-                <a16:creationId xmlns:a16="http://schemas.microsoft.com/office/drawing/2014/main" id="{A0FDC091-EB89-55F2-D2BA-73E31FD43DC8}"/>
-              </a:ext>
-            </a:extLst>
-          </p:cNvPr>
-          <p:cNvSpPr>
-            <a:spLocks noGrp="1" noRot="1" noChangeAspect="1"/>
-          </p:cNvSpPr>
-          <p:nvPr>
-            <p:ph type="sldImg"/>
-          </p:nvPr>
-        </p:nvSpPr>
-        <p:spPr>
-          <a:xfrm>
-            <a:off x="381000" y="685800"/>
-            <a:ext cx="6096000" cy="3429000"/>
-          </a:xfrm>
-        </p:spPr>
-      </p:sp>
-      <p:sp>
-        <p:nvSpPr>
-          <p:cNvPr id="3" name="Notes Placeholder 2">
-            <a:extLst>
-              <a:ext uri="{FF2B5EF4-FFF2-40B4-BE49-F238E27FC236}">
-                <a16:creationId xmlns:a16="http://schemas.microsoft.com/office/drawing/2014/main" id="{7FD26963-B6E0-27C7-0483-50F978A7CA5C}"/>
-              </a:ext>
-            </a:extLst>
-          </p:cNvPr>
-          <p:cNvSpPr>
-            <a:spLocks noGrp="1"/>
-          </p:cNvSpPr>
-          <p:nvPr>
-            <p:ph type="body" idx="1"/>
-          </p:nvPr>
-        </p:nvSpPr>
-        <p:spPr/>
-        <p:txBody>
-          <a:bodyPr/>
-          <a:lstStyle/>
-          <a:p>
-            <a:r>
-              <a:rPr lang="de-DE" dirty="0"/>
-              <a:t>This </a:t>
-            </a:r>
-            <a:r>
-              <a:rPr lang="de-DE" dirty="0" err="1"/>
-              <a:t>is</a:t>
-            </a:r>
-            <a:r>
-              <a:rPr lang="de-DE" dirty="0"/>
-              <a:t> </a:t>
-            </a:r>
-            <a:r>
-              <a:rPr lang="de-DE" dirty="0" err="1"/>
-              <a:t>the</a:t>
-            </a:r>
-            <a:r>
-              <a:rPr lang="de-DE" dirty="0"/>
-              <a:t> </a:t>
-            </a:r>
-            <a:r>
-              <a:rPr lang="de-DE" dirty="0" err="1"/>
-              <a:t>competency</a:t>
-            </a:r>
-            <a:r>
-              <a:rPr lang="de-DE" dirty="0"/>
-              <a:t> </a:t>
-            </a:r>
-            <a:r>
-              <a:rPr lang="de-DE" dirty="0" err="1"/>
-              <a:t>question</a:t>
-            </a:r>
-            <a:r>
-              <a:rPr lang="de-DE" dirty="0"/>
-              <a:t> </a:t>
-            </a:r>
-            <a:r>
-              <a:rPr lang="de-DE" dirty="0" err="1"/>
-              <a:t>driving</a:t>
-            </a:r>
-            <a:r>
-              <a:rPr lang="de-DE" dirty="0"/>
-              <a:t> </a:t>
-            </a:r>
-            <a:r>
-              <a:rPr lang="de-DE" dirty="0" err="1"/>
-              <a:t>the</a:t>
-            </a:r>
-            <a:r>
-              <a:rPr lang="de-DE" dirty="0"/>
-              <a:t> </a:t>
-            </a:r>
-            <a:r>
-              <a:rPr lang="de-DE" dirty="0" err="1"/>
-              <a:t>presentation</a:t>
-            </a:r>
-            <a:endParaRPr lang="en-US" dirty="0"/>
-          </a:p>
-        </p:txBody>
-      </p:sp>
-    </p:spTree>
-    <p:extLst>
-      <p:ext uri="{BB962C8B-B14F-4D97-AF65-F5344CB8AC3E}">
-        <p14:creationId xmlns:p14="http://schemas.microsoft.com/office/powerpoint/2010/main" val="1757687430"/>
-      </p:ext>
-    </p:extLst>
-  </p:cSld>
-  <p:clrMapOvr>
-    <a:masterClrMapping/>
-  </p:clrMapOvr>
-</p:notes>
-</file>
-
-<file path=ppt/notesSlides/notesSlide11.xml><?xml version="1.0" encoding="utf-8"?>
-<p:notes xmlns:a="http://schemas.openxmlformats.org/drawingml/2006/main" xmlns:r="http://schemas.openxmlformats.org/officeDocument/2006/relationships" xmlns:p="http://schemas.openxmlformats.org/presentationml/2006/main">
-  <p:cSld>
-    <p:spTree>
-      <p:nvGrpSpPr>
-        <p:cNvPr id="1" name="">
-          <a:extLst>
-            <a:ext uri="{FF2B5EF4-FFF2-40B4-BE49-F238E27FC236}">
               <a16:creationId xmlns:a16="http://schemas.microsoft.com/office/drawing/2014/main" id="{56F21A0D-1E11-A9EB-8BED-2B0C7F2FCE75}"/>
             </a:ext>
           </a:extLst>
@@ -8480,7 +8339,7 @@
 </p:notes>
 </file>
 
-<file path=ppt/notesSlides/notesSlide12.xml><?xml version="1.0" encoding="utf-8"?>
+<file path=ppt/notesSlides/notesSlide11.xml><?xml version="1.0" encoding="utf-8"?>
 <p:notes xmlns:a="http://schemas.openxmlformats.org/drawingml/2006/main" xmlns:r="http://schemas.openxmlformats.org/officeDocument/2006/relationships" xmlns:p="http://schemas.openxmlformats.org/presentationml/2006/main">
   <p:cSld>
     <p:spTree>
@@ -8620,7 +8479,7 @@
 </p:notes>
 </file>
 
-<file path=ppt/notesSlides/notesSlide13.xml><?xml version="1.0" encoding="utf-8"?>
+<file path=ppt/notesSlides/notesSlide12.xml><?xml version="1.0" encoding="utf-8"?>
 <p:notes xmlns:a="http://schemas.openxmlformats.org/drawingml/2006/main" xmlns:r="http://schemas.openxmlformats.org/officeDocument/2006/relationships" xmlns:p="http://schemas.openxmlformats.org/presentationml/2006/main">
   <p:cSld>
     <p:spTree>
@@ -8760,7 +8619,7 @@
 </p:notes>
 </file>
 
-<file path=ppt/notesSlides/notesSlide14.xml><?xml version="1.0" encoding="utf-8"?>
+<file path=ppt/notesSlides/notesSlide13.xml><?xml version="1.0" encoding="utf-8"?>
 <p:notes xmlns:a="http://schemas.openxmlformats.org/drawingml/2006/main" xmlns:r="http://schemas.openxmlformats.org/officeDocument/2006/relationships" xmlns:p="http://schemas.openxmlformats.org/presentationml/2006/main">
   <p:cSld>
     <p:spTree>
@@ -8900,7 +8759,7 @@
 </p:notes>
 </file>
 
-<file path=ppt/notesSlides/notesSlide15.xml><?xml version="1.0" encoding="utf-8"?>
+<file path=ppt/notesSlides/notesSlide14.xml><?xml version="1.0" encoding="utf-8"?>
 <p:notes xmlns:a="http://schemas.openxmlformats.org/drawingml/2006/main" xmlns:r="http://schemas.openxmlformats.org/officeDocument/2006/relationships" xmlns:p="http://schemas.openxmlformats.org/presentationml/2006/main">
   <p:cSld>
     <p:spTree>
@@ -9040,7 +8899,7 @@
 </p:notes>
 </file>
 
-<file path=ppt/notesSlides/notesSlide16.xml><?xml version="1.0" encoding="utf-8"?>
+<file path=ppt/notesSlides/notesSlide15.xml><?xml version="1.0" encoding="utf-8"?>
 <p:notes xmlns:a="http://schemas.openxmlformats.org/drawingml/2006/main" xmlns:r="http://schemas.openxmlformats.org/officeDocument/2006/relationships" xmlns:p="http://schemas.openxmlformats.org/presentationml/2006/main">
   <p:cSld>
     <p:spTree>
@@ -9180,7 +9039,7 @@
 </p:notes>
 </file>
 
-<file path=ppt/notesSlides/notesSlide17.xml><?xml version="1.0" encoding="utf-8"?>
+<file path=ppt/notesSlides/notesSlide16.xml><?xml version="1.0" encoding="utf-8"?>
 <p:notes xmlns:a="http://schemas.openxmlformats.org/drawingml/2006/main" xmlns:r="http://schemas.openxmlformats.org/officeDocument/2006/relationships" xmlns:p="http://schemas.openxmlformats.org/presentationml/2006/main">
   <p:cSld>
     <p:spTree>
@@ -9320,7 +9179,7 @@
 </p:notes>
 </file>
 
-<file path=ppt/notesSlides/notesSlide18.xml><?xml version="1.0" encoding="utf-8"?>
+<file path=ppt/notesSlides/notesSlide17.xml><?xml version="1.0" encoding="utf-8"?>
 <p:notes xmlns:a="http://schemas.openxmlformats.org/drawingml/2006/main" xmlns:r="http://schemas.openxmlformats.org/officeDocument/2006/relationships" xmlns:p="http://schemas.openxmlformats.org/presentationml/2006/main">
   <p:cSld>
     <p:spTree>
@@ -9460,7 +9319,7 @@
 </p:notes>
 </file>
 
-<file path=ppt/notesSlides/notesSlide19.xml><?xml version="1.0" encoding="utf-8"?>
+<file path=ppt/notesSlides/notesSlide18.xml><?xml version="1.0" encoding="utf-8"?>
 <p:notes xmlns:a="http://schemas.openxmlformats.org/drawingml/2006/main" xmlns:r="http://schemas.openxmlformats.org/officeDocument/2006/relationships" xmlns:p="http://schemas.openxmlformats.org/presentationml/2006/main">
   <p:cSld>
     <p:spTree>
@@ -9591,6 +9450,146 @@
     <p:extLst>
       <p:ext uri="{BB962C8B-B14F-4D97-AF65-F5344CB8AC3E}">
         <p14:creationId xmlns:p14="http://schemas.microsoft.com/office/powerpoint/2010/main" val="446078535"/>
+      </p:ext>
+    </p:extLst>
+  </p:cSld>
+  <p:clrMapOvr>
+    <a:masterClrMapping/>
+  </p:clrMapOvr>
+</p:notes>
+</file>
+
+<file path=ppt/notesSlides/notesSlide19.xml><?xml version="1.0" encoding="utf-8"?>
+<p:notes xmlns:a="http://schemas.openxmlformats.org/drawingml/2006/main" xmlns:r="http://schemas.openxmlformats.org/officeDocument/2006/relationships" xmlns:p="http://schemas.openxmlformats.org/presentationml/2006/main">
+  <p:cSld>
+    <p:spTree>
+      <p:nvGrpSpPr>
+        <p:cNvPr id="1" name="">
+          <a:extLst>
+            <a:ext uri="{FF2B5EF4-FFF2-40B4-BE49-F238E27FC236}">
+              <a16:creationId xmlns:a16="http://schemas.microsoft.com/office/drawing/2014/main" id="{8D88D765-E697-34E1-2DEF-76874B3A7EA3}"/>
+            </a:ext>
+          </a:extLst>
+        </p:cNvPr>
+        <p:cNvGrpSpPr/>
+        <p:nvPr/>
+      </p:nvGrpSpPr>
+      <p:grpSpPr>
+        <a:xfrm>
+          <a:off x="0" y="0"/>
+          <a:ext cx="0" cy="0"/>
+          <a:chOff x="0" y="0"/>
+          <a:chExt cx="0" cy="0"/>
+        </a:xfrm>
+      </p:grpSpPr>
+      <p:sp>
+        <p:nvSpPr>
+          <p:cNvPr id="2" name="Slide Image Placeholder 1">
+            <a:extLst>
+              <a:ext uri="{FF2B5EF4-FFF2-40B4-BE49-F238E27FC236}">
+                <a16:creationId xmlns:a16="http://schemas.microsoft.com/office/drawing/2014/main" id="{BB197DE3-F25B-1290-71C7-552C4D4B70BE}"/>
+              </a:ext>
+            </a:extLst>
+          </p:cNvPr>
+          <p:cNvSpPr>
+            <a:spLocks noGrp="1" noRot="1" noChangeAspect="1"/>
+          </p:cNvSpPr>
+          <p:nvPr>
+            <p:ph type="sldImg"/>
+          </p:nvPr>
+        </p:nvSpPr>
+        <p:spPr>
+          <a:xfrm>
+            <a:off x="381000" y="685800"/>
+            <a:ext cx="6096000" cy="3429000"/>
+          </a:xfrm>
+        </p:spPr>
+      </p:sp>
+      <p:sp>
+        <p:nvSpPr>
+          <p:cNvPr id="3" name="Notes Placeholder 2">
+            <a:extLst>
+              <a:ext uri="{FF2B5EF4-FFF2-40B4-BE49-F238E27FC236}">
+                <a16:creationId xmlns:a16="http://schemas.microsoft.com/office/drawing/2014/main" id="{97F5A006-33BF-926F-7431-DDF1CBDD3173}"/>
+              </a:ext>
+            </a:extLst>
+          </p:cNvPr>
+          <p:cNvSpPr>
+            <a:spLocks noGrp="1"/>
+          </p:cNvSpPr>
+          <p:nvPr>
+            <p:ph type="body" idx="1"/>
+          </p:nvPr>
+        </p:nvSpPr>
+        <p:spPr/>
+        <p:txBody>
+          <a:bodyPr/>
+          <a:lstStyle/>
+          <a:p>
+            <a:r>
+              <a:rPr lang="de-DE" dirty="0"/>
+              <a:t>This </a:t>
+            </a:r>
+            <a:r>
+              <a:rPr lang="de-DE" dirty="0" err="1"/>
+              <a:t>is</a:t>
+            </a:r>
+            <a:r>
+              <a:rPr lang="de-DE" dirty="0"/>
+              <a:t> </a:t>
+            </a:r>
+            <a:r>
+              <a:rPr lang="de-DE" dirty="0" err="1"/>
+              <a:t>the</a:t>
+            </a:r>
+            <a:r>
+              <a:rPr lang="de-DE" dirty="0"/>
+              <a:t> </a:t>
+            </a:r>
+            <a:r>
+              <a:rPr lang="de-DE" dirty="0" err="1"/>
+              <a:t>competency</a:t>
+            </a:r>
+            <a:r>
+              <a:rPr lang="de-DE" dirty="0"/>
+              <a:t> </a:t>
+            </a:r>
+            <a:r>
+              <a:rPr lang="de-DE" dirty="0" err="1"/>
+              <a:t>question</a:t>
+            </a:r>
+            <a:r>
+              <a:rPr lang="de-DE" dirty="0"/>
+              <a:t> </a:t>
+            </a:r>
+            <a:r>
+              <a:rPr lang="de-DE" dirty="0" err="1"/>
+              <a:t>driving</a:t>
+            </a:r>
+            <a:r>
+              <a:rPr lang="de-DE" dirty="0"/>
+              <a:t> </a:t>
+            </a:r>
+            <a:r>
+              <a:rPr lang="de-DE" dirty="0" err="1"/>
+              <a:t>the</a:t>
+            </a:r>
+            <a:r>
+              <a:rPr lang="de-DE" dirty="0"/>
+              <a:t> </a:t>
+            </a:r>
+            <a:r>
+              <a:rPr lang="de-DE" dirty="0" err="1"/>
+              <a:t>presentation</a:t>
+            </a:r>
+            <a:endParaRPr lang="en-US" dirty="0"/>
+          </a:p>
+        </p:txBody>
+      </p:sp>
+    </p:spTree>
+    <p:extLst>
+      <p:ext uri="{BB962C8B-B14F-4D97-AF65-F5344CB8AC3E}">
+        <p14:creationId xmlns:p14="http://schemas.microsoft.com/office/powerpoint/2010/main" val="109195617"/>
       </p:ext>
     </p:extLst>
   </p:cSld>
@@ -9674,146 +9673,6 @@
         <p:cNvPr id="1" name="">
           <a:extLst>
             <a:ext uri="{FF2B5EF4-FFF2-40B4-BE49-F238E27FC236}">
-              <a16:creationId xmlns:a16="http://schemas.microsoft.com/office/drawing/2014/main" id="{8D88D765-E697-34E1-2DEF-76874B3A7EA3}"/>
-            </a:ext>
-          </a:extLst>
-        </p:cNvPr>
-        <p:cNvGrpSpPr/>
-        <p:nvPr/>
-      </p:nvGrpSpPr>
-      <p:grpSpPr>
-        <a:xfrm>
-          <a:off x="0" y="0"/>
-          <a:ext cx="0" cy="0"/>
-          <a:chOff x="0" y="0"/>
-          <a:chExt cx="0" cy="0"/>
-        </a:xfrm>
-      </p:grpSpPr>
-      <p:sp>
-        <p:nvSpPr>
-          <p:cNvPr id="2" name="Slide Image Placeholder 1">
-            <a:extLst>
-              <a:ext uri="{FF2B5EF4-FFF2-40B4-BE49-F238E27FC236}">
-                <a16:creationId xmlns:a16="http://schemas.microsoft.com/office/drawing/2014/main" id="{BB197DE3-F25B-1290-71C7-552C4D4B70BE}"/>
-              </a:ext>
-            </a:extLst>
-          </p:cNvPr>
-          <p:cNvSpPr>
-            <a:spLocks noGrp="1" noRot="1" noChangeAspect="1"/>
-          </p:cNvSpPr>
-          <p:nvPr>
-            <p:ph type="sldImg"/>
-          </p:nvPr>
-        </p:nvSpPr>
-        <p:spPr>
-          <a:xfrm>
-            <a:off x="381000" y="685800"/>
-            <a:ext cx="6096000" cy="3429000"/>
-          </a:xfrm>
-        </p:spPr>
-      </p:sp>
-      <p:sp>
-        <p:nvSpPr>
-          <p:cNvPr id="3" name="Notes Placeholder 2">
-            <a:extLst>
-              <a:ext uri="{FF2B5EF4-FFF2-40B4-BE49-F238E27FC236}">
-                <a16:creationId xmlns:a16="http://schemas.microsoft.com/office/drawing/2014/main" id="{97F5A006-33BF-926F-7431-DDF1CBDD3173}"/>
-              </a:ext>
-            </a:extLst>
-          </p:cNvPr>
-          <p:cNvSpPr>
-            <a:spLocks noGrp="1"/>
-          </p:cNvSpPr>
-          <p:nvPr>
-            <p:ph type="body" idx="1"/>
-          </p:nvPr>
-        </p:nvSpPr>
-        <p:spPr/>
-        <p:txBody>
-          <a:bodyPr/>
-          <a:lstStyle/>
-          <a:p>
-            <a:r>
-              <a:rPr lang="de-DE" dirty="0"/>
-              <a:t>This </a:t>
-            </a:r>
-            <a:r>
-              <a:rPr lang="de-DE" dirty="0" err="1"/>
-              <a:t>is</a:t>
-            </a:r>
-            <a:r>
-              <a:rPr lang="de-DE" dirty="0"/>
-              <a:t> </a:t>
-            </a:r>
-            <a:r>
-              <a:rPr lang="de-DE" dirty="0" err="1"/>
-              <a:t>the</a:t>
-            </a:r>
-            <a:r>
-              <a:rPr lang="de-DE" dirty="0"/>
-              <a:t> </a:t>
-            </a:r>
-            <a:r>
-              <a:rPr lang="de-DE" dirty="0" err="1"/>
-              <a:t>competency</a:t>
-            </a:r>
-            <a:r>
-              <a:rPr lang="de-DE" dirty="0"/>
-              <a:t> </a:t>
-            </a:r>
-            <a:r>
-              <a:rPr lang="de-DE" dirty="0" err="1"/>
-              <a:t>question</a:t>
-            </a:r>
-            <a:r>
-              <a:rPr lang="de-DE" dirty="0"/>
-              <a:t> </a:t>
-            </a:r>
-            <a:r>
-              <a:rPr lang="de-DE" dirty="0" err="1"/>
-              <a:t>driving</a:t>
-            </a:r>
-            <a:r>
-              <a:rPr lang="de-DE" dirty="0"/>
-              <a:t> </a:t>
-            </a:r>
-            <a:r>
-              <a:rPr lang="de-DE" dirty="0" err="1"/>
-              <a:t>the</a:t>
-            </a:r>
-            <a:r>
-              <a:rPr lang="de-DE" dirty="0"/>
-              <a:t> </a:t>
-            </a:r>
-            <a:r>
-              <a:rPr lang="de-DE" dirty="0" err="1"/>
-              <a:t>presentation</a:t>
-            </a:r>
-            <a:endParaRPr lang="en-US" dirty="0"/>
-          </a:p>
-        </p:txBody>
-      </p:sp>
-    </p:spTree>
-    <p:extLst>
-      <p:ext uri="{BB962C8B-B14F-4D97-AF65-F5344CB8AC3E}">
-        <p14:creationId xmlns:p14="http://schemas.microsoft.com/office/powerpoint/2010/main" val="109195617"/>
-      </p:ext>
-    </p:extLst>
-  </p:cSld>
-  <p:clrMapOvr>
-    <a:masterClrMapping/>
-  </p:clrMapOvr>
-</p:notes>
-</file>
-
-<file path=ppt/notesSlides/notesSlide21.xml><?xml version="1.0" encoding="utf-8"?>
-<p:notes xmlns:a="http://schemas.openxmlformats.org/drawingml/2006/main" xmlns:r="http://schemas.openxmlformats.org/officeDocument/2006/relationships" xmlns:p="http://schemas.openxmlformats.org/presentationml/2006/main">
-  <p:cSld>
-    <p:spTree>
-      <p:nvGrpSpPr>
-        <p:cNvPr id="1" name="">
-          <a:extLst>
-            <a:ext uri="{FF2B5EF4-FFF2-40B4-BE49-F238E27FC236}">
               <a16:creationId xmlns:a16="http://schemas.microsoft.com/office/drawing/2014/main" id="{82ECE3E9-5BEF-4746-4671-F79262245595}"/>
             </a:ext>
           </a:extLst>
@@ -9946,7 +9805,7 @@
 </p:notes>
 </file>
 
-<file path=ppt/notesSlides/notesSlide22.xml><?xml version="1.0" encoding="utf-8"?>
+<file path=ppt/notesSlides/notesSlide21.xml><?xml version="1.0" encoding="utf-8"?>
 <p:notes xmlns:a="http://schemas.openxmlformats.org/drawingml/2006/main" xmlns:r="http://schemas.openxmlformats.org/officeDocument/2006/relationships" xmlns:p="http://schemas.openxmlformats.org/presentationml/2006/main">
   <p:cSld>
     <p:spTree>
@@ -10086,7 +9945,7 @@
 </p:notes>
 </file>
 
-<file path=ppt/notesSlides/notesSlide23.xml><?xml version="1.0" encoding="utf-8"?>
+<file path=ppt/notesSlides/notesSlide22.xml><?xml version="1.0" encoding="utf-8"?>
 <p:notes xmlns:a="http://schemas.openxmlformats.org/drawingml/2006/main" xmlns:r="http://schemas.openxmlformats.org/officeDocument/2006/relationships" xmlns:p="http://schemas.openxmlformats.org/presentationml/2006/main">
   <p:cSld>
     <p:spTree>
@@ -10226,7 +10085,7 @@
 </p:notes>
 </file>
 
-<file path=ppt/notesSlides/notesSlide24.xml><?xml version="1.0" encoding="utf-8"?>
+<file path=ppt/notesSlides/notesSlide23.xml><?xml version="1.0" encoding="utf-8"?>
 <p:notes xmlns:a="http://schemas.openxmlformats.org/drawingml/2006/main" xmlns:r="http://schemas.openxmlformats.org/officeDocument/2006/relationships" xmlns:p="http://schemas.openxmlformats.org/presentationml/2006/main">
   <p:cSld>
     <p:spTree>
@@ -10366,7 +10225,7 @@
 </p:notes>
 </file>
 
-<file path=ppt/notesSlides/notesSlide25.xml><?xml version="1.0" encoding="utf-8"?>
+<file path=ppt/notesSlides/notesSlide24.xml><?xml version="1.0" encoding="utf-8"?>
 <p:notes xmlns:a="http://schemas.openxmlformats.org/drawingml/2006/main" xmlns:r="http://schemas.openxmlformats.org/officeDocument/2006/relationships" xmlns:p="http://schemas.openxmlformats.org/presentationml/2006/main">
   <p:cSld>
     <p:spTree>
@@ -10506,7 +10365,7 @@
 </p:notes>
 </file>
 
-<file path=ppt/notesSlides/notesSlide26.xml><?xml version="1.0" encoding="utf-8"?>
+<file path=ppt/notesSlides/notesSlide25.xml><?xml version="1.0" encoding="utf-8"?>
 <p:notes xmlns:a="http://schemas.openxmlformats.org/drawingml/2006/main" xmlns:r="http://schemas.openxmlformats.org/officeDocument/2006/relationships" xmlns:p="http://schemas.openxmlformats.org/presentationml/2006/main">
   <p:cSld>
     <p:spTree>
@@ -10646,7 +10505,7 @@
 </p:notes>
 </file>
 
-<file path=ppt/notesSlides/notesSlide27.xml><?xml version="1.0" encoding="utf-8"?>
+<file path=ppt/notesSlides/notesSlide26.xml><?xml version="1.0" encoding="utf-8"?>
 <p:notes xmlns:a="http://schemas.openxmlformats.org/drawingml/2006/main" xmlns:r="http://schemas.openxmlformats.org/officeDocument/2006/relationships" xmlns:p="http://schemas.openxmlformats.org/presentationml/2006/main">
   <p:cSld>
     <p:spTree>
@@ -10786,7 +10645,7 @@
 </p:notes>
 </file>
 
-<file path=ppt/notesSlides/notesSlide28.xml><?xml version="1.0" encoding="utf-8"?>
+<file path=ppt/notesSlides/notesSlide27.xml><?xml version="1.0" encoding="utf-8"?>
 <p:notes xmlns:a="http://schemas.openxmlformats.org/drawingml/2006/main" xmlns:r="http://schemas.openxmlformats.org/officeDocument/2006/relationships" xmlns:p="http://schemas.openxmlformats.org/presentationml/2006/main">
   <p:cSld>
     <p:spTree>
@@ -10926,7 +10785,7 @@
 </p:notes>
 </file>
 
-<file path=ppt/notesSlides/notesSlide29.xml><?xml version="1.0" encoding="utf-8"?>
+<file path=ppt/notesSlides/notesSlide28.xml><?xml version="1.0" encoding="utf-8"?>
 <p:notes xmlns:a="http://schemas.openxmlformats.org/drawingml/2006/main" xmlns:r="http://schemas.openxmlformats.org/officeDocument/2006/relationships" xmlns:p="http://schemas.openxmlformats.org/presentationml/2006/main">
   <p:cSld>
     <p:spTree>
@@ -11057,6 +10916,146 @@
     <p:extLst>
       <p:ext uri="{BB962C8B-B14F-4D97-AF65-F5344CB8AC3E}">
         <p14:creationId xmlns:p14="http://schemas.microsoft.com/office/powerpoint/2010/main" val="2031637903"/>
+      </p:ext>
+    </p:extLst>
+  </p:cSld>
+  <p:clrMapOvr>
+    <a:masterClrMapping/>
+  </p:clrMapOvr>
+</p:notes>
+</file>
+
+<file path=ppt/notesSlides/notesSlide29.xml><?xml version="1.0" encoding="utf-8"?>
+<p:notes xmlns:a="http://schemas.openxmlformats.org/drawingml/2006/main" xmlns:r="http://schemas.openxmlformats.org/officeDocument/2006/relationships" xmlns:p="http://schemas.openxmlformats.org/presentationml/2006/main">
+  <p:cSld>
+    <p:spTree>
+      <p:nvGrpSpPr>
+        <p:cNvPr id="1" name="">
+          <a:extLst>
+            <a:ext uri="{FF2B5EF4-FFF2-40B4-BE49-F238E27FC236}">
+              <a16:creationId xmlns:a16="http://schemas.microsoft.com/office/drawing/2014/main" id="{74AE4D5B-6E9C-AA0F-749F-C87D190F8202}"/>
+            </a:ext>
+          </a:extLst>
+        </p:cNvPr>
+        <p:cNvGrpSpPr/>
+        <p:nvPr/>
+      </p:nvGrpSpPr>
+      <p:grpSpPr>
+        <a:xfrm>
+          <a:off x="0" y="0"/>
+          <a:ext cx="0" cy="0"/>
+          <a:chOff x="0" y="0"/>
+          <a:chExt cx="0" cy="0"/>
+        </a:xfrm>
+      </p:grpSpPr>
+      <p:sp>
+        <p:nvSpPr>
+          <p:cNvPr id="2" name="Slide Image Placeholder 1">
+            <a:extLst>
+              <a:ext uri="{FF2B5EF4-FFF2-40B4-BE49-F238E27FC236}">
+                <a16:creationId xmlns:a16="http://schemas.microsoft.com/office/drawing/2014/main" id="{FC64EEF4-79E5-EF83-2358-6EB45A32044C}"/>
+              </a:ext>
+            </a:extLst>
+          </p:cNvPr>
+          <p:cNvSpPr>
+            <a:spLocks noGrp="1" noRot="1" noChangeAspect="1"/>
+          </p:cNvSpPr>
+          <p:nvPr>
+            <p:ph type="sldImg"/>
+          </p:nvPr>
+        </p:nvSpPr>
+        <p:spPr>
+          <a:xfrm>
+            <a:off x="381000" y="685800"/>
+            <a:ext cx="6096000" cy="3429000"/>
+          </a:xfrm>
+        </p:spPr>
+      </p:sp>
+      <p:sp>
+        <p:nvSpPr>
+          <p:cNvPr id="3" name="Notes Placeholder 2">
+            <a:extLst>
+              <a:ext uri="{FF2B5EF4-FFF2-40B4-BE49-F238E27FC236}">
+                <a16:creationId xmlns:a16="http://schemas.microsoft.com/office/drawing/2014/main" id="{F07A5AD4-D18E-AE85-A5E5-00F06E9C4873}"/>
+              </a:ext>
+            </a:extLst>
+          </p:cNvPr>
+          <p:cNvSpPr>
+            <a:spLocks noGrp="1"/>
+          </p:cNvSpPr>
+          <p:nvPr>
+            <p:ph type="body" idx="1"/>
+          </p:nvPr>
+        </p:nvSpPr>
+        <p:spPr/>
+        <p:txBody>
+          <a:bodyPr/>
+          <a:lstStyle/>
+          <a:p>
+            <a:r>
+              <a:rPr lang="de-DE" dirty="0"/>
+              <a:t>This </a:t>
+            </a:r>
+            <a:r>
+              <a:rPr lang="de-DE" dirty="0" err="1"/>
+              <a:t>is</a:t>
+            </a:r>
+            <a:r>
+              <a:rPr lang="de-DE" dirty="0"/>
+              <a:t> </a:t>
+            </a:r>
+            <a:r>
+              <a:rPr lang="de-DE" dirty="0" err="1"/>
+              <a:t>the</a:t>
+            </a:r>
+            <a:r>
+              <a:rPr lang="de-DE" dirty="0"/>
+              <a:t> </a:t>
+            </a:r>
+            <a:r>
+              <a:rPr lang="de-DE" dirty="0" err="1"/>
+              <a:t>competency</a:t>
+            </a:r>
+            <a:r>
+              <a:rPr lang="de-DE" dirty="0"/>
+              <a:t> </a:t>
+            </a:r>
+            <a:r>
+              <a:rPr lang="de-DE" dirty="0" err="1"/>
+              <a:t>question</a:t>
+            </a:r>
+            <a:r>
+              <a:rPr lang="de-DE" dirty="0"/>
+              <a:t> </a:t>
+            </a:r>
+            <a:r>
+              <a:rPr lang="de-DE" dirty="0" err="1"/>
+              <a:t>driving</a:t>
+            </a:r>
+            <a:r>
+              <a:rPr lang="de-DE" dirty="0"/>
+              <a:t> </a:t>
+            </a:r>
+            <a:r>
+              <a:rPr lang="de-DE" dirty="0" err="1"/>
+              <a:t>the</a:t>
+            </a:r>
+            <a:r>
+              <a:rPr lang="de-DE" dirty="0"/>
+              <a:t> </a:t>
+            </a:r>
+            <a:r>
+              <a:rPr lang="de-DE" dirty="0" err="1"/>
+              <a:t>presentation</a:t>
+            </a:r>
+            <a:endParaRPr lang="en-US" dirty="0"/>
+          </a:p>
+        </p:txBody>
+      </p:sp>
+    </p:spTree>
+    <p:extLst>
+      <p:ext uri="{BB962C8B-B14F-4D97-AF65-F5344CB8AC3E}">
+        <p14:creationId xmlns:p14="http://schemas.microsoft.com/office/powerpoint/2010/main" val="1487120446"/>
       </p:ext>
     </p:extLst>
   </p:cSld>
@@ -11158,146 +11157,6 @@
         <p:cNvPr id="1" name="">
           <a:extLst>
             <a:ext uri="{FF2B5EF4-FFF2-40B4-BE49-F238E27FC236}">
-              <a16:creationId xmlns:a16="http://schemas.microsoft.com/office/drawing/2014/main" id="{74AE4D5B-6E9C-AA0F-749F-C87D190F8202}"/>
-            </a:ext>
-          </a:extLst>
-        </p:cNvPr>
-        <p:cNvGrpSpPr/>
-        <p:nvPr/>
-      </p:nvGrpSpPr>
-      <p:grpSpPr>
-        <a:xfrm>
-          <a:off x="0" y="0"/>
-          <a:ext cx="0" cy="0"/>
-          <a:chOff x="0" y="0"/>
-          <a:chExt cx="0" cy="0"/>
-        </a:xfrm>
-      </p:grpSpPr>
-      <p:sp>
-        <p:nvSpPr>
-          <p:cNvPr id="2" name="Slide Image Placeholder 1">
-            <a:extLst>
-              <a:ext uri="{FF2B5EF4-FFF2-40B4-BE49-F238E27FC236}">
-                <a16:creationId xmlns:a16="http://schemas.microsoft.com/office/drawing/2014/main" id="{FC64EEF4-79E5-EF83-2358-6EB45A32044C}"/>
-              </a:ext>
-            </a:extLst>
-          </p:cNvPr>
-          <p:cNvSpPr>
-            <a:spLocks noGrp="1" noRot="1" noChangeAspect="1"/>
-          </p:cNvSpPr>
-          <p:nvPr>
-            <p:ph type="sldImg"/>
-          </p:nvPr>
-        </p:nvSpPr>
-        <p:spPr>
-          <a:xfrm>
-            <a:off x="381000" y="685800"/>
-            <a:ext cx="6096000" cy="3429000"/>
-          </a:xfrm>
-        </p:spPr>
-      </p:sp>
-      <p:sp>
-        <p:nvSpPr>
-          <p:cNvPr id="3" name="Notes Placeholder 2">
-            <a:extLst>
-              <a:ext uri="{FF2B5EF4-FFF2-40B4-BE49-F238E27FC236}">
-                <a16:creationId xmlns:a16="http://schemas.microsoft.com/office/drawing/2014/main" id="{F07A5AD4-D18E-AE85-A5E5-00F06E9C4873}"/>
-              </a:ext>
-            </a:extLst>
-          </p:cNvPr>
-          <p:cNvSpPr>
-            <a:spLocks noGrp="1"/>
-          </p:cNvSpPr>
-          <p:nvPr>
-            <p:ph type="body" idx="1"/>
-          </p:nvPr>
-        </p:nvSpPr>
-        <p:spPr/>
-        <p:txBody>
-          <a:bodyPr/>
-          <a:lstStyle/>
-          <a:p>
-            <a:r>
-              <a:rPr lang="de-DE" dirty="0"/>
-              <a:t>This </a:t>
-            </a:r>
-            <a:r>
-              <a:rPr lang="de-DE" dirty="0" err="1"/>
-              <a:t>is</a:t>
-            </a:r>
-            <a:r>
-              <a:rPr lang="de-DE" dirty="0"/>
-              <a:t> </a:t>
-            </a:r>
-            <a:r>
-              <a:rPr lang="de-DE" dirty="0" err="1"/>
-              <a:t>the</a:t>
-            </a:r>
-            <a:r>
-              <a:rPr lang="de-DE" dirty="0"/>
-              <a:t> </a:t>
-            </a:r>
-            <a:r>
-              <a:rPr lang="de-DE" dirty="0" err="1"/>
-              <a:t>competency</a:t>
-            </a:r>
-            <a:r>
-              <a:rPr lang="de-DE" dirty="0"/>
-              <a:t> </a:t>
-            </a:r>
-            <a:r>
-              <a:rPr lang="de-DE" dirty="0" err="1"/>
-              <a:t>question</a:t>
-            </a:r>
-            <a:r>
-              <a:rPr lang="de-DE" dirty="0"/>
-              <a:t> </a:t>
-            </a:r>
-            <a:r>
-              <a:rPr lang="de-DE" dirty="0" err="1"/>
-              <a:t>driving</a:t>
-            </a:r>
-            <a:r>
-              <a:rPr lang="de-DE" dirty="0"/>
-              <a:t> </a:t>
-            </a:r>
-            <a:r>
-              <a:rPr lang="de-DE" dirty="0" err="1"/>
-              <a:t>the</a:t>
-            </a:r>
-            <a:r>
-              <a:rPr lang="de-DE" dirty="0"/>
-              <a:t> </a:t>
-            </a:r>
-            <a:r>
-              <a:rPr lang="de-DE" dirty="0" err="1"/>
-              <a:t>presentation</a:t>
-            </a:r>
-            <a:endParaRPr lang="en-US" dirty="0"/>
-          </a:p>
-        </p:txBody>
-      </p:sp>
-    </p:spTree>
-    <p:extLst>
-      <p:ext uri="{BB962C8B-B14F-4D97-AF65-F5344CB8AC3E}">
-        <p14:creationId xmlns:p14="http://schemas.microsoft.com/office/powerpoint/2010/main" val="1487120446"/>
-      </p:ext>
-    </p:extLst>
-  </p:cSld>
-  <p:clrMapOvr>
-    <a:masterClrMapping/>
-  </p:clrMapOvr>
-</p:notes>
-</file>
-
-<file path=ppt/notesSlides/notesSlide31.xml><?xml version="1.0" encoding="utf-8"?>
-<p:notes xmlns:a="http://schemas.openxmlformats.org/drawingml/2006/main" xmlns:r="http://schemas.openxmlformats.org/officeDocument/2006/relationships" xmlns:p="http://schemas.openxmlformats.org/presentationml/2006/main">
-  <p:cSld>
-    <p:spTree>
-      <p:nvGrpSpPr>
-        <p:cNvPr id="1" name="">
-          <a:extLst>
-            <a:ext uri="{FF2B5EF4-FFF2-40B4-BE49-F238E27FC236}">
               <a16:creationId xmlns:a16="http://schemas.microsoft.com/office/drawing/2014/main" id="{6AF181EB-626C-B5C5-88A1-64B1134AC187}"/>
             </a:ext>
           </a:extLst>
@@ -11430,7 +11289,7 @@
 </p:notes>
 </file>
 
-<file path=ppt/notesSlides/notesSlide32.xml><?xml version="1.0" encoding="utf-8"?>
+<file path=ppt/notesSlides/notesSlide31.xml><?xml version="1.0" encoding="utf-8"?>
 <p:notes xmlns:a="http://schemas.openxmlformats.org/drawingml/2006/main" xmlns:r="http://schemas.openxmlformats.org/officeDocument/2006/relationships" xmlns:p="http://schemas.openxmlformats.org/presentationml/2006/main">
   <p:cSld>
     <p:spTree>
@@ -11570,7 +11429,7 @@
 </p:notes>
 </file>
 
-<file path=ppt/notesSlides/notesSlide33.xml><?xml version="1.0" encoding="utf-8"?>
+<file path=ppt/notesSlides/notesSlide32.xml><?xml version="1.0" encoding="utf-8"?>
 <p:notes xmlns:a="http://schemas.openxmlformats.org/drawingml/2006/main" xmlns:r="http://schemas.openxmlformats.org/officeDocument/2006/relationships" xmlns:p="http://schemas.openxmlformats.org/presentationml/2006/main">
   <p:cSld>
     <p:spTree>
@@ -11710,7 +11569,7 @@
 </p:notes>
 </file>
 
-<file path=ppt/notesSlides/notesSlide34.xml><?xml version="1.0" encoding="utf-8"?>
+<file path=ppt/notesSlides/notesSlide33.xml><?xml version="1.0" encoding="utf-8"?>
 <p:notes xmlns:a="http://schemas.openxmlformats.org/drawingml/2006/main" xmlns:r="http://schemas.openxmlformats.org/officeDocument/2006/relationships" xmlns:p="http://schemas.openxmlformats.org/presentationml/2006/main">
   <p:cSld>
     <p:spTree>
@@ -11850,7 +11709,7 @@
 </p:notes>
 </file>
 
-<file path=ppt/notesSlides/notesSlide35.xml><?xml version="1.0" encoding="utf-8"?>
+<file path=ppt/notesSlides/notesSlide34.xml><?xml version="1.0" encoding="utf-8"?>
 <p:notes xmlns:a="http://schemas.openxmlformats.org/drawingml/2006/main" xmlns:r="http://schemas.openxmlformats.org/officeDocument/2006/relationships" xmlns:p="http://schemas.openxmlformats.org/presentationml/2006/main">
   <p:cSld>
     <p:spTree>
@@ -12198,262 +12057,6 @@
         <p:cNvPr id="1" name="">
           <a:extLst>
             <a:ext uri="{FF2B5EF4-FFF2-40B4-BE49-F238E27FC236}">
-              <a16:creationId xmlns:a16="http://schemas.microsoft.com/office/drawing/2014/main" id="{F767CD17-8D2A-3577-3602-42EF470DB23C}"/>
-            </a:ext>
-          </a:extLst>
-        </p:cNvPr>
-        <p:cNvGrpSpPr/>
-        <p:nvPr/>
-      </p:nvGrpSpPr>
-      <p:grpSpPr>
-        <a:xfrm>
-          <a:off x="0" y="0"/>
-          <a:ext cx="0" cy="0"/>
-          <a:chOff x="0" y="0"/>
-          <a:chExt cx="0" cy="0"/>
-        </a:xfrm>
-      </p:grpSpPr>
-      <p:sp>
-        <p:nvSpPr>
-          <p:cNvPr id="2" name="Marcador de imagen de diapositiva 1">
-            <a:extLst>
-              <a:ext uri="{FF2B5EF4-FFF2-40B4-BE49-F238E27FC236}">
-                <a16:creationId xmlns:a16="http://schemas.microsoft.com/office/drawing/2014/main" id="{03DE2E75-4212-682B-7929-EECAC4739476}"/>
-              </a:ext>
-            </a:extLst>
-          </p:cNvPr>
-          <p:cNvSpPr>
-            <a:spLocks noGrp="1" noRot="1" noChangeAspect="1"/>
-          </p:cNvSpPr>
-          <p:nvPr>
-            <p:ph type="sldImg"/>
-          </p:nvPr>
-        </p:nvSpPr>
-        <p:spPr>
-          <a:xfrm>
-            <a:off x="381000" y="685800"/>
-            <a:ext cx="6096000" cy="3429000"/>
-          </a:xfrm>
-        </p:spPr>
-      </p:sp>
-      <p:sp>
-        <p:nvSpPr>
-          <p:cNvPr id="3" name="Marcador de notas 2">
-            <a:extLst>
-              <a:ext uri="{FF2B5EF4-FFF2-40B4-BE49-F238E27FC236}">
-                <a16:creationId xmlns:a16="http://schemas.microsoft.com/office/drawing/2014/main" id="{EF3F6B17-F79C-B03A-B134-955E32E3C1D2}"/>
-              </a:ext>
-            </a:extLst>
-          </p:cNvPr>
-          <p:cNvSpPr>
-            <a:spLocks noGrp="1"/>
-          </p:cNvSpPr>
-          <p:nvPr>
-            <p:ph type="body" idx="1"/>
-          </p:nvPr>
-        </p:nvSpPr>
-        <p:spPr/>
-        <p:txBody>
-          <a:bodyPr/>
-          <a:lstStyle/>
-          <a:p>
-            <a:r>
-              <a:rPr lang="es-ES" dirty="0" err="1"/>
-              <a:t>The</a:t>
-            </a:r>
-            <a:r>
-              <a:rPr lang="es-ES" dirty="0"/>
-              <a:t> </a:t>
-            </a:r>
-            <a:r>
-              <a:rPr lang="es-ES" dirty="0" err="1"/>
-              <a:t>goal</a:t>
-            </a:r>
-            <a:r>
-              <a:rPr lang="es-ES" dirty="0"/>
-              <a:t> </a:t>
-            </a:r>
-            <a:r>
-              <a:rPr lang="es-ES" dirty="0" err="1"/>
-              <a:t>of</a:t>
-            </a:r>
-            <a:r>
-              <a:rPr lang="es-ES" dirty="0"/>
-              <a:t> </a:t>
-            </a:r>
-            <a:r>
-              <a:rPr lang="es-ES" dirty="0" err="1"/>
-              <a:t>this</a:t>
-            </a:r>
-            <a:r>
-              <a:rPr lang="es-ES" dirty="0"/>
-              <a:t> </a:t>
-            </a:r>
-            <a:r>
-              <a:rPr lang="es-ES" dirty="0" err="1"/>
-              <a:t>slide</a:t>
-            </a:r>
-            <a:r>
-              <a:rPr lang="es-ES" dirty="0"/>
-              <a:t> </a:t>
-            </a:r>
-            <a:r>
-              <a:rPr lang="es-ES" dirty="0" err="1"/>
-              <a:t>is</a:t>
-            </a:r>
-            <a:r>
-              <a:rPr lang="es-ES" dirty="0"/>
-              <a:t> </a:t>
-            </a:r>
-            <a:r>
-              <a:rPr lang="es-ES" dirty="0" err="1"/>
-              <a:t>to</a:t>
-            </a:r>
-            <a:r>
-              <a:rPr lang="es-ES" dirty="0"/>
-              <a:t> set up </a:t>
-            </a:r>
-            <a:r>
-              <a:rPr lang="es-ES" dirty="0" err="1"/>
-              <a:t>the</a:t>
-            </a:r>
-            <a:r>
-              <a:rPr lang="es-ES" dirty="0"/>
-              <a:t> </a:t>
-            </a:r>
-            <a:r>
-              <a:rPr lang="es-ES" dirty="0" err="1"/>
-              <a:t>stage</a:t>
-            </a:r>
-            <a:r>
-              <a:rPr lang="es-ES" dirty="0"/>
-              <a:t> </a:t>
-            </a:r>
-            <a:r>
-              <a:rPr lang="es-ES" dirty="0" err="1"/>
-              <a:t>describing</a:t>
-            </a:r>
-            <a:r>
-              <a:rPr lang="es-ES" dirty="0"/>
-              <a:t> </a:t>
-            </a:r>
-            <a:r>
-              <a:rPr lang="es-ES" dirty="0" err="1"/>
-              <a:t>the</a:t>
-            </a:r>
-            <a:r>
-              <a:rPr lang="es-ES" dirty="0"/>
-              <a:t> </a:t>
-            </a:r>
-            <a:r>
-              <a:rPr lang="es-ES" dirty="0" err="1"/>
-              <a:t>current</a:t>
-            </a:r>
-            <a:r>
-              <a:rPr lang="es-ES" dirty="0"/>
-              <a:t> </a:t>
-            </a:r>
-            <a:r>
-              <a:rPr lang="es-ES" dirty="0" err="1"/>
-              <a:t>situation</a:t>
-            </a:r>
-            <a:r>
-              <a:rPr lang="es-ES" dirty="0"/>
-              <a:t> </a:t>
-            </a:r>
-            <a:r>
-              <a:rPr lang="es-ES" dirty="0" err="1"/>
-              <a:t>with</a:t>
-            </a:r>
-            <a:r>
-              <a:rPr lang="es-ES" dirty="0"/>
-              <a:t> </a:t>
-            </a:r>
-            <a:r>
-              <a:rPr lang="es-ES" dirty="0" err="1"/>
-              <a:t>the</a:t>
-            </a:r>
-            <a:r>
-              <a:rPr lang="es-ES" dirty="0"/>
-              <a:t> </a:t>
-            </a:r>
-            <a:r>
-              <a:rPr lang="es-ES" dirty="0" err="1"/>
-              <a:t>tool</a:t>
-            </a:r>
-            <a:r>
-              <a:rPr lang="es-ES" dirty="0"/>
-              <a:t> data </a:t>
-            </a:r>
-            <a:r>
-              <a:rPr lang="es-ES" dirty="0" err="1"/>
-              <a:t>models</a:t>
-            </a:r>
-            <a:r>
-              <a:rPr lang="es-ES" dirty="0"/>
-              <a:t>/</a:t>
-            </a:r>
-            <a:r>
-              <a:rPr lang="es-ES" dirty="0" err="1"/>
-              <a:t>ontologies</a:t>
-            </a:r>
-            <a:r>
-              <a:rPr lang="es-ES" dirty="0"/>
-              <a:t>. </a:t>
-            </a:r>
-            <a:r>
-              <a:rPr lang="es-ES" dirty="0" err="1"/>
-              <a:t>Main</a:t>
-            </a:r>
-            <a:r>
-              <a:rPr lang="es-ES" dirty="0"/>
-              <a:t> </a:t>
-            </a:r>
-            <a:r>
-              <a:rPr lang="es-ES" dirty="0" err="1"/>
-              <a:t>features</a:t>
-            </a:r>
-            <a:r>
-              <a:rPr lang="es-ES" dirty="0"/>
-              <a:t>, </a:t>
-            </a:r>
-            <a:r>
-              <a:rPr lang="es-ES" dirty="0" err="1"/>
-              <a:t>main</a:t>
-            </a:r>
-            <a:r>
-              <a:rPr lang="es-ES" dirty="0"/>
-              <a:t> </a:t>
-            </a:r>
-            <a:r>
-              <a:rPr lang="es-ES" dirty="0" err="1"/>
-              <a:t>problems</a:t>
-            </a:r>
-            <a:endParaRPr lang="en-US" dirty="0"/>
-          </a:p>
-        </p:txBody>
-      </p:sp>
-    </p:spTree>
-    <p:extLst>
-      <p:ext uri="{BB962C8B-B14F-4D97-AF65-F5344CB8AC3E}">
-        <p14:creationId xmlns:p14="http://schemas.microsoft.com/office/powerpoint/2010/main" val="2894292596"/>
-      </p:ext>
-    </p:extLst>
-  </p:cSld>
-  <p:clrMapOvr>
-    <a:masterClrMapping/>
-  </p:clrMapOvr>
-</p:notes>
-</file>
-
-<file path=ppt/notesSlides/notesSlide6.xml><?xml version="1.0" encoding="utf-8"?>
-<p:notes xmlns:a="http://schemas.openxmlformats.org/drawingml/2006/main" xmlns:r="http://schemas.openxmlformats.org/officeDocument/2006/relationships" xmlns:p="http://schemas.openxmlformats.org/presentationml/2006/main">
-  <p:cSld>
-    <p:spTree>
-      <p:nvGrpSpPr>
-        <p:cNvPr id="1" name="">
-          <a:extLst>
-            <a:ext uri="{FF2B5EF4-FFF2-40B4-BE49-F238E27FC236}">
               <a16:creationId xmlns:a16="http://schemas.microsoft.com/office/drawing/2014/main" id="{01D42DB2-2DE2-4D5A-98B0-D2E268080FE4}"/>
             </a:ext>
           </a:extLst>
@@ -12702,7 +12305,7 @@
 </p:notes>
 </file>
 
-<file path=ppt/notesSlides/notesSlide7.xml><?xml version="1.0" encoding="utf-8"?>
+<file path=ppt/notesSlides/notesSlide6.xml><?xml version="1.0" encoding="utf-8"?>
 <p:notes xmlns:a="http://schemas.openxmlformats.org/drawingml/2006/main" xmlns:r="http://schemas.openxmlformats.org/officeDocument/2006/relationships" xmlns:p="http://schemas.openxmlformats.org/presentationml/2006/main">
   <p:cSld>
     <p:spTree>
@@ -12940,7 +12543,7 @@
 </p:notes>
 </file>
 
-<file path=ppt/notesSlides/notesSlide8.xml><?xml version="1.0" encoding="utf-8"?>
+<file path=ppt/notesSlides/notesSlide7.xml><?xml version="1.0" encoding="utf-8"?>
 <p:notes xmlns:a="http://schemas.openxmlformats.org/drawingml/2006/main" xmlns:r="http://schemas.openxmlformats.org/officeDocument/2006/relationships" xmlns:p="http://schemas.openxmlformats.org/presentationml/2006/main">
   <p:cSld>
     <p:spTree>
@@ -13196,7 +12799,7 @@
 </p:notes>
 </file>
 
-<file path=ppt/notesSlides/notesSlide9.xml><?xml version="1.0" encoding="utf-8"?>
+<file path=ppt/notesSlides/notesSlide8.xml><?xml version="1.0" encoding="utf-8"?>
 <p:notes xmlns:a="http://schemas.openxmlformats.org/drawingml/2006/main" xmlns:r="http://schemas.openxmlformats.org/officeDocument/2006/relationships" xmlns:p="http://schemas.openxmlformats.org/presentationml/2006/main">
   <p:cSld>
     <p:spTree>
@@ -13443,6 +13046,146 @@
     <p:extLst>
       <p:ext uri="{BB962C8B-B14F-4D97-AF65-F5344CB8AC3E}">
         <p14:creationId xmlns:p14="http://schemas.microsoft.com/office/powerpoint/2010/main" val="1684184235"/>
+      </p:ext>
+    </p:extLst>
+  </p:cSld>
+  <p:clrMapOvr>
+    <a:masterClrMapping/>
+  </p:clrMapOvr>
+</p:notes>
+</file>
+
+<file path=ppt/notesSlides/notesSlide9.xml><?xml version="1.0" encoding="utf-8"?>
+<p:notes xmlns:a="http://schemas.openxmlformats.org/drawingml/2006/main" xmlns:r="http://schemas.openxmlformats.org/officeDocument/2006/relationships" xmlns:p="http://schemas.openxmlformats.org/presentationml/2006/main">
+  <p:cSld>
+    <p:spTree>
+      <p:nvGrpSpPr>
+        <p:cNvPr id="1" name="">
+          <a:extLst>
+            <a:ext uri="{FF2B5EF4-FFF2-40B4-BE49-F238E27FC236}">
+              <a16:creationId xmlns:a16="http://schemas.microsoft.com/office/drawing/2014/main" id="{2EB95F05-2FC5-300A-E716-36694B5DE717}"/>
+            </a:ext>
+          </a:extLst>
+        </p:cNvPr>
+        <p:cNvGrpSpPr/>
+        <p:nvPr/>
+      </p:nvGrpSpPr>
+      <p:grpSpPr>
+        <a:xfrm>
+          <a:off x="0" y="0"/>
+          <a:ext cx="0" cy="0"/>
+          <a:chOff x="0" y="0"/>
+          <a:chExt cx="0" cy="0"/>
+        </a:xfrm>
+      </p:grpSpPr>
+      <p:sp>
+        <p:nvSpPr>
+          <p:cNvPr id="2" name="Slide Image Placeholder 1">
+            <a:extLst>
+              <a:ext uri="{FF2B5EF4-FFF2-40B4-BE49-F238E27FC236}">
+                <a16:creationId xmlns:a16="http://schemas.microsoft.com/office/drawing/2014/main" id="{A0FDC091-EB89-55F2-D2BA-73E31FD43DC8}"/>
+              </a:ext>
+            </a:extLst>
+          </p:cNvPr>
+          <p:cNvSpPr>
+            <a:spLocks noGrp="1" noRot="1" noChangeAspect="1"/>
+          </p:cNvSpPr>
+          <p:nvPr>
+            <p:ph type="sldImg"/>
+          </p:nvPr>
+        </p:nvSpPr>
+        <p:spPr>
+          <a:xfrm>
+            <a:off x="381000" y="685800"/>
+            <a:ext cx="6096000" cy="3429000"/>
+          </a:xfrm>
+        </p:spPr>
+      </p:sp>
+      <p:sp>
+        <p:nvSpPr>
+          <p:cNvPr id="3" name="Notes Placeholder 2">
+            <a:extLst>
+              <a:ext uri="{FF2B5EF4-FFF2-40B4-BE49-F238E27FC236}">
+                <a16:creationId xmlns:a16="http://schemas.microsoft.com/office/drawing/2014/main" id="{7FD26963-B6E0-27C7-0483-50F978A7CA5C}"/>
+              </a:ext>
+            </a:extLst>
+          </p:cNvPr>
+          <p:cNvSpPr>
+            <a:spLocks noGrp="1"/>
+          </p:cNvSpPr>
+          <p:nvPr>
+            <p:ph type="body" idx="1"/>
+          </p:nvPr>
+        </p:nvSpPr>
+        <p:spPr/>
+        <p:txBody>
+          <a:bodyPr/>
+          <a:lstStyle/>
+          <a:p>
+            <a:r>
+              <a:rPr lang="de-DE" dirty="0"/>
+              <a:t>This </a:t>
+            </a:r>
+            <a:r>
+              <a:rPr lang="de-DE" dirty="0" err="1"/>
+              <a:t>is</a:t>
+            </a:r>
+            <a:r>
+              <a:rPr lang="de-DE" dirty="0"/>
+              <a:t> </a:t>
+            </a:r>
+            <a:r>
+              <a:rPr lang="de-DE" dirty="0" err="1"/>
+              <a:t>the</a:t>
+            </a:r>
+            <a:r>
+              <a:rPr lang="de-DE" dirty="0"/>
+              <a:t> </a:t>
+            </a:r>
+            <a:r>
+              <a:rPr lang="de-DE" dirty="0" err="1"/>
+              <a:t>competency</a:t>
+            </a:r>
+            <a:r>
+              <a:rPr lang="de-DE" dirty="0"/>
+              <a:t> </a:t>
+            </a:r>
+            <a:r>
+              <a:rPr lang="de-DE" dirty="0" err="1"/>
+              <a:t>question</a:t>
+            </a:r>
+            <a:r>
+              <a:rPr lang="de-DE" dirty="0"/>
+              <a:t> </a:t>
+            </a:r>
+            <a:r>
+              <a:rPr lang="de-DE" dirty="0" err="1"/>
+              <a:t>driving</a:t>
+            </a:r>
+            <a:r>
+              <a:rPr lang="de-DE" dirty="0"/>
+              <a:t> </a:t>
+            </a:r>
+            <a:r>
+              <a:rPr lang="de-DE" dirty="0" err="1"/>
+              <a:t>the</a:t>
+            </a:r>
+            <a:r>
+              <a:rPr lang="de-DE" dirty="0"/>
+              <a:t> </a:t>
+            </a:r>
+            <a:r>
+              <a:rPr lang="de-DE" dirty="0" err="1"/>
+              <a:t>presentation</a:t>
+            </a:r>
+            <a:endParaRPr lang="en-US" dirty="0"/>
+          </a:p>
+        </p:txBody>
+      </p:sp>
+    </p:spTree>
+    <p:extLst>
+      <p:ext uri="{BB962C8B-B14F-4D97-AF65-F5344CB8AC3E}">
+        <p14:creationId xmlns:p14="http://schemas.microsoft.com/office/powerpoint/2010/main" val="1757687430"/>
       </p:ext>
     </p:extLst>
   </p:cSld>
@@ -22321,13 +22064,13 @@
           <a:p>
             <a:r>
               <a:rPr lang="en-US" noProof="0" dirty="0"/>
-              <a:t>Jesualdo Tomás Fernández Breis</a:t>
+              <a:t>Jesualdo Tomás Fernández Breis, PhD</a:t>
             </a:r>
           </a:p>
           <a:p>
             <a:r>
               <a:rPr lang="en-US" noProof="0" dirty="0"/>
-              <a:t>Alexander Garcia Castro</a:t>
+              <a:t>Alexander Garcia Castro, PhD</a:t>
             </a:r>
           </a:p>
           <a:p>
@@ -22413,285 +22156,6 @@
         <p:cNvPr id="1" name="">
           <a:extLst>
             <a:ext uri="{FF2B5EF4-FFF2-40B4-BE49-F238E27FC236}">
-              <a16:creationId xmlns:a16="http://schemas.microsoft.com/office/drawing/2014/main" id="{A24A54F5-EA24-96F2-7D56-34C3C1FCB3F8}"/>
-            </a:ext>
-          </a:extLst>
-        </p:cNvPr>
-        <p:cNvGrpSpPr/>
-        <p:nvPr/>
-      </p:nvGrpSpPr>
-      <p:grpSpPr>
-        <a:xfrm>
-          <a:off x="0" y="0"/>
-          <a:ext cx="0" cy="0"/>
-          <a:chOff x="0" y="0"/>
-          <a:chExt cx="0" cy="0"/>
-        </a:xfrm>
-      </p:grpSpPr>
-      <p:sp>
-        <p:nvSpPr>
-          <p:cNvPr id="28" name="Title 1">
-            <a:extLst>
-              <a:ext uri="{FF2B5EF4-FFF2-40B4-BE49-F238E27FC236}">
-                <a16:creationId xmlns:a16="http://schemas.microsoft.com/office/drawing/2014/main" id="{026BB3F6-539B-A596-7D83-88EFF042A3E6}"/>
-              </a:ext>
-            </a:extLst>
-          </p:cNvPr>
-          <p:cNvSpPr>
-            <a:spLocks noGrp="1"/>
-          </p:cNvSpPr>
-          <p:nvPr>
-            <p:ph type="title"/>
-          </p:nvPr>
-        </p:nvSpPr>
-        <p:spPr>
-          <a:xfrm>
-            <a:off x="415600" y="219823"/>
-            <a:ext cx="11360800" cy="763600"/>
-          </a:xfrm>
-        </p:spPr>
-        <p:txBody>
-          <a:bodyPr>
-            <a:normAutofit fontScale="90000"/>
-          </a:bodyPr>
-          <a:lstStyle/>
-          <a:p>
-            <a:r>
-              <a:rPr lang="en-US" sz="4000" dirty="0"/>
-              <a:t>CFIHOS distribution</a:t>
-            </a:r>
-            <a:br>
-              <a:rPr lang="en-US" sz="4000" dirty="0"/>
-            </a:br>
-            <a:r>
-              <a:rPr lang="en-US" sz="3100" dirty="0"/>
-              <a:t>Version 2.0 October 2024</a:t>
-            </a:r>
-            <a:endParaRPr lang="en-US" sz="4000" b="1" dirty="0"/>
-          </a:p>
-        </p:txBody>
-      </p:sp>
-      <p:sp>
-        <p:nvSpPr>
-          <p:cNvPr id="19" name="Marcador de texto 2">
-            <a:extLst>
-              <a:ext uri="{FF2B5EF4-FFF2-40B4-BE49-F238E27FC236}">
-                <a16:creationId xmlns:a16="http://schemas.microsoft.com/office/drawing/2014/main" id="{D081E6E3-9134-BFE4-099E-1493100BCD26}"/>
-              </a:ext>
-            </a:extLst>
-          </p:cNvPr>
-          <p:cNvSpPr>
-            <a:spLocks noGrp="1"/>
-          </p:cNvSpPr>
-          <p:nvPr>
-            <p:ph type="body" idx="1"/>
-          </p:nvPr>
-        </p:nvSpPr>
-        <p:spPr>
-          <a:xfrm>
-            <a:off x="584923" y="1642751"/>
-            <a:ext cx="5873750" cy="2385785"/>
-          </a:xfrm>
-        </p:spPr>
-        <p:txBody>
-          <a:bodyPr>
-            <a:normAutofit fontScale="85000" lnSpcReduction="20000"/>
-          </a:bodyPr>
-          <a:lstStyle/>
-          <a:p>
-            <a:r>
-              <a:rPr lang="en-US" sz="2300" dirty="0"/>
-              <a:t>CFIHOS is a specification, not an implementation</a:t>
-            </a:r>
-          </a:p>
-          <a:p>
-            <a:endParaRPr lang="en-US" sz="2300" dirty="0"/>
-          </a:p>
-          <a:p>
-            <a:r>
-              <a:rPr lang="en-US" sz="2300" dirty="0"/>
-              <a:t>CFIHOS data model can be inspected through an HTML explorer</a:t>
-            </a:r>
-          </a:p>
-          <a:p>
-            <a:pPr marL="152396" indent="0">
-              <a:buNone/>
-            </a:pPr>
-            <a:endParaRPr lang="en-US" sz="2300" dirty="0"/>
-          </a:p>
-          <a:p>
-            <a:r>
-              <a:rPr lang="en-US" sz="2300" dirty="0"/>
-              <a:t>CFIHOS reference data library is distributed as tables in Excel format</a:t>
-            </a:r>
-            <a:endParaRPr lang="en-US" dirty="0"/>
-          </a:p>
-        </p:txBody>
-      </p:sp>
-      <p:pic>
-        <p:nvPicPr>
-          <p:cNvPr id="4" name="Imagen 3">
-            <a:extLst>
-              <a:ext uri="{FF2B5EF4-FFF2-40B4-BE49-F238E27FC236}">
-                <a16:creationId xmlns:a16="http://schemas.microsoft.com/office/drawing/2014/main" id="{04985822-C57C-0C6C-EC65-C5B9B924DCF4}"/>
-              </a:ext>
-            </a:extLst>
-          </p:cNvPr>
-          <p:cNvPicPr>
-            <a:picLocks noChangeAspect="1"/>
-          </p:cNvPicPr>
-          <p:nvPr/>
-        </p:nvPicPr>
-        <p:blipFill>
-          <a:blip r:embed="rId3"/>
-          <a:stretch>
-            <a:fillRect/>
-          </a:stretch>
-        </p:blipFill>
-        <p:spPr>
-          <a:xfrm>
-            <a:off x="7482906" y="240866"/>
-            <a:ext cx="4045076" cy="3913884"/>
-          </a:xfrm>
-          <a:prstGeom prst="rect">
-            <a:avLst/>
-          </a:prstGeom>
-        </p:spPr>
-      </p:pic>
-      <p:pic>
-        <p:nvPicPr>
-          <p:cNvPr id="6" name="Imagen 5">
-            <a:extLst>
-              <a:ext uri="{FF2B5EF4-FFF2-40B4-BE49-F238E27FC236}">
-                <a16:creationId xmlns:a16="http://schemas.microsoft.com/office/drawing/2014/main" id="{9FE42249-7FFE-35D0-C3F0-06C6CB15AB33}"/>
-              </a:ext>
-            </a:extLst>
-          </p:cNvPr>
-          <p:cNvPicPr>
-            <a:picLocks noChangeAspect="1"/>
-          </p:cNvPicPr>
-          <p:nvPr/>
-        </p:nvPicPr>
-        <p:blipFill>
-          <a:blip r:embed="rId4"/>
-          <a:stretch>
-            <a:fillRect/>
-          </a:stretch>
-        </p:blipFill>
-        <p:spPr>
-          <a:xfrm>
-            <a:off x="2161626" y="4507251"/>
-            <a:ext cx="7868748" cy="1886213"/>
-          </a:xfrm>
-          <a:prstGeom prst="rect">
-            <a:avLst/>
-          </a:prstGeom>
-        </p:spPr>
-      </p:pic>
-      <p:cxnSp>
-        <p:nvCxnSpPr>
-          <p:cNvPr id="8" name="Conector recto de flecha 7">
-            <a:extLst>
-              <a:ext uri="{FF2B5EF4-FFF2-40B4-BE49-F238E27FC236}">
-                <a16:creationId xmlns:a16="http://schemas.microsoft.com/office/drawing/2014/main" id="{902DA343-7702-839D-EA86-2BF69DEAB056}"/>
-              </a:ext>
-            </a:extLst>
-          </p:cNvPr>
-          <p:cNvCxnSpPr>
-            <a:cxnSpLocks/>
-            <a:endCxn id="4" idx="1"/>
-          </p:cNvCxnSpPr>
-          <p:nvPr/>
-        </p:nvCxnSpPr>
-        <p:spPr>
-          <a:xfrm flipV="1">
-            <a:off x="5984111" y="2197808"/>
-            <a:ext cx="1498795" cy="545392"/>
-          </a:xfrm>
-          <a:prstGeom prst="straightConnector1">
-            <a:avLst/>
-          </a:prstGeom>
-          <a:ln>
-            <a:tailEnd type="triangle"/>
-          </a:ln>
-        </p:spPr>
-        <p:style>
-          <a:lnRef idx="1">
-            <a:schemeClr val="dk1"/>
-          </a:lnRef>
-          <a:fillRef idx="0">
-            <a:schemeClr val="dk1"/>
-          </a:fillRef>
-          <a:effectRef idx="0">
-            <a:schemeClr val="dk1"/>
-          </a:effectRef>
-          <a:fontRef idx="minor">
-            <a:schemeClr val="tx1"/>
-          </a:fontRef>
-        </p:style>
-      </p:cxnSp>
-      <p:cxnSp>
-        <p:nvCxnSpPr>
-          <p:cNvPr id="11" name="Conector recto de flecha 10">
-            <a:extLst>
-              <a:ext uri="{FF2B5EF4-FFF2-40B4-BE49-F238E27FC236}">
-                <a16:creationId xmlns:a16="http://schemas.microsoft.com/office/drawing/2014/main" id="{E06D7C0E-A2B1-2F14-68CD-590D8064B36C}"/>
-              </a:ext>
-            </a:extLst>
-          </p:cNvPr>
-          <p:cNvCxnSpPr>
-            <a:cxnSpLocks/>
-          </p:cNvCxnSpPr>
-          <p:nvPr/>
-        </p:nvCxnSpPr>
-        <p:spPr>
-          <a:xfrm>
-            <a:off x="3865944" y="4028536"/>
-            <a:ext cx="1111498" cy="414068"/>
-          </a:xfrm>
-          <a:prstGeom prst="straightConnector1">
-            <a:avLst/>
-          </a:prstGeom>
-          <a:ln>
-            <a:tailEnd type="triangle"/>
-          </a:ln>
-        </p:spPr>
-        <p:style>
-          <a:lnRef idx="1">
-            <a:schemeClr val="dk1"/>
-          </a:lnRef>
-          <a:fillRef idx="0">
-            <a:schemeClr val="dk1"/>
-          </a:fillRef>
-          <a:effectRef idx="0">
-            <a:schemeClr val="dk1"/>
-          </a:effectRef>
-          <a:fontRef idx="minor">
-            <a:schemeClr val="tx1"/>
-          </a:fontRef>
-        </p:style>
-      </p:cxnSp>
-    </p:spTree>
-    <p:extLst>
-      <p:ext uri="{BB962C8B-B14F-4D97-AF65-F5344CB8AC3E}">
-        <p14:creationId xmlns:p14="http://schemas.microsoft.com/office/powerpoint/2010/main" val="3640465719"/>
-      </p:ext>
-    </p:extLst>
-  </p:cSld>
-  <p:clrMapOvr>
-    <a:masterClrMapping/>
-  </p:clrMapOvr>
-</p:sld>
-</file>
-
-<file path=ppt/slides/slide11.xml><?xml version="1.0" encoding="utf-8"?>
-<p:sld xmlns:a="http://schemas.openxmlformats.org/drawingml/2006/main" xmlns:r="http://schemas.openxmlformats.org/officeDocument/2006/relationships" xmlns:p="http://schemas.openxmlformats.org/presentationml/2006/main">
-  <p:cSld>
-    <p:spTree>
-      <p:nvGrpSpPr>
-        <p:cNvPr id="1" name="">
-          <a:extLst>
-            <a:ext uri="{FF2B5EF4-FFF2-40B4-BE49-F238E27FC236}">
               <a16:creationId xmlns:a16="http://schemas.microsoft.com/office/drawing/2014/main" id="{A27A01F2-1895-EBF4-43A2-0F0B4D59DEBB}"/>
             </a:ext>
           </a:extLst>
@@ -23000,7 +22464,7 @@
 </p:sld>
 </file>
 
-<file path=ppt/slides/slide12.xml><?xml version="1.0" encoding="utf-8"?>
+<file path=ppt/slides/slide11.xml><?xml version="1.0" encoding="utf-8"?>
 <p:sld xmlns:a="http://schemas.openxmlformats.org/drawingml/2006/main" xmlns:r="http://schemas.openxmlformats.org/officeDocument/2006/relationships" xmlns:p="http://schemas.openxmlformats.org/presentationml/2006/main">
   <p:cSld>
     <p:spTree>
@@ -23181,7 +22645,7 @@
 </p:sld>
 </file>
 
-<file path=ppt/slides/slide13.xml><?xml version="1.0" encoding="utf-8"?>
+<file path=ppt/slides/slide12.xml><?xml version="1.0" encoding="utf-8"?>
 <p:sld xmlns:a="http://schemas.openxmlformats.org/drawingml/2006/main" xmlns:r="http://schemas.openxmlformats.org/officeDocument/2006/relationships" xmlns:p="http://schemas.openxmlformats.org/presentationml/2006/main">
   <p:cSld>
     <p:spTree>
@@ -23477,7 +22941,7 @@
 </p:sld>
 </file>
 
-<file path=ppt/slides/slide14.xml><?xml version="1.0" encoding="utf-8"?>
+<file path=ppt/slides/slide13.xml><?xml version="1.0" encoding="utf-8"?>
 <p:sld xmlns:a="http://schemas.openxmlformats.org/drawingml/2006/main" xmlns:r="http://schemas.openxmlformats.org/officeDocument/2006/relationships" xmlns:p="http://schemas.openxmlformats.org/presentationml/2006/main">
   <p:cSld>
     <p:spTree>
@@ -23820,7 +23284,7 @@
 </p:sld>
 </file>
 
-<file path=ppt/slides/slide15.xml><?xml version="1.0" encoding="utf-8"?>
+<file path=ppt/slides/slide14.xml><?xml version="1.0" encoding="utf-8"?>
 <p:sld xmlns:a="http://schemas.openxmlformats.org/drawingml/2006/main" xmlns:r="http://schemas.openxmlformats.org/officeDocument/2006/relationships" xmlns:p="http://schemas.openxmlformats.org/presentationml/2006/main">
   <p:cSld>
     <p:spTree>
@@ -24322,7 +23786,7 @@
 </p:sld>
 </file>
 
-<file path=ppt/slides/slide16.xml><?xml version="1.0" encoding="utf-8"?>
+<file path=ppt/slides/slide15.xml><?xml version="1.0" encoding="utf-8"?>
 <p:sld xmlns:a="http://schemas.openxmlformats.org/drawingml/2006/main" xmlns:r="http://schemas.openxmlformats.org/officeDocument/2006/relationships" xmlns:p="http://schemas.openxmlformats.org/presentationml/2006/main">
   <p:cSld>
     <p:spTree>
@@ -24507,7 +23971,7 @@
 </p:sld>
 </file>
 
-<file path=ppt/slides/slide17.xml><?xml version="1.0" encoding="utf-8"?>
+<file path=ppt/slides/slide16.xml><?xml version="1.0" encoding="utf-8"?>
 <p:sld xmlns:a="http://schemas.openxmlformats.org/drawingml/2006/main" xmlns:r="http://schemas.openxmlformats.org/officeDocument/2006/relationships" xmlns:p="http://schemas.openxmlformats.org/presentationml/2006/main">
   <p:cSld>
     <p:spTree>
@@ -24633,7 +24097,7 @@
 </p:sld>
 </file>
 
-<file path=ppt/slides/slide18.xml><?xml version="1.0" encoding="utf-8"?>
+<file path=ppt/slides/slide17.xml><?xml version="1.0" encoding="utf-8"?>
 <p:sld xmlns:a="http://schemas.openxmlformats.org/drawingml/2006/main" xmlns:r="http://schemas.openxmlformats.org/officeDocument/2006/relationships" xmlns:p="http://schemas.openxmlformats.org/presentationml/2006/main">
   <p:cSld>
     <p:spTree>
@@ -24838,7 +24302,7 @@
 </p:sld>
 </file>
 
-<file path=ppt/slides/slide19.xml><?xml version="1.0" encoding="utf-8"?>
+<file path=ppt/slides/slide18.xml><?xml version="1.0" encoding="utf-8"?>
 <p:sld xmlns:a="http://schemas.openxmlformats.org/drawingml/2006/main" xmlns:r="http://schemas.openxmlformats.org/officeDocument/2006/relationships" xmlns:p="http://schemas.openxmlformats.org/presentationml/2006/main">
   <p:cSld>
     <p:spTree>
@@ -25031,96 +24495,7 @@
 </p:sld>
 </file>
 
-<file path=ppt/slides/slide2.xml><?xml version="1.0" encoding="utf-8"?>
-<p:sld xmlns:a="http://schemas.openxmlformats.org/drawingml/2006/main" xmlns:r="http://schemas.openxmlformats.org/officeDocument/2006/relationships" xmlns:p="http://schemas.openxmlformats.org/presentationml/2006/main">
-  <p:cSld>
-    <p:spTree>
-      <p:nvGrpSpPr>
-        <p:cNvPr id="1" name=""/>
-        <p:cNvGrpSpPr/>
-        <p:nvPr/>
-      </p:nvGrpSpPr>
-      <p:grpSpPr>
-        <a:xfrm>
-          <a:off x="0" y="0"/>
-          <a:ext cx="0" cy="0"/>
-          <a:chOff x="0" y="0"/>
-          <a:chExt cx="0" cy="0"/>
-        </a:xfrm>
-      </p:grpSpPr>
-      <p:sp>
-        <p:nvSpPr>
-          <p:cNvPr id="2" name="Title 1">
-            <a:extLst>
-              <a:ext uri="{FF2B5EF4-FFF2-40B4-BE49-F238E27FC236}">
-                <a16:creationId xmlns:a16="http://schemas.microsoft.com/office/drawing/2014/main" id="{35E8C7BB-3D0C-7EA9-2119-D87E65DCFFBF}"/>
-              </a:ext>
-            </a:extLst>
-          </p:cNvPr>
-          <p:cNvSpPr>
-            <a:spLocks noGrp="1"/>
-          </p:cNvSpPr>
-          <p:nvPr>
-            <p:ph type="title"/>
-          </p:nvPr>
-        </p:nvSpPr>
-        <p:spPr/>
-        <p:txBody>
-          <a:bodyPr>
-            <a:normAutofit/>
-          </a:bodyPr>
-          <a:lstStyle/>
-          <a:p>
-            <a:pPr algn="ctr"/>
-            <a:r>
-              <a:rPr lang="en-US" sz="3200" b="1" dirty="0"/>
-              <a:t>The Ecosystem of Industry Standards</a:t>
-            </a:r>
-          </a:p>
-        </p:txBody>
-      </p:sp>
-      <p:graphicFrame>
-        <p:nvGraphicFramePr>
-          <p:cNvPr id="3" name="Diagrama 2">
-            <a:extLst>
-              <a:ext uri="{FF2B5EF4-FFF2-40B4-BE49-F238E27FC236}">
-                <a16:creationId xmlns:a16="http://schemas.microsoft.com/office/drawing/2014/main" id="{9AFDD94C-939E-8319-4E17-E8BA51183C58}"/>
-              </a:ext>
-            </a:extLst>
-          </p:cNvPr>
-          <p:cNvGraphicFramePr/>
-          <p:nvPr>
-            <p:extLst>
-              <p:ext uri="{D42A27DB-BD31-4B8C-83A1-F6EECF244321}">
-                <p14:modId xmlns:p14="http://schemas.microsoft.com/office/powerpoint/2010/main" val="1889370074"/>
-              </p:ext>
-            </p:extLst>
-          </p:nvPr>
-        </p:nvGraphicFramePr>
-        <p:xfrm>
-          <a:off x="0" y="1356967"/>
-          <a:ext cx="12192000" cy="5418667"/>
-        </p:xfrm>
-        <a:graphic>
-          <a:graphicData uri="http://schemas.openxmlformats.org/drawingml/2006/diagram">
-            <dgm:relIds xmlns:dgm="http://schemas.openxmlformats.org/drawingml/2006/diagram" xmlns:r="http://schemas.openxmlformats.org/officeDocument/2006/relationships" r:dm="rId3" r:lo="rId4" r:qs="rId5" r:cs="rId6"/>
-          </a:graphicData>
-        </a:graphic>
-      </p:graphicFrame>
-    </p:spTree>
-    <p:extLst>
-      <p:ext uri="{BB962C8B-B14F-4D97-AF65-F5344CB8AC3E}">
-        <p14:creationId xmlns:p14="http://schemas.microsoft.com/office/powerpoint/2010/main" val="2867656128"/>
-      </p:ext>
-    </p:extLst>
-  </p:cSld>
-  <p:clrMapOvr>
-    <a:masterClrMapping/>
-  </p:clrMapOvr>
-</p:sld>
-</file>
-
-<file path=ppt/slides/slide20.xml><?xml version="1.0" encoding="utf-8"?>
+<file path=ppt/slides/slide19.xml><?xml version="1.0" encoding="utf-8"?>
 <p:sld xmlns:a="http://schemas.openxmlformats.org/drawingml/2006/main" xmlns:r="http://schemas.openxmlformats.org/officeDocument/2006/relationships" xmlns:p="http://schemas.openxmlformats.org/presentationml/2006/main">
   <p:cSld>
     <p:spTree>
@@ -25400,7 +24775,96 @@
 </p:sld>
 </file>
 
-<file path=ppt/slides/slide21.xml><?xml version="1.0" encoding="utf-8"?>
+<file path=ppt/slides/slide2.xml><?xml version="1.0" encoding="utf-8"?>
+<p:sld xmlns:a="http://schemas.openxmlformats.org/drawingml/2006/main" xmlns:r="http://schemas.openxmlformats.org/officeDocument/2006/relationships" xmlns:p="http://schemas.openxmlformats.org/presentationml/2006/main">
+  <p:cSld>
+    <p:spTree>
+      <p:nvGrpSpPr>
+        <p:cNvPr id="1" name=""/>
+        <p:cNvGrpSpPr/>
+        <p:nvPr/>
+      </p:nvGrpSpPr>
+      <p:grpSpPr>
+        <a:xfrm>
+          <a:off x="0" y="0"/>
+          <a:ext cx="0" cy="0"/>
+          <a:chOff x="0" y="0"/>
+          <a:chExt cx="0" cy="0"/>
+        </a:xfrm>
+      </p:grpSpPr>
+      <p:sp>
+        <p:nvSpPr>
+          <p:cNvPr id="2" name="Title 1">
+            <a:extLst>
+              <a:ext uri="{FF2B5EF4-FFF2-40B4-BE49-F238E27FC236}">
+                <a16:creationId xmlns:a16="http://schemas.microsoft.com/office/drawing/2014/main" id="{35E8C7BB-3D0C-7EA9-2119-D87E65DCFFBF}"/>
+              </a:ext>
+            </a:extLst>
+          </p:cNvPr>
+          <p:cNvSpPr>
+            <a:spLocks noGrp="1"/>
+          </p:cNvSpPr>
+          <p:nvPr>
+            <p:ph type="title"/>
+          </p:nvPr>
+        </p:nvSpPr>
+        <p:spPr/>
+        <p:txBody>
+          <a:bodyPr>
+            <a:normAutofit/>
+          </a:bodyPr>
+          <a:lstStyle/>
+          <a:p>
+            <a:pPr algn="ctr"/>
+            <a:r>
+              <a:rPr lang="en-US" sz="3200" b="1" dirty="0"/>
+              <a:t>The Ecosystem of Industry Standards</a:t>
+            </a:r>
+          </a:p>
+        </p:txBody>
+      </p:sp>
+      <p:graphicFrame>
+        <p:nvGraphicFramePr>
+          <p:cNvPr id="3" name="Diagrama 2">
+            <a:extLst>
+              <a:ext uri="{FF2B5EF4-FFF2-40B4-BE49-F238E27FC236}">
+                <a16:creationId xmlns:a16="http://schemas.microsoft.com/office/drawing/2014/main" id="{9AFDD94C-939E-8319-4E17-E8BA51183C58}"/>
+              </a:ext>
+            </a:extLst>
+          </p:cNvPr>
+          <p:cNvGraphicFramePr/>
+          <p:nvPr>
+            <p:extLst>
+              <p:ext uri="{D42A27DB-BD31-4B8C-83A1-F6EECF244321}">
+                <p14:modId xmlns:p14="http://schemas.microsoft.com/office/powerpoint/2010/main" val="1889370074"/>
+              </p:ext>
+            </p:extLst>
+          </p:nvPr>
+        </p:nvGraphicFramePr>
+        <p:xfrm>
+          <a:off x="0" y="1356967"/>
+          <a:ext cx="12192000" cy="5418667"/>
+        </p:xfrm>
+        <a:graphic>
+          <a:graphicData uri="http://schemas.openxmlformats.org/drawingml/2006/diagram">
+            <dgm:relIds xmlns:dgm="http://schemas.openxmlformats.org/drawingml/2006/diagram" xmlns:r="http://schemas.openxmlformats.org/officeDocument/2006/relationships" r:dm="rId3" r:lo="rId4" r:qs="rId5" r:cs="rId6"/>
+          </a:graphicData>
+        </a:graphic>
+      </p:graphicFrame>
+    </p:spTree>
+    <p:extLst>
+      <p:ext uri="{BB962C8B-B14F-4D97-AF65-F5344CB8AC3E}">
+        <p14:creationId xmlns:p14="http://schemas.microsoft.com/office/powerpoint/2010/main" val="2867656128"/>
+      </p:ext>
+    </p:extLst>
+  </p:cSld>
+  <p:clrMapOvr>
+    <a:masterClrMapping/>
+  </p:clrMapOvr>
+</p:sld>
+</file>
+
+<file path=ppt/slides/slide20.xml><?xml version="1.0" encoding="utf-8"?>
 <p:sld xmlns:a="http://schemas.openxmlformats.org/drawingml/2006/main" xmlns:r="http://schemas.openxmlformats.org/officeDocument/2006/relationships" xmlns:p="http://schemas.openxmlformats.org/presentationml/2006/main">
   <p:cSld>
     <p:spTree>
@@ -25538,7 +25002,7 @@
 </p:sld>
 </file>
 
-<file path=ppt/slides/slide22.xml><?xml version="1.0" encoding="utf-8"?>
+<file path=ppt/slides/slide21.xml><?xml version="1.0" encoding="utf-8"?>
 <p:sld xmlns:a="http://schemas.openxmlformats.org/drawingml/2006/main" xmlns:r="http://schemas.openxmlformats.org/officeDocument/2006/relationships" xmlns:p="http://schemas.openxmlformats.org/presentationml/2006/main">
   <p:cSld>
     <p:spTree>
@@ -25750,7 +25214,7 @@
 </p:sld>
 </file>
 
-<file path=ppt/slides/slide23.xml><?xml version="1.0" encoding="utf-8"?>
+<file path=ppt/slides/slide22.xml><?xml version="1.0" encoding="utf-8"?>
 <p:sld xmlns:a="http://schemas.openxmlformats.org/drawingml/2006/main" xmlns:r="http://schemas.openxmlformats.org/officeDocument/2006/relationships" xmlns:p="http://schemas.openxmlformats.org/presentationml/2006/main">
   <p:cSld>
     <p:spTree>
@@ -25894,7 +25358,7 @@
 </p:sld>
 </file>
 
-<file path=ppt/slides/slide24.xml><?xml version="1.0" encoding="utf-8"?>
+<file path=ppt/slides/slide23.xml><?xml version="1.0" encoding="utf-8"?>
 <p:sld xmlns:a="http://schemas.openxmlformats.org/drawingml/2006/main" xmlns:r="http://schemas.openxmlformats.org/officeDocument/2006/relationships" xmlns:p="http://schemas.openxmlformats.org/presentationml/2006/main">
   <p:cSld>
     <p:spTree>
@@ -26134,7 +25598,7 @@
 </p:sld>
 </file>
 
-<file path=ppt/slides/slide25.xml><?xml version="1.0" encoding="utf-8"?>
+<file path=ppt/slides/slide24.xml><?xml version="1.0" encoding="utf-8"?>
 <p:sld xmlns:a="http://schemas.openxmlformats.org/drawingml/2006/main" xmlns:r="http://schemas.openxmlformats.org/officeDocument/2006/relationships" xmlns:p="http://schemas.openxmlformats.org/presentationml/2006/main">
   <p:cSld>
     <p:spTree>
@@ -26344,7 +25808,7 @@
 </p:sld>
 </file>
 
-<file path=ppt/slides/slide26.xml><?xml version="1.0" encoding="utf-8"?>
+<file path=ppt/slides/slide25.xml><?xml version="1.0" encoding="utf-8"?>
 <p:sld xmlns:a="http://schemas.openxmlformats.org/drawingml/2006/main" xmlns:r="http://schemas.openxmlformats.org/officeDocument/2006/relationships" xmlns:p="http://schemas.openxmlformats.org/presentationml/2006/main">
   <p:cSld>
     <p:spTree>
@@ -26505,7 +25969,7 @@
 </p:sld>
 </file>
 
-<file path=ppt/slides/slide27.xml><?xml version="1.0" encoding="utf-8"?>
+<file path=ppt/slides/slide26.xml><?xml version="1.0" encoding="utf-8"?>
 <p:sld xmlns:a="http://schemas.openxmlformats.org/drawingml/2006/main" xmlns:r="http://schemas.openxmlformats.org/officeDocument/2006/relationships" xmlns:p="http://schemas.openxmlformats.org/presentationml/2006/main">
   <p:cSld>
     <p:spTree>
@@ -26637,7 +26101,7 @@
 </p:sld>
 </file>
 
-<file path=ppt/slides/slide28.xml><?xml version="1.0" encoding="utf-8"?>
+<file path=ppt/slides/slide27.xml><?xml version="1.0" encoding="utf-8"?>
 <p:sld xmlns:a="http://schemas.openxmlformats.org/drawingml/2006/main" xmlns:r="http://schemas.openxmlformats.org/officeDocument/2006/relationships" xmlns:p="http://schemas.openxmlformats.org/presentationml/2006/main">
   <p:cSld>
     <p:spTree>
@@ -26769,7 +26233,7 @@
 </p:sld>
 </file>
 
-<file path=ppt/slides/slide29.xml><?xml version="1.0" encoding="utf-8"?>
+<file path=ppt/slides/slide28.xml><?xml version="1.0" encoding="utf-8"?>
 <p:sld xmlns:a="http://schemas.openxmlformats.org/drawingml/2006/main" xmlns:r="http://schemas.openxmlformats.org/officeDocument/2006/relationships" xmlns:p="http://schemas.openxmlformats.org/presentationml/2006/main">
   <p:cSld>
     <p:spTree>
@@ -26922,6 +26386,138 @@
     <p:extLst>
       <p:ext uri="{BB962C8B-B14F-4D97-AF65-F5344CB8AC3E}">
         <p14:creationId xmlns:p14="http://schemas.microsoft.com/office/powerpoint/2010/main" val="4034572620"/>
+      </p:ext>
+    </p:extLst>
+  </p:cSld>
+  <p:clrMapOvr>
+    <a:masterClrMapping/>
+  </p:clrMapOvr>
+</p:sld>
+</file>
+
+<file path=ppt/slides/slide29.xml><?xml version="1.0" encoding="utf-8"?>
+<p:sld xmlns:a="http://schemas.openxmlformats.org/drawingml/2006/main" xmlns:r="http://schemas.openxmlformats.org/officeDocument/2006/relationships" xmlns:p="http://schemas.openxmlformats.org/presentationml/2006/main">
+  <p:cSld>
+    <p:spTree>
+      <p:nvGrpSpPr>
+        <p:cNvPr id="1" name="">
+          <a:extLst>
+            <a:ext uri="{FF2B5EF4-FFF2-40B4-BE49-F238E27FC236}">
+              <a16:creationId xmlns:a16="http://schemas.microsoft.com/office/drawing/2014/main" id="{AB85CABA-F040-A4C5-F499-BC40D3424000}"/>
+            </a:ext>
+          </a:extLst>
+        </p:cNvPr>
+        <p:cNvGrpSpPr/>
+        <p:nvPr/>
+      </p:nvGrpSpPr>
+      <p:grpSpPr>
+        <a:xfrm>
+          <a:off x="0" y="0"/>
+          <a:ext cx="0" cy="0"/>
+          <a:chOff x="0" y="0"/>
+          <a:chExt cx="0" cy="0"/>
+        </a:xfrm>
+      </p:grpSpPr>
+      <p:sp>
+        <p:nvSpPr>
+          <p:cNvPr id="28" name="Title 1">
+            <a:extLst>
+              <a:ext uri="{FF2B5EF4-FFF2-40B4-BE49-F238E27FC236}">
+                <a16:creationId xmlns:a16="http://schemas.microsoft.com/office/drawing/2014/main" id="{95429BF6-4D0A-279F-E18B-712DCA148C0D}"/>
+              </a:ext>
+            </a:extLst>
+          </p:cNvPr>
+          <p:cNvSpPr>
+            <a:spLocks noGrp="1"/>
+          </p:cNvSpPr>
+          <p:nvPr>
+            <p:ph type="title"/>
+          </p:nvPr>
+        </p:nvSpPr>
+        <p:spPr>
+          <a:xfrm>
+            <a:off x="415600" y="593367"/>
+            <a:ext cx="11360800" cy="763600"/>
+          </a:xfrm>
+        </p:spPr>
+        <p:txBody>
+          <a:bodyPr>
+            <a:normAutofit/>
+          </a:bodyPr>
+          <a:lstStyle/>
+          <a:p>
+            <a:r>
+              <a:rPr lang="en-US" sz="4000" dirty="0"/>
+              <a:t>Testing the CFIHOS ontology</a:t>
+            </a:r>
+            <a:endParaRPr lang="en-US" sz="4000" b="1" dirty="0"/>
+          </a:p>
+        </p:txBody>
+      </p:sp>
+      <p:pic>
+        <p:nvPicPr>
+          <p:cNvPr id="3" name="Imagen 2">
+            <a:extLst>
+              <a:ext uri="{FF2B5EF4-FFF2-40B4-BE49-F238E27FC236}">
+                <a16:creationId xmlns:a16="http://schemas.microsoft.com/office/drawing/2014/main" id="{5CA04276-80F4-74EA-50B5-085147803F0B}"/>
+              </a:ext>
+            </a:extLst>
+          </p:cNvPr>
+          <p:cNvPicPr>
+            <a:picLocks noChangeAspect="1"/>
+          </p:cNvPicPr>
+          <p:nvPr/>
+        </p:nvPicPr>
+        <p:blipFill>
+          <a:blip r:embed="rId3"/>
+          <a:stretch>
+            <a:fillRect/>
+          </a:stretch>
+        </p:blipFill>
+        <p:spPr>
+          <a:xfrm>
+            <a:off x="700581" y="1745433"/>
+            <a:ext cx="7787812" cy="2696121"/>
+          </a:xfrm>
+          <a:prstGeom prst="rect">
+            <a:avLst/>
+          </a:prstGeom>
+        </p:spPr>
+      </p:pic>
+      <p:pic>
+        <p:nvPicPr>
+          <p:cNvPr id="5" name="Imagen 4" descr="Icono&#10;&#10;El contenido generado por IA puede ser incorrecto.">
+            <a:extLst>
+              <a:ext uri="{FF2B5EF4-FFF2-40B4-BE49-F238E27FC236}">
+                <a16:creationId xmlns:a16="http://schemas.microsoft.com/office/drawing/2014/main" id="{94B5B8F8-389B-E5AC-CDB6-9ABF3949AC86}"/>
+              </a:ext>
+            </a:extLst>
+          </p:cNvPr>
+          <p:cNvPicPr>
+            <a:picLocks noChangeAspect="1"/>
+          </p:cNvPicPr>
+          <p:nvPr/>
+        </p:nvPicPr>
+        <p:blipFill>
+          <a:blip r:embed="rId4"/>
+          <a:stretch>
+            <a:fillRect/>
+          </a:stretch>
+        </p:blipFill>
+        <p:spPr>
+          <a:xfrm>
+            <a:off x="7751700" y="3586386"/>
+            <a:ext cx="3806734" cy="2397797"/>
+          </a:xfrm>
+          <a:prstGeom prst="rect">
+            <a:avLst/>
+          </a:prstGeom>
+        </p:spPr>
+      </p:pic>
+    </p:spTree>
+    <p:extLst>
+      <p:ext uri="{BB962C8B-B14F-4D97-AF65-F5344CB8AC3E}">
+        <p14:creationId xmlns:p14="http://schemas.microsoft.com/office/powerpoint/2010/main" val="1662386950"/>
       </p:ext>
     </p:extLst>
   </p:cSld>
@@ -27098,138 +26694,6 @@
         <p:cNvPr id="1" name="">
           <a:extLst>
             <a:ext uri="{FF2B5EF4-FFF2-40B4-BE49-F238E27FC236}">
-              <a16:creationId xmlns:a16="http://schemas.microsoft.com/office/drawing/2014/main" id="{AB85CABA-F040-A4C5-F499-BC40D3424000}"/>
-            </a:ext>
-          </a:extLst>
-        </p:cNvPr>
-        <p:cNvGrpSpPr/>
-        <p:nvPr/>
-      </p:nvGrpSpPr>
-      <p:grpSpPr>
-        <a:xfrm>
-          <a:off x="0" y="0"/>
-          <a:ext cx="0" cy="0"/>
-          <a:chOff x="0" y="0"/>
-          <a:chExt cx="0" cy="0"/>
-        </a:xfrm>
-      </p:grpSpPr>
-      <p:sp>
-        <p:nvSpPr>
-          <p:cNvPr id="28" name="Title 1">
-            <a:extLst>
-              <a:ext uri="{FF2B5EF4-FFF2-40B4-BE49-F238E27FC236}">
-                <a16:creationId xmlns:a16="http://schemas.microsoft.com/office/drawing/2014/main" id="{95429BF6-4D0A-279F-E18B-712DCA148C0D}"/>
-              </a:ext>
-            </a:extLst>
-          </p:cNvPr>
-          <p:cNvSpPr>
-            <a:spLocks noGrp="1"/>
-          </p:cNvSpPr>
-          <p:nvPr>
-            <p:ph type="title"/>
-          </p:nvPr>
-        </p:nvSpPr>
-        <p:spPr>
-          <a:xfrm>
-            <a:off x="415600" y="593367"/>
-            <a:ext cx="11360800" cy="763600"/>
-          </a:xfrm>
-        </p:spPr>
-        <p:txBody>
-          <a:bodyPr>
-            <a:normAutofit/>
-          </a:bodyPr>
-          <a:lstStyle/>
-          <a:p>
-            <a:r>
-              <a:rPr lang="en-US" sz="4000" dirty="0"/>
-              <a:t>Testing the CFIHOS ontology</a:t>
-            </a:r>
-            <a:endParaRPr lang="en-US" sz="4000" b="1" dirty="0"/>
-          </a:p>
-        </p:txBody>
-      </p:sp>
-      <p:pic>
-        <p:nvPicPr>
-          <p:cNvPr id="3" name="Imagen 2">
-            <a:extLst>
-              <a:ext uri="{FF2B5EF4-FFF2-40B4-BE49-F238E27FC236}">
-                <a16:creationId xmlns:a16="http://schemas.microsoft.com/office/drawing/2014/main" id="{5CA04276-80F4-74EA-50B5-085147803F0B}"/>
-              </a:ext>
-            </a:extLst>
-          </p:cNvPr>
-          <p:cNvPicPr>
-            <a:picLocks noChangeAspect="1"/>
-          </p:cNvPicPr>
-          <p:nvPr/>
-        </p:nvPicPr>
-        <p:blipFill>
-          <a:blip r:embed="rId3"/>
-          <a:stretch>
-            <a:fillRect/>
-          </a:stretch>
-        </p:blipFill>
-        <p:spPr>
-          <a:xfrm>
-            <a:off x="700581" y="1745433"/>
-            <a:ext cx="7787812" cy="2696121"/>
-          </a:xfrm>
-          <a:prstGeom prst="rect">
-            <a:avLst/>
-          </a:prstGeom>
-        </p:spPr>
-      </p:pic>
-      <p:pic>
-        <p:nvPicPr>
-          <p:cNvPr id="5" name="Imagen 4" descr="Icono&#10;&#10;El contenido generado por IA puede ser incorrecto.">
-            <a:extLst>
-              <a:ext uri="{FF2B5EF4-FFF2-40B4-BE49-F238E27FC236}">
-                <a16:creationId xmlns:a16="http://schemas.microsoft.com/office/drawing/2014/main" id="{94B5B8F8-389B-E5AC-CDB6-9ABF3949AC86}"/>
-              </a:ext>
-            </a:extLst>
-          </p:cNvPr>
-          <p:cNvPicPr>
-            <a:picLocks noChangeAspect="1"/>
-          </p:cNvPicPr>
-          <p:nvPr/>
-        </p:nvPicPr>
-        <p:blipFill>
-          <a:blip r:embed="rId4"/>
-          <a:stretch>
-            <a:fillRect/>
-          </a:stretch>
-        </p:blipFill>
-        <p:spPr>
-          <a:xfrm>
-            <a:off x="7751700" y="3586386"/>
-            <a:ext cx="3806734" cy="2397797"/>
-          </a:xfrm>
-          <a:prstGeom prst="rect">
-            <a:avLst/>
-          </a:prstGeom>
-        </p:spPr>
-      </p:pic>
-    </p:spTree>
-    <p:extLst>
-      <p:ext uri="{BB962C8B-B14F-4D97-AF65-F5344CB8AC3E}">
-        <p14:creationId xmlns:p14="http://schemas.microsoft.com/office/powerpoint/2010/main" val="1662386950"/>
-      </p:ext>
-    </p:extLst>
-  </p:cSld>
-  <p:clrMapOvr>
-    <a:masterClrMapping/>
-  </p:clrMapOvr>
-</p:sld>
-</file>
-
-<file path=ppt/slides/slide31.xml><?xml version="1.0" encoding="utf-8"?>
-<p:sld xmlns:a="http://schemas.openxmlformats.org/drawingml/2006/main" xmlns:r="http://schemas.openxmlformats.org/officeDocument/2006/relationships" xmlns:p="http://schemas.openxmlformats.org/presentationml/2006/main">
-  <p:cSld>
-    <p:spTree>
-      <p:nvGrpSpPr>
-        <p:cNvPr id="1" name="">
-          <a:extLst>
-            <a:ext uri="{FF2B5EF4-FFF2-40B4-BE49-F238E27FC236}">
               <a16:creationId xmlns:a16="http://schemas.microsoft.com/office/drawing/2014/main" id="{8D9321CF-CC40-8799-9B73-A41F917015C9}"/>
             </a:ext>
           </a:extLst>
@@ -27354,7 +26818,7 @@
 </p:sld>
 </file>
 
-<file path=ppt/slides/slide32.xml><?xml version="1.0" encoding="utf-8"?>
+<file path=ppt/slides/slide31.xml><?xml version="1.0" encoding="utf-8"?>
 <p:sld xmlns:a="http://schemas.openxmlformats.org/drawingml/2006/main" xmlns:r="http://schemas.openxmlformats.org/officeDocument/2006/relationships" xmlns:p="http://schemas.openxmlformats.org/presentationml/2006/main">
   <p:cSld>
     <p:spTree>
@@ -27486,7 +26950,7 @@
 </p:sld>
 </file>
 
-<file path=ppt/slides/slide33.xml><?xml version="1.0" encoding="utf-8"?>
+<file path=ppt/slides/slide32.xml><?xml version="1.0" encoding="utf-8"?>
 <p:sld xmlns:a="http://schemas.openxmlformats.org/drawingml/2006/main" xmlns:r="http://schemas.openxmlformats.org/officeDocument/2006/relationships" xmlns:p="http://schemas.openxmlformats.org/presentationml/2006/main">
   <p:cSld>
     <p:spTree>
@@ -27588,7 +27052,7 @@
 </p:sld>
 </file>
 
-<file path=ppt/slides/slide34.xml><?xml version="1.0" encoding="utf-8"?>
+<file path=ppt/slides/slide33.xml><?xml version="1.0" encoding="utf-8"?>
 <p:sld xmlns:a="http://schemas.openxmlformats.org/drawingml/2006/main" xmlns:r="http://schemas.openxmlformats.org/officeDocument/2006/relationships" xmlns:p="http://schemas.openxmlformats.org/presentationml/2006/main">
   <p:cSld>
     <p:spTree>
@@ -27734,7 +27198,7 @@
 </p:sld>
 </file>
 
-<file path=ppt/slides/slide35.xml><?xml version="1.0" encoding="utf-8"?>
+<file path=ppt/slides/slide34.xml><?xml version="1.0" encoding="utf-8"?>
 <p:sld xmlns:a="http://schemas.openxmlformats.org/drawingml/2006/main" xmlns:r="http://schemas.openxmlformats.org/officeDocument/2006/relationships" xmlns:p="http://schemas.openxmlformats.org/presentationml/2006/main">
   <p:cSld>
     <p:spTree>
@@ -27828,13 +27292,13 @@
           <a:p>
             <a:r>
               <a:rPr lang="en-US" noProof="0" dirty="0"/>
-              <a:t>Jesualdo Tomás Fernández Breis</a:t>
+              <a:t>Jesualdo Tomás Fernández Breis, PhD</a:t>
             </a:r>
           </a:p>
           <a:p>
             <a:r>
               <a:rPr lang="en-US" noProof="0" dirty="0"/>
-              <a:t>Alexander Garcia Castro</a:t>
+              <a:t>Alexander Garcia Castro, PhD</a:t>
             </a:r>
           </a:p>
           <a:p>
@@ -28069,202 +27533,6 @@
         <p:cNvPr id="1" name="">
           <a:extLst>
             <a:ext uri="{FF2B5EF4-FFF2-40B4-BE49-F238E27FC236}">
-              <a16:creationId xmlns:a16="http://schemas.microsoft.com/office/drawing/2014/main" id="{C7B01E13-23D3-282F-62FC-948BBC137641}"/>
-            </a:ext>
-          </a:extLst>
-        </p:cNvPr>
-        <p:cNvGrpSpPr/>
-        <p:nvPr/>
-      </p:nvGrpSpPr>
-      <p:grpSpPr>
-        <a:xfrm>
-          <a:off x="0" y="0"/>
-          <a:ext cx="0" cy="0"/>
-          <a:chOff x="0" y="0"/>
-          <a:chExt cx="0" cy="0"/>
-        </a:xfrm>
-      </p:grpSpPr>
-      <p:sp>
-        <p:nvSpPr>
-          <p:cNvPr id="2" name="CuadroTexto 1">
-            <a:extLst>
-              <a:ext uri="{FF2B5EF4-FFF2-40B4-BE49-F238E27FC236}">
-                <a16:creationId xmlns:a16="http://schemas.microsoft.com/office/drawing/2014/main" id="{972F760F-B5BE-C12A-241C-459A315D9CC6}"/>
-              </a:ext>
-            </a:extLst>
-          </p:cNvPr>
-          <p:cNvSpPr txBox="1"/>
-          <p:nvPr/>
-        </p:nvSpPr>
-        <p:spPr>
-          <a:xfrm>
-            <a:off x="3935186" y="4245429"/>
-            <a:ext cx="0" cy="0"/>
-          </a:xfrm>
-          <a:prstGeom prst="rect">
-            <a:avLst/>
-          </a:prstGeom>
-          <a:noFill/>
-        </p:spPr>
-        <p:txBody>
-          <a:bodyPr wrap="none" lIns="0" tIns="0" rIns="0" bIns="0" rtlCol="0">
-            <a:noAutofit/>
-          </a:bodyPr>
-          <a:lstStyle/>
-          <a:p>
-            <a:pPr algn="l"/>
-            <a:endParaRPr lang="en-US" dirty="0" err="1"/>
-          </a:p>
-        </p:txBody>
-      </p:sp>
-      <p:sp>
-        <p:nvSpPr>
-          <p:cNvPr id="5" name="Título 4">
-            <a:extLst>
-              <a:ext uri="{FF2B5EF4-FFF2-40B4-BE49-F238E27FC236}">
-                <a16:creationId xmlns:a16="http://schemas.microsoft.com/office/drawing/2014/main" id="{09937A6C-0AEC-61D4-FC7C-34D1328E37E2}"/>
-              </a:ext>
-            </a:extLst>
-          </p:cNvPr>
-          <p:cNvSpPr>
-            <a:spLocks noGrp="1"/>
-          </p:cNvSpPr>
-          <p:nvPr>
-            <p:ph type="title"/>
-          </p:nvPr>
-        </p:nvSpPr>
-        <p:spPr>
-          <a:xfrm>
-            <a:off x="1" y="1"/>
-            <a:ext cx="11560628" cy="1414800"/>
-          </a:xfrm>
-        </p:spPr>
-        <p:txBody>
-          <a:bodyPr/>
-          <a:lstStyle/>
-          <a:p>
-            <a:r>
-              <a:rPr lang="en-US" sz="4000" dirty="0"/>
-              <a:t>A Siemens Energy Centrifugal Pump</a:t>
-            </a:r>
-          </a:p>
-        </p:txBody>
-      </p:sp>
-      <p:pic>
-        <p:nvPicPr>
-          <p:cNvPr id="1026" name="Picture 2" descr="Centrifugal Pumps Siemens Motor for RO Water Purifier Bkz ...">
-            <a:extLst>
-              <a:ext uri="{FF2B5EF4-FFF2-40B4-BE49-F238E27FC236}">
-                <a16:creationId xmlns:a16="http://schemas.microsoft.com/office/drawing/2014/main" id="{299D942D-C213-E91B-613D-EBA22C9BD123}"/>
-              </a:ext>
-            </a:extLst>
-          </p:cNvPr>
-          <p:cNvPicPr>
-            <a:picLocks noChangeAspect="1" noChangeArrowheads="1"/>
-          </p:cNvPicPr>
-          <p:nvPr/>
-        </p:nvPicPr>
-        <p:blipFill rotWithShape="1">
-          <a:blip r:embed="rId3">
-            <a:extLst>
-              <a:ext uri="{28A0092B-C50C-407E-A947-70E740481C1C}">
-                <a14:useLocalDpi xmlns:a14="http://schemas.microsoft.com/office/drawing/2010/main" val="0"/>
-              </a:ext>
-            </a:extLst>
-          </a:blip>
-          <a:srcRect t="23961" b="9414"/>
-          <a:stretch>
-            <a:fillRect/>
-          </a:stretch>
-        </p:blipFill>
-        <p:spPr bwMode="auto">
-          <a:xfrm>
-            <a:off x="4927905" y="1067702"/>
-            <a:ext cx="3503527" cy="2334216"/>
-          </a:xfrm>
-          <a:prstGeom prst="rect">
-            <a:avLst/>
-          </a:prstGeom>
-          <a:noFill/>
-          <a:extLst>
-            <a:ext uri="{909E8E84-426E-40DD-AFC4-6F175D3DCCD1}">
-              <a14:hiddenFill xmlns:a14="http://schemas.microsoft.com/office/drawing/2010/main">
-                <a:solidFill>
-                  <a:srgbClr val="FFFFFF"/>
-                </a:solidFill>
-              </a14:hiddenFill>
-            </a:ext>
-          </a:extLst>
-        </p:spPr>
-      </p:pic>
-      <p:pic>
-        <p:nvPicPr>
-          <p:cNvPr id="6" name="Picture 2" descr="Imagen de salida">
-            <a:extLst>
-              <a:ext uri="{FF2B5EF4-FFF2-40B4-BE49-F238E27FC236}">
-                <a16:creationId xmlns:a16="http://schemas.microsoft.com/office/drawing/2014/main" id="{B22B0B26-BCCA-BB24-37A8-28048F25C04F}"/>
-              </a:ext>
-            </a:extLst>
-          </p:cNvPr>
-          <p:cNvPicPr>
-            <a:picLocks noChangeAspect="1" noChangeArrowheads="1"/>
-          </p:cNvPicPr>
-          <p:nvPr/>
-        </p:nvPicPr>
-        <p:blipFill rotWithShape="1">
-          <a:blip r:embed="rId4">
-            <a:extLst>
-              <a:ext uri="{28A0092B-C50C-407E-A947-70E740481C1C}">
-                <a14:useLocalDpi xmlns:a14="http://schemas.microsoft.com/office/drawing/2010/main" val="0"/>
-              </a:ext>
-            </a:extLst>
-          </a:blip>
-          <a:srcRect t="16993" b="8605"/>
-          <a:stretch>
-            <a:fillRect/>
-          </a:stretch>
-        </p:blipFill>
-        <p:spPr bwMode="auto">
-          <a:xfrm>
-            <a:off x="3632143" y="3329071"/>
-            <a:ext cx="6279423" cy="3552082"/>
-          </a:xfrm>
-          <a:prstGeom prst="rect">
-            <a:avLst/>
-          </a:prstGeom>
-          <a:noFill/>
-          <a:extLst>
-            <a:ext uri="{909E8E84-426E-40DD-AFC4-6F175D3DCCD1}">
-              <a14:hiddenFill xmlns:a14="http://schemas.microsoft.com/office/drawing/2010/main">
-                <a:solidFill>
-                  <a:srgbClr val="FFFFFF"/>
-                </a:solidFill>
-              </a14:hiddenFill>
-            </a:ext>
-          </a:extLst>
-        </p:spPr>
-      </p:pic>
-    </p:spTree>
-    <p:extLst>
-      <p:ext uri="{BB962C8B-B14F-4D97-AF65-F5344CB8AC3E}">
-        <p14:creationId xmlns:p14="http://schemas.microsoft.com/office/powerpoint/2010/main" val="829953449"/>
-      </p:ext>
-    </p:extLst>
-  </p:cSld>
-  <p:clrMapOvr>
-    <a:masterClrMapping/>
-  </p:clrMapOvr>
-</p:sld>
-</file>
-
-<file path=ppt/slides/slide6.xml><?xml version="1.0" encoding="utf-8"?>
-<p:sld xmlns:a="http://schemas.openxmlformats.org/drawingml/2006/main" xmlns:r="http://schemas.openxmlformats.org/officeDocument/2006/relationships" xmlns:p="http://schemas.openxmlformats.org/presentationml/2006/main">
-  <p:cSld>
-    <p:spTree>
-      <p:nvGrpSpPr>
-        <p:cNvPr id="1" name="">
-          <a:extLst>
-            <a:ext uri="{FF2B5EF4-FFF2-40B4-BE49-F238E27FC236}">
               <a16:creationId xmlns:a16="http://schemas.microsoft.com/office/drawing/2014/main" id="{C3FDF424-1EBB-2DA7-157B-239F7A6EE26E}"/>
             </a:ext>
           </a:extLst>
@@ -28526,7 +27794,7 @@
 </p:sld>
 </file>
 
-<file path=ppt/slides/slide7.xml><?xml version="1.0" encoding="utf-8"?>
+<file path=ppt/slides/slide6.xml><?xml version="1.0" encoding="utf-8"?>
 <p:sld xmlns:a="http://schemas.openxmlformats.org/drawingml/2006/main" xmlns:r="http://schemas.openxmlformats.org/officeDocument/2006/relationships" xmlns:p="http://schemas.openxmlformats.org/presentationml/2006/main">
   <p:cSld>
     <p:spTree>
@@ -29885,7 +29153,7 @@
 </p:sld>
 </file>
 
-<file path=ppt/slides/slide8.xml><?xml version="1.0" encoding="utf-8"?>
+<file path=ppt/slides/slide7.xml><?xml version="1.0" encoding="utf-8"?>
 <p:sld xmlns:a="http://schemas.openxmlformats.org/drawingml/2006/main" xmlns:r="http://schemas.openxmlformats.org/officeDocument/2006/relationships" xmlns:p="http://schemas.openxmlformats.org/presentationml/2006/main">
   <p:cSld>
     <p:spTree>
@@ -30005,7 +29273,7 @@
 </p:sld>
 </file>
 
-<file path=ppt/slides/slide9.xml><?xml version="1.0" encoding="utf-8"?>
+<file path=ppt/slides/slide8.xml><?xml version="1.0" encoding="utf-8"?>
 <p:sld xmlns:a="http://schemas.openxmlformats.org/drawingml/2006/main" xmlns:r="http://schemas.openxmlformats.org/officeDocument/2006/relationships" xmlns:p="http://schemas.openxmlformats.org/presentationml/2006/main">
   <p:cSld>
     <p:spTree>
@@ -31411,6 +30679,285 @@
     <p:extLst>
       <p:ext uri="{BB962C8B-B14F-4D97-AF65-F5344CB8AC3E}">
         <p14:creationId xmlns:p14="http://schemas.microsoft.com/office/powerpoint/2010/main" val="1747172335"/>
+      </p:ext>
+    </p:extLst>
+  </p:cSld>
+  <p:clrMapOvr>
+    <a:masterClrMapping/>
+  </p:clrMapOvr>
+</p:sld>
+</file>
+
+<file path=ppt/slides/slide9.xml><?xml version="1.0" encoding="utf-8"?>
+<p:sld xmlns:a="http://schemas.openxmlformats.org/drawingml/2006/main" xmlns:r="http://schemas.openxmlformats.org/officeDocument/2006/relationships" xmlns:p="http://schemas.openxmlformats.org/presentationml/2006/main">
+  <p:cSld>
+    <p:spTree>
+      <p:nvGrpSpPr>
+        <p:cNvPr id="1" name="">
+          <a:extLst>
+            <a:ext uri="{FF2B5EF4-FFF2-40B4-BE49-F238E27FC236}">
+              <a16:creationId xmlns:a16="http://schemas.microsoft.com/office/drawing/2014/main" id="{A24A54F5-EA24-96F2-7D56-34C3C1FCB3F8}"/>
+            </a:ext>
+          </a:extLst>
+        </p:cNvPr>
+        <p:cNvGrpSpPr/>
+        <p:nvPr/>
+      </p:nvGrpSpPr>
+      <p:grpSpPr>
+        <a:xfrm>
+          <a:off x="0" y="0"/>
+          <a:ext cx="0" cy="0"/>
+          <a:chOff x="0" y="0"/>
+          <a:chExt cx="0" cy="0"/>
+        </a:xfrm>
+      </p:grpSpPr>
+      <p:sp>
+        <p:nvSpPr>
+          <p:cNvPr id="28" name="Title 1">
+            <a:extLst>
+              <a:ext uri="{FF2B5EF4-FFF2-40B4-BE49-F238E27FC236}">
+                <a16:creationId xmlns:a16="http://schemas.microsoft.com/office/drawing/2014/main" id="{026BB3F6-539B-A596-7D83-88EFF042A3E6}"/>
+              </a:ext>
+            </a:extLst>
+          </p:cNvPr>
+          <p:cNvSpPr>
+            <a:spLocks noGrp="1"/>
+          </p:cNvSpPr>
+          <p:nvPr>
+            <p:ph type="title"/>
+          </p:nvPr>
+        </p:nvSpPr>
+        <p:spPr>
+          <a:xfrm>
+            <a:off x="415600" y="219823"/>
+            <a:ext cx="11360800" cy="763600"/>
+          </a:xfrm>
+        </p:spPr>
+        <p:txBody>
+          <a:bodyPr>
+            <a:normAutofit fontScale="90000"/>
+          </a:bodyPr>
+          <a:lstStyle/>
+          <a:p>
+            <a:r>
+              <a:rPr lang="en-US" sz="4000" dirty="0"/>
+              <a:t>CFIHOS distribution</a:t>
+            </a:r>
+            <a:br>
+              <a:rPr lang="en-US" sz="4000" dirty="0"/>
+            </a:br>
+            <a:r>
+              <a:rPr lang="en-US" sz="3100" dirty="0"/>
+              <a:t>Version 2.0 October 2024</a:t>
+            </a:r>
+            <a:endParaRPr lang="en-US" sz="4000" b="1" dirty="0"/>
+          </a:p>
+        </p:txBody>
+      </p:sp>
+      <p:sp>
+        <p:nvSpPr>
+          <p:cNvPr id="19" name="Marcador de texto 2">
+            <a:extLst>
+              <a:ext uri="{FF2B5EF4-FFF2-40B4-BE49-F238E27FC236}">
+                <a16:creationId xmlns:a16="http://schemas.microsoft.com/office/drawing/2014/main" id="{D081E6E3-9134-BFE4-099E-1493100BCD26}"/>
+              </a:ext>
+            </a:extLst>
+          </p:cNvPr>
+          <p:cNvSpPr>
+            <a:spLocks noGrp="1"/>
+          </p:cNvSpPr>
+          <p:nvPr>
+            <p:ph type="body" idx="1"/>
+          </p:nvPr>
+        </p:nvSpPr>
+        <p:spPr>
+          <a:xfrm>
+            <a:off x="584923" y="1642751"/>
+            <a:ext cx="5873750" cy="2385785"/>
+          </a:xfrm>
+        </p:spPr>
+        <p:txBody>
+          <a:bodyPr>
+            <a:normAutofit fontScale="85000" lnSpcReduction="20000"/>
+          </a:bodyPr>
+          <a:lstStyle/>
+          <a:p>
+            <a:r>
+              <a:rPr lang="en-US" sz="2300" dirty="0"/>
+              <a:t>CFIHOS is a specification, not an implementation</a:t>
+            </a:r>
+          </a:p>
+          <a:p>
+            <a:endParaRPr lang="en-US" sz="2300" dirty="0"/>
+          </a:p>
+          <a:p>
+            <a:r>
+              <a:rPr lang="en-US" sz="2300" dirty="0"/>
+              <a:t>CFIHOS data model can be inspected through an HTML explorer</a:t>
+            </a:r>
+          </a:p>
+          <a:p>
+            <a:pPr marL="152396" indent="0">
+              <a:buNone/>
+            </a:pPr>
+            <a:endParaRPr lang="en-US" sz="2300" dirty="0"/>
+          </a:p>
+          <a:p>
+            <a:r>
+              <a:rPr lang="en-US" sz="2300" dirty="0"/>
+              <a:t>CFIHOS reference data library is distributed as tables in Excel format</a:t>
+            </a:r>
+            <a:endParaRPr lang="en-US" dirty="0"/>
+          </a:p>
+        </p:txBody>
+      </p:sp>
+      <p:pic>
+        <p:nvPicPr>
+          <p:cNvPr id="4" name="Imagen 3">
+            <a:extLst>
+              <a:ext uri="{FF2B5EF4-FFF2-40B4-BE49-F238E27FC236}">
+                <a16:creationId xmlns:a16="http://schemas.microsoft.com/office/drawing/2014/main" id="{04985822-C57C-0C6C-EC65-C5B9B924DCF4}"/>
+              </a:ext>
+            </a:extLst>
+          </p:cNvPr>
+          <p:cNvPicPr>
+            <a:picLocks noChangeAspect="1"/>
+          </p:cNvPicPr>
+          <p:nvPr/>
+        </p:nvPicPr>
+        <p:blipFill>
+          <a:blip r:embed="rId3"/>
+          <a:stretch>
+            <a:fillRect/>
+          </a:stretch>
+        </p:blipFill>
+        <p:spPr>
+          <a:xfrm>
+            <a:off x="7482906" y="240866"/>
+            <a:ext cx="4045076" cy="3913884"/>
+          </a:xfrm>
+          <a:prstGeom prst="rect">
+            <a:avLst/>
+          </a:prstGeom>
+        </p:spPr>
+      </p:pic>
+      <p:pic>
+        <p:nvPicPr>
+          <p:cNvPr id="6" name="Imagen 5">
+            <a:extLst>
+              <a:ext uri="{FF2B5EF4-FFF2-40B4-BE49-F238E27FC236}">
+                <a16:creationId xmlns:a16="http://schemas.microsoft.com/office/drawing/2014/main" id="{9FE42249-7FFE-35D0-C3F0-06C6CB15AB33}"/>
+              </a:ext>
+            </a:extLst>
+          </p:cNvPr>
+          <p:cNvPicPr>
+            <a:picLocks noChangeAspect="1"/>
+          </p:cNvPicPr>
+          <p:nvPr/>
+        </p:nvPicPr>
+        <p:blipFill>
+          <a:blip r:embed="rId4"/>
+          <a:stretch>
+            <a:fillRect/>
+          </a:stretch>
+        </p:blipFill>
+        <p:spPr>
+          <a:xfrm>
+            <a:off x="2161626" y="4507251"/>
+            <a:ext cx="7868748" cy="1886213"/>
+          </a:xfrm>
+          <a:prstGeom prst="rect">
+            <a:avLst/>
+          </a:prstGeom>
+        </p:spPr>
+      </p:pic>
+      <p:cxnSp>
+        <p:nvCxnSpPr>
+          <p:cNvPr id="8" name="Conector recto de flecha 7">
+            <a:extLst>
+              <a:ext uri="{FF2B5EF4-FFF2-40B4-BE49-F238E27FC236}">
+                <a16:creationId xmlns:a16="http://schemas.microsoft.com/office/drawing/2014/main" id="{902DA343-7702-839D-EA86-2BF69DEAB056}"/>
+              </a:ext>
+            </a:extLst>
+          </p:cNvPr>
+          <p:cNvCxnSpPr>
+            <a:cxnSpLocks/>
+            <a:endCxn id="4" idx="1"/>
+          </p:cNvCxnSpPr>
+          <p:nvPr/>
+        </p:nvCxnSpPr>
+        <p:spPr>
+          <a:xfrm flipV="1">
+            <a:off x="5984111" y="2197808"/>
+            <a:ext cx="1498795" cy="545392"/>
+          </a:xfrm>
+          <a:prstGeom prst="straightConnector1">
+            <a:avLst/>
+          </a:prstGeom>
+          <a:ln>
+            <a:tailEnd type="triangle"/>
+          </a:ln>
+        </p:spPr>
+        <p:style>
+          <a:lnRef idx="1">
+            <a:schemeClr val="dk1"/>
+          </a:lnRef>
+          <a:fillRef idx="0">
+            <a:schemeClr val="dk1"/>
+          </a:fillRef>
+          <a:effectRef idx="0">
+            <a:schemeClr val="dk1"/>
+          </a:effectRef>
+          <a:fontRef idx="minor">
+            <a:schemeClr val="tx1"/>
+          </a:fontRef>
+        </p:style>
+      </p:cxnSp>
+      <p:cxnSp>
+        <p:nvCxnSpPr>
+          <p:cNvPr id="11" name="Conector recto de flecha 10">
+            <a:extLst>
+              <a:ext uri="{FF2B5EF4-FFF2-40B4-BE49-F238E27FC236}">
+                <a16:creationId xmlns:a16="http://schemas.microsoft.com/office/drawing/2014/main" id="{E06D7C0E-A2B1-2F14-68CD-590D8064B36C}"/>
+              </a:ext>
+            </a:extLst>
+          </p:cNvPr>
+          <p:cNvCxnSpPr>
+            <a:cxnSpLocks/>
+          </p:cNvCxnSpPr>
+          <p:nvPr/>
+        </p:nvCxnSpPr>
+        <p:spPr>
+          <a:xfrm>
+            <a:off x="3865944" y="4028536"/>
+            <a:ext cx="1111498" cy="414068"/>
+          </a:xfrm>
+          <a:prstGeom prst="straightConnector1">
+            <a:avLst/>
+          </a:prstGeom>
+          <a:ln>
+            <a:tailEnd type="triangle"/>
+          </a:ln>
+        </p:spPr>
+        <p:style>
+          <a:lnRef idx="1">
+            <a:schemeClr val="dk1"/>
+          </a:lnRef>
+          <a:fillRef idx="0">
+            <a:schemeClr val="dk1"/>
+          </a:fillRef>
+          <a:effectRef idx="0">
+            <a:schemeClr val="dk1"/>
+          </a:effectRef>
+          <a:fontRef idx="minor">
+            <a:schemeClr val="tx1"/>
+          </a:fontRef>
+        </p:style>
+      </p:cxnSp>
+    </p:spTree>
+    <p:extLst>
+      <p:ext uri="{BB962C8B-B14F-4D97-AF65-F5344CB8AC3E}">
+        <p14:creationId xmlns:p14="http://schemas.microsoft.com/office/powerpoint/2010/main" val="3640465719"/>
       </p:ext>
     </p:extLst>
   </p:cSld>

--- a/docs/cfihos-ontology.pptx
+++ b/docs/cfihos-ontology.pptx
@@ -7637,7 +7637,7 @@
           <a:p>
             <a:fld id="{ADE2EF3F-42B8-4B9D-A37E-11A4D443AA0D}" type="datetimeFigureOut">
               <a:rPr lang="en-US" sz="1050" smtClean="0"/>
-              <a:t>2/25/26</a:t>
+              <a:t>2/27/26</a:t>
             </a:fld>
             <a:endParaRPr lang="en-US" sz="1050" dirty="0"/>
           </a:p>
@@ -7823,7 +7823,7 @@
             <a:fld id="{B121E240-E9EA-40DE-8EFF-BE00DCAC0262}" type="datetimeFigureOut">
               <a:rPr lang="en-US" noProof="0" smtClean="0"/>
               <a:pPr/>
-              <a:t>2/25/26</a:t>
+              <a:t>2/27/26</a:t>
             </a:fld>
             <a:endParaRPr lang="en-US" noProof="0" dirty="0"/>
           </a:p>
@@ -29225,7 +29225,7 @@
           <a:p>
             <a:r>
               <a:rPr lang="en-GB" sz="4000" dirty="0"/>
-              <a:t>Towards a common language</a:t>
+              <a:t>Towards a “common language”</a:t>
             </a:r>
           </a:p>
         </p:txBody>

--- a/docs/cfihos-ontology.pptx
+++ b/docs/cfihos-ontology.pptx
@@ -25,8 +25,8 @@
     <p:sldId id="2076136676" r:id="rId13"/>
     <p:sldId id="2076136656" r:id="rId14"/>
     <p:sldId id="2076136654" r:id="rId15"/>
-    <p:sldId id="2076136675" r:id="rId16"/>
-    <p:sldId id="2076136684" r:id="rId17"/>
+    <p:sldId id="2076136684" r:id="rId16"/>
+    <p:sldId id="2076136675" r:id="rId17"/>
     <p:sldId id="2076136663" r:id="rId18"/>
     <p:sldId id="2076136664" r:id="rId19"/>
     <p:sldId id="2076136665" r:id="rId20"/>
@@ -7637,7 +7637,7 @@
           <a:p>
             <a:fld id="{ADE2EF3F-42B8-4B9D-A37E-11A4D443AA0D}" type="datetimeFigureOut">
               <a:rPr lang="en-US" sz="1050" smtClean="0"/>
-              <a:t>2/27/26</a:t>
+              <a:t>3/13/26</a:t>
             </a:fld>
             <a:endParaRPr lang="en-US" sz="1050" dirty="0"/>
           </a:p>
@@ -7823,7 +7823,7 @@
             <a:fld id="{B121E240-E9EA-40DE-8EFF-BE00DCAC0262}" type="datetimeFigureOut">
               <a:rPr lang="en-US" noProof="0" smtClean="0"/>
               <a:pPr/>
-              <a:t>2/27/26</a:t>
+              <a:t>3/13/26</a:t>
             </a:fld>
             <a:endParaRPr lang="en-US" noProof="0" dirty="0"/>
           </a:p>
@@ -8907,6 +8907,146 @@
         <p:cNvPr id="1" name="">
           <a:extLst>
             <a:ext uri="{FF2B5EF4-FFF2-40B4-BE49-F238E27FC236}">
+              <a16:creationId xmlns:a16="http://schemas.microsoft.com/office/drawing/2014/main" id="{F8746F0A-09E7-F107-D4AA-E3EF09CB2918}"/>
+            </a:ext>
+          </a:extLst>
+        </p:cNvPr>
+        <p:cNvGrpSpPr/>
+        <p:nvPr/>
+      </p:nvGrpSpPr>
+      <p:grpSpPr>
+        <a:xfrm>
+          <a:off x="0" y="0"/>
+          <a:ext cx="0" cy="0"/>
+          <a:chOff x="0" y="0"/>
+          <a:chExt cx="0" cy="0"/>
+        </a:xfrm>
+      </p:grpSpPr>
+      <p:sp>
+        <p:nvSpPr>
+          <p:cNvPr id="2" name="Slide Image Placeholder 1">
+            <a:extLst>
+              <a:ext uri="{FF2B5EF4-FFF2-40B4-BE49-F238E27FC236}">
+                <a16:creationId xmlns:a16="http://schemas.microsoft.com/office/drawing/2014/main" id="{10B9380B-6BCA-AA18-2DCB-609E9F4761CB}"/>
+              </a:ext>
+            </a:extLst>
+          </p:cNvPr>
+          <p:cNvSpPr>
+            <a:spLocks noGrp="1" noRot="1" noChangeAspect="1"/>
+          </p:cNvSpPr>
+          <p:nvPr>
+            <p:ph type="sldImg"/>
+          </p:nvPr>
+        </p:nvSpPr>
+        <p:spPr>
+          <a:xfrm>
+            <a:off x="381000" y="685800"/>
+            <a:ext cx="6096000" cy="3429000"/>
+          </a:xfrm>
+        </p:spPr>
+      </p:sp>
+      <p:sp>
+        <p:nvSpPr>
+          <p:cNvPr id="3" name="Notes Placeholder 2">
+            <a:extLst>
+              <a:ext uri="{FF2B5EF4-FFF2-40B4-BE49-F238E27FC236}">
+                <a16:creationId xmlns:a16="http://schemas.microsoft.com/office/drawing/2014/main" id="{28337E62-613D-1FE2-7878-06D3373971FD}"/>
+              </a:ext>
+            </a:extLst>
+          </p:cNvPr>
+          <p:cNvSpPr>
+            <a:spLocks noGrp="1"/>
+          </p:cNvSpPr>
+          <p:nvPr>
+            <p:ph type="body" idx="1"/>
+          </p:nvPr>
+        </p:nvSpPr>
+        <p:spPr/>
+        <p:txBody>
+          <a:bodyPr/>
+          <a:lstStyle/>
+          <a:p>
+            <a:r>
+              <a:rPr lang="de-DE" dirty="0"/>
+              <a:t>This </a:t>
+            </a:r>
+            <a:r>
+              <a:rPr lang="de-DE" dirty="0" err="1"/>
+              <a:t>is</a:t>
+            </a:r>
+            <a:r>
+              <a:rPr lang="de-DE" dirty="0"/>
+              <a:t> </a:t>
+            </a:r>
+            <a:r>
+              <a:rPr lang="de-DE" dirty="0" err="1"/>
+              <a:t>the</a:t>
+            </a:r>
+            <a:r>
+              <a:rPr lang="de-DE" dirty="0"/>
+              <a:t> </a:t>
+            </a:r>
+            <a:r>
+              <a:rPr lang="de-DE" dirty="0" err="1"/>
+              <a:t>competency</a:t>
+            </a:r>
+            <a:r>
+              <a:rPr lang="de-DE" dirty="0"/>
+              <a:t> </a:t>
+            </a:r>
+            <a:r>
+              <a:rPr lang="de-DE" dirty="0" err="1"/>
+              <a:t>question</a:t>
+            </a:r>
+            <a:r>
+              <a:rPr lang="de-DE" dirty="0"/>
+              <a:t> </a:t>
+            </a:r>
+            <a:r>
+              <a:rPr lang="de-DE" dirty="0" err="1"/>
+              <a:t>driving</a:t>
+            </a:r>
+            <a:r>
+              <a:rPr lang="de-DE" dirty="0"/>
+              <a:t> </a:t>
+            </a:r>
+            <a:r>
+              <a:rPr lang="de-DE" dirty="0" err="1"/>
+              <a:t>the</a:t>
+            </a:r>
+            <a:r>
+              <a:rPr lang="de-DE" dirty="0"/>
+              <a:t> </a:t>
+            </a:r>
+            <a:r>
+              <a:rPr lang="de-DE" dirty="0" err="1"/>
+              <a:t>presentation</a:t>
+            </a:r>
+            <a:endParaRPr lang="en-US" dirty="0"/>
+          </a:p>
+        </p:txBody>
+      </p:sp>
+    </p:spTree>
+    <p:extLst>
+      <p:ext uri="{BB962C8B-B14F-4D97-AF65-F5344CB8AC3E}">
+        <p14:creationId xmlns:p14="http://schemas.microsoft.com/office/powerpoint/2010/main" val="2608057452"/>
+      </p:ext>
+    </p:extLst>
+  </p:cSld>
+  <p:clrMapOvr>
+    <a:masterClrMapping/>
+  </p:clrMapOvr>
+</p:notes>
+</file>
+
+<file path=ppt/notesSlides/notesSlide16.xml><?xml version="1.0" encoding="utf-8"?>
+<p:notes xmlns:a="http://schemas.openxmlformats.org/drawingml/2006/main" xmlns:r="http://schemas.openxmlformats.org/officeDocument/2006/relationships" xmlns:p="http://schemas.openxmlformats.org/presentationml/2006/main">
+  <p:cSld>
+    <p:spTree>
+      <p:nvGrpSpPr>
+        <p:cNvPr id="1" name="">
+          <a:extLst>
+            <a:ext uri="{FF2B5EF4-FFF2-40B4-BE49-F238E27FC236}">
               <a16:creationId xmlns:a16="http://schemas.microsoft.com/office/drawing/2014/main" id="{890E4457-665A-B431-59D3-B52A74501E98}"/>
             </a:ext>
           </a:extLst>
@@ -9030,146 +9170,6 @@
     <p:extLst>
       <p:ext uri="{BB962C8B-B14F-4D97-AF65-F5344CB8AC3E}">
         <p14:creationId xmlns:p14="http://schemas.microsoft.com/office/powerpoint/2010/main" val="3222162435"/>
-      </p:ext>
-    </p:extLst>
-  </p:cSld>
-  <p:clrMapOvr>
-    <a:masterClrMapping/>
-  </p:clrMapOvr>
-</p:notes>
-</file>
-
-<file path=ppt/notesSlides/notesSlide16.xml><?xml version="1.0" encoding="utf-8"?>
-<p:notes xmlns:a="http://schemas.openxmlformats.org/drawingml/2006/main" xmlns:r="http://schemas.openxmlformats.org/officeDocument/2006/relationships" xmlns:p="http://schemas.openxmlformats.org/presentationml/2006/main">
-  <p:cSld>
-    <p:spTree>
-      <p:nvGrpSpPr>
-        <p:cNvPr id="1" name="">
-          <a:extLst>
-            <a:ext uri="{FF2B5EF4-FFF2-40B4-BE49-F238E27FC236}">
-              <a16:creationId xmlns:a16="http://schemas.microsoft.com/office/drawing/2014/main" id="{F8746F0A-09E7-F107-D4AA-E3EF09CB2918}"/>
-            </a:ext>
-          </a:extLst>
-        </p:cNvPr>
-        <p:cNvGrpSpPr/>
-        <p:nvPr/>
-      </p:nvGrpSpPr>
-      <p:grpSpPr>
-        <a:xfrm>
-          <a:off x="0" y="0"/>
-          <a:ext cx="0" cy="0"/>
-          <a:chOff x="0" y="0"/>
-          <a:chExt cx="0" cy="0"/>
-        </a:xfrm>
-      </p:grpSpPr>
-      <p:sp>
-        <p:nvSpPr>
-          <p:cNvPr id="2" name="Slide Image Placeholder 1">
-            <a:extLst>
-              <a:ext uri="{FF2B5EF4-FFF2-40B4-BE49-F238E27FC236}">
-                <a16:creationId xmlns:a16="http://schemas.microsoft.com/office/drawing/2014/main" id="{10B9380B-6BCA-AA18-2DCB-609E9F4761CB}"/>
-              </a:ext>
-            </a:extLst>
-          </p:cNvPr>
-          <p:cNvSpPr>
-            <a:spLocks noGrp="1" noRot="1" noChangeAspect="1"/>
-          </p:cNvSpPr>
-          <p:nvPr>
-            <p:ph type="sldImg"/>
-          </p:nvPr>
-        </p:nvSpPr>
-        <p:spPr>
-          <a:xfrm>
-            <a:off x="381000" y="685800"/>
-            <a:ext cx="6096000" cy="3429000"/>
-          </a:xfrm>
-        </p:spPr>
-      </p:sp>
-      <p:sp>
-        <p:nvSpPr>
-          <p:cNvPr id="3" name="Notes Placeholder 2">
-            <a:extLst>
-              <a:ext uri="{FF2B5EF4-FFF2-40B4-BE49-F238E27FC236}">
-                <a16:creationId xmlns:a16="http://schemas.microsoft.com/office/drawing/2014/main" id="{28337E62-613D-1FE2-7878-06D3373971FD}"/>
-              </a:ext>
-            </a:extLst>
-          </p:cNvPr>
-          <p:cNvSpPr>
-            <a:spLocks noGrp="1"/>
-          </p:cNvSpPr>
-          <p:nvPr>
-            <p:ph type="body" idx="1"/>
-          </p:nvPr>
-        </p:nvSpPr>
-        <p:spPr/>
-        <p:txBody>
-          <a:bodyPr/>
-          <a:lstStyle/>
-          <a:p>
-            <a:r>
-              <a:rPr lang="de-DE" dirty="0"/>
-              <a:t>This </a:t>
-            </a:r>
-            <a:r>
-              <a:rPr lang="de-DE" dirty="0" err="1"/>
-              <a:t>is</a:t>
-            </a:r>
-            <a:r>
-              <a:rPr lang="de-DE" dirty="0"/>
-              <a:t> </a:t>
-            </a:r>
-            <a:r>
-              <a:rPr lang="de-DE" dirty="0" err="1"/>
-              <a:t>the</a:t>
-            </a:r>
-            <a:r>
-              <a:rPr lang="de-DE" dirty="0"/>
-              <a:t> </a:t>
-            </a:r>
-            <a:r>
-              <a:rPr lang="de-DE" dirty="0" err="1"/>
-              <a:t>competency</a:t>
-            </a:r>
-            <a:r>
-              <a:rPr lang="de-DE" dirty="0"/>
-              <a:t> </a:t>
-            </a:r>
-            <a:r>
-              <a:rPr lang="de-DE" dirty="0" err="1"/>
-              <a:t>question</a:t>
-            </a:r>
-            <a:r>
-              <a:rPr lang="de-DE" dirty="0"/>
-              <a:t> </a:t>
-            </a:r>
-            <a:r>
-              <a:rPr lang="de-DE" dirty="0" err="1"/>
-              <a:t>driving</a:t>
-            </a:r>
-            <a:r>
-              <a:rPr lang="de-DE" dirty="0"/>
-              <a:t> </a:t>
-            </a:r>
-            <a:r>
-              <a:rPr lang="de-DE" dirty="0" err="1"/>
-              <a:t>the</a:t>
-            </a:r>
-            <a:r>
-              <a:rPr lang="de-DE" dirty="0"/>
-              <a:t> </a:t>
-            </a:r>
-            <a:r>
-              <a:rPr lang="de-DE" dirty="0" err="1"/>
-              <a:t>presentation</a:t>
-            </a:r>
-            <a:endParaRPr lang="en-US" dirty="0"/>
-          </a:p>
-        </p:txBody>
-      </p:sp>
-    </p:spTree>
-    <p:extLst>
-      <p:ext uri="{BB962C8B-B14F-4D97-AF65-F5344CB8AC3E}">
-        <p14:creationId xmlns:p14="http://schemas.microsoft.com/office/powerpoint/2010/main" val="2608057452"/>
       </p:ext>
     </p:extLst>
   </p:cSld>
@@ -23794,191 +23794,6 @@
         <p:cNvPr id="1" name="">
           <a:extLst>
             <a:ext uri="{FF2B5EF4-FFF2-40B4-BE49-F238E27FC236}">
-              <a16:creationId xmlns:a16="http://schemas.microsoft.com/office/drawing/2014/main" id="{35BEF359-D175-9A79-BB9D-E7542E52B192}"/>
-            </a:ext>
-          </a:extLst>
-        </p:cNvPr>
-        <p:cNvGrpSpPr/>
-        <p:nvPr/>
-      </p:nvGrpSpPr>
-      <p:grpSpPr>
-        <a:xfrm>
-          <a:off x="0" y="0"/>
-          <a:ext cx="0" cy="0"/>
-          <a:chOff x="0" y="0"/>
-          <a:chExt cx="0" cy="0"/>
-        </a:xfrm>
-      </p:grpSpPr>
-      <p:sp>
-        <p:nvSpPr>
-          <p:cNvPr id="28" name="Title 1">
-            <a:extLst>
-              <a:ext uri="{FF2B5EF4-FFF2-40B4-BE49-F238E27FC236}">
-                <a16:creationId xmlns:a16="http://schemas.microsoft.com/office/drawing/2014/main" id="{CBDB7C71-DE6C-43F1-302E-ED66A9C12D3B}"/>
-              </a:ext>
-            </a:extLst>
-          </p:cNvPr>
-          <p:cNvSpPr>
-            <a:spLocks noGrp="1"/>
-          </p:cNvSpPr>
-          <p:nvPr>
-            <p:ph type="title"/>
-          </p:nvPr>
-        </p:nvSpPr>
-        <p:spPr/>
-        <p:txBody>
-          <a:bodyPr>
-            <a:normAutofit/>
-          </a:bodyPr>
-          <a:lstStyle/>
-          <a:p>
-            <a:r>
-              <a:rPr lang="en-US" sz="4000" b="1" dirty="0"/>
-              <a:t>Modeling properties</a:t>
-            </a:r>
-          </a:p>
-        </p:txBody>
-      </p:sp>
-      <p:sp>
-        <p:nvSpPr>
-          <p:cNvPr id="8" name="Marcador de texto 7">
-            <a:extLst>
-              <a:ext uri="{FF2B5EF4-FFF2-40B4-BE49-F238E27FC236}">
-                <a16:creationId xmlns:a16="http://schemas.microsoft.com/office/drawing/2014/main" id="{93C840FA-BC99-8E14-16B8-9C1AE04A3C53}"/>
-              </a:ext>
-            </a:extLst>
-          </p:cNvPr>
-          <p:cNvSpPr>
-            <a:spLocks noGrp="1"/>
-          </p:cNvSpPr>
-          <p:nvPr>
-            <p:ph type="body" idx="1"/>
-          </p:nvPr>
-        </p:nvSpPr>
-        <p:spPr/>
-        <p:txBody>
-          <a:bodyPr>
-            <a:normAutofit/>
-          </a:bodyPr>
-          <a:lstStyle/>
-          <a:p>
-            <a:pPr marL="152396" indent="0">
-              <a:buNone/>
-            </a:pPr>
-            <a:r>
-              <a:rPr lang="en-GB" sz="2200" b="1" dirty="0"/>
-              <a:t>Classification of properties</a:t>
-            </a:r>
-          </a:p>
-          <a:p>
-            <a:pPr marL="152396" indent="0">
-              <a:buNone/>
-            </a:pPr>
-            <a:endParaRPr lang="en-GB" sz="2200" dirty="0"/>
-          </a:p>
-          <a:p>
-            <a:r>
-              <a:rPr lang="en-GB" sz="2200" dirty="0"/>
-              <a:t>The property has a dimension assigned in the CFIHOS standard </a:t>
-            </a:r>
-            <a:r>
-              <a:rPr lang="en-GB" sz="2200" dirty="0">
-                <a:sym typeface="Wingdings" pitchFamily="2" charset="2"/>
-              </a:rPr>
-              <a:t> </a:t>
-            </a:r>
-            <a:r>
-              <a:rPr lang="en-GB" sz="2200" b="1" dirty="0">
-                <a:sym typeface="Wingdings" pitchFamily="2" charset="2"/>
-              </a:rPr>
-              <a:t>Quantitative</a:t>
-            </a:r>
-            <a:endParaRPr lang="en-GB" sz="2200" b="1" dirty="0"/>
-          </a:p>
-          <a:p>
-            <a:endParaRPr lang="en-GB" sz="2200" dirty="0"/>
-          </a:p>
-          <a:p>
-            <a:endParaRPr lang="en-GB" sz="2200" dirty="0"/>
-          </a:p>
-          <a:p>
-            <a:r>
-              <a:rPr lang="en-GB" sz="2200" dirty="0"/>
-              <a:t>The property has a picklist assigned in the CFIHOS standard </a:t>
-            </a:r>
-            <a:r>
-              <a:rPr lang="en-GB" sz="2200" dirty="0">
-                <a:sym typeface="Wingdings" pitchFamily="2" charset="2"/>
-              </a:rPr>
-              <a:t> </a:t>
-            </a:r>
-            <a:r>
-              <a:rPr lang="en-GB" sz="2200" b="1" dirty="0">
-                <a:sym typeface="Wingdings" pitchFamily="2" charset="2"/>
-              </a:rPr>
-              <a:t>Qualitative</a:t>
-            </a:r>
-            <a:endParaRPr lang="en-GB" sz="2200" b="1" dirty="0"/>
-          </a:p>
-          <a:p>
-            <a:pPr lvl="1"/>
-            <a:endParaRPr lang="en-GB" sz="2200" dirty="0"/>
-          </a:p>
-          <a:p>
-            <a:pPr lvl="1"/>
-            <a:endParaRPr lang="en-GB" sz="2200" dirty="0"/>
-          </a:p>
-          <a:p>
-            <a:r>
-              <a:rPr lang="en-GB" sz="2200" dirty="0"/>
-              <a:t>If the property does not have dimension nor picklist</a:t>
-            </a:r>
-          </a:p>
-          <a:p>
-            <a:pPr lvl="1"/>
-            <a:r>
-              <a:rPr lang="en-GB" sz="2200" b="1" dirty="0"/>
-              <a:t>Quantitative</a:t>
-            </a:r>
-            <a:r>
-              <a:rPr lang="en-GB" sz="2200" dirty="0"/>
-              <a:t> if the data type is “number”</a:t>
-            </a:r>
-          </a:p>
-          <a:p>
-            <a:pPr lvl="1"/>
-            <a:r>
-              <a:rPr lang="en-GB" sz="2200" b="1" dirty="0"/>
-              <a:t>Qualitative</a:t>
-            </a:r>
-            <a:r>
-              <a:rPr lang="en-GB" sz="2200" dirty="0"/>
-              <a:t> in other case</a:t>
-            </a:r>
-          </a:p>
-        </p:txBody>
-      </p:sp>
-    </p:spTree>
-    <p:extLst>
-      <p:ext uri="{BB962C8B-B14F-4D97-AF65-F5344CB8AC3E}">
-        <p14:creationId xmlns:p14="http://schemas.microsoft.com/office/powerpoint/2010/main" val="1250082465"/>
-      </p:ext>
-    </p:extLst>
-  </p:cSld>
-  <p:clrMapOvr>
-    <a:masterClrMapping/>
-  </p:clrMapOvr>
-</p:sld>
-</file>
-
-<file path=ppt/slides/slide16.xml><?xml version="1.0" encoding="utf-8"?>
-<p:sld xmlns:a="http://schemas.openxmlformats.org/drawingml/2006/main" xmlns:r="http://schemas.openxmlformats.org/officeDocument/2006/relationships" xmlns:p="http://schemas.openxmlformats.org/presentationml/2006/main">
-  <p:cSld>
-    <p:spTree>
-      <p:nvGrpSpPr>
-        <p:cNvPr id="1" name="">
-          <a:extLst>
-            <a:ext uri="{FF2B5EF4-FFF2-40B4-BE49-F238E27FC236}">
               <a16:creationId xmlns:a16="http://schemas.microsoft.com/office/drawing/2014/main" id="{06FDEFFB-BA1F-789B-2ABD-2239F0ADBF8A}"/>
             </a:ext>
           </a:extLst>
@@ -24088,6 +23903,191 @@
     <p:extLst>
       <p:ext uri="{BB962C8B-B14F-4D97-AF65-F5344CB8AC3E}">
         <p14:creationId xmlns:p14="http://schemas.microsoft.com/office/powerpoint/2010/main" val="2500914355"/>
+      </p:ext>
+    </p:extLst>
+  </p:cSld>
+  <p:clrMapOvr>
+    <a:masterClrMapping/>
+  </p:clrMapOvr>
+</p:sld>
+</file>
+
+<file path=ppt/slides/slide16.xml><?xml version="1.0" encoding="utf-8"?>
+<p:sld xmlns:a="http://schemas.openxmlformats.org/drawingml/2006/main" xmlns:r="http://schemas.openxmlformats.org/officeDocument/2006/relationships" xmlns:p="http://schemas.openxmlformats.org/presentationml/2006/main">
+  <p:cSld>
+    <p:spTree>
+      <p:nvGrpSpPr>
+        <p:cNvPr id="1" name="">
+          <a:extLst>
+            <a:ext uri="{FF2B5EF4-FFF2-40B4-BE49-F238E27FC236}">
+              <a16:creationId xmlns:a16="http://schemas.microsoft.com/office/drawing/2014/main" id="{35BEF359-D175-9A79-BB9D-E7542E52B192}"/>
+            </a:ext>
+          </a:extLst>
+        </p:cNvPr>
+        <p:cNvGrpSpPr/>
+        <p:nvPr/>
+      </p:nvGrpSpPr>
+      <p:grpSpPr>
+        <a:xfrm>
+          <a:off x="0" y="0"/>
+          <a:ext cx="0" cy="0"/>
+          <a:chOff x="0" y="0"/>
+          <a:chExt cx="0" cy="0"/>
+        </a:xfrm>
+      </p:grpSpPr>
+      <p:sp>
+        <p:nvSpPr>
+          <p:cNvPr id="28" name="Title 1">
+            <a:extLst>
+              <a:ext uri="{FF2B5EF4-FFF2-40B4-BE49-F238E27FC236}">
+                <a16:creationId xmlns:a16="http://schemas.microsoft.com/office/drawing/2014/main" id="{CBDB7C71-DE6C-43F1-302E-ED66A9C12D3B}"/>
+              </a:ext>
+            </a:extLst>
+          </p:cNvPr>
+          <p:cNvSpPr>
+            <a:spLocks noGrp="1"/>
+          </p:cNvSpPr>
+          <p:nvPr>
+            <p:ph type="title"/>
+          </p:nvPr>
+        </p:nvSpPr>
+        <p:spPr/>
+        <p:txBody>
+          <a:bodyPr>
+            <a:normAutofit/>
+          </a:bodyPr>
+          <a:lstStyle/>
+          <a:p>
+            <a:r>
+              <a:rPr lang="en-US" sz="4000" b="1" dirty="0"/>
+              <a:t>Modeling properties</a:t>
+            </a:r>
+          </a:p>
+        </p:txBody>
+      </p:sp>
+      <p:sp>
+        <p:nvSpPr>
+          <p:cNvPr id="8" name="Marcador de texto 7">
+            <a:extLst>
+              <a:ext uri="{FF2B5EF4-FFF2-40B4-BE49-F238E27FC236}">
+                <a16:creationId xmlns:a16="http://schemas.microsoft.com/office/drawing/2014/main" id="{93C840FA-BC99-8E14-16B8-9C1AE04A3C53}"/>
+              </a:ext>
+            </a:extLst>
+          </p:cNvPr>
+          <p:cNvSpPr>
+            <a:spLocks noGrp="1"/>
+          </p:cNvSpPr>
+          <p:nvPr>
+            <p:ph type="body" idx="1"/>
+          </p:nvPr>
+        </p:nvSpPr>
+        <p:spPr/>
+        <p:txBody>
+          <a:bodyPr>
+            <a:normAutofit/>
+          </a:bodyPr>
+          <a:lstStyle/>
+          <a:p>
+            <a:pPr marL="152396" indent="0">
+              <a:buNone/>
+            </a:pPr>
+            <a:r>
+              <a:rPr lang="en-GB" sz="2200" b="1" dirty="0"/>
+              <a:t>Classification of properties</a:t>
+            </a:r>
+          </a:p>
+          <a:p>
+            <a:pPr marL="152396" indent="0">
+              <a:buNone/>
+            </a:pPr>
+            <a:endParaRPr lang="en-GB" sz="2200" dirty="0"/>
+          </a:p>
+          <a:p>
+            <a:r>
+              <a:rPr lang="en-GB" sz="2200" dirty="0"/>
+              <a:t>The property has a dimension assigned in the CFIHOS standard </a:t>
+            </a:r>
+            <a:r>
+              <a:rPr lang="en-GB" sz="2200" dirty="0">
+                <a:sym typeface="Wingdings" pitchFamily="2" charset="2"/>
+              </a:rPr>
+              <a:t> </a:t>
+            </a:r>
+            <a:r>
+              <a:rPr lang="en-GB" sz="2200" b="1" dirty="0">
+                <a:sym typeface="Wingdings" pitchFamily="2" charset="2"/>
+              </a:rPr>
+              <a:t>Quantitative</a:t>
+            </a:r>
+            <a:endParaRPr lang="en-GB" sz="2200" b="1" dirty="0"/>
+          </a:p>
+          <a:p>
+            <a:endParaRPr lang="en-GB" sz="2200" dirty="0"/>
+          </a:p>
+          <a:p>
+            <a:endParaRPr lang="en-GB" sz="2200" dirty="0"/>
+          </a:p>
+          <a:p>
+            <a:r>
+              <a:rPr lang="en-GB" sz="2200" dirty="0"/>
+              <a:t>The property has a picklist assigned in the CFIHOS standard </a:t>
+            </a:r>
+            <a:r>
+              <a:rPr lang="en-GB" sz="2200" dirty="0">
+                <a:sym typeface="Wingdings" pitchFamily="2" charset="2"/>
+              </a:rPr>
+              <a:t> </a:t>
+            </a:r>
+            <a:r>
+              <a:rPr lang="en-GB" sz="2200" b="1" dirty="0">
+                <a:sym typeface="Wingdings" pitchFamily="2" charset="2"/>
+              </a:rPr>
+              <a:t>Qualitative</a:t>
+            </a:r>
+            <a:endParaRPr lang="en-GB" sz="2200" b="1" dirty="0"/>
+          </a:p>
+          <a:p>
+            <a:pPr lvl="1"/>
+            <a:endParaRPr lang="en-GB" sz="2200" dirty="0"/>
+          </a:p>
+          <a:p>
+            <a:pPr lvl="1"/>
+            <a:endParaRPr lang="en-GB" sz="2200" dirty="0"/>
+          </a:p>
+          <a:p>
+            <a:r>
+              <a:rPr lang="en-GB" sz="2200" dirty="0"/>
+              <a:t>If the property does not have dimension nor picklist</a:t>
+            </a:r>
+          </a:p>
+          <a:p>
+            <a:pPr lvl="1"/>
+            <a:r>
+              <a:rPr lang="en-GB" sz="2200" b="1" dirty="0"/>
+              <a:t>Quantitative</a:t>
+            </a:r>
+            <a:r>
+              <a:rPr lang="en-GB" sz="2200" dirty="0"/>
+              <a:t> if the data type is “number”</a:t>
+            </a:r>
+          </a:p>
+          <a:p>
+            <a:pPr lvl="1"/>
+            <a:r>
+              <a:rPr lang="en-GB" sz="2200" b="1" dirty="0"/>
+              <a:t>Qualitative</a:t>
+            </a:r>
+            <a:r>
+              <a:rPr lang="en-GB" sz="2200" dirty="0"/>
+              <a:t> in other case</a:t>
+            </a:r>
+          </a:p>
+        </p:txBody>
+      </p:sp>
+    </p:spTree>
+    <p:extLst>
+      <p:ext uri="{BB962C8B-B14F-4D97-AF65-F5344CB8AC3E}">
+        <p14:creationId xmlns:p14="http://schemas.microsoft.com/office/powerpoint/2010/main" val="1250082465"/>
       </p:ext>
     </p:extLst>
   </p:cSld>
@@ -24204,19 +24204,19 @@
         </p:nvSpPr>
         <p:spPr>
           <a:xfrm>
-            <a:off x="785003" y="1639667"/>
-            <a:ext cx="9554751" cy="1929387"/>
+            <a:off x="785002" y="1639667"/>
+            <a:ext cx="10505567" cy="1929387"/>
           </a:xfrm>
         </p:spPr>
         <p:txBody>
           <a:bodyPr>
-            <a:normAutofit fontScale="55000" lnSpcReduction="20000"/>
+            <a:normAutofit fontScale="62500" lnSpcReduction="20000"/>
           </a:bodyPr>
           <a:lstStyle/>
           <a:p>
             <a:r>
               <a:rPr lang="en-US" sz="4500" dirty="0"/>
-              <a:t>IDO does not work with object properties but Quality classes.</a:t>
+              <a:t>IDO does not use object properties for qualities but classes</a:t>
             </a:r>
           </a:p>
           <a:p>
@@ -28471,10 +28471,10 @@
           <p:nvPr/>
         </p:nvPicPr>
         <p:blipFill>
-          <a:blip r:embed="rId3">
+          <a:blip>
             <a:extLst>
               <a:ext uri="{96DAC541-7B7A-43D3-8B79-37D633B846F1}">
-                <asvg:svgBlip xmlns:asvg="http://schemas.microsoft.com/office/drawing/2016/SVG/main" r:embed="rId4"/>
+                <asvg:svgBlip xmlns:asvg="http://schemas.microsoft.com/office/drawing/2016/SVG/main" r:embed="rId3"/>
               </a:ext>
             </a:extLst>
           </a:blip>
@@ -28507,10 +28507,10 @@
           <p:nvPr/>
         </p:nvPicPr>
         <p:blipFill>
-          <a:blip r:embed="rId3">
+          <a:blip>
             <a:extLst>
               <a:ext uri="{96DAC541-7B7A-43D3-8B79-37D633B846F1}">
-                <asvg:svgBlip xmlns:asvg="http://schemas.microsoft.com/office/drawing/2016/SVG/main" r:embed="rId4"/>
+                <asvg:svgBlip xmlns:asvg="http://schemas.microsoft.com/office/drawing/2016/SVG/main" r:embed="rId3"/>
               </a:ext>
             </a:extLst>
           </a:blip>
@@ -28543,10 +28543,10 @@
           <p:nvPr/>
         </p:nvPicPr>
         <p:blipFill>
-          <a:blip r:embed="rId3">
+          <a:blip>
             <a:extLst>
               <a:ext uri="{96DAC541-7B7A-43D3-8B79-37D633B846F1}">
-                <asvg:svgBlip xmlns:asvg="http://schemas.microsoft.com/office/drawing/2016/SVG/main" r:embed="rId4"/>
+                <asvg:svgBlip xmlns:asvg="http://schemas.microsoft.com/office/drawing/2016/SVG/main" r:embed="rId3"/>
               </a:ext>
             </a:extLst>
           </a:blip>
@@ -28579,10 +28579,10 @@
           <p:nvPr/>
         </p:nvPicPr>
         <p:blipFill>
-          <a:blip r:embed="rId3">
+          <a:blip>
             <a:extLst>
               <a:ext uri="{96DAC541-7B7A-43D3-8B79-37D633B846F1}">
-                <asvg:svgBlip xmlns:asvg="http://schemas.microsoft.com/office/drawing/2016/SVG/main" r:embed="rId4"/>
+                <asvg:svgBlip xmlns:asvg="http://schemas.microsoft.com/office/drawing/2016/SVG/main" r:embed="rId3"/>
               </a:ext>
             </a:extLst>
           </a:blip>
@@ -28615,10 +28615,10 @@
           <p:nvPr/>
         </p:nvPicPr>
         <p:blipFill>
-          <a:blip r:embed="rId3">
+          <a:blip>
             <a:extLst>
               <a:ext uri="{96DAC541-7B7A-43D3-8B79-37D633B846F1}">
-                <asvg:svgBlip xmlns:asvg="http://schemas.microsoft.com/office/drawing/2016/SVG/main" r:embed="rId4"/>
+                <asvg:svgBlip xmlns:asvg="http://schemas.microsoft.com/office/drawing/2016/SVG/main" r:embed="rId3"/>
               </a:ext>
             </a:extLst>
           </a:blip>
@@ -28651,10 +28651,10 @@
           <p:nvPr/>
         </p:nvPicPr>
         <p:blipFill>
-          <a:blip r:embed="rId3">
+          <a:blip>
             <a:extLst>
               <a:ext uri="{96DAC541-7B7A-43D3-8B79-37D633B846F1}">
-                <asvg:svgBlip xmlns:asvg="http://schemas.microsoft.com/office/drawing/2016/SVG/main" r:embed="rId4"/>
+                <asvg:svgBlip xmlns:asvg="http://schemas.microsoft.com/office/drawing/2016/SVG/main" r:embed="rId3"/>
               </a:ext>
             </a:extLst>
           </a:blip>
@@ -28687,10 +28687,10 @@
           <p:nvPr/>
         </p:nvPicPr>
         <p:blipFill>
-          <a:blip r:embed="rId3">
+          <a:blip>
             <a:extLst>
               <a:ext uri="{96DAC541-7B7A-43D3-8B79-37D633B846F1}">
-                <asvg:svgBlip xmlns:asvg="http://schemas.microsoft.com/office/drawing/2016/SVG/main" r:embed="rId4"/>
+                <asvg:svgBlip xmlns:asvg="http://schemas.microsoft.com/office/drawing/2016/SVG/main" r:embed="rId3"/>
               </a:ext>
             </a:extLst>
           </a:blip>
@@ -28723,10 +28723,10 @@
           <p:nvPr/>
         </p:nvPicPr>
         <p:blipFill>
-          <a:blip r:embed="rId3">
+          <a:blip>
             <a:extLst>
               <a:ext uri="{96DAC541-7B7A-43D3-8B79-37D633B846F1}">
-                <asvg:svgBlip xmlns:asvg="http://schemas.microsoft.com/office/drawing/2016/SVG/main" r:embed="rId4"/>
+                <asvg:svgBlip xmlns:asvg="http://schemas.microsoft.com/office/drawing/2016/SVG/main" r:embed="rId3"/>
               </a:ext>
             </a:extLst>
           </a:blip>
@@ -28759,10 +28759,10 @@
           <p:nvPr/>
         </p:nvPicPr>
         <p:blipFill>
-          <a:blip r:embed="rId3">
+          <a:blip>
             <a:extLst>
               <a:ext uri="{96DAC541-7B7A-43D3-8B79-37D633B846F1}">
-                <asvg:svgBlip xmlns:asvg="http://schemas.microsoft.com/office/drawing/2016/SVG/main" r:embed="rId4"/>
+                <asvg:svgBlip xmlns:asvg="http://schemas.microsoft.com/office/drawing/2016/SVG/main" r:embed="rId3"/>
               </a:ext>
             </a:extLst>
           </a:blip>
@@ -28795,10 +28795,10 @@
           <p:nvPr/>
         </p:nvPicPr>
         <p:blipFill>
-          <a:blip r:embed="rId3">
+          <a:blip>
             <a:extLst>
               <a:ext uri="{96DAC541-7B7A-43D3-8B79-37D633B846F1}">
-                <asvg:svgBlip xmlns:asvg="http://schemas.microsoft.com/office/drawing/2016/SVG/main" r:embed="rId4"/>
+                <asvg:svgBlip xmlns:asvg="http://schemas.microsoft.com/office/drawing/2016/SVG/main" r:embed="rId3"/>
               </a:ext>
             </a:extLst>
           </a:blip>
@@ -28831,10 +28831,10 @@
           <p:nvPr/>
         </p:nvPicPr>
         <p:blipFill>
-          <a:blip r:embed="rId3">
+          <a:blip>
             <a:extLst>
               <a:ext uri="{96DAC541-7B7A-43D3-8B79-37D633B846F1}">
-                <asvg:svgBlip xmlns:asvg="http://schemas.microsoft.com/office/drawing/2016/SVG/main" r:embed="rId4"/>
+                <asvg:svgBlip xmlns:asvg="http://schemas.microsoft.com/office/drawing/2016/SVG/main" r:embed="rId3"/>
               </a:ext>
             </a:extLst>
           </a:blip>
@@ -28867,10 +28867,10 @@
           <p:nvPr/>
         </p:nvPicPr>
         <p:blipFill>
-          <a:blip r:embed="rId3">
+          <a:blip>
             <a:extLst>
               <a:ext uri="{96DAC541-7B7A-43D3-8B79-37D633B846F1}">
-                <asvg:svgBlip xmlns:asvg="http://schemas.microsoft.com/office/drawing/2016/SVG/main" r:embed="rId4"/>
+                <asvg:svgBlip xmlns:asvg="http://schemas.microsoft.com/office/drawing/2016/SVG/main" r:embed="rId3"/>
               </a:ext>
             </a:extLst>
           </a:blip>
@@ -28903,10 +28903,10 @@
           <p:nvPr/>
         </p:nvPicPr>
         <p:blipFill>
-          <a:blip r:embed="rId3">
+          <a:blip>
             <a:extLst>
               <a:ext uri="{96DAC541-7B7A-43D3-8B79-37D633B846F1}">
-                <asvg:svgBlip xmlns:asvg="http://schemas.microsoft.com/office/drawing/2016/SVG/main" r:embed="rId4"/>
+                <asvg:svgBlip xmlns:asvg="http://schemas.microsoft.com/office/drawing/2016/SVG/main" r:embed="rId3"/>
               </a:ext>
             </a:extLst>
           </a:blip>
@@ -28939,10 +28939,10 @@
           <p:nvPr/>
         </p:nvPicPr>
         <p:blipFill>
-          <a:blip r:embed="rId3">
+          <a:blip>
             <a:extLst>
               <a:ext uri="{96DAC541-7B7A-43D3-8B79-37D633B846F1}">
-                <asvg:svgBlip xmlns:asvg="http://schemas.microsoft.com/office/drawing/2016/SVG/main" r:embed="rId4"/>
+                <asvg:svgBlip xmlns:asvg="http://schemas.microsoft.com/office/drawing/2016/SVG/main" r:embed="rId3"/>
               </a:ext>
             </a:extLst>
           </a:blip>
@@ -28975,10 +28975,10 @@
           <p:nvPr/>
         </p:nvPicPr>
         <p:blipFill>
-          <a:blip r:embed="rId3">
+          <a:blip>
             <a:extLst>
               <a:ext uri="{96DAC541-7B7A-43D3-8B79-37D633B846F1}">
-                <asvg:svgBlip xmlns:asvg="http://schemas.microsoft.com/office/drawing/2016/SVG/main" r:embed="rId4"/>
+                <asvg:svgBlip xmlns:asvg="http://schemas.microsoft.com/office/drawing/2016/SVG/main" r:embed="rId3"/>
               </a:ext>
             </a:extLst>
           </a:blip>
@@ -29011,10 +29011,10 @@
           <p:nvPr/>
         </p:nvPicPr>
         <p:blipFill>
-          <a:blip r:embed="rId5">
+          <a:blip>
             <a:extLst>
               <a:ext uri="{96DAC541-7B7A-43D3-8B79-37D633B846F1}">
-                <asvg:svgBlip xmlns:asvg="http://schemas.microsoft.com/office/drawing/2016/SVG/main" r:embed="rId6"/>
+                <asvg:svgBlip xmlns:asvg="http://schemas.microsoft.com/office/drawing/2016/SVG/main" r:embed="rId4"/>
               </a:ext>
             </a:extLst>
           </a:blip>
@@ -29047,10 +29047,10 @@
           <p:nvPr/>
         </p:nvPicPr>
         <p:blipFill>
-          <a:blip r:embed="rId5">
+          <a:blip>
             <a:extLst>
               <a:ext uri="{96DAC541-7B7A-43D3-8B79-37D633B846F1}">
-                <asvg:svgBlip xmlns:asvg="http://schemas.microsoft.com/office/drawing/2016/SVG/main" r:embed="rId6"/>
+                <asvg:svgBlip xmlns:asvg="http://schemas.microsoft.com/office/drawing/2016/SVG/main" r:embed="rId4"/>
               </a:ext>
             </a:extLst>
           </a:blip>
@@ -29083,10 +29083,10 @@
           <p:nvPr/>
         </p:nvPicPr>
         <p:blipFill>
-          <a:blip r:embed="rId5">
+          <a:blip>
             <a:extLst>
               <a:ext uri="{96DAC541-7B7A-43D3-8B79-37D633B846F1}">
-                <asvg:svgBlip xmlns:asvg="http://schemas.microsoft.com/office/drawing/2016/SVG/main" r:embed="rId6"/>
+                <asvg:svgBlip xmlns:asvg="http://schemas.microsoft.com/office/drawing/2016/SVG/main" r:embed="rId4"/>
               </a:ext>
             </a:extLst>
           </a:blip>
@@ -29119,10 +29119,10 @@
           <p:nvPr/>
         </p:nvPicPr>
         <p:blipFill>
-          <a:blip r:embed="rId5">
+          <a:blip>
             <a:extLst>
               <a:ext uri="{96DAC541-7B7A-43D3-8B79-37D633B846F1}">
-                <asvg:svgBlip xmlns:asvg="http://schemas.microsoft.com/office/drawing/2016/SVG/main" r:embed="rId6"/>
+                <asvg:svgBlip xmlns:asvg="http://schemas.microsoft.com/office/drawing/2016/SVG/main" r:embed="rId4"/>
               </a:ext>
             </a:extLst>
           </a:blip>
@@ -29950,10 +29950,10 @@
           <p:nvPr/>
         </p:nvPicPr>
         <p:blipFill>
-          <a:blip r:embed="rId3">
+          <a:blip>
             <a:extLst>
               <a:ext uri="{96DAC541-7B7A-43D3-8B79-37D633B846F1}">
-                <asvg:svgBlip xmlns:asvg="http://schemas.microsoft.com/office/drawing/2016/SVG/main" r:embed="rId4"/>
+                <asvg:svgBlip xmlns:asvg="http://schemas.microsoft.com/office/drawing/2016/SVG/main" r:embed="rId3"/>
               </a:ext>
             </a:extLst>
           </a:blip>
@@ -29986,10 +29986,10 @@
           <p:nvPr/>
         </p:nvPicPr>
         <p:blipFill>
-          <a:blip r:embed="rId3">
+          <a:blip>
             <a:extLst>
               <a:ext uri="{96DAC541-7B7A-43D3-8B79-37D633B846F1}">
-                <asvg:svgBlip xmlns:asvg="http://schemas.microsoft.com/office/drawing/2016/SVG/main" r:embed="rId4"/>
+                <asvg:svgBlip xmlns:asvg="http://schemas.microsoft.com/office/drawing/2016/SVG/main" r:embed="rId3"/>
               </a:ext>
             </a:extLst>
           </a:blip>
@@ -30022,10 +30022,10 @@
           <p:nvPr/>
         </p:nvPicPr>
         <p:blipFill>
-          <a:blip r:embed="rId3">
+          <a:blip>
             <a:extLst>
               <a:ext uri="{96DAC541-7B7A-43D3-8B79-37D633B846F1}">
-                <asvg:svgBlip xmlns:asvg="http://schemas.microsoft.com/office/drawing/2016/SVG/main" r:embed="rId4"/>
+                <asvg:svgBlip xmlns:asvg="http://schemas.microsoft.com/office/drawing/2016/SVG/main" r:embed="rId3"/>
               </a:ext>
             </a:extLst>
           </a:blip>
@@ -30058,10 +30058,10 @@
           <p:nvPr/>
         </p:nvPicPr>
         <p:blipFill>
-          <a:blip r:embed="rId3">
+          <a:blip>
             <a:extLst>
               <a:ext uri="{96DAC541-7B7A-43D3-8B79-37D633B846F1}">
-                <asvg:svgBlip xmlns:asvg="http://schemas.microsoft.com/office/drawing/2016/SVG/main" r:embed="rId4"/>
+                <asvg:svgBlip xmlns:asvg="http://schemas.microsoft.com/office/drawing/2016/SVG/main" r:embed="rId3"/>
               </a:ext>
             </a:extLst>
           </a:blip>
@@ -30094,10 +30094,10 @@
           <p:nvPr/>
         </p:nvPicPr>
         <p:blipFill>
-          <a:blip r:embed="rId3">
+          <a:blip>
             <a:extLst>
               <a:ext uri="{96DAC541-7B7A-43D3-8B79-37D633B846F1}">
-                <asvg:svgBlip xmlns:asvg="http://schemas.microsoft.com/office/drawing/2016/SVG/main" r:embed="rId4"/>
+                <asvg:svgBlip xmlns:asvg="http://schemas.microsoft.com/office/drawing/2016/SVG/main" r:embed="rId3"/>
               </a:ext>
             </a:extLst>
           </a:blip>
@@ -30130,10 +30130,10 @@
           <p:nvPr/>
         </p:nvPicPr>
         <p:blipFill>
-          <a:blip r:embed="rId3">
+          <a:blip>
             <a:extLst>
               <a:ext uri="{96DAC541-7B7A-43D3-8B79-37D633B846F1}">
-                <asvg:svgBlip xmlns:asvg="http://schemas.microsoft.com/office/drawing/2016/SVG/main" r:embed="rId4"/>
+                <asvg:svgBlip xmlns:asvg="http://schemas.microsoft.com/office/drawing/2016/SVG/main" r:embed="rId3"/>
               </a:ext>
             </a:extLst>
           </a:blip>
@@ -30166,10 +30166,10 @@
           <p:nvPr/>
         </p:nvPicPr>
         <p:blipFill>
-          <a:blip r:embed="rId3">
+          <a:blip>
             <a:extLst>
               <a:ext uri="{96DAC541-7B7A-43D3-8B79-37D633B846F1}">
-                <asvg:svgBlip xmlns:asvg="http://schemas.microsoft.com/office/drawing/2016/SVG/main" r:embed="rId4"/>
+                <asvg:svgBlip xmlns:asvg="http://schemas.microsoft.com/office/drawing/2016/SVG/main" r:embed="rId3"/>
               </a:ext>
             </a:extLst>
           </a:blip>
@@ -30202,10 +30202,10 @@
           <p:nvPr/>
         </p:nvPicPr>
         <p:blipFill>
-          <a:blip r:embed="rId3">
+          <a:blip>
             <a:extLst>
               <a:ext uri="{96DAC541-7B7A-43D3-8B79-37D633B846F1}">
-                <asvg:svgBlip xmlns:asvg="http://schemas.microsoft.com/office/drawing/2016/SVG/main" r:embed="rId4"/>
+                <asvg:svgBlip xmlns:asvg="http://schemas.microsoft.com/office/drawing/2016/SVG/main" r:embed="rId3"/>
               </a:ext>
             </a:extLst>
           </a:blip>
@@ -30238,10 +30238,10 @@
           <p:nvPr/>
         </p:nvPicPr>
         <p:blipFill>
-          <a:blip r:embed="rId3">
+          <a:blip>
             <a:extLst>
               <a:ext uri="{96DAC541-7B7A-43D3-8B79-37D633B846F1}">
-                <asvg:svgBlip xmlns:asvg="http://schemas.microsoft.com/office/drawing/2016/SVG/main" r:embed="rId4"/>
+                <asvg:svgBlip xmlns:asvg="http://schemas.microsoft.com/office/drawing/2016/SVG/main" r:embed="rId3"/>
               </a:ext>
             </a:extLst>
           </a:blip>
@@ -30274,10 +30274,10 @@
           <p:nvPr/>
         </p:nvPicPr>
         <p:blipFill>
-          <a:blip r:embed="rId3">
+          <a:blip>
             <a:extLst>
               <a:ext uri="{96DAC541-7B7A-43D3-8B79-37D633B846F1}">
-                <asvg:svgBlip xmlns:asvg="http://schemas.microsoft.com/office/drawing/2016/SVG/main" r:embed="rId4"/>
+                <asvg:svgBlip xmlns:asvg="http://schemas.microsoft.com/office/drawing/2016/SVG/main" r:embed="rId3"/>
               </a:ext>
             </a:extLst>
           </a:blip>
@@ -30310,10 +30310,10 @@
           <p:nvPr/>
         </p:nvPicPr>
         <p:blipFill>
-          <a:blip r:embed="rId3">
+          <a:blip>
             <a:extLst>
               <a:ext uri="{96DAC541-7B7A-43D3-8B79-37D633B846F1}">
-                <asvg:svgBlip xmlns:asvg="http://schemas.microsoft.com/office/drawing/2016/SVG/main" r:embed="rId4"/>
+                <asvg:svgBlip xmlns:asvg="http://schemas.microsoft.com/office/drawing/2016/SVG/main" r:embed="rId3"/>
               </a:ext>
             </a:extLst>
           </a:blip>
@@ -30346,10 +30346,10 @@
           <p:nvPr/>
         </p:nvPicPr>
         <p:blipFill>
-          <a:blip r:embed="rId3">
+          <a:blip>
             <a:extLst>
               <a:ext uri="{96DAC541-7B7A-43D3-8B79-37D633B846F1}">
-                <asvg:svgBlip xmlns:asvg="http://schemas.microsoft.com/office/drawing/2016/SVG/main" r:embed="rId4"/>
+                <asvg:svgBlip xmlns:asvg="http://schemas.microsoft.com/office/drawing/2016/SVG/main" r:embed="rId3"/>
               </a:ext>
             </a:extLst>
           </a:blip>
@@ -30382,10 +30382,10 @@
           <p:nvPr/>
         </p:nvPicPr>
         <p:blipFill>
-          <a:blip r:embed="rId3">
+          <a:blip>
             <a:extLst>
               <a:ext uri="{96DAC541-7B7A-43D3-8B79-37D633B846F1}">
-                <asvg:svgBlip xmlns:asvg="http://schemas.microsoft.com/office/drawing/2016/SVG/main" r:embed="rId4"/>
+                <asvg:svgBlip xmlns:asvg="http://schemas.microsoft.com/office/drawing/2016/SVG/main" r:embed="rId3"/>
               </a:ext>
             </a:extLst>
           </a:blip>
@@ -30418,10 +30418,10 @@
           <p:nvPr/>
         </p:nvPicPr>
         <p:blipFill>
-          <a:blip r:embed="rId3">
+          <a:blip>
             <a:extLst>
               <a:ext uri="{96DAC541-7B7A-43D3-8B79-37D633B846F1}">
-                <asvg:svgBlip xmlns:asvg="http://schemas.microsoft.com/office/drawing/2016/SVG/main" r:embed="rId4"/>
+                <asvg:svgBlip xmlns:asvg="http://schemas.microsoft.com/office/drawing/2016/SVG/main" r:embed="rId3"/>
               </a:ext>
             </a:extLst>
           </a:blip>
@@ -30454,10 +30454,10 @@
           <p:nvPr/>
         </p:nvPicPr>
         <p:blipFill>
-          <a:blip r:embed="rId3">
+          <a:blip>
             <a:extLst>
               <a:ext uri="{96DAC541-7B7A-43D3-8B79-37D633B846F1}">
-                <asvg:svgBlip xmlns:asvg="http://schemas.microsoft.com/office/drawing/2016/SVG/main" r:embed="rId4"/>
+                <asvg:svgBlip xmlns:asvg="http://schemas.microsoft.com/office/drawing/2016/SVG/main" r:embed="rId3"/>
               </a:ext>
             </a:extLst>
           </a:blip>
@@ -30490,10 +30490,10 @@
           <p:nvPr/>
         </p:nvPicPr>
         <p:blipFill>
-          <a:blip r:embed="rId5">
+          <a:blip>
             <a:extLst>
               <a:ext uri="{96DAC541-7B7A-43D3-8B79-37D633B846F1}">
-                <asvg:svgBlip xmlns:asvg="http://schemas.microsoft.com/office/drawing/2016/SVG/main" r:embed="rId6"/>
+                <asvg:svgBlip xmlns:asvg="http://schemas.microsoft.com/office/drawing/2016/SVG/main" r:embed="rId4"/>
               </a:ext>
             </a:extLst>
           </a:blip>
@@ -30526,10 +30526,10 @@
           <p:nvPr/>
         </p:nvPicPr>
         <p:blipFill>
-          <a:blip r:embed="rId5">
+          <a:blip>
             <a:extLst>
               <a:ext uri="{96DAC541-7B7A-43D3-8B79-37D633B846F1}">
-                <asvg:svgBlip xmlns:asvg="http://schemas.microsoft.com/office/drawing/2016/SVG/main" r:embed="rId6"/>
+                <asvg:svgBlip xmlns:asvg="http://schemas.microsoft.com/office/drawing/2016/SVG/main" r:embed="rId4"/>
               </a:ext>
             </a:extLst>
           </a:blip>
@@ -30562,10 +30562,10 @@
           <p:nvPr/>
         </p:nvPicPr>
         <p:blipFill>
-          <a:blip r:embed="rId5">
+          <a:blip>
             <a:extLst>
               <a:ext uri="{96DAC541-7B7A-43D3-8B79-37D633B846F1}">
-                <asvg:svgBlip xmlns:asvg="http://schemas.microsoft.com/office/drawing/2016/SVG/main" r:embed="rId6"/>
+                <asvg:svgBlip xmlns:asvg="http://schemas.microsoft.com/office/drawing/2016/SVG/main" r:embed="rId4"/>
               </a:ext>
             </a:extLst>
           </a:blip>
@@ -30598,10 +30598,10 @@
           <p:nvPr/>
         </p:nvPicPr>
         <p:blipFill>
-          <a:blip r:embed="rId5">
+          <a:blip>
             <a:extLst>
               <a:ext uri="{96DAC541-7B7A-43D3-8B79-37D633B846F1}">
-                <asvg:svgBlip xmlns:asvg="http://schemas.microsoft.com/office/drawing/2016/SVG/main" r:embed="rId6"/>
+                <asvg:svgBlip xmlns:asvg="http://schemas.microsoft.com/office/drawing/2016/SVG/main" r:embed="rId4"/>
               </a:ext>
             </a:extLst>
           </a:blip>
